--- a/usecases/ai_pipeline 2/docs/APIX_Metrics_Discussion.pptx
+++ b/usecases/ai_pipeline 2/docs/APIX_Metrics_Discussion.pptx
@@ -14,6 +14,8 @@
     <p:sldId id="262" r:id="rId13"/>
     <p:sldId id="263" r:id="rId14"/>
     <p:sldId id="264" r:id="rId15"/>
+    <p:sldId id="265" r:id="rId16"/>
+    <p:sldId id="266" r:id="rId17"/>
   </p:sldIdLst>
   <p:sldSz cx="12191695" cy="6858000" type="screen4x3"/>
   <p:notesSz cx="6858000" cy="9144000"/>
@@ -3281,6 +3283,1009 @@
 </p:sld>
 </file>
 
+<file path=ppt/slides/slide10.xml><?xml version="1.0" encoding="utf-8"?>
+<p:sld xmlns:a="http://schemas.openxmlformats.org/drawingml/2006/main" xmlns:p="http://schemas.openxmlformats.org/presentationml/2006/main" xmlns:r="http://schemas.openxmlformats.org/officeDocument/2006/relationships">
+  <p:cSld>
+    <p:bg>
+      <p:bgPr>
+        <a:solidFill>
+          <a:srgbClr val="FFFFFF"/>
+        </a:solidFill>
+        <a:effectLst/>
+      </p:bgPr>
+    </p:bg>
+    <p:spTree>
+      <p:nvGrpSpPr>
+        <p:cNvPr id="1" name=""/>
+        <p:cNvGrpSpPr/>
+        <p:nvPr/>
+      </p:nvGrpSpPr>
+      <p:grpSpPr/>
+      <p:sp>
+        <p:nvSpPr>
+          <p:cNvPr id="2" name="Rectangle 1"/>
+          <p:cNvSpPr/>
+          <p:nvPr/>
+        </p:nvSpPr>
+        <p:spPr>
+          <a:xfrm>
+            <a:off x="0" y="0"/>
+            <a:ext cx="12191695" cy="128016"/>
+          </a:xfrm>
+          <a:prstGeom prst="rect">
+            <a:avLst/>
+          </a:prstGeom>
+          <a:solidFill>
+            <a:srgbClr val="0E7C74"/>
+          </a:solidFill>
+          <a:ln>
+            <a:noFill/>
+          </a:ln>
+        </p:spPr>
+        <p:style>
+          <a:lnRef idx="1">
+            <a:schemeClr val="accent1"/>
+          </a:lnRef>
+          <a:fillRef idx="3">
+            <a:schemeClr val="accent1"/>
+          </a:fillRef>
+          <a:effectRef idx="2">
+            <a:schemeClr val="accent1"/>
+          </a:effectRef>
+          <a:fontRef idx="minor">
+            <a:schemeClr val="lt1"/>
+          </a:fontRef>
+        </p:style>
+        <p:txBody>
+          <a:bodyPr rtlCol="0" anchor="ctr"/>
+          <a:lstStyle/>
+          <a:p>
+            <a:pPr algn="ctr"/>
+          </a:p>
+        </p:txBody>
+      </p:sp>
+      <p:sp>
+        <p:nvSpPr>
+          <p:cNvPr id="3" name="TextBox 2"/>
+          <p:cNvSpPr txBox="1"/>
+          <p:nvPr/>
+        </p:nvSpPr>
+        <p:spPr>
+          <a:xfrm>
+            <a:off x="640080" y="384048"/>
+            <a:ext cx="11155680" cy="1280160"/>
+          </a:xfrm>
+          <a:prstGeom prst="rect">
+            <a:avLst/>
+          </a:prstGeom>
+          <a:noFill/>
+        </p:spPr>
+        <p:txBody>
+          <a:bodyPr wrap="square">
+            <a:spAutoFit/>
+          </a:bodyPr>
+          <a:lstStyle/>
+          <a:p>
+            <a:pPr>
+              <a:spcAft>
+                <a:spcPts val="500"/>
+              </a:spcAft>
+            </a:pPr>
+            <a:r>
+              <a:rPr sz="1250" b="1">
+                <a:solidFill>
+                  <a:srgbClr val="0E7C74"/>
+                </a:solidFill>
+                <a:latin typeface="Segoe UI"/>
+              </a:rPr>
+              <a:t>WORKED EXAMPLE</a:t>
+            </a:r>
+          </a:p>
+          <a:p>
+            <a:pPr>
+              <a:spcAft>
+                <a:spcPts val="0"/>
+              </a:spcAft>
+            </a:pPr>
+            <a:r>
+              <a:rPr sz="2700" b="1">
+                <a:solidFill>
+                  <a:srgbClr val="1A1F27"/>
+                </a:solidFill>
+                <a:latin typeface="Segoe UI"/>
+              </a:rPr>
+              <a:t>How to read a KPI — from one call to a number</a:t>
+            </a:r>
+          </a:p>
+        </p:txBody>
+      </p:sp>
+      <p:sp>
+        <p:nvSpPr>
+          <p:cNvPr id="4" name="TextBox 3"/>
+          <p:cNvSpPr txBox="1"/>
+          <p:nvPr/>
+        </p:nvSpPr>
+        <p:spPr>
+          <a:xfrm>
+            <a:off x="685800" y="1600200"/>
+            <a:ext cx="10881360" cy="548640"/>
+          </a:xfrm>
+          <a:prstGeom prst="rect">
+            <a:avLst/>
+          </a:prstGeom>
+          <a:noFill/>
+        </p:spPr>
+        <p:txBody>
+          <a:bodyPr wrap="square">
+            <a:spAutoFit/>
+          </a:bodyPr>
+          <a:lstStyle/>
+          <a:p>
+            <a:pPr>
+              <a:spcAft>
+                <a:spcPts val="0"/>
+              </a:spcAft>
+            </a:pPr>
+            <a:r>
+              <a:rPr sz="1500" b="0">
+                <a:solidFill>
+                  <a:srgbClr val="535C6A"/>
+                </a:solidFill>
+                <a:latin typeface="Segoe UI"/>
+              </a:rPr>
+              <a:t>The AI judges each call; a KPI is simply those judgments added up per agent. No extra labelling.</a:t>
+            </a:r>
+          </a:p>
+        </p:txBody>
+      </p:sp>
+      <p:graphicFrame>
+        <p:nvGraphicFramePr>
+          <p:cNvPr id="5" name="Table 4"/>
+          <p:cNvGraphicFramePr>
+            <a:graphicFrameLocks noGrp="1"/>
+          </p:cNvGraphicFramePr>
+          <p:nvPr/>
+        </p:nvGraphicFramePr>
+        <p:xfrm>
+          <a:off x="640080" y="2194560"/>
+          <a:ext cx="10927080" cy="3291840"/>
+        </p:xfrm>
+        <a:graphic>
+          <a:graphicData uri="http://schemas.openxmlformats.org/drawingml/2006/table">
+            <a:tbl>
+              <a:tblPr firstRow="1">
+                <a:tableStyleId>{5C22544A-7EE6-4342-B048-85BDC9FD1C3A}</a:tableStyleId>
+              </a:tblPr>
+              <a:tblGrid>
+                <a:gridCol w="3017520"/>
+                <a:gridCol w="7909560"/>
+              </a:tblGrid>
+              <a:tr h="658368">
+                <a:tc>
+                  <a:txBody>
+                    <a:bodyPr wrap="square"/>
+                    <a:lstStyle/>
+                    <a:p>
+                      <a:r>
+                        <a:rPr sz="1100" b="1">
+                          <a:solidFill>
+                            <a:srgbClr val="FFFFFF"/>
+                          </a:solidFill>
+                          <a:latin typeface="Segoe UI"/>
+                        </a:rPr>
+                        <a:t>Step</a:t>
+                      </a:r>
+                    </a:p>
+                  </a:txBody>
+                  <a:tcPr anchor="ctr" marL="82296" marR="54864" marT="18288" marB="18288">
+                    <a:solidFill>
+                      <a:srgbClr val="0E7C74"/>
+                    </a:solidFill>
+                  </a:tcPr>
+                </a:tc>
+                <a:tc>
+                  <a:txBody>
+                    <a:bodyPr wrap="square"/>
+                    <a:lstStyle/>
+                    <a:p>
+                      <a:r>
+                        <a:rPr sz="1100" b="1">
+                          <a:solidFill>
+                            <a:srgbClr val="FFFFFF"/>
+                          </a:solidFill>
+                          <a:latin typeface="Segoe UI"/>
+                        </a:rPr>
+                        <a:t>What happens</a:t>
+                      </a:r>
+                    </a:p>
+                  </a:txBody>
+                  <a:tcPr anchor="ctr" marL="82296" marR="54864" marT="18288" marB="18288">
+                    <a:solidFill>
+                      <a:srgbClr val="0E7C74"/>
+                    </a:solidFill>
+                  </a:tcPr>
+                </a:tc>
+              </a:tr>
+              <a:tr h="658368">
+                <a:tc>
+                  <a:txBody>
+                    <a:bodyPr wrap="square"/>
+                    <a:lstStyle/>
+                    <a:p>
+                      <a:r>
+                        <a:rPr sz="1350" b="1">
+                          <a:solidFill>
+                            <a:srgbClr val="1A1F27"/>
+                          </a:solidFill>
+                          <a:latin typeface="Segoe UI"/>
+                        </a:rPr>
+                        <a:t>1 · The AI reads a call</a:t>
+                      </a:r>
+                    </a:p>
+                  </a:txBody>
+                  <a:tcPr anchor="ctr" marL="82296" marR="54864" marT="18288" marB="18288">
+                    <a:solidFill>
+                      <a:srgbClr val="FFFFFF"/>
+                    </a:solidFill>
+                  </a:tcPr>
+                </a:tc>
+                <a:tc>
+                  <a:txBody>
+                    <a:bodyPr wrap="square"/>
+                    <a:lstStyle/>
+                    <a:p>
+                      <a:r>
+                        <a:rPr sz="1350" b="0">
+                          <a:solidFill>
+                            <a:srgbClr val="535C6A"/>
+                          </a:solidFill>
+                          <a:latin typeface="Segoe UI"/>
+                        </a:rPr>
+                        <a:t>Notes: a new-line opportunity existed, the agent pitched, the issue was resolved</a:t>
+                      </a:r>
+                    </a:p>
+                  </a:txBody>
+                  <a:tcPr anchor="ctr" marL="82296" marR="54864" marT="18288" marB="18288">
+                    <a:solidFill>
+                      <a:srgbClr val="FFFFFF"/>
+                    </a:solidFill>
+                  </a:tcPr>
+                </a:tc>
+              </a:tr>
+              <a:tr h="658368">
+                <a:tc>
+                  <a:txBody>
+                    <a:bodyPr wrap="square"/>
+                    <a:lstStyle/>
+                    <a:p>
+                      <a:r>
+                        <a:rPr sz="1350" b="1">
+                          <a:solidFill>
+                            <a:srgbClr val="1A1F27"/>
+                          </a:solidFill>
+                          <a:latin typeface="Segoe UI"/>
+                        </a:rPr>
+                        <a:t>2 · Repeat for the week</a:t>
+                      </a:r>
+                    </a:p>
+                  </a:txBody>
+                  <a:tcPr anchor="ctr" marL="82296" marR="54864" marT="18288" marB="18288">
+                    <a:solidFill>
+                      <a:srgbClr val="F7F9F8"/>
+                    </a:solidFill>
+                  </a:tcPr>
+                </a:tc>
+                <a:tc>
+                  <a:txBody>
+                    <a:bodyPr wrap="square"/>
+                    <a:lstStyle/>
+                    <a:p>
+                      <a:r>
+                        <a:rPr sz="1350" b="0">
+                          <a:solidFill>
+                            <a:srgbClr val="535C6A"/>
+                          </a:solidFill>
+                          <a:latin typeface="Segoe UI"/>
+                        </a:rPr>
+                        <a:t>20 calls had a new-line opportunity; the agent pitched on 12 of them</a:t>
+                      </a:r>
+                    </a:p>
+                  </a:txBody>
+                  <a:tcPr anchor="ctr" marL="82296" marR="54864" marT="18288" marB="18288">
+                    <a:solidFill>
+                      <a:srgbClr val="F7F9F8"/>
+                    </a:solidFill>
+                  </a:tcPr>
+                </a:tc>
+              </a:tr>
+              <a:tr h="658368">
+                <a:tc>
+                  <a:txBody>
+                    <a:bodyPr wrap="square"/>
+                    <a:lstStyle/>
+                    <a:p>
+                      <a:r>
+                        <a:rPr sz="1350" b="1">
+                          <a:solidFill>
+                            <a:srgbClr val="1A1F27"/>
+                          </a:solidFill>
+                          <a:latin typeface="Segoe UI"/>
+                        </a:rPr>
+                        <a:t>3 · Count (no AI)</a:t>
+                      </a:r>
+                    </a:p>
+                  </a:txBody>
+                  <a:tcPr anchor="ctr" marL="82296" marR="54864" marT="18288" marB="18288">
+                    <a:solidFill>
+                      <a:srgbClr val="FFFFFF"/>
+                    </a:solidFill>
+                  </a:tcPr>
+                </a:tc>
+                <a:tc>
+                  <a:txBody>
+                    <a:bodyPr wrap="square"/>
+                    <a:lstStyle/>
+                    <a:p>
+                      <a:r>
+                        <a:rPr sz="1350" b="0">
+                          <a:solidFill>
+                            <a:srgbClr val="535C6A"/>
+                          </a:solidFill>
+                          <a:latin typeface="Segoe UI"/>
+                        </a:rPr>
+                        <a:t>new_line_pitches = 12</a:t>
+                      </a:r>
+                    </a:p>
+                  </a:txBody>
+                  <a:tcPr anchor="ctr" marL="82296" marR="54864" marT="18288" marB="18288">
+                    <a:solidFill>
+                      <a:srgbClr val="FFFFFF"/>
+                    </a:solidFill>
+                  </a:tcPr>
+                </a:tc>
+              </a:tr>
+              <a:tr h="658368">
+                <a:tc>
+                  <a:txBody>
+                    <a:bodyPr wrap="square"/>
+                    <a:lstStyle/>
+                    <a:p>
+                      <a:r>
+                        <a:rPr sz="1350" b="1">
+                          <a:solidFill>
+                            <a:srgbClr val="1A1F27"/>
+                          </a:solidFill>
+                          <a:latin typeface="Segoe UI"/>
+                        </a:rPr>
+                        <a:t>4 · Derive the rate</a:t>
+                      </a:r>
+                    </a:p>
+                  </a:txBody>
+                  <a:tcPr anchor="ctr" marL="82296" marR="54864" marT="18288" marB="18288">
+                    <a:solidFill>
+                      <a:srgbClr val="F7F9F8"/>
+                    </a:solidFill>
+                  </a:tcPr>
+                </a:tc>
+                <a:tc>
+                  <a:txBody>
+                    <a:bodyPr wrap="square"/>
+                    <a:lstStyle/>
+                    <a:p>
+                      <a:r>
+                        <a:rPr sz="1350" b="0">
+                          <a:solidFill>
+                            <a:srgbClr val="535C6A"/>
+                          </a:solidFill>
+                          <a:latin typeface="Segoe UI"/>
+                        </a:rPr>
+                        <a:t>opportunity_missed = 8 / 20 = 40%</a:t>
+                      </a:r>
+                    </a:p>
+                  </a:txBody>
+                  <a:tcPr anchor="ctr" marL="82296" marR="54864" marT="18288" marB="18288">
+                    <a:solidFill>
+                      <a:srgbClr val="F7F9F8"/>
+                    </a:solidFill>
+                  </a:tcPr>
+                </a:tc>
+              </a:tr>
+            </a:tbl>
+          </a:graphicData>
+        </a:graphic>
+      </p:graphicFrame>
+      <p:sp>
+        <p:nvSpPr>
+          <p:cNvPr id="6" name="Rectangle 5"/>
+          <p:cNvSpPr/>
+          <p:nvPr/>
+        </p:nvSpPr>
+        <p:spPr>
+          <a:xfrm>
+            <a:off x="685800" y="5806440"/>
+            <a:ext cx="10881360" cy="777240"/>
+          </a:xfrm>
+          <a:prstGeom prst="rect">
+            <a:avLst/>
+          </a:prstGeom>
+          <a:solidFill>
+            <a:srgbClr val="F2F5F4"/>
+          </a:solidFill>
+          <a:ln>
+            <a:noFill/>
+          </a:ln>
+        </p:spPr>
+        <p:style>
+          <a:lnRef idx="1">
+            <a:schemeClr val="accent1"/>
+          </a:lnRef>
+          <a:fillRef idx="3">
+            <a:schemeClr val="accent1"/>
+          </a:fillRef>
+          <a:effectRef idx="2">
+            <a:schemeClr val="accent1"/>
+          </a:effectRef>
+          <a:fontRef idx="minor">
+            <a:schemeClr val="lt1"/>
+          </a:fontRef>
+        </p:style>
+        <p:txBody>
+          <a:bodyPr rtlCol="0" anchor="ctr" wrap="square" lIns="228600" rIns="228600"/>
+          <a:lstStyle/>
+          <a:p>
+            <a:pPr algn="ctr">
+              <a:spcAft>
+                <a:spcPts val="0"/>
+              </a:spcAft>
+            </a:pPr>
+            <a:r>
+              <a:rPr sz="1600" b="1">
+                <a:solidFill>
+                  <a:srgbClr val="0E7C74"/>
+                </a:solidFill>
+                <a:latin typeface="Segoe UI"/>
+              </a:rPr>
+              <a:t>Every judgment also links to the exact call moments behind it — so any score can be explained and checked.</a:t>
+            </a:r>
+          </a:p>
+        </p:txBody>
+      </p:sp>
+    </p:spTree>
+  </p:cSld>
+  <p:clrMapOvr>
+    <a:masterClrMapping/>
+  </p:clrMapOvr>
+</p:sld>
+</file>
+
+<file path=ppt/slides/slide11.xml><?xml version="1.0" encoding="utf-8"?>
+<p:sld xmlns:a="http://schemas.openxmlformats.org/drawingml/2006/main" xmlns:p="http://schemas.openxmlformats.org/presentationml/2006/main" xmlns:r="http://schemas.openxmlformats.org/officeDocument/2006/relationships">
+  <p:cSld>
+    <p:bg>
+      <p:bgPr>
+        <a:solidFill>
+          <a:srgbClr val="FFFFFF"/>
+        </a:solidFill>
+        <a:effectLst/>
+      </p:bgPr>
+    </p:bg>
+    <p:spTree>
+      <p:nvGrpSpPr>
+        <p:cNvPr id="1" name=""/>
+        <p:cNvGrpSpPr/>
+        <p:nvPr/>
+      </p:nvGrpSpPr>
+      <p:grpSpPr/>
+      <p:sp>
+        <p:nvSpPr>
+          <p:cNvPr id="2" name="Rectangle 1"/>
+          <p:cNvSpPr/>
+          <p:nvPr/>
+        </p:nvSpPr>
+        <p:spPr>
+          <a:xfrm>
+            <a:off x="0" y="0"/>
+            <a:ext cx="12191695" cy="128016"/>
+          </a:xfrm>
+          <a:prstGeom prst="rect">
+            <a:avLst/>
+          </a:prstGeom>
+          <a:solidFill>
+            <a:srgbClr val="0E7C74"/>
+          </a:solidFill>
+          <a:ln>
+            <a:noFill/>
+          </a:ln>
+        </p:spPr>
+        <p:style>
+          <a:lnRef idx="1">
+            <a:schemeClr val="accent1"/>
+          </a:lnRef>
+          <a:fillRef idx="3">
+            <a:schemeClr val="accent1"/>
+          </a:fillRef>
+          <a:effectRef idx="2">
+            <a:schemeClr val="accent1"/>
+          </a:effectRef>
+          <a:fontRef idx="minor">
+            <a:schemeClr val="lt1"/>
+          </a:fontRef>
+        </p:style>
+        <p:txBody>
+          <a:bodyPr rtlCol="0" anchor="ctr"/>
+          <a:lstStyle/>
+          <a:p>
+            <a:pPr algn="ctr"/>
+          </a:p>
+        </p:txBody>
+      </p:sp>
+      <p:sp>
+        <p:nvSpPr>
+          <p:cNvPr id="3" name="TextBox 2"/>
+          <p:cNvSpPr txBox="1"/>
+          <p:nvPr/>
+        </p:nvSpPr>
+        <p:spPr>
+          <a:xfrm>
+            <a:off x="640080" y="384048"/>
+            <a:ext cx="11155680" cy="1280160"/>
+          </a:xfrm>
+          <a:prstGeom prst="rect">
+            <a:avLst/>
+          </a:prstGeom>
+          <a:noFill/>
+        </p:spPr>
+        <p:txBody>
+          <a:bodyPr wrap="square">
+            <a:spAutoFit/>
+          </a:bodyPr>
+          <a:lstStyle/>
+          <a:p>
+            <a:pPr>
+              <a:spcAft>
+                <a:spcPts val="500"/>
+              </a:spcAft>
+            </a:pPr>
+            <a:r>
+              <a:rPr sz="1250" b="1">
+                <a:solidFill>
+                  <a:srgbClr val="0E7C74"/>
+                </a:solidFill>
+                <a:latin typeface="Segoe UI"/>
+              </a:rPr>
+              <a:t>WORKED EXAMPLE</a:t>
+            </a:r>
+          </a:p>
+          <a:p>
+            <a:pPr>
+              <a:spcAft>
+                <a:spcPts val="0"/>
+              </a:spcAft>
+            </a:pPr>
+            <a:r>
+              <a:rPr sz="2700" b="1">
+                <a:solidFill>
+                  <a:srgbClr val="1A1F27"/>
+                </a:solidFill>
+                <a:latin typeface="Segoe UI"/>
+              </a:rPr>
+              <a:t>Golden data — what a coach certifies for one call</a:t>
+            </a:r>
+          </a:p>
+        </p:txBody>
+      </p:sp>
+      <p:graphicFrame>
+        <p:nvGraphicFramePr>
+          <p:cNvPr id="4" name="Table 3"/>
+          <p:cNvGraphicFramePr>
+            <a:graphicFrameLocks noGrp="1"/>
+          </p:cNvGraphicFramePr>
+          <p:nvPr/>
+        </p:nvGraphicFramePr>
+        <p:xfrm>
+          <a:off x="640080" y="1783080"/>
+          <a:ext cx="10927080" cy="3520440"/>
+        </p:xfrm>
+        <a:graphic>
+          <a:graphicData uri="http://schemas.openxmlformats.org/drawingml/2006/table">
+            <a:tbl>
+              <a:tblPr firstRow="1">
+                <a:tableStyleId>{5C22544A-7EE6-4342-B048-85BDC9FD1C3A}</a:tableStyleId>
+              </a:tblPr>
+              <a:tblGrid>
+                <a:gridCol w="4297680"/>
+                <a:gridCol w="6629400"/>
+              </a:tblGrid>
+              <a:tr h="502920">
+                <a:tc>
+                  <a:txBody>
+                    <a:bodyPr wrap="square"/>
+                    <a:lstStyle/>
+                    <a:p>
+                      <a:r>
+                        <a:rPr sz="1100" b="1">
+                          <a:solidFill>
+                            <a:srgbClr val="FFFFFF"/>
+                          </a:solidFill>
+                          <a:latin typeface="Segoe UI"/>
+                        </a:rPr>
+                        <a:t>Field</a:t>
+                      </a:r>
+                    </a:p>
+                  </a:txBody>
+                  <a:tcPr anchor="ctr" marL="82296" marR="54864" marT="18288" marB="18288">
+                    <a:solidFill>
+                      <a:srgbClr val="0E7C74"/>
+                    </a:solidFill>
+                  </a:tcPr>
+                </a:tc>
+                <a:tc>
+                  <a:txBody>
+                    <a:bodyPr wrap="square"/>
+                    <a:lstStyle/>
+                    <a:p>
+                      <a:r>
+                        <a:rPr sz="1100" b="1">
+                          <a:solidFill>
+                            <a:srgbClr val="FFFFFF"/>
+                          </a:solidFill>
+                          <a:latin typeface="Segoe UI"/>
+                        </a:rPr>
+                        <a:t>Certified answer</a:t>
+                      </a:r>
+                    </a:p>
+                  </a:txBody>
+                  <a:tcPr anchor="ctr" marL="82296" marR="54864" marT="18288" marB="18288">
+                    <a:solidFill>
+                      <a:srgbClr val="0E7C74"/>
+                    </a:solidFill>
+                  </a:tcPr>
+                </a:tc>
+              </a:tr>
+              <a:tr h="502920">
+                <a:tc>
+                  <a:txBody>
+                    <a:bodyPr wrap="square"/>
+                    <a:lstStyle/>
+                    <a:p>
+                      <a:r>
+                        <a:rPr sz="1350" b="1">
+                          <a:solidFill>
+                            <a:srgbClr val="1A1F27"/>
+                          </a:solidFill>
+                          <a:latin typeface="Segoe UI"/>
+                        </a:rPr>
+                        <a:t>new_line_opportunity_exists</a:t>
+                      </a:r>
+                    </a:p>
+                  </a:txBody>
+                  <a:tcPr anchor="ctr" marL="82296" marR="54864" marT="18288" marB="18288">
+                    <a:solidFill>
+                      <a:srgbClr val="FFFFFF"/>
+                    </a:solidFill>
+                  </a:tcPr>
+                </a:tc>
+                <a:tc>
+                  <a:txBody>
+                    <a:bodyPr wrap="square"/>
+                    <a:lstStyle/>
+                    <a:p>
+                      <a:r>
+                        <a:rPr sz="1350" b="0">
+                          <a:solidFill>
+                            <a:srgbClr val="535C6A"/>
+                          </a:solidFill>
+                          <a:latin typeface="Segoe UI"/>
+                        </a:rPr>
+                        <a:t>true</a:t>
+                      </a:r>
+                    </a:p>
+                  </a:txBody>
+                  <a:tcPr anchor="ctr" marL="82296" marR="54864" marT="18288" marB="18288">
+                    <a:solidFill>
+                      <a:srgbClr val="FFFFFF"/>
+                    </a:solidFill>
+                  </a:tcPr>
+                </a:tc>
+              </a:tr>
+              <a:tr h="502920">
+                <a:tc>
+                  <a:txBody>
+                    <a:bodyPr wrap="square"/>
+                    <a:lstStyle/>
+                    <a:p>
+                      <a:r>
+                        <a:rPr sz="1350" b="1">
+                          <a:solidFill>
+                            <a:srgbClr val="1A1F27"/>
+                          </a:solidFill>
+                          <a:latin typeface="Segoe UI"/>
+                        </a:rPr>
+                        <a:t>pitched_new_line</a:t>
+                      </a:r>
+                    </a:p>
+                  </a:txBody>
+                  <a:tcPr anchor="ctr" marL="82296" marR="54864" marT="18288" marB="18288">
+                    <a:solidFill>
+                      <a:srgbClr val="F7F9F8"/>
+                    </a:solidFill>
+                  </a:tcPr>
+                </a:tc>
+                <a:tc>
+                  <a:txBody>
+                    <a:bodyPr wrap="square"/>
+                    <a:lstStyle/>
+                    <a:p>
+                      <a:r>
+                        <a:rPr sz="1350" b="0">
+                          <a:solidFill>
+                            <a:srgbClr val="535C6A"/>
+                          </a:solidFill>
+                          <a:latin typeface="Segoe UI"/>
+                        </a:rPr>
+                        <a:t>false</a:t>
+                      </a:r>
+                    </a:p>
+                  </a:txBody>
+                  <a:tcPr anchor="ctr" marL="82296" marR="54864" marT="18288" marB="18288">
+                    <a:solidFill>
+                      <a:srgbClr val="F7F9F8"/>
+                    </a:solidFill>
+                  </a:tcPr>
+                </a:tc>
+              </a:tr>
+              <a:tr h="502920">
+                <a:tc>
+                  <a:txBody>
+                    <a:bodyPr wrap="square"/>
+                    <a:lstStyle/>
+                    <a:p>
+                      <a:r>
+                        <a:rPr sz="1350" b="1">
+                          <a:solidFill>
+                            <a:srgbClr val="1A1F27"/>
+                          </a:solidFill>
+                          <a:latin typeface="Segoe UI"/>
+                        </a:rPr>
+                        <a:t>escalation</a:t>
+                      </a:r>
+                    </a:p>
+                  </a:txBody>
+                  <a:tcPr anchor="ctr" marL="82296" marR="54864" marT="18288" marB="18288">
+                    <a:solidFill>
+                      <a:srgbClr val="FFFFFF"/>
+                    </a:solidFill>
+                  </a:tcPr>
+                </a:tc>
+                <a:tc>
+                  <a:txBody>
+                    <a:bodyPr wrap="square"/>
+                    <a:lstStyle/>
+                    <a:p>
+                      <a:r>
+                        <a:rPr sz="1350" b="0">
+                          <a:solidFill>
+                            <a:srgbClr val="535C6A"/>
+                          </a:solidFill>
+                          <a:latin typeface="Segoe UI"/>
+                        </a:rPr>
+                        <a:t>none</a:t>
+                      </a:r>
+                    </a:p>
+                  </a:txBody>
+                  <a:tcPr anchor="ctr" marL="82296" marR="54864" marT="18288" marB="18288">
+                    <a:solidFill>
+                      <a:srgbClr val="FFFFFF"/>
+                    </a:solidFill>
+                  </a:tcPr>
+                </a:tc>
+              </a:tr>
+              <a:tr h="502920">
+                <a:tc>
+                  <a:txBody>
+                    <a:bodyPr wrap="square"/>
+                    <a:lstStyle/>
+                    <a:p>
+                      <a:r>
+                        <a:rPr sz="1350" b="1">
+                          <a:solidFill>
+                            <a:srgbClr val="1A1F27"/>
+                          </a:solidFill>
+                          <a:latin typeface="Segoe UI"/>
+                        </a:rPr>
+                        <a:t>customer_experience</a:t>
+                      </a:r>
+                    </a:p>
+                  </a:txBody>
+                  <a:tcPr anchor="ctr" marL="82296" marR="54864" marT="18288" marB="18288">
+                    <a:solidFill>
+                      <a:srgbClr val="F7F9F8"/>
+                    </a:solidFill>
+                  </a:tcPr>
+                </a:tc>
+                <a:tc>
+                  <a:txBody>
+                    <a:bodyPr wrap="square"/>
+                    <a:lstStyle/>
+                    <a:p>
+                      <a:r>
+                        <a:rPr sz="1350" b="0">
+                          <a:solidFill>
+                            <a:srgbClr val="535C6A"/>
+                          </a:solidFill>
+                          <a:latin typeface="Segoe UI"/>
+                        </a:rPr>
+                        <a:t>Medium</a:t>
+                      </a:r>
+                    </a:p>
+                  </a:txBody>
+                  <a:tcPr anchor="ctr" marL="82296" marR="54864" marT="18288" marB="18288">
+                    <a:solidFill>
+                      <a:srgbClr val="F7F9F8"/>
+                    </a:solidFill>
+                  </a:tcPr>
+                </a:tc>
+              </a:tr>
+              <a:tr h="502920">
+                <a:tc>
+                  <a:txBody>
+                    <a:bodyPr wrap="square"/>
+                    <a:lstStyle/>
+                    <a:p>
+                      <a:r>
+                        <a:rPr sz="1350" b="1">
+                          <a:solidFill>
+                            <a:srgbClr val="1A1F27"/>
+                          </a:solidFill>
+                          <a:latin typeface="Segoe UI"/>
+                        </a:rPr>
+                        <a:t>Evidence</a:t>
+                      </a:r>
+                    </a:p>
+                  </a:txBody>
+                  <a:tcPr anchor="ctr" marL="82296" marR="54864" marT="18288" marB="18288">
+                    <a:solidFill>
+                      <a:srgbClr val="FFFFFF"/>
+                    </a:solidFill>
+                  </a:tcPr>
+                </a:tc>
+                <a:tc>
+                  <a:txBody>
+                    <a:bodyPr wrap="square"/>
+                    <a:lstStyle/>
+                    <a:p>
+                      <a:r>
+                        <a:rPr sz="1350" b="0">
+                          <a:solidFill>
+                            <a:srgbClr val="535C6A"/>
+                          </a:solidFill>
+                          <a:latin typeface="Segoe UI"/>
+                        </a:rPr>
+                        <a:t>lines 12–14 of the call</a:t>
+                      </a:r>
+                    </a:p>
+                  </a:txBody>
+                  <a:tcPr anchor="ctr" marL="82296" marR="54864" marT="18288" marB="18288">
+                    <a:solidFill>
+                      <a:srgbClr val="FFFFFF"/>
+                    </a:solidFill>
+                  </a:tcPr>
+                </a:tc>
+              </a:tr>
+              <a:tr h="502920">
+                <a:tc>
+                  <a:txBody>
+                    <a:bodyPr wrap="square"/>
+                    <a:lstStyle/>
+                    <a:p>
+                      <a:r>
+                        <a:rPr sz="1350" b="1">
+                          <a:solidFill>
+                            <a:srgbClr val="1A1F27"/>
+                          </a:solidFill>
+                          <a:latin typeface="Segoe UI"/>
+                        </a:rPr>
+                        <a:t>Certified by</a:t>
+                      </a:r>
+                    </a:p>
+                  </a:txBody>
+                  <a:tcPr anchor="ctr" marL="82296" marR="54864" marT="18288" marB="18288">
+                    <a:solidFill>
+                      <a:srgbClr val="F7F9F8"/>
+                    </a:solidFill>
+                  </a:tcPr>
+                </a:tc>
+                <a:tc>
+                  <a:txBody>
+                    <a:bodyPr wrap="square"/>
+                    <a:lstStyle/>
+                    <a:p>
+                      <a:r>
+                        <a:rPr sz="1350" b="0">
+                          <a:solidFill>
+                            <a:srgbClr val="535C6A"/>
+                          </a:solidFill>
+                          <a:latin typeface="Segoe UI"/>
+                        </a:rPr>
+                        <a:t>2 coaches · 8 Sep</a:t>
+                      </a:r>
+                    </a:p>
+                  </a:txBody>
+                  <a:tcPr anchor="ctr" marL="82296" marR="54864" marT="18288" marB="18288">
+                    <a:solidFill>
+                      <a:srgbClr val="F7F9F8"/>
+                    </a:solidFill>
+                  </a:tcPr>
+                </a:tc>
+              </a:tr>
+            </a:tbl>
+          </a:graphicData>
+        </a:graphic>
+      </p:graphicFrame>
+      <p:sp>
+        <p:nvSpPr>
+          <p:cNvPr id="5" name="Rectangle 4"/>
+          <p:cNvSpPr/>
+          <p:nvPr/>
+        </p:nvSpPr>
+        <p:spPr>
+          <a:xfrm>
+            <a:off x="685800" y="5760720"/>
+            <a:ext cx="10881360" cy="822960"/>
+          </a:xfrm>
+          <a:prstGeom prst="rect">
+            <a:avLst/>
+          </a:prstGeom>
+          <a:solidFill>
+            <a:srgbClr val="F2F5F4"/>
+          </a:solidFill>
+          <a:ln>
+            <a:noFill/>
+          </a:ln>
+        </p:spPr>
+        <p:style>
+          <a:lnRef idx="1">
+            <a:schemeClr val="accent1"/>
+          </a:lnRef>
+          <a:fillRef idx="3">
+            <a:schemeClr val="accent1"/>
+          </a:fillRef>
+          <a:effectRef idx="2">
+            <a:schemeClr val="accent1"/>
+          </a:effectRef>
+          <a:fontRef idx="minor">
+            <a:schemeClr val="lt1"/>
+          </a:fontRef>
+        </p:style>
+        <p:txBody>
+          <a:bodyPr rtlCol="0" anchor="ctr" wrap="square" lIns="228600" rIns="228600"/>
+          <a:lstStyle/>
+          <a:p>
+            <a:pPr algn="ctr">
+              <a:spcAft>
+                <a:spcPts val="0"/>
+              </a:spcAft>
+            </a:pPr>
+            <a:r>
+              <a:rPr sz="1600" b="1">
+                <a:solidFill>
+                  <a:srgbClr val="0E7C74"/>
+                </a:solidFill>
+                <a:latin typeface="Segoe UI"/>
+              </a:rPr>
+              <a:t>A transcript becomes “golden” only when 2 or more coaches agree on its answers — not because we picked it. Disagreement means the definition needs fixing first.</a:t>
+            </a:r>
+          </a:p>
+        </p:txBody>
+      </p:sp>
+    </p:spTree>
+  </p:cSld>
+  <p:clrMapOvr>
+    <a:masterClrMapping/>
+  </p:clrMapOvr>
+</p:sld>
+</file>
+
 <file path=ppt/slides/slide2.xml><?xml version="1.0" encoding="utf-8"?>
 <p:sld xmlns:a="http://schemas.openxmlformats.org/drawingml/2006/main" xmlns:p="http://schemas.openxmlformats.org/presentationml/2006/main" xmlns:r="http://schemas.openxmlformats.org/officeDocument/2006/relationships">
   <p:cSld>

--- a/usecases/ai_pipeline 2/docs/APIX_Metrics_Discussion.pptx
+++ b/usecases/ai_pipeline 2/docs/APIX_Metrics_Discussion.pptx
@@ -13,9 +13,6 @@
     <p:sldId id="261" r:id="rId12"/>
     <p:sldId id="262" r:id="rId13"/>
     <p:sldId id="263" r:id="rId14"/>
-    <p:sldId id="264" r:id="rId15"/>
-    <p:sldId id="265" r:id="rId16"/>
-    <p:sldId id="266" r:id="rId17"/>
   </p:sldIdLst>
   <p:sldSz cx="12191695" cy="6858000" type="screen4x3"/>
   <p:notesSz cx="6858000" cy="9144000"/>
@@ -3126,6 +3123,7 @@
           <a:ln>
             <a:noFill/>
           </a:ln>
+          <a:effectLst/>
         </p:spPr>
         <p:style>
           <a:lnRef idx="1">
@@ -3157,8 +3155,8 @@
         </p:nvSpPr>
         <p:spPr>
           <a:xfrm>
-            <a:off x="731520" y="2011680"/>
-            <a:ext cx="10698480" cy="2926080"/>
+            <a:off x="731520" y="1874519"/>
+            <a:ext cx="10698480" cy="3108960"/>
           </a:xfrm>
           <a:prstGeom prst="rect">
             <a:avLst/>
@@ -3177,13 +3175,13 @@
               </a:spcAft>
             </a:pPr>
             <a:r>
-              <a:rPr sz="1400" b="1">
+              <a:rPr sz="1350" b="1">
                 <a:solidFill>
                   <a:srgbClr val="0E7C74"/>
                 </a:solidFill>
                 <a:latin typeface="Segoe UI"/>
               </a:rPr>
-              <a:t>APIX  ·  METRICS DISCUSSION</a:t>
+              <a:t>APIX (AFNI PERFORMANCE INDEX)  ·  THE METRICS, EXPLAINED</a:t>
             </a:r>
           </a:p>
           <a:p>
@@ -3193,29 +3191,29 @@
               </a:spcAft>
             </a:pPr>
             <a:r>
-              <a:rPr sz="3800" b="1">
+              <a:rPr sz="3700" b="1">
                 <a:solidFill>
                   <a:srgbClr val="1A1F27"/>
                 </a:solidFill>
                 <a:latin typeface="Segoe UI"/>
               </a:rPr>
-              <a:t>The APIX KPIs — what they are,</a:t>
+              <a:t>The AI that scores every</a:t>
             </a:r>
           </a:p>
           <a:p>
             <a:pPr>
               <a:spcAft>
-                <a:spcPts val="1600"/>
-              </a:spcAft>
-            </a:pPr>
-            <a:r>
-              <a:rPr sz="3800" b="1">
+                <a:spcPts val="1500"/>
+              </a:spcAft>
+            </a:pPr>
+            <a:r>
+              <a:rPr sz="3700" b="1">
                 <a:solidFill>
                   <a:srgbClr val="1A1F27"/>
                 </a:solidFill>
                 <a:latin typeface="Segoe UI"/>
               </a:rPr>
-              <a:t>and the golden data we need for them</a:t>
+              <a:t>customer call</a:t>
             </a:r>
           </a:p>
           <a:p>
@@ -3225,13 +3223,13 @@
               </a:spcAft>
             </a:pPr>
             <a:r>
-              <a:rPr sz="1800" b="0">
+              <a:rPr sz="1750" b="0">
                 <a:solidFill>
                   <a:srgbClr val="535C6A"/>
                 </a:solidFill>
                 <a:latin typeface="Segoe UI"/>
               </a:rPr>
-              <a:t>APIX = AFNI Performance Index.  Enumerated per program, for discussion.</a:t>
+              <a:t>How APIX turns calls into per-agent coaching — the metrics, with worked examples and program comparisons.</a:t>
             </a:r>
           </a:p>
         </p:txBody>
@@ -3244,7 +3242,7 @@
         </p:nvSpPr>
         <p:spPr>
           <a:xfrm>
-            <a:off x="731520" y="5852160"/>
+            <a:off x="731520" y="5897880"/>
             <a:ext cx="10698480" cy="640080"/>
           </a:xfrm>
           <a:prstGeom prst="rect">
@@ -3264,1016 +3262,13 @@
               </a:spcAft>
             </a:pPr>
             <a:r>
-              <a:rPr sz="1350" b="0">
+              <a:rPr sz="1300" b="0">
                 <a:solidFill>
                   <a:srgbClr val="8A93A1"/>
                 </a:solidFill>
                 <a:latin typeface="Segoe UI"/>
               </a:rPr>
-              <a:t>3 programs   ·   47 KPIs   ·   ~500 golden calls proposed   ·   8 Sep 2026</a:t>
-            </a:r>
-          </a:p>
-        </p:txBody>
-      </p:sp>
-    </p:spTree>
-  </p:cSld>
-  <p:clrMapOvr>
-    <a:masterClrMapping/>
-  </p:clrMapOvr>
-</p:sld>
-</file>
-
-<file path=ppt/slides/slide10.xml><?xml version="1.0" encoding="utf-8"?>
-<p:sld xmlns:a="http://schemas.openxmlformats.org/drawingml/2006/main" xmlns:p="http://schemas.openxmlformats.org/presentationml/2006/main" xmlns:r="http://schemas.openxmlformats.org/officeDocument/2006/relationships">
-  <p:cSld>
-    <p:bg>
-      <p:bgPr>
-        <a:solidFill>
-          <a:srgbClr val="FFFFFF"/>
-        </a:solidFill>
-        <a:effectLst/>
-      </p:bgPr>
-    </p:bg>
-    <p:spTree>
-      <p:nvGrpSpPr>
-        <p:cNvPr id="1" name=""/>
-        <p:cNvGrpSpPr/>
-        <p:nvPr/>
-      </p:nvGrpSpPr>
-      <p:grpSpPr/>
-      <p:sp>
-        <p:nvSpPr>
-          <p:cNvPr id="2" name="Rectangle 1"/>
-          <p:cNvSpPr/>
-          <p:nvPr/>
-        </p:nvSpPr>
-        <p:spPr>
-          <a:xfrm>
-            <a:off x="0" y="0"/>
-            <a:ext cx="12191695" cy="128016"/>
-          </a:xfrm>
-          <a:prstGeom prst="rect">
-            <a:avLst/>
-          </a:prstGeom>
-          <a:solidFill>
-            <a:srgbClr val="0E7C74"/>
-          </a:solidFill>
-          <a:ln>
-            <a:noFill/>
-          </a:ln>
-        </p:spPr>
-        <p:style>
-          <a:lnRef idx="1">
-            <a:schemeClr val="accent1"/>
-          </a:lnRef>
-          <a:fillRef idx="3">
-            <a:schemeClr val="accent1"/>
-          </a:fillRef>
-          <a:effectRef idx="2">
-            <a:schemeClr val="accent1"/>
-          </a:effectRef>
-          <a:fontRef idx="minor">
-            <a:schemeClr val="lt1"/>
-          </a:fontRef>
-        </p:style>
-        <p:txBody>
-          <a:bodyPr rtlCol="0" anchor="ctr"/>
-          <a:lstStyle/>
-          <a:p>
-            <a:pPr algn="ctr"/>
-          </a:p>
-        </p:txBody>
-      </p:sp>
-      <p:sp>
-        <p:nvSpPr>
-          <p:cNvPr id="3" name="TextBox 2"/>
-          <p:cNvSpPr txBox="1"/>
-          <p:nvPr/>
-        </p:nvSpPr>
-        <p:spPr>
-          <a:xfrm>
-            <a:off x="640080" y="384048"/>
-            <a:ext cx="11155680" cy="1280160"/>
-          </a:xfrm>
-          <a:prstGeom prst="rect">
-            <a:avLst/>
-          </a:prstGeom>
-          <a:noFill/>
-        </p:spPr>
-        <p:txBody>
-          <a:bodyPr wrap="square">
-            <a:spAutoFit/>
-          </a:bodyPr>
-          <a:lstStyle/>
-          <a:p>
-            <a:pPr>
-              <a:spcAft>
-                <a:spcPts val="500"/>
-              </a:spcAft>
-            </a:pPr>
-            <a:r>
-              <a:rPr sz="1250" b="1">
-                <a:solidFill>
-                  <a:srgbClr val="0E7C74"/>
-                </a:solidFill>
-                <a:latin typeface="Segoe UI"/>
-              </a:rPr>
-              <a:t>WORKED EXAMPLE</a:t>
-            </a:r>
-          </a:p>
-          <a:p>
-            <a:pPr>
-              <a:spcAft>
-                <a:spcPts val="0"/>
-              </a:spcAft>
-            </a:pPr>
-            <a:r>
-              <a:rPr sz="2700" b="1">
-                <a:solidFill>
-                  <a:srgbClr val="1A1F27"/>
-                </a:solidFill>
-                <a:latin typeface="Segoe UI"/>
-              </a:rPr>
-              <a:t>How to read a KPI — from one call to a number</a:t>
-            </a:r>
-          </a:p>
-        </p:txBody>
-      </p:sp>
-      <p:sp>
-        <p:nvSpPr>
-          <p:cNvPr id="4" name="TextBox 3"/>
-          <p:cNvSpPr txBox="1"/>
-          <p:nvPr/>
-        </p:nvSpPr>
-        <p:spPr>
-          <a:xfrm>
-            <a:off x="685800" y="1600200"/>
-            <a:ext cx="10881360" cy="548640"/>
-          </a:xfrm>
-          <a:prstGeom prst="rect">
-            <a:avLst/>
-          </a:prstGeom>
-          <a:noFill/>
-        </p:spPr>
-        <p:txBody>
-          <a:bodyPr wrap="square">
-            <a:spAutoFit/>
-          </a:bodyPr>
-          <a:lstStyle/>
-          <a:p>
-            <a:pPr>
-              <a:spcAft>
-                <a:spcPts val="0"/>
-              </a:spcAft>
-            </a:pPr>
-            <a:r>
-              <a:rPr sz="1500" b="0">
-                <a:solidFill>
-                  <a:srgbClr val="535C6A"/>
-                </a:solidFill>
-                <a:latin typeface="Segoe UI"/>
-              </a:rPr>
-              <a:t>The AI judges each call; a KPI is simply those judgments added up per agent. No extra labelling.</a:t>
-            </a:r>
-          </a:p>
-        </p:txBody>
-      </p:sp>
-      <p:graphicFrame>
-        <p:nvGraphicFramePr>
-          <p:cNvPr id="5" name="Table 4"/>
-          <p:cNvGraphicFramePr>
-            <a:graphicFrameLocks noGrp="1"/>
-          </p:cNvGraphicFramePr>
-          <p:nvPr/>
-        </p:nvGraphicFramePr>
-        <p:xfrm>
-          <a:off x="640080" y="2194560"/>
-          <a:ext cx="10927080" cy="3291840"/>
-        </p:xfrm>
-        <a:graphic>
-          <a:graphicData uri="http://schemas.openxmlformats.org/drawingml/2006/table">
-            <a:tbl>
-              <a:tblPr firstRow="1">
-                <a:tableStyleId>{5C22544A-7EE6-4342-B048-85BDC9FD1C3A}</a:tableStyleId>
-              </a:tblPr>
-              <a:tblGrid>
-                <a:gridCol w="3017520"/>
-                <a:gridCol w="7909560"/>
-              </a:tblGrid>
-              <a:tr h="658368">
-                <a:tc>
-                  <a:txBody>
-                    <a:bodyPr wrap="square"/>
-                    <a:lstStyle/>
-                    <a:p>
-                      <a:r>
-                        <a:rPr sz="1100" b="1">
-                          <a:solidFill>
-                            <a:srgbClr val="FFFFFF"/>
-                          </a:solidFill>
-                          <a:latin typeface="Segoe UI"/>
-                        </a:rPr>
-                        <a:t>Step</a:t>
-                      </a:r>
-                    </a:p>
-                  </a:txBody>
-                  <a:tcPr anchor="ctr" marL="82296" marR="54864" marT="18288" marB="18288">
-                    <a:solidFill>
-                      <a:srgbClr val="0E7C74"/>
-                    </a:solidFill>
-                  </a:tcPr>
-                </a:tc>
-                <a:tc>
-                  <a:txBody>
-                    <a:bodyPr wrap="square"/>
-                    <a:lstStyle/>
-                    <a:p>
-                      <a:r>
-                        <a:rPr sz="1100" b="1">
-                          <a:solidFill>
-                            <a:srgbClr val="FFFFFF"/>
-                          </a:solidFill>
-                          <a:latin typeface="Segoe UI"/>
-                        </a:rPr>
-                        <a:t>What happens</a:t>
-                      </a:r>
-                    </a:p>
-                  </a:txBody>
-                  <a:tcPr anchor="ctr" marL="82296" marR="54864" marT="18288" marB="18288">
-                    <a:solidFill>
-                      <a:srgbClr val="0E7C74"/>
-                    </a:solidFill>
-                  </a:tcPr>
-                </a:tc>
-              </a:tr>
-              <a:tr h="658368">
-                <a:tc>
-                  <a:txBody>
-                    <a:bodyPr wrap="square"/>
-                    <a:lstStyle/>
-                    <a:p>
-                      <a:r>
-                        <a:rPr sz="1350" b="1">
-                          <a:solidFill>
-                            <a:srgbClr val="1A1F27"/>
-                          </a:solidFill>
-                          <a:latin typeface="Segoe UI"/>
-                        </a:rPr>
-                        <a:t>1 · The AI reads a call</a:t>
-                      </a:r>
-                    </a:p>
-                  </a:txBody>
-                  <a:tcPr anchor="ctr" marL="82296" marR="54864" marT="18288" marB="18288">
-                    <a:solidFill>
-                      <a:srgbClr val="FFFFFF"/>
-                    </a:solidFill>
-                  </a:tcPr>
-                </a:tc>
-                <a:tc>
-                  <a:txBody>
-                    <a:bodyPr wrap="square"/>
-                    <a:lstStyle/>
-                    <a:p>
-                      <a:r>
-                        <a:rPr sz="1350" b="0">
-                          <a:solidFill>
-                            <a:srgbClr val="535C6A"/>
-                          </a:solidFill>
-                          <a:latin typeface="Segoe UI"/>
-                        </a:rPr>
-                        <a:t>Notes: a new-line opportunity existed, the agent pitched, the issue was resolved</a:t>
-                      </a:r>
-                    </a:p>
-                  </a:txBody>
-                  <a:tcPr anchor="ctr" marL="82296" marR="54864" marT="18288" marB="18288">
-                    <a:solidFill>
-                      <a:srgbClr val="FFFFFF"/>
-                    </a:solidFill>
-                  </a:tcPr>
-                </a:tc>
-              </a:tr>
-              <a:tr h="658368">
-                <a:tc>
-                  <a:txBody>
-                    <a:bodyPr wrap="square"/>
-                    <a:lstStyle/>
-                    <a:p>
-                      <a:r>
-                        <a:rPr sz="1350" b="1">
-                          <a:solidFill>
-                            <a:srgbClr val="1A1F27"/>
-                          </a:solidFill>
-                          <a:latin typeface="Segoe UI"/>
-                        </a:rPr>
-                        <a:t>2 · Repeat for the week</a:t>
-                      </a:r>
-                    </a:p>
-                  </a:txBody>
-                  <a:tcPr anchor="ctr" marL="82296" marR="54864" marT="18288" marB="18288">
-                    <a:solidFill>
-                      <a:srgbClr val="F7F9F8"/>
-                    </a:solidFill>
-                  </a:tcPr>
-                </a:tc>
-                <a:tc>
-                  <a:txBody>
-                    <a:bodyPr wrap="square"/>
-                    <a:lstStyle/>
-                    <a:p>
-                      <a:r>
-                        <a:rPr sz="1350" b="0">
-                          <a:solidFill>
-                            <a:srgbClr val="535C6A"/>
-                          </a:solidFill>
-                          <a:latin typeface="Segoe UI"/>
-                        </a:rPr>
-                        <a:t>20 calls had a new-line opportunity; the agent pitched on 12 of them</a:t>
-                      </a:r>
-                    </a:p>
-                  </a:txBody>
-                  <a:tcPr anchor="ctr" marL="82296" marR="54864" marT="18288" marB="18288">
-                    <a:solidFill>
-                      <a:srgbClr val="F7F9F8"/>
-                    </a:solidFill>
-                  </a:tcPr>
-                </a:tc>
-              </a:tr>
-              <a:tr h="658368">
-                <a:tc>
-                  <a:txBody>
-                    <a:bodyPr wrap="square"/>
-                    <a:lstStyle/>
-                    <a:p>
-                      <a:r>
-                        <a:rPr sz="1350" b="1">
-                          <a:solidFill>
-                            <a:srgbClr val="1A1F27"/>
-                          </a:solidFill>
-                          <a:latin typeface="Segoe UI"/>
-                        </a:rPr>
-                        <a:t>3 · Count (no AI)</a:t>
-                      </a:r>
-                    </a:p>
-                  </a:txBody>
-                  <a:tcPr anchor="ctr" marL="82296" marR="54864" marT="18288" marB="18288">
-                    <a:solidFill>
-                      <a:srgbClr val="FFFFFF"/>
-                    </a:solidFill>
-                  </a:tcPr>
-                </a:tc>
-                <a:tc>
-                  <a:txBody>
-                    <a:bodyPr wrap="square"/>
-                    <a:lstStyle/>
-                    <a:p>
-                      <a:r>
-                        <a:rPr sz="1350" b="0">
-                          <a:solidFill>
-                            <a:srgbClr val="535C6A"/>
-                          </a:solidFill>
-                          <a:latin typeface="Segoe UI"/>
-                        </a:rPr>
-                        <a:t>new_line_pitches = 12</a:t>
-                      </a:r>
-                    </a:p>
-                  </a:txBody>
-                  <a:tcPr anchor="ctr" marL="82296" marR="54864" marT="18288" marB="18288">
-                    <a:solidFill>
-                      <a:srgbClr val="FFFFFF"/>
-                    </a:solidFill>
-                  </a:tcPr>
-                </a:tc>
-              </a:tr>
-              <a:tr h="658368">
-                <a:tc>
-                  <a:txBody>
-                    <a:bodyPr wrap="square"/>
-                    <a:lstStyle/>
-                    <a:p>
-                      <a:r>
-                        <a:rPr sz="1350" b="1">
-                          <a:solidFill>
-                            <a:srgbClr val="1A1F27"/>
-                          </a:solidFill>
-                          <a:latin typeface="Segoe UI"/>
-                        </a:rPr>
-                        <a:t>4 · Derive the rate</a:t>
-                      </a:r>
-                    </a:p>
-                  </a:txBody>
-                  <a:tcPr anchor="ctr" marL="82296" marR="54864" marT="18288" marB="18288">
-                    <a:solidFill>
-                      <a:srgbClr val="F7F9F8"/>
-                    </a:solidFill>
-                  </a:tcPr>
-                </a:tc>
-                <a:tc>
-                  <a:txBody>
-                    <a:bodyPr wrap="square"/>
-                    <a:lstStyle/>
-                    <a:p>
-                      <a:r>
-                        <a:rPr sz="1350" b="0">
-                          <a:solidFill>
-                            <a:srgbClr val="535C6A"/>
-                          </a:solidFill>
-                          <a:latin typeface="Segoe UI"/>
-                        </a:rPr>
-                        <a:t>opportunity_missed = 8 / 20 = 40%</a:t>
-                      </a:r>
-                    </a:p>
-                  </a:txBody>
-                  <a:tcPr anchor="ctr" marL="82296" marR="54864" marT="18288" marB="18288">
-                    <a:solidFill>
-                      <a:srgbClr val="F7F9F8"/>
-                    </a:solidFill>
-                  </a:tcPr>
-                </a:tc>
-              </a:tr>
-            </a:tbl>
-          </a:graphicData>
-        </a:graphic>
-      </p:graphicFrame>
-      <p:sp>
-        <p:nvSpPr>
-          <p:cNvPr id="6" name="Rectangle 5"/>
-          <p:cNvSpPr/>
-          <p:nvPr/>
-        </p:nvSpPr>
-        <p:spPr>
-          <a:xfrm>
-            <a:off x="685800" y="5806440"/>
-            <a:ext cx="10881360" cy="777240"/>
-          </a:xfrm>
-          <a:prstGeom prst="rect">
-            <a:avLst/>
-          </a:prstGeom>
-          <a:solidFill>
-            <a:srgbClr val="F2F5F4"/>
-          </a:solidFill>
-          <a:ln>
-            <a:noFill/>
-          </a:ln>
-        </p:spPr>
-        <p:style>
-          <a:lnRef idx="1">
-            <a:schemeClr val="accent1"/>
-          </a:lnRef>
-          <a:fillRef idx="3">
-            <a:schemeClr val="accent1"/>
-          </a:fillRef>
-          <a:effectRef idx="2">
-            <a:schemeClr val="accent1"/>
-          </a:effectRef>
-          <a:fontRef idx="minor">
-            <a:schemeClr val="lt1"/>
-          </a:fontRef>
-        </p:style>
-        <p:txBody>
-          <a:bodyPr rtlCol="0" anchor="ctr" wrap="square" lIns="228600" rIns="228600"/>
-          <a:lstStyle/>
-          <a:p>
-            <a:pPr algn="ctr">
-              <a:spcAft>
-                <a:spcPts val="0"/>
-              </a:spcAft>
-            </a:pPr>
-            <a:r>
-              <a:rPr sz="1600" b="1">
-                <a:solidFill>
-                  <a:srgbClr val="0E7C74"/>
-                </a:solidFill>
-                <a:latin typeface="Segoe UI"/>
-              </a:rPr>
-              <a:t>Every judgment also links to the exact call moments behind it — so any score can be explained and checked.</a:t>
-            </a:r>
-          </a:p>
-        </p:txBody>
-      </p:sp>
-    </p:spTree>
-  </p:cSld>
-  <p:clrMapOvr>
-    <a:masterClrMapping/>
-  </p:clrMapOvr>
-</p:sld>
-</file>
-
-<file path=ppt/slides/slide11.xml><?xml version="1.0" encoding="utf-8"?>
-<p:sld xmlns:a="http://schemas.openxmlformats.org/drawingml/2006/main" xmlns:p="http://schemas.openxmlformats.org/presentationml/2006/main" xmlns:r="http://schemas.openxmlformats.org/officeDocument/2006/relationships">
-  <p:cSld>
-    <p:bg>
-      <p:bgPr>
-        <a:solidFill>
-          <a:srgbClr val="FFFFFF"/>
-        </a:solidFill>
-        <a:effectLst/>
-      </p:bgPr>
-    </p:bg>
-    <p:spTree>
-      <p:nvGrpSpPr>
-        <p:cNvPr id="1" name=""/>
-        <p:cNvGrpSpPr/>
-        <p:nvPr/>
-      </p:nvGrpSpPr>
-      <p:grpSpPr/>
-      <p:sp>
-        <p:nvSpPr>
-          <p:cNvPr id="2" name="Rectangle 1"/>
-          <p:cNvSpPr/>
-          <p:nvPr/>
-        </p:nvSpPr>
-        <p:spPr>
-          <a:xfrm>
-            <a:off x="0" y="0"/>
-            <a:ext cx="12191695" cy="128016"/>
-          </a:xfrm>
-          <a:prstGeom prst="rect">
-            <a:avLst/>
-          </a:prstGeom>
-          <a:solidFill>
-            <a:srgbClr val="0E7C74"/>
-          </a:solidFill>
-          <a:ln>
-            <a:noFill/>
-          </a:ln>
-        </p:spPr>
-        <p:style>
-          <a:lnRef idx="1">
-            <a:schemeClr val="accent1"/>
-          </a:lnRef>
-          <a:fillRef idx="3">
-            <a:schemeClr val="accent1"/>
-          </a:fillRef>
-          <a:effectRef idx="2">
-            <a:schemeClr val="accent1"/>
-          </a:effectRef>
-          <a:fontRef idx="minor">
-            <a:schemeClr val="lt1"/>
-          </a:fontRef>
-        </p:style>
-        <p:txBody>
-          <a:bodyPr rtlCol="0" anchor="ctr"/>
-          <a:lstStyle/>
-          <a:p>
-            <a:pPr algn="ctr"/>
-          </a:p>
-        </p:txBody>
-      </p:sp>
-      <p:sp>
-        <p:nvSpPr>
-          <p:cNvPr id="3" name="TextBox 2"/>
-          <p:cNvSpPr txBox="1"/>
-          <p:nvPr/>
-        </p:nvSpPr>
-        <p:spPr>
-          <a:xfrm>
-            <a:off x="640080" y="384048"/>
-            <a:ext cx="11155680" cy="1280160"/>
-          </a:xfrm>
-          <a:prstGeom prst="rect">
-            <a:avLst/>
-          </a:prstGeom>
-          <a:noFill/>
-        </p:spPr>
-        <p:txBody>
-          <a:bodyPr wrap="square">
-            <a:spAutoFit/>
-          </a:bodyPr>
-          <a:lstStyle/>
-          <a:p>
-            <a:pPr>
-              <a:spcAft>
-                <a:spcPts val="500"/>
-              </a:spcAft>
-            </a:pPr>
-            <a:r>
-              <a:rPr sz="1250" b="1">
-                <a:solidFill>
-                  <a:srgbClr val="0E7C74"/>
-                </a:solidFill>
-                <a:latin typeface="Segoe UI"/>
-              </a:rPr>
-              <a:t>WORKED EXAMPLE</a:t>
-            </a:r>
-          </a:p>
-          <a:p>
-            <a:pPr>
-              <a:spcAft>
-                <a:spcPts val="0"/>
-              </a:spcAft>
-            </a:pPr>
-            <a:r>
-              <a:rPr sz="2700" b="1">
-                <a:solidFill>
-                  <a:srgbClr val="1A1F27"/>
-                </a:solidFill>
-                <a:latin typeface="Segoe UI"/>
-              </a:rPr>
-              <a:t>Golden data — what a coach certifies for one call</a:t>
-            </a:r>
-          </a:p>
-        </p:txBody>
-      </p:sp>
-      <p:graphicFrame>
-        <p:nvGraphicFramePr>
-          <p:cNvPr id="4" name="Table 3"/>
-          <p:cNvGraphicFramePr>
-            <a:graphicFrameLocks noGrp="1"/>
-          </p:cNvGraphicFramePr>
-          <p:nvPr/>
-        </p:nvGraphicFramePr>
-        <p:xfrm>
-          <a:off x="640080" y="1783080"/>
-          <a:ext cx="10927080" cy="3520440"/>
-        </p:xfrm>
-        <a:graphic>
-          <a:graphicData uri="http://schemas.openxmlformats.org/drawingml/2006/table">
-            <a:tbl>
-              <a:tblPr firstRow="1">
-                <a:tableStyleId>{5C22544A-7EE6-4342-B048-85BDC9FD1C3A}</a:tableStyleId>
-              </a:tblPr>
-              <a:tblGrid>
-                <a:gridCol w="4297680"/>
-                <a:gridCol w="6629400"/>
-              </a:tblGrid>
-              <a:tr h="502920">
-                <a:tc>
-                  <a:txBody>
-                    <a:bodyPr wrap="square"/>
-                    <a:lstStyle/>
-                    <a:p>
-                      <a:r>
-                        <a:rPr sz="1100" b="1">
-                          <a:solidFill>
-                            <a:srgbClr val="FFFFFF"/>
-                          </a:solidFill>
-                          <a:latin typeface="Segoe UI"/>
-                        </a:rPr>
-                        <a:t>Field</a:t>
-                      </a:r>
-                    </a:p>
-                  </a:txBody>
-                  <a:tcPr anchor="ctr" marL="82296" marR="54864" marT="18288" marB="18288">
-                    <a:solidFill>
-                      <a:srgbClr val="0E7C74"/>
-                    </a:solidFill>
-                  </a:tcPr>
-                </a:tc>
-                <a:tc>
-                  <a:txBody>
-                    <a:bodyPr wrap="square"/>
-                    <a:lstStyle/>
-                    <a:p>
-                      <a:r>
-                        <a:rPr sz="1100" b="1">
-                          <a:solidFill>
-                            <a:srgbClr val="FFFFFF"/>
-                          </a:solidFill>
-                          <a:latin typeface="Segoe UI"/>
-                        </a:rPr>
-                        <a:t>Certified answer</a:t>
-                      </a:r>
-                    </a:p>
-                  </a:txBody>
-                  <a:tcPr anchor="ctr" marL="82296" marR="54864" marT="18288" marB="18288">
-                    <a:solidFill>
-                      <a:srgbClr val="0E7C74"/>
-                    </a:solidFill>
-                  </a:tcPr>
-                </a:tc>
-              </a:tr>
-              <a:tr h="502920">
-                <a:tc>
-                  <a:txBody>
-                    <a:bodyPr wrap="square"/>
-                    <a:lstStyle/>
-                    <a:p>
-                      <a:r>
-                        <a:rPr sz="1350" b="1">
-                          <a:solidFill>
-                            <a:srgbClr val="1A1F27"/>
-                          </a:solidFill>
-                          <a:latin typeface="Segoe UI"/>
-                        </a:rPr>
-                        <a:t>new_line_opportunity_exists</a:t>
-                      </a:r>
-                    </a:p>
-                  </a:txBody>
-                  <a:tcPr anchor="ctr" marL="82296" marR="54864" marT="18288" marB="18288">
-                    <a:solidFill>
-                      <a:srgbClr val="FFFFFF"/>
-                    </a:solidFill>
-                  </a:tcPr>
-                </a:tc>
-                <a:tc>
-                  <a:txBody>
-                    <a:bodyPr wrap="square"/>
-                    <a:lstStyle/>
-                    <a:p>
-                      <a:r>
-                        <a:rPr sz="1350" b="0">
-                          <a:solidFill>
-                            <a:srgbClr val="535C6A"/>
-                          </a:solidFill>
-                          <a:latin typeface="Segoe UI"/>
-                        </a:rPr>
-                        <a:t>true</a:t>
-                      </a:r>
-                    </a:p>
-                  </a:txBody>
-                  <a:tcPr anchor="ctr" marL="82296" marR="54864" marT="18288" marB="18288">
-                    <a:solidFill>
-                      <a:srgbClr val="FFFFFF"/>
-                    </a:solidFill>
-                  </a:tcPr>
-                </a:tc>
-              </a:tr>
-              <a:tr h="502920">
-                <a:tc>
-                  <a:txBody>
-                    <a:bodyPr wrap="square"/>
-                    <a:lstStyle/>
-                    <a:p>
-                      <a:r>
-                        <a:rPr sz="1350" b="1">
-                          <a:solidFill>
-                            <a:srgbClr val="1A1F27"/>
-                          </a:solidFill>
-                          <a:latin typeface="Segoe UI"/>
-                        </a:rPr>
-                        <a:t>pitched_new_line</a:t>
-                      </a:r>
-                    </a:p>
-                  </a:txBody>
-                  <a:tcPr anchor="ctr" marL="82296" marR="54864" marT="18288" marB="18288">
-                    <a:solidFill>
-                      <a:srgbClr val="F7F9F8"/>
-                    </a:solidFill>
-                  </a:tcPr>
-                </a:tc>
-                <a:tc>
-                  <a:txBody>
-                    <a:bodyPr wrap="square"/>
-                    <a:lstStyle/>
-                    <a:p>
-                      <a:r>
-                        <a:rPr sz="1350" b="0">
-                          <a:solidFill>
-                            <a:srgbClr val="535C6A"/>
-                          </a:solidFill>
-                          <a:latin typeface="Segoe UI"/>
-                        </a:rPr>
-                        <a:t>false</a:t>
-                      </a:r>
-                    </a:p>
-                  </a:txBody>
-                  <a:tcPr anchor="ctr" marL="82296" marR="54864" marT="18288" marB="18288">
-                    <a:solidFill>
-                      <a:srgbClr val="F7F9F8"/>
-                    </a:solidFill>
-                  </a:tcPr>
-                </a:tc>
-              </a:tr>
-              <a:tr h="502920">
-                <a:tc>
-                  <a:txBody>
-                    <a:bodyPr wrap="square"/>
-                    <a:lstStyle/>
-                    <a:p>
-                      <a:r>
-                        <a:rPr sz="1350" b="1">
-                          <a:solidFill>
-                            <a:srgbClr val="1A1F27"/>
-                          </a:solidFill>
-                          <a:latin typeface="Segoe UI"/>
-                        </a:rPr>
-                        <a:t>escalation</a:t>
-                      </a:r>
-                    </a:p>
-                  </a:txBody>
-                  <a:tcPr anchor="ctr" marL="82296" marR="54864" marT="18288" marB="18288">
-                    <a:solidFill>
-                      <a:srgbClr val="FFFFFF"/>
-                    </a:solidFill>
-                  </a:tcPr>
-                </a:tc>
-                <a:tc>
-                  <a:txBody>
-                    <a:bodyPr wrap="square"/>
-                    <a:lstStyle/>
-                    <a:p>
-                      <a:r>
-                        <a:rPr sz="1350" b="0">
-                          <a:solidFill>
-                            <a:srgbClr val="535C6A"/>
-                          </a:solidFill>
-                          <a:latin typeface="Segoe UI"/>
-                        </a:rPr>
-                        <a:t>none</a:t>
-                      </a:r>
-                    </a:p>
-                  </a:txBody>
-                  <a:tcPr anchor="ctr" marL="82296" marR="54864" marT="18288" marB="18288">
-                    <a:solidFill>
-                      <a:srgbClr val="FFFFFF"/>
-                    </a:solidFill>
-                  </a:tcPr>
-                </a:tc>
-              </a:tr>
-              <a:tr h="502920">
-                <a:tc>
-                  <a:txBody>
-                    <a:bodyPr wrap="square"/>
-                    <a:lstStyle/>
-                    <a:p>
-                      <a:r>
-                        <a:rPr sz="1350" b="1">
-                          <a:solidFill>
-                            <a:srgbClr val="1A1F27"/>
-                          </a:solidFill>
-                          <a:latin typeface="Segoe UI"/>
-                        </a:rPr>
-                        <a:t>customer_experience</a:t>
-                      </a:r>
-                    </a:p>
-                  </a:txBody>
-                  <a:tcPr anchor="ctr" marL="82296" marR="54864" marT="18288" marB="18288">
-                    <a:solidFill>
-                      <a:srgbClr val="F7F9F8"/>
-                    </a:solidFill>
-                  </a:tcPr>
-                </a:tc>
-                <a:tc>
-                  <a:txBody>
-                    <a:bodyPr wrap="square"/>
-                    <a:lstStyle/>
-                    <a:p>
-                      <a:r>
-                        <a:rPr sz="1350" b="0">
-                          <a:solidFill>
-                            <a:srgbClr val="535C6A"/>
-                          </a:solidFill>
-                          <a:latin typeface="Segoe UI"/>
-                        </a:rPr>
-                        <a:t>Medium</a:t>
-                      </a:r>
-                    </a:p>
-                  </a:txBody>
-                  <a:tcPr anchor="ctr" marL="82296" marR="54864" marT="18288" marB="18288">
-                    <a:solidFill>
-                      <a:srgbClr val="F7F9F8"/>
-                    </a:solidFill>
-                  </a:tcPr>
-                </a:tc>
-              </a:tr>
-              <a:tr h="502920">
-                <a:tc>
-                  <a:txBody>
-                    <a:bodyPr wrap="square"/>
-                    <a:lstStyle/>
-                    <a:p>
-                      <a:r>
-                        <a:rPr sz="1350" b="1">
-                          <a:solidFill>
-                            <a:srgbClr val="1A1F27"/>
-                          </a:solidFill>
-                          <a:latin typeface="Segoe UI"/>
-                        </a:rPr>
-                        <a:t>Evidence</a:t>
-                      </a:r>
-                    </a:p>
-                  </a:txBody>
-                  <a:tcPr anchor="ctr" marL="82296" marR="54864" marT="18288" marB="18288">
-                    <a:solidFill>
-                      <a:srgbClr val="FFFFFF"/>
-                    </a:solidFill>
-                  </a:tcPr>
-                </a:tc>
-                <a:tc>
-                  <a:txBody>
-                    <a:bodyPr wrap="square"/>
-                    <a:lstStyle/>
-                    <a:p>
-                      <a:r>
-                        <a:rPr sz="1350" b="0">
-                          <a:solidFill>
-                            <a:srgbClr val="535C6A"/>
-                          </a:solidFill>
-                          <a:latin typeface="Segoe UI"/>
-                        </a:rPr>
-                        <a:t>lines 12–14 of the call</a:t>
-                      </a:r>
-                    </a:p>
-                  </a:txBody>
-                  <a:tcPr anchor="ctr" marL="82296" marR="54864" marT="18288" marB="18288">
-                    <a:solidFill>
-                      <a:srgbClr val="FFFFFF"/>
-                    </a:solidFill>
-                  </a:tcPr>
-                </a:tc>
-              </a:tr>
-              <a:tr h="502920">
-                <a:tc>
-                  <a:txBody>
-                    <a:bodyPr wrap="square"/>
-                    <a:lstStyle/>
-                    <a:p>
-                      <a:r>
-                        <a:rPr sz="1350" b="1">
-                          <a:solidFill>
-                            <a:srgbClr val="1A1F27"/>
-                          </a:solidFill>
-                          <a:latin typeface="Segoe UI"/>
-                        </a:rPr>
-                        <a:t>Certified by</a:t>
-                      </a:r>
-                    </a:p>
-                  </a:txBody>
-                  <a:tcPr anchor="ctr" marL="82296" marR="54864" marT="18288" marB="18288">
-                    <a:solidFill>
-                      <a:srgbClr val="F7F9F8"/>
-                    </a:solidFill>
-                  </a:tcPr>
-                </a:tc>
-                <a:tc>
-                  <a:txBody>
-                    <a:bodyPr wrap="square"/>
-                    <a:lstStyle/>
-                    <a:p>
-                      <a:r>
-                        <a:rPr sz="1350" b="0">
-                          <a:solidFill>
-                            <a:srgbClr val="535C6A"/>
-                          </a:solidFill>
-                          <a:latin typeface="Segoe UI"/>
-                        </a:rPr>
-                        <a:t>2 coaches · 8 Sep</a:t>
-                      </a:r>
-                    </a:p>
-                  </a:txBody>
-                  <a:tcPr anchor="ctr" marL="82296" marR="54864" marT="18288" marB="18288">
-                    <a:solidFill>
-                      <a:srgbClr val="F7F9F8"/>
-                    </a:solidFill>
-                  </a:tcPr>
-                </a:tc>
-              </a:tr>
-            </a:tbl>
-          </a:graphicData>
-        </a:graphic>
-      </p:graphicFrame>
-      <p:sp>
-        <p:nvSpPr>
-          <p:cNvPr id="5" name="Rectangle 4"/>
-          <p:cNvSpPr/>
-          <p:nvPr/>
-        </p:nvSpPr>
-        <p:spPr>
-          <a:xfrm>
-            <a:off x="685800" y="5760720"/>
-            <a:ext cx="10881360" cy="822960"/>
-          </a:xfrm>
-          <a:prstGeom prst="rect">
-            <a:avLst/>
-          </a:prstGeom>
-          <a:solidFill>
-            <a:srgbClr val="F2F5F4"/>
-          </a:solidFill>
-          <a:ln>
-            <a:noFill/>
-          </a:ln>
-        </p:spPr>
-        <p:style>
-          <a:lnRef idx="1">
-            <a:schemeClr val="accent1"/>
-          </a:lnRef>
-          <a:fillRef idx="3">
-            <a:schemeClr val="accent1"/>
-          </a:fillRef>
-          <a:effectRef idx="2">
-            <a:schemeClr val="accent1"/>
-          </a:effectRef>
-          <a:fontRef idx="minor">
-            <a:schemeClr val="lt1"/>
-          </a:fontRef>
-        </p:style>
-        <p:txBody>
-          <a:bodyPr rtlCol="0" anchor="ctr" wrap="square" lIns="228600" rIns="228600"/>
-          <a:lstStyle/>
-          <a:p>
-            <a:pPr algn="ctr">
-              <a:spcAft>
-                <a:spcPts val="0"/>
-              </a:spcAft>
-            </a:pPr>
-            <a:r>
-              <a:rPr sz="1600" b="1">
-                <a:solidFill>
-                  <a:srgbClr val="0E7C74"/>
-                </a:solidFill>
-                <a:latin typeface="Segoe UI"/>
-              </a:rPr>
-              <a:t>A transcript becomes “golden” only when 2 or more coaches agree on its answers — not because we picked it. Disagreement means the definition needs fixing first.</a:t>
+              <a:t>3 programs  (Telesales · WCC · PSO)      47 KPIs      ~500 golden calls proposed      9 Sep 2026</a:t>
             </a:r>
           </a:p>
         </p:txBody>
@@ -4324,6 +3319,7 @@
           <a:ln>
             <a:noFill/>
           </a:ln>
+          <a:effectLst/>
         </p:spPr>
         <p:style>
           <a:lnRef idx="1">
@@ -4355,8 +3351,8 @@
         </p:nvSpPr>
         <p:spPr>
           <a:xfrm>
-            <a:off x="640080" y="384048"/>
-            <a:ext cx="11155680" cy="1280160"/>
+            <a:off x="640080" y="365760"/>
+            <a:ext cx="11247120" cy="1234440"/>
           </a:xfrm>
           <a:prstGeom prst="rect">
             <a:avLst/>
@@ -4371,17 +3367,17 @@
           <a:p>
             <a:pPr>
               <a:spcAft>
-                <a:spcPts val="500"/>
-              </a:spcAft>
-            </a:pPr>
-            <a:r>
-              <a:rPr sz="1250" b="1">
+                <a:spcPts val="400"/>
+              </a:spcAft>
+            </a:pPr>
+            <a:r>
+              <a:rPr sz="1200" b="1">
                 <a:solidFill>
                   <a:srgbClr val="0E7C74"/>
                 </a:solidFill>
                 <a:latin typeface="Segoe UI"/>
               </a:rPr>
-              <a:t>THE APIX METRIC SET</a:t>
+              <a:t>WHAT APIX DOES</a:t>
             </a:r>
           </a:p>
           <a:p>
@@ -4391,616 +3387,27 @@
               </a:spcAft>
             </a:pPr>
             <a:r>
-              <a:rPr sz="2700" b="1">
+              <a:rPr sz="2500" b="1">
                 <a:solidFill>
                   <a:srgbClr val="1A1F27"/>
                 </a:solidFill>
                 <a:latin typeface="Segoe UI"/>
               </a:rPr>
-              <a:t>What APIX measures, by the numbers</a:t>
-            </a:r>
-          </a:p>
-        </p:txBody>
-      </p:sp>
-      <p:graphicFrame>
-        <p:nvGraphicFramePr>
-          <p:cNvPr id="4" name="Table 3"/>
-          <p:cNvGraphicFramePr>
-            <a:graphicFrameLocks noGrp="1"/>
-          </p:cNvGraphicFramePr>
-          <p:nvPr/>
-        </p:nvGraphicFramePr>
-        <p:xfrm>
-          <a:off x="640080" y="1783080"/>
-          <a:ext cx="11521440" cy="2514600"/>
-        </p:xfrm>
-        <a:graphic>
-          <a:graphicData uri="http://schemas.openxmlformats.org/drawingml/2006/table">
-            <a:tbl>
-              <a:tblPr firstRow="1">
-                <a:tableStyleId>{5C22544A-7EE6-4342-B048-85BDC9FD1C3A}</a:tableStyleId>
-              </a:tblPr>
-              <a:tblGrid>
-                <a:gridCol w="2011680"/>
-                <a:gridCol w="4754880"/>
-                <a:gridCol w="1280160"/>
-                <a:gridCol w="1737360"/>
-                <a:gridCol w="1737360"/>
-              </a:tblGrid>
-              <a:tr h="502920">
-                <a:tc>
-                  <a:txBody>
-                    <a:bodyPr wrap="square"/>
-                    <a:lstStyle/>
-                    <a:p>
-                      <a:r>
-                        <a:rPr sz="1200" b="1">
-                          <a:solidFill>
-                            <a:srgbClr val="FFFFFF"/>
-                          </a:solidFill>
-                          <a:latin typeface="Segoe UI"/>
-                        </a:rPr>
-                        <a:t>Program</a:t>
-                      </a:r>
-                    </a:p>
-                  </a:txBody>
-                  <a:tcPr anchor="ctr" marL="82296" marR="54864" marT="18288" marB="18288">
-                    <a:solidFill>
-                      <a:srgbClr val="0E7C74"/>
-                    </a:solidFill>
-                  </a:tcPr>
-                </a:tc>
-                <a:tc>
-                  <a:txBody>
-                    <a:bodyPr wrap="square"/>
-                    <a:lstStyle/>
-                    <a:p>
-                      <a:r>
-                        <a:rPr sz="1200" b="1">
-                          <a:solidFill>
-                            <a:srgbClr val="FFFFFF"/>
-                          </a:solidFill>
-                          <a:latin typeface="Segoe UI"/>
-                        </a:rPr>
-                        <a:t>Lens</a:t>
-                      </a:r>
-                    </a:p>
-                  </a:txBody>
-                  <a:tcPr anchor="ctr" marL="82296" marR="54864" marT="18288" marB="18288">
-                    <a:solidFill>
-                      <a:srgbClr val="0E7C74"/>
-                    </a:solidFill>
-                  </a:tcPr>
-                </a:tc>
-                <a:tc>
-                  <a:txBody>
-                    <a:bodyPr wrap="square"/>
-                    <a:lstStyle/>
-                    <a:p>
-                      <a:r>
-                        <a:rPr sz="1200" b="1">
-                          <a:solidFill>
-                            <a:srgbClr val="FFFFFF"/>
-                          </a:solidFill>
-                          <a:latin typeface="Segoe UI"/>
-                        </a:rPr>
-                        <a:t>KPIs</a:t>
-                      </a:r>
-                    </a:p>
-                  </a:txBody>
-                  <a:tcPr anchor="ctr" marL="82296" marR="54864" marT="18288" marB="18288">
-                    <a:solidFill>
-                      <a:srgbClr val="0E7C74"/>
-                    </a:solidFill>
-                  </a:tcPr>
-                </a:tc>
-                <a:tc>
-                  <a:txBody>
-                    <a:bodyPr wrap="square"/>
-                    <a:lstStyle/>
-                    <a:p>
-                      <a:r>
-                        <a:rPr sz="1200" b="1">
-                          <a:solidFill>
-                            <a:srgbClr val="FFFFFF"/>
-                          </a:solidFill>
-                          <a:latin typeface="Segoe UI"/>
-                        </a:rPr>
-                        <a:t>Behaviours</a:t>
-                      </a:r>
-                    </a:p>
-                  </a:txBody>
-                  <a:tcPr anchor="ctr" marL="82296" marR="54864" marT="18288" marB="18288">
-                    <a:solidFill>
-                      <a:srgbClr val="0E7C74"/>
-                    </a:solidFill>
-                  </a:tcPr>
-                </a:tc>
-                <a:tc>
-                  <a:txBody>
-                    <a:bodyPr wrap="square"/>
-                    <a:lstStyle/>
-                    <a:p>
-                      <a:r>
-                        <a:rPr sz="1200" b="1">
-                          <a:solidFill>
-                            <a:srgbClr val="FFFFFF"/>
-                          </a:solidFill>
-                          <a:latin typeface="Segoe UI"/>
-                        </a:rPr>
-                        <a:t>Soft skills</a:t>
-                      </a:r>
-                    </a:p>
-                  </a:txBody>
-                  <a:tcPr anchor="ctr" marL="82296" marR="54864" marT="18288" marB="18288">
-                    <a:solidFill>
-                      <a:srgbClr val="0E7C74"/>
-                    </a:solidFill>
-                  </a:tcPr>
-                </a:tc>
-              </a:tr>
-              <a:tr h="502920">
-                <a:tc>
-                  <a:txBody>
-                    <a:bodyPr wrap="square"/>
-                    <a:lstStyle/>
-                    <a:p>
-                      <a:r>
-                        <a:rPr sz="1300" b="1">
-                          <a:solidFill>
-                            <a:srgbClr val="1A1F27"/>
-                          </a:solidFill>
-                          <a:latin typeface="Segoe UI"/>
-                        </a:rPr>
-                        <a:t>Telesales</a:t>
-                      </a:r>
-                    </a:p>
-                  </a:txBody>
-                  <a:tcPr anchor="ctr" marL="82296" marR="54864" marT="18288" marB="18288">
-                    <a:solidFill>
-                      <a:srgbClr val="FFFFFF"/>
-                    </a:solidFill>
-                  </a:tcPr>
-                </a:tc>
-                <a:tc>
-                  <a:txBody>
-                    <a:bodyPr wrap="square"/>
-                    <a:lstStyle/>
-                    <a:p>
-                      <a:r>
-                        <a:rPr sz="1300" b="0">
-                          <a:solidFill>
-                            <a:srgbClr val="535C6A"/>
-                          </a:solidFill>
-                          <a:latin typeface="Segoe UI"/>
-                        </a:rPr>
-                        <a:t>Sales</a:t>
-                      </a:r>
-                    </a:p>
-                  </a:txBody>
-                  <a:tcPr anchor="ctr" marL="82296" marR="54864" marT="18288" marB="18288">
-                    <a:solidFill>
-                      <a:srgbClr val="FFFFFF"/>
-                    </a:solidFill>
-                  </a:tcPr>
-                </a:tc>
-                <a:tc>
-                  <a:txBody>
-                    <a:bodyPr wrap="square"/>
-                    <a:lstStyle/>
-                    <a:p>
-                      <a:r>
-                        <a:rPr sz="1300" b="0">
-                          <a:solidFill>
-                            <a:srgbClr val="535C6A"/>
-                          </a:solidFill>
-                          <a:latin typeface="Segoe UI"/>
-                        </a:rPr>
-                        <a:t>12</a:t>
-                      </a:r>
-                    </a:p>
-                  </a:txBody>
-                  <a:tcPr anchor="ctr" marL="82296" marR="54864" marT="18288" marB="18288">
-                    <a:solidFill>
-                      <a:srgbClr val="FFFFFF"/>
-                    </a:solidFill>
-                  </a:tcPr>
-                </a:tc>
-                <a:tc>
-                  <a:txBody>
-                    <a:bodyPr wrap="square"/>
-                    <a:lstStyle/>
-                    <a:p>
-                      <a:r>
-                        <a:rPr sz="1300" b="0">
-                          <a:solidFill>
-                            <a:srgbClr val="535C6A"/>
-                          </a:solidFill>
-                          <a:latin typeface="Segoe UI"/>
-                        </a:rPr>
-                        <a:t>10</a:t>
-                      </a:r>
-                    </a:p>
-                  </a:txBody>
-                  <a:tcPr anchor="ctr" marL="82296" marR="54864" marT="18288" marB="18288">
-                    <a:solidFill>
-                      <a:srgbClr val="FFFFFF"/>
-                    </a:solidFill>
-                  </a:tcPr>
-                </a:tc>
-                <a:tc>
-                  <a:txBody>
-                    <a:bodyPr wrap="square"/>
-                    <a:lstStyle/>
-                    <a:p>
-                      <a:r>
-                        <a:rPr sz="1300" b="0">
-                          <a:solidFill>
-                            <a:srgbClr val="535C6A"/>
-                          </a:solidFill>
-                          <a:latin typeface="Segoe UI"/>
-                        </a:rPr>
-                        <a:t>6</a:t>
-                      </a:r>
-                    </a:p>
-                  </a:txBody>
-                  <a:tcPr anchor="ctr" marL="82296" marR="54864" marT="18288" marB="18288">
-                    <a:solidFill>
-                      <a:srgbClr val="FFFFFF"/>
-                    </a:solidFill>
-                  </a:tcPr>
-                </a:tc>
-              </a:tr>
-              <a:tr h="502920">
-                <a:tc>
-                  <a:txBody>
-                    <a:bodyPr wrap="square"/>
-                    <a:lstStyle/>
-                    <a:p>
-                      <a:r>
-                        <a:rPr sz="1300" b="1">
-                          <a:solidFill>
-                            <a:srgbClr val="1A1F27"/>
-                          </a:solidFill>
-                          <a:latin typeface="Segoe UI"/>
-                        </a:rPr>
-                        <a:t>WCC</a:t>
-                      </a:r>
-                    </a:p>
-                  </a:txBody>
-                  <a:tcPr anchor="ctr" marL="82296" marR="54864" marT="18288" marB="18288">
-                    <a:solidFill>
-                      <a:srgbClr val="F7F9F8"/>
-                    </a:solidFill>
-                  </a:tcPr>
-                </a:tc>
-                <a:tc>
-                  <a:txBody>
-                    <a:bodyPr wrap="square"/>
-                    <a:lstStyle/>
-                    <a:p>
-                      <a:r>
-                        <a:rPr sz="1300" b="0">
-                          <a:solidFill>
-                            <a:srgbClr val="535C6A"/>
-                          </a:solidFill>
-                          <a:latin typeface="Segoe UI"/>
-                        </a:rPr>
-                        <a:t>Care &amp; retention (LEARN/PROVIDE/CLOSE)</a:t>
-                      </a:r>
-                    </a:p>
-                  </a:txBody>
-                  <a:tcPr anchor="ctr" marL="82296" marR="54864" marT="18288" marB="18288">
-                    <a:solidFill>
-                      <a:srgbClr val="F7F9F8"/>
-                    </a:solidFill>
-                  </a:tcPr>
-                </a:tc>
-                <a:tc>
-                  <a:txBody>
-                    <a:bodyPr wrap="square"/>
-                    <a:lstStyle/>
-                    <a:p>
-                      <a:r>
-                        <a:rPr sz="1300" b="0">
-                          <a:solidFill>
-                            <a:srgbClr val="535C6A"/>
-                          </a:solidFill>
-                          <a:latin typeface="Segoe UI"/>
-                        </a:rPr>
-                        <a:t>11</a:t>
-                      </a:r>
-                    </a:p>
-                  </a:txBody>
-                  <a:tcPr anchor="ctr" marL="82296" marR="54864" marT="18288" marB="18288">
-                    <a:solidFill>
-                      <a:srgbClr val="F7F9F8"/>
-                    </a:solidFill>
-                  </a:tcPr>
-                </a:tc>
-                <a:tc>
-                  <a:txBody>
-                    <a:bodyPr wrap="square"/>
-                    <a:lstStyle/>
-                    <a:p>
-                      <a:r>
-                        <a:rPr sz="1300" b="0">
-                          <a:solidFill>
-                            <a:srgbClr val="535C6A"/>
-                          </a:solidFill>
-                          <a:latin typeface="Segoe UI"/>
-                        </a:rPr>
-                        <a:t>15</a:t>
-                      </a:r>
-                    </a:p>
-                  </a:txBody>
-                  <a:tcPr anchor="ctr" marL="82296" marR="54864" marT="18288" marB="18288">
-                    <a:solidFill>
-                      <a:srgbClr val="F7F9F8"/>
-                    </a:solidFill>
-                  </a:tcPr>
-                </a:tc>
-                <a:tc>
-                  <a:txBody>
-                    <a:bodyPr wrap="square"/>
-                    <a:lstStyle/>
-                    <a:p>
-                      <a:r>
-                        <a:rPr sz="1300" b="0">
-                          <a:solidFill>
-                            <a:srgbClr val="535C6A"/>
-                          </a:solidFill>
-                          <a:latin typeface="Segoe UI"/>
-                        </a:rPr>
-                        <a:t>6</a:t>
-                      </a:r>
-                    </a:p>
-                  </a:txBody>
-                  <a:tcPr anchor="ctr" marL="82296" marR="54864" marT="18288" marB="18288">
-                    <a:solidFill>
-                      <a:srgbClr val="F7F9F8"/>
-                    </a:solidFill>
-                  </a:tcPr>
-                </a:tc>
-              </a:tr>
-              <a:tr h="502920">
-                <a:tc>
-                  <a:txBody>
-                    <a:bodyPr wrap="square"/>
-                    <a:lstStyle/>
-                    <a:p>
-                      <a:r>
-                        <a:rPr sz="1300" b="1">
-                          <a:solidFill>
-                            <a:srgbClr val="1A1F27"/>
-                          </a:solidFill>
-                          <a:latin typeface="Segoe UI"/>
-                        </a:rPr>
-                        <a:t>PSO</a:t>
-                      </a:r>
-                    </a:p>
-                  </a:txBody>
-                  <a:tcPr anchor="ctr" marL="82296" marR="54864" marT="18288" marB="18288">
-                    <a:solidFill>
-                      <a:srgbClr val="FFFFFF"/>
-                    </a:solidFill>
-                  </a:tcPr>
-                </a:tc>
-                <a:tc>
-                  <a:txBody>
-                    <a:bodyPr wrap="square"/>
-                    <a:lstStyle/>
-                    <a:p>
-                      <a:r>
-                        <a:rPr sz="1300" b="0">
-                          <a:solidFill>
-                            <a:srgbClr val="535C6A"/>
-                          </a:solidFill>
-                          <a:latin typeface="Segoe UI"/>
-                        </a:rPr>
-                        <a:t>Care — VZ Mobile</a:t>
-                      </a:r>
-                    </a:p>
-                  </a:txBody>
-                  <a:tcPr anchor="ctr" marL="82296" marR="54864" marT="18288" marB="18288">
-                    <a:solidFill>
-                      <a:srgbClr val="FFFFFF"/>
-                    </a:solidFill>
-                  </a:tcPr>
-                </a:tc>
-                <a:tc>
-                  <a:txBody>
-                    <a:bodyPr wrap="square"/>
-                    <a:lstStyle/>
-                    <a:p>
-                      <a:r>
-                        <a:rPr sz="1300" b="0">
-                          <a:solidFill>
-                            <a:srgbClr val="535C6A"/>
-                          </a:solidFill>
-                          <a:latin typeface="Segoe UI"/>
-                        </a:rPr>
-                        <a:t>24</a:t>
-                      </a:r>
-                    </a:p>
-                  </a:txBody>
-                  <a:tcPr anchor="ctr" marL="82296" marR="54864" marT="18288" marB="18288">
-                    <a:solidFill>
-                      <a:srgbClr val="FFFFFF"/>
-                    </a:solidFill>
-                  </a:tcPr>
-                </a:tc>
-                <a:tc>
-                  <a:txBody>
-                    <a:bodyPr wrap="square"/>
-                    <a:lstStyle/>
-                    <a:p>
-                      <a:r>
-                        <a:rPr sz="1300" b="0">
-                          <a:solidFill>
-                            <a:srgbClr val="535C6A"/>
-                          </a:solidFill>
-                          <a:latin typeface="Segoe UI"/>
-                        </a:rPr>
-                        <a:t>13</a:t>
-                      </a:r>
-                    </a:p>
-                  </a:txBody>
-                  <a:tcPr anchor="ctr" marL="82296" marR="54864" marT="18288" marB="18288">
-                    <a:solidFill>
-                      <a:srgbClr val="FFFFFF"/>
-                    </a:solidFill>
-                  </a:tcPr>
-                </a:tc>
-                <a:tc>
-                  <a:txBody>
-                    <a:bodyPr wrap="square"/>
-                    <a:lstStyle/>
-                    <a:p>
-                      <a:r>
-                        <a:rPr sz="1300" b="0">
-                          <a:solidFill>
-                            <a:srgbClr val="535C6A"/>
-                          </a:solidFill>
-                          <a:latin typeface="Segoe UI"/>
-                        </a:rPr>
-                        <a:t>6</a:t>
-                      </a:r>
-                    </a:p>
-                  </a:txBody>
-                  <a:tcPr anchor="ctr" marL="82296" marR="54864" marT="18288" marB="18288">
-                    <a:solidFill>
-                      <a:srgbClr val="FFFFFF"/>
-                    </a:solidFill>
-                  </a:tcPr>
-                </a:tc>
-              </a:tr>
-              <a:tr h="502920">
-                <a:tc>
-                  <a:txBody>
-                    <a:bodyPr wrap="square"/>
-                    <a:lstStyle/>
-                    <a:p>
-                      <a:r>
-                        <a:rPr sz="1300" b="1">
-                          <a:solidFill>
-                            <a:srgbClr val="1A1F27"/>
-                          </a:solidFill>
-                          <a:latin typeface="Segoe UI"/>
-                        </a:rPr>
-                        <a:t>Total</a:t>
-                      </a:r>
-                    </a:p>
-                  </a:txBody>
-                  <a:tcPr anchor="ctr" marL="82296" marR="54864" marT="18288" marB="18288">
-                    <a:solidFill>
-                      <a:srgbClr val="F7F9F8"/>
-                    </a:solidFill>
-                  </a:tcPr>
-                </a:tc>
-                <a:tc>
-                  <a:txBody>
-                    <a:bodyPr wrap="square"/>
-                    <a:lstStyle/>
-                    <a:p>
-                      <a:r>
-                        <a:rPr sz="1300" b="0">
-                          <a:solidFill>
-                            <a:srgbClr val="535C6A"/>
-                          </a:solidFill>
-                          <a:latin typeface="Segoe UI"/>
-                        </a:rPr>
-                        <a:t>3 lines of business</a:t>
-                      </a:r>
-                    </a:p>
-                  </a:txBody>
-                  <a:tcPr anchor="ctr" marL="82296" marR="54864" marT="18288" marB="18288">
-                    <a:solidFill>
-                      <a:srgbClr val="F7F9F8"/>
-                    </a:solidFill>
-                  </a:tcPr>
-                </a:tc>
-                <a:tc>
-                  <a:txBody>
-                    <a:bodyPr wrap="square"/>
-                    <a:lstStyle/>
-                    <a:p>
-                      <a:r>
-                        <a:rPr sz="1300" b="0">
-                          <a:solidFill>
-                            <a:srgbClr val="535C6A"/>
-                          </a:solidFill>
-                          <a:latin typeface="Segoe UI"/>
-                        </a:rPr>
-                        <a:t>47</a:t>
-                      </a:r>
-                    </a:p>
-                  </a:txBody>
-                  <a:tcPr anchor="ctr" marL="82296" marR="54864" marT="18288" marB="18288">
-                    <a:solidFill>
-                      <a:srgbClr val="F7F9F8"/>
-                    </a:solidFill>
-                  </a:tcPr>
-                </a:tc>
-                <a:tc>
-                  <a:txBody>
-                    <a:bodyPr wrap="square"/>
-                    <a:lstStyle/>
-                    <a:p>
-                      <a:r>
-                        <a:rPr sz="1300" b="0">
-                          <a:solidFill>
-                            <a:srgbClr val="535C6A"/>
-                          </a:solidFill>
-                          <a:latin typeface="Segoe UI"/>
-                        </a:rPr>
-                        <a:t>38</a:t>
-                      </a:r>
-                    </a:p>
-                  </a:txBody>
-                  <a:tcPr anchor="ctr" marL="82296" marR="54864" marT="18288" marB="18288">
-                    <a:solidFill>
-                      <a:srgbClr val="F7F9F8"/>
-                    </a:solidFill>
-                  </a:tcPr>
-                </a:tc>
-                <a:tc>
-                  <a:txBody>
-                    <a:bodyPr wrap="square"/>
-                    <a:lstStyle/>
-                    <a:p>
-                      <a:r>
-                        <a:rPr sz="1300" b="0">
-                          <a:solidFill>
-                            <a:srgbClr val="535C6A"/>
-                          </a:solidFill>
-                          <a:latin typeface="Segoe UI"/>
-                        </a:rPr>
-                        <a:t>6 shared</a:t>
-                      </a:r>
-                    </a:p>
-                  </a:txBody>
-                  <a:tcPr anchor="ctr" marL="82296" marR="54864" marT="18288" marB="18288">
-                    <a:solidFill>
-                      <a:srgbClr val="F7F9F8"/>
-                    </a:solidFill>
-                  </a:tcPr>
-                </a:tc>
-              </a:tr>
-            </a:tbl>
-          </a:graphicData>
-        </a:graphic>
-      </p:graphicFrame>
-      <p:sp>
-        <p:nvSpPr>
-          <p:cNvPr id="5" name="TextBox 4"/>
+              <a:t>Every week: raw calls → a coaching scorecard</a:t>
+            </a:r>
+          </a:p>
+        </p:txBody>
+      </p:sp>
+      <p:sp>
+        <p:nvSpPr>
+          <p:cNvPr id="4" name="TextBox 3"/>
           <p:cNvSpPr txBox="1"/>
           <p:nvPr/>
         </p:nvSpPr>
         <p:spPr>
           <a:xfrm>
-            <a:off x="658368" y="4846320"/>
-            <a:ext cx="10881360" cy="1280160"/>
+            <a:off x="685800" y="1920240"/>
+            <a:ext cx="5394960" cy="4023360"/>
           </a:xfrm>
           <a:prstGeom prst="rect">
             <a:avLst/>
@@ -5015,56 +3422,341 @@
           <a:p>
             <a:pPr>
               <a:spcAft>
-                <a:spcPts val="600"/>
-              </a:spcAft>
-            </a:pPr>
-            <a:r>
-              <a:rPr sz="1400" b="0">
-                <a:solidFill>
-                  <a:srgbClr val="535C6A"/>
+                <a:spcPts val="1500"/>
+              </a:spcAft>
+            </a:pPr>
+            <a:r>
+              <a:rPr sz="1500" b="0">
+                <a:solidFill>
+                  <a:srgbClr val="1A1F27"/>
                 </a:solidFill>
                 <a:latin typeface="Segoe UI"/>
               </a:rPr>
-              <a:t>KPIs = counts or rates from per-call judgments.  Behaviours &amp; soft skills = 0–1 averages.</a:t>
-            </a:r>
-          </a:p>
-        </p:txBody>
-      </p:sp>
-      <p:sp>
-        <p:nvSpPr>
-          <p:cNvPr id="6" name="TextBox 5"/>
-          <p:cNvSpPr txBox="1"/>
+              <a:t>1 · Denoise  — clean messy speech-to-text</a:t>
+            </a:r>
+          </a:p>
+          <a:p>
+            <a:pPr>
+              <a:spcAft>
+                <a:spcPts val="1500"/>
+              </a:spcAft>
+            </a:pPr>
+            <a:r>
+              <a:rPr sz="1500" b="0">
+                <a:solidFill>
+                  <a:srgbClr val="1A1F27"/>
+                </a:solidFill>
+                <a:latin typeface="Segoe UI"/>
+              </a:rPr>
+              <a:t>2 · Analysis — the AI scores every call, with evidence</a:t>
+            </a:r>
+          </a:p>
+          <a:p>
+            <a:pPr>
+              <a:spcAft>
+                <a:spcPts val="1500"/>
+              </a:spcAft>
+            </a:pPr>
+            <a:r>
+              <a:rPr sz="1500" b="0">
+                <a:solidFill>
+                  <a:srgbClr val="1A1F27"/>
+                </a:solidFill>
+                <a:latin typeface="Segoe UI"/>
+              </a:rPr>
+              <a:t>3 · Summary  — roll a week of calls into per-agent scores</a:t>
+            </a:r>
+          </a:p>
+          <a:p>
+            <a:pPr>
+              <a:spcAft>
+                <a:spcPts val="1500"/>
+              </a:spcAft>
+            </a:pPr>
+            <a:r>
+              <a:rPr sz="1500" b="0">
+                <a:solidFill>
+                  <a:srgbClr val="1A1F27"/>
+                </a:solidFill>
+                <a:latin typeface="Segoe UI"/>
+              </a:rPr>
+              <a:t>4 · Individual metrics — add Verizon operational data + tips</a:t>
+            </a:r>
+          </a:p>
+          <a:p>
+            <a:pPr>
+              <a:spcAft>
+                <a:spcPts val="1500"/>
+              </a:spcAft>
+            </a:pPr>
+            <a:r>
+              <a:rPr sz="1500" b="0">
+                <a:solidFill>
+                  <a:srgbClr val="1A1F27"/>
+                </a:solidFill>
+                <a:latin typeface="Segoe UI"/>
+              </a:rPr>
+              <a:t>5 · KPI aggregator — build the weekly dashboard file</a:t>
+            </a:r>
+          </a:p>
+        </p:txBody>
+      </p:sp>
+      <p:sp>
+        <p:nvSpPr>
+          <p:cNvPr id="5" name="Rounded Rectangle 4"/>
+          <p:cNvSpPr/>
           <p:nvPr/>
         </p:nvSpPr>
         <p:spPr>
           <a:xfrm>
-            <a:off x="658368" y="5257800"/>
-            <a:ext cx="10881360" cy="914400"/>
+            <a:off x="6400800" y="1874519"/>
+            <a:ext cx="5212080" cy="3566160"/>
           </a:xfrm>
-          <a:prstGeom prst="rect">
+          <a:prstGeom prst="roundRect">
             <a:avLst/>
           </a:prstGeom>
-          <a:noFill/>
+          <a:solidFill>
+            <a:srgbClr val="E1F0EE"/>
+          </a:solidFill>
+          <a:ln w="9525">
+            <a:solidFill>
+              <a:srgbClr val="D9DFE5"/>
+            </a:solidFill>
+          </a:ln>
+          <a:effectLst/>
         </p:spPr>
-        <p:txBody>
-          <a:bodyPr wrap="square">
-            <a:spAutoFit/>
-          </a:bodyPr>
+        <p:style>
+          <a:lnRef idx="1">
+            <a:schemeClr val="accent1"/>
+          </a:lnRef>
+          <a:fillRef idx="3">
+            <a:schemeClr val="accent1"/>
+          </a:fillRef>
+          <a:effectRef idx="2">
+            <a:schemeClr val="accent1"/>
+          </a:effectRef>
+          <a:fontRef idx="minor">
+            <a:schemeClr val="lt1"/>
+          </a:fontRef>
+        </p:style>
+        <p:txBody>
+          <a:bodyPr rtlCol="0" anchor="ctr" wrap="square" lIns="146304" rIns="128016" tIns="118872" bIns="91440"/>
           <a:lstStyle/>
           <a:p>
+            <a:pPr algn="ctr">
+              <a:spcAft>
+                <a:spcPts val="700"/>
+              </a:spcAft>
+            </a:pPr>
+            <a:r>
+              <a:rPr sz="1250" b="1">
+                <a:solidFill>
+                  <a:srgbClr val="0E7C74"/>
+                </a:solidFill>
+                <a:latin typeface="Segoe UI"/>
+              </a:rPr>
+              <a:t>EXAMPLE · one call flowing through</a:t>
+            </a:r>
+          </a:p>
+          <a:p>
             <a:pPr>
               <a:spcAft>
+                <a:spcPts val="300"/>
+              </a:spcAft>
+            </a:pPr>
+            <a:r>
+              <a:rPr sz="1150" b="0">
+                <a:solidFill>
+                  <a:srgbClr val="535C6A"/>
+                </a:solidFill>
+                <a:latin typeface="Segoe UI"/>
+              </a:rPr>
+              <a:t>Customer asks about their bill.</a:t>
+            </a:r>
+          </a:p>
+          <a:p>
+            <a:pPr>
+              <a:spcAft>
+                <a:spcPts val="300"/>
+              </a:spcAft>
+            </a:pPr>
+            <a:r>
+              <a:rPr sz="1150" b="0">
+                <a:solidFill>
+                  <a:srgbClr val="535C6A"/>
+                </a:solidFill>
+                <a:latin typeface="Segoe UI"/>
+              </a:rPr>
+              <a:t>Agent fixes it, then offers a second</a:t>
+            </a:r>
+          </a:p>
+          <a:p>
+            <a:pPr>
+              <a:spcAft>
+                <a:spcPts val="300"/>
+              </a:spcAft>
+            </a:pPr>
+            <a:r>
+              <a:rPr sz="1150" b="0">
+                <a:solidFill>
+                  <a:srgbClr val="535C6A"/>
+                </a:solidFill>
+                <a:latin typeface="Segoe UI"/>
+              </a:rPr>
+              <a:t>line. Customer declines.</a:t>
+            </a:r>
+          </a:p>
+          <a:p>
+            <a:pPr>
+              <a:spcAft>
+                <a:spcPts val="300"/>
+              </a:spcAft>
+            </a:pPr>
+            <a:r>
+              <a:rPr sz="1150" b="0">
+                <a:solidFill>
+                  <a:srgbClr val="1A1F27"/>
+                </a:solidFill>
+                <a:latin typeface="Segoe UI"/>
+              </a:rPr>
+              <a:t/>
+            </a:r>
+          </a:p>
+          <a:p>
+            <a:pPr>
+              <a:spcAft>
+                <a:spcPts val="300"/>
+              </a:spcAft>
+            </a:pPr>
+            <a:r>
+              <a:rPr sz="1150" b="0">
+                <a:solidFill>
+                  <a:srgbClr val="0A5B55"/>
+                </a:solidFill>
+                <a:latin typeface="Segoe UI"/>
+              </a:rPr>
+              <a:t>The AI (step 2) records:</a:t>
+            </a:r>
+          </a:p>
+          <a:p>
+            <a:pPr>
+              <a:spcAft>
+                <a:spcPts val="300"/>
+              </a:spcAft>
+            </a:pPr>
+            <a:r>
+              <a:rPr sz="1150" b="0">
+                <a:solidFill>
+                  <a:srgbClr val="0A5B55"/>
+                </a:solidFill>
+                <a:latin typeface="Consolas"/>
+              </a:rPr>
+              <a:t>new_line_opportunity_exists = true</a:t>
+            </a:r>
+          </a:p>
+          <a:p>
+            <a:pPr>
+              <a:spcAft>
+                <a:spcPts val="300"/>
+              </a:spcAft>
+            </a:pPr>
+            <a:r>
+              <a:rPr sz="1150" b="0">
+                <a:solidFill>
+                  <a:srgbClr val="0A5B55"/>
+                </a:solidFill>
+                <a:latin typeface="Consolas"/>
+              </a:rPr>
+              <a:t>pitched_new_line            = true</a:t>
+            </a:r>
+          </a:p>
+          <a:p>
+            <a:pPr>
+              <a:spcAft>
+                <a:spcPts val="300"/>
+              </a:spcAft>
+            </a:pPr>
+            <a:r>
+              <a:rPr sz="1150" b="0">
+                <a:solidFill>
+                  <a:srgbClr val="0A5B55"/>
+                </a:solidFill>
+                <a:latin typeface="Consolas"/>
+              </a:rPr>
+              <a:t>issue_resolved              = true</a:t>
+            </a:r>
+          </a:p>
+          <a:p>
+            <a:pPr>
+              <a:spcAft>
+                <a:spcPts val="300"/>
+              </a:spcAft>
+            </a:pPr>
+            <a:r>
+              <a:rPr sz="1150" b="0">
+                <a:solidFill>
+                  <a:srgbClr val="0A5B55"/>
+                </a:solidFill>
+                <a:latin typeface="Consolas"/>
+              </a:rPr>
+              <a:t>customer_experience         = Good</a:t>
+            </a:r>
+          </a:p>
+        </p:txBody>
+      </p:sp>
+      <p:sp>
+        <p:nvSpPr>
+          <p:cNvPr id="6" name="Rounded Rectangle 5"/>
+          <p:cNvSpPr/>
+          <p:nvPr/>
+        </p:nvSpPr>
+        <p:spPr>
+          <a:xfrm>
+            <a:off x="640080" y="5806440"/>
+            <a:ext cx="10927080" cy="749808"/>
+          </a:xfrm>
+          <a:prstGeom prst="roundRect">
+            <a:avLst/>
+          </a:prstGeom>
+          <a:solidFill>
+            <a:srgbClr val="E1F0EE"/>
+          </a:solidFill>
+          <a:ln>
+            <a:noFill/>
+          </a:ln>
+          <a:effectLst/>
+        </p:spPr>
+        <p:style>
+          <a:lnRef idx="1">
+            <a:schemeClr val="accent1"/>
+          </a:lnRef>
+          <a:fillRef idx="3">
+            <a:schemeClr val="accent1"/>
+          </a:fillRef>
+          <a:effectRef idx="2">
+            <a:schemeClr val="accent1"/>
+          </a:effectRef>
+          <a:fontRef idx="minor">
+            <a:schemeClr val="lt1"/>
+          </a:fontRef>
+        </p:style>
+        <p:txBody>
+          <a:bodyPr rtlCol="0" anchor="ctr" wrap="square" lIns="201168" rIns="201168"/>
+          <a:lstStyle/>
+          <a:p>
+            <a:pPr algn="ctr">
+              <a:spcAft>
                 <a:spcPts val="0"/>
               </a:spcAft>
             </a:pPr>
             <a:r>
-              <a:rPr sz="1400" b="0">
-                <a:solidFill>
-                  <a:srgbClr val="A96E12"/>
+              <a:rPr sz="1400" b="1">
+                <a:solidFill>
+                  <a:srgbClr val="0A5B55"/>
                 </a:solidFill>
                 <a:latin typeface="Segoe UI"/>
               </a:rPr>
-              <a:t>Separately: operational metrics (AHT · VXS · FCR · resolve/disconnect) come from Verizon data, not the model.</a:t>
+              <a:t>The AI only judges each call. Everything after is counting — and every judgment links to the exact call moment behind it.</a:t>
             </a:r>
           </a:p>
         </p:txBody>
@@ -5115,6 +3807,7 @@
           <a:ln>
             <a:noFill/>
           </a:ln>
+          <a:effectLst/>
         </p:spPr>
         <p:style>
           <a:lnRef idx="1">
@@ -5146,8 +3839,8 @@
         </p:nvSpPr>
         <p:spPr>
           <a:xfrm>
-            <a:off x="640080" y="384048"/>
-            <a:ext cx="11155680" cy="1280160"/>
+            <a:off x="640080" y="365760"/>
+            <a:ext cx="11247120" cy="1234440"/>
           </a:xfrm>
           <a:prstGeom prst="rect">
             <a:avLst/>
@@ -5162,17 +3855,17 @@
           <a:p>
             <a:pPr>
               <a:spcAft>
-                <a:spcPts val="500"/>
-              </a:spcAft>
-            </a:pPr>
-            <a:r>
-              <a:rPr sz="1250" b="1">
+                <a:spcPts val="400"/>
+              </a:spcAft>
+            </a:pPr>
+            <a:r>
+              <a:rPr sz="1200" b="1">
                 <a:solidFill>
                   <a:srgbClr val="0E7C74"/>
                 </a:solidFill>
                 <a:latin typeface="Segoe UI"/>
               </a:rPr>
-              <a:t>KPIS · TELESALES (12)</a:t>
+              <a:t>THE FOUR KINDS OF METRIC</a:t>
             </a:r>
           </a:p>
           <a:p>
@@ -5182,13 +3875,13 @@
               </a:spcAft>
             </a:pPr>
             <a:r>
-              <a:rPr sz="2700" b="1">
+              <a:rPr sz="2500" b="1">
                 <a:solidFill>
                   <a:srgbClr val="1A1F27"/>
                 </a:solidFill>
                 <a:latin typeface="Segoe UI"/>
               </a:rPr>
-              <a:t>Sales performance</a:t>
+              <a:t>What comes from the AI — and what doesn't</a:t>
             </a:r>
           </a:p>
         </p:txBody>
@@ -5202,8 +3895,8 @@
           <p:nvPr/>
         </p:nvGraphicFramePr>
         <p:xfrm>
-          <a:off x="640080" y="1783080"/>
-          <a:ext cx="10927080" cy="4279392"/>
+          <a:off x="640080" y="1874519"/>
+          <a:ext cx="10927080" cy="3291840"/>
         </p:xfrm>
         <a:graphic>
           <a:graphicData uri="http://schemas.openxmlformats.org/drawingml/2006/table">
@@ -5212,11 +3905,12 @@
                 <a:tableStyleId>{5C22544A-7EE6-4342-B048-85BDC9FD1C3A}</a:tableStyleId>
               </a:tblPr>
               <a:tblGrid>
-                <a:gridCol w="3200400"/>
-                <a:gridCol w="6446520"/>
-                <a:gridCol w="1280160"/>
+                <a:gridCol w="2743200"/>
+                <a:gridCol w="2834640"/>
+                <a:gridCol w="3063240"/>
+                <a:gridCol w="2286000"/>
               </a:tblGrid>
-              <a:tr h="329184">
+              <a:tr h="658368">
                 <a:tc>
                   <a:txBody>
                     <a:bodyPr wrap="square"/>
@@ -5229,11 +3923,11 @@
                           </a:solidFill>
                           <a:latin typeface="Segoe UI"/>
                         </a:rPr>
-                        <a:t>KPI</a:t>
+                        <a:t>Metric type</a:t>
                       </a:r>
                     </a:p>
                   </a:txBody>
-                  <a:tcPr anchor="ctr" marL="82296" marR="54864" marT="18288" marB="18288">
+                  <a:tcPr anchor="ctr" marL="91440" marR="54864" marT="18288" marB="18288">
                     <a:solidFill>
                       <a:srgbClr val="0E7C74"/>
                     </a:solidFill>
@@ -5251,11 +3945,11 @@
                           </a:solidFill>
                           <a:latin typeface="Segoe UI"/>
                         </a:rPr>
-                        <a:t>What it measures</a:t>
+                        <a:t>Example</a:t>
                       </a:r>
                     </a:p>
                   </a:txBody>
-                  <a:tcPr anchor="ctr" marL="82296" marR="54864" marT="18288" marB="18288">
+                  <a:tcPr anchor="ctr" marL="91440" marR="54864" marT="18288" marB="18288">
                     <a:solidFill>
                       <a:srgbClr val="0E7C74"/>
                     </a:solidFill>
@@ -5273,18 +3967,16 @@
                           </a:solidFill>
                           <a:latin typeface="Segoe UI"/>
                         </a:rPr>
-                        <a:t>Unit</a:t>
+                        <a:t>Where it comes from</a:t>
                       </a:r>
                     </a:p>
                   </a:txBody>
-                  <a:tcPr anchor="ctr" marL="82296" marR="54864" marT="18288" marB="18288">
+                  <a:tcPr anchor="ctr" marL="91440" marR="54864" marT="18288" marB="18288">
                     <a:solidFill>
                       <a:srgbClr val="0E7C74"/>
                     </a:solidFill>
                   </a:tcPr>
                 </a:tc>
-              </a:tr>
-              <a:tr h="329184">
                 <a:tc>
                   <a:txBody>
                     <a:bodyPr wrap="square"/>
@@ -5293,15 +3985,39 @@
                       <a:r>
                         <a:rPr sz="1100" b="1">
                           <a:solidFill>
+                            <a:srgbClr val="FFFFFF"/>
+                          </a:solidFill>
+                          <a:latin typeface="Segoe UI"/>
+                        </a:rPr>
+                        <a:t>How it's checked</a:t>
+                      </a:r>
+                    </a:p>
+                  </a:txBody>
+                  <a:tcPr anchor="ctr" marL="91440" marR="54864" marT="18288" marB="18288">
+                    <a:solidFill>
+                      <a:srgbClr val="0E7C74"/>
+                    </a:solidFill>
+                  </a:tcPr>
+                </a:tc>
+              </a:tr>
+              <a:tr h="658368">
+                <a:tc>
+                  <a:txBody>
+                    <a:bodyPr wrap="square"/>
+                    <a:lstStyle/>
+                    <a:p>
+                      <a:r>
+                        <a:rPr sz="1250" b="1">
+                          <a:solidFill>
                             <a:srgbClr val="1A1F27"/>
                           </a:solidFill>
                           <a:latin typeface="Segoe UI"/>
                         </a:rPr>
-                        <a:t>new_line_pitches</a:t>
+                        <a:t>KPIs (counts &amp; rates)</a:t>
                       </a:r>
                     </a:p>
                   </a:txBody>
-                  <a:tcPr anchor="ctr" marL="82296" marR="54864" marT="18288" marB="18288">
+                  <a:tcPr anchor="ctr" marL="91440" marR="54864" marT="18288" marB="18288">
                     <a:solidFill>
                       <a:srgbClr val="FFFFFF"/>
                     </a:solidFill>
@@ -5313,17 +4029,17 @@
                     <a:lstStyle/>
                     <a:p>
                       <a:r>
-                        <a:rPr sz="1100" b="0">
+                        <a:rPr sz="1250" b="0">
                           <a:solidFill>
                             <a:srgbClr val="535C6A"/>
                           </a:solidFill>
                           <a:latin typeface="Segoe UI"/>
                         </a:rPr>
-                        <a:t>New-line pitches where an opportunity existed</a:t>
+                        <a:t>new_line_pitches = 12</a:t>
                       </a:r>
                     </a:p>
                   </a:txBody>
-                  <a:tcPr anchor="ctr" marL="82296" marR="54864" marT="18288" marB="18288">
+                  <a:tcPr anchor="ctr" marL="91440" marR="54864" marT="18288" marB="18288">
                     <a:solidFill>
                       <a:srgbClr val="FFFFFF"/>
                     </a:solidFill>
@@ -5335,41 +4051,63 @@
                     <a:lstStyle/>
                     <a:p>
                       <a:r>
-                        <a:rPr sz="1100" b="0">
+                        <a:rPr sz="1250" b="0">
                           <a:solidFill>
                             <a:srgbClr val="535C6A"/>
                           </a:solidFill>
                           <a:latin typeface="Segoe UI"/>
                         </a:rPr>
-                        <a:t>count</a:t>
+                        <a:t>AI judgments, added up</a:t>
                       </a:r>
                     </a:p>
                   </a:txBody>
-                  <a:tcPr anchor="ctr" marL="82296" marR="54864" marT="18288" marB="18288">
+                  <a:tcPr anchor="ctr" marL="91440" marR="54864" marT="18288" marB="18288">
+                    <a:solidFill>
+                      <a:srgbClr val="FFFFFF"/>
+                    </a:solidFill>
+                  </a:tcPr>
+                </a:tc>
+                <a:tc>
+                  <a:txBody>
+                    <a:bodyPr wrap="square"/>
+                    <a:lstStyle/>
+                    <a:p>
+                      <a:r>
+                        <a:rPr sz="1250" b="0">
+                          <a:solidFill>
+                            <a:srgbClr val="535C6A"/>
+                          </a:solidFill>
+                          <a:latin typeface="Segoe UI"/>
+                        </a:rPr>
+                        <a:t>Automated tests</a:t>
+                      </a:r>
+                    </a:p>
+                  </a:txBody>
+                  <a:tcPr anchor="ctr" marL="91440" marR="54864" marT="18288" marB="18288">
                     <a:solidFill>
                       <a:srgbClr val="FFFFFF"/>
                     </a:solidFill>
                   </a:tcPr>
                 </a:tc>
               </a:tr>
-              <a:tr h="329184">
+              <a:tr h="658368">
                 <a:tc>
                   <a:txBody>
                     <a:bodyPr wrap="square"/>
                     <a:lstStyle/>
                     <a:p>
                       <a:r>
-                        <a:rPr sz="1100" b="1">
+                        <a:rPr sz="1250" b="1">
                           <a:solidFill>
                             <a:srgbClr val="1A1F27"/>
                           </a:solidFill>
                           <a:latin typeface="Segoe UI"/>
                         </a:rPr>
-                        <a:t>new_line_opportunity_exists</a:t>
+                        <a:t>Behaviour / soft skills</a:t>
                       </a:r>
                     </a:p>
                   </a:txBody>
-                  <a:tcPr anchor="ctr" marL="82296" marR="54864" marT="18288" marB="18288">
+                  <a:tcPr anchor="ctr" marL="91440" marR="54864" marT="18288" marB="18288">
                     <a:solidFill>
                       <a:srgbClr val="F7F9F8"/>
                     </a:solidFill>
@@ -5381,17 +4119,17 @@
                     <a:lstStyle/>
                     <a:p>
                       <a:r>
-                        <a:rPr sz="1100" b="0">
+                        <a:rPr sz="1250" b="0">
                           <a:solidFill>
                             <a:srgbClr val="535C6A"/>
                           </a:solidFill>
                           <a:latin typeface="Segoe UI"/>
                         </a:rPr>
-                        <a:t>New-line opportunities present</a:t>
+                        <a:t>empathy = 0.80 (0–1)</a:t>
                       </a:r>
                     </a:p>
                   </a:txBody>
-                  <a:tcPr anchor="ctr" marL="82296" marR="54864" marT="18288" marB="18288">
+                  <a:tcPr anchor="ctr" marL="91440" marR="54864" marT="18288" marB="18288">
                     <a:solidFill>
                       <a:srgbClr val="F7F9F8"/>
                     </a:solidFill>
@@ -5403,41 +4141,63 @@
                     <a:lstStyle/>
                     <a:p>
                       <a:r>
-                        <a:rPr sz="1100" b="0">
+                        <a:rPr sz="1250" b="0">
                           <a:solidFill>
                             <a:srgbClr val="535C6A"/>
                           </a:solidFill>
                           <a:latin typeface="Segoe UI"/>
                         </a:rPr>
-                        <a:t>count</a:t>
+                        <a:t>AI judgments, averaged</a:t>
                       </a:r>
                     </a:p>
                   </a:txBody>
-                  <a:tcPr anchor="ctr" marL="82296" marR="54864" marT="18288" marB="18288">
+                  <a:tcPr anchor="ctr" marL="91440" marR="54864" marT="18288" marB="18288">
+                    <a:solidFill>
+                      <a:srgbClr val="F7F9F8"/>
+                    </a:solidFill>
+                  </a:tcPr>
+                </a:tc>
+                <a:tc>
+                  <a:txBody>
+                    <a:bodyPr wrap="square"/>
+                    <a:lstStyle/>
+                    <a:p>
+                      <a:r>
+                        <a:rPr sz="1250" b="0">
+                          <a:solidFill>
+                            <a:srgbClr val="535C6A"/>
+                          </a:solidFill>
+                          <a:latin typeface="Segoe UI"/>
+                        </a:rPr>
+                        <a:t>Golden data</a:t>
+                      </a:r>
+                    </a:p>
+                  </a:txBody>
+                  <a:tcPr anchor="ctr" marL="91440" marR="54864" marT="18288" marB="18288">
                     <a:solidFill>
                       <a:srgbClr val="F7F9F8"/>
                     </a:solidFill>
                   </a:tcPr>
                 </a:tc>
               </a:tr>
-              <a:tr h="329184">
+              <a:tr h="658368">
                 <a:tc>
                   <a:txBody>
                     <a:bodyPr wrap="square"/>
                     <a:lstStyle/>
                     <a:p>
                       <a:r>
-                        <a:rPr sz="1100" b="1">
+                        <a:rPr sz="1250" b="1">
                           <a:solidFill>
                             <a:srgbClr val="1A1F27"/>
                           </a:solidFill>
                           <a:latin typeface="Segoe UI"/>
                         </a:rPr>
-                        <a:t>new_line_opportunity_missed</a:t>
+                        <a:t>Operational metrics</a:t>
                       </a:r>
                     </a:p>
                   </a:txBody>
-                  <a:tcPr anchor="ctr" marL="82296" marR="54864" marT="18288" marB="18288">
+                  <a:tcPr anchor="ctr" marL="91440" marR="54864" marT="18288" marB="18288">
                     <a:solidFill>
                       <a:srgbClr val="FFFFFF"/>
                     </a:solidFill>
@@ -5449,17 +4209,17 @@
                     <a:lstStyle/>
                     <a:p>
                       <a:r>
-                        <a:rPr sz="1100" b="0">
+                        <a:rPr sz="1250" b="0">
                           <a:solidFill>
                             <a:srgbClr val="535C6A"/>
                           </a:solidFill>
                           <a:latin typeface="Segoe UI"/>
                         </a:rPr>
-                        <a:t>Share of new-line opportunities not pitched</a:t>
+                        <a:t>AHT, VXS, resolve %</a:t>
                       </a:r>
                     </a:p>
                   </a:txBody>
-                  <a:tcPr anchor="ctr" marL="82296" marR="54864" marT="18288" marB="18288">
+                  <a:tcPr anchor="ctr" marL="91440" marR="54864" marT="18288" marB="18288">
                     <a:solidFill>
                       <a:srgbClr val="FFFFFF"/>
                     </a:solidFill>
@@ -5471,41 +4231,63 @@
                     <a:lstStyle/>
                     <a:p>
                       <a:r>
-                        <a:rPr sz="1100" b="0">
+                        <a:rPr sz="1250" b="0">
                           <a:solidFill>
                             <a:srgbClr val="535C6A"/>
                           </a:solidFill>
                           <a:latin typeface="Segoe UI"/>
                         </a:rPr>
-                        <a:t>rate</a:t>
+                        <a:t>Verizon data warehouse</a:t>
                       </a:r>
                     </a:p>
                   </a:txBody>
-                  <a:tcPr anchor="ctr" marL="82296" marR="54864" marT="18288" marB="18288">
+                  <a:tcPr anchor="ctr" marL="91440" marR="54864" marT="18288" marB="18288">
+                    <a:solidFill>
+                      <a:srgbClr val="FFFFFF"/>
+                    </a:solidFill>
+                  </a:tcPr>
+                </a:tc>
+                <a:tc>
+                  <a:txBody>
+                    <a:bodyPr wrap="square"/>
+                    <a:lstStyle/>
+                    <a:p>
+                      <a:r>
+                        <a:rPr sz="1250" b="0">
+                          <a:solidFill>
+                            <a:srgbClr val="535C6A"/>
+                          </a:solidFill>
+                          <a:latin typeface="Segoe UI"/>
+                        </a:rPr>
+                        <a:t>Validate the query</a:t>
+                      </a:r>
+                    </a:p>
+                  </a:txBody>
+                  <a:tcPr anchor="ctr" marL="91440" marR="54864" marT="18288" marB="18288">
                     <a:solidFill>
                       <a:srgbClr val="FFFFFF"/>
                     </a:solidFill>
                   </a:tcPr>
                 </a:tc>
               </a:tr>
-              <a:tr h="329184">
+              <a:tr h="658368">
                 <a:tc>
                   <a:txBody>
                     <a:bodyPr wrap="square"/>
                     <a:lstStyle/>
                     <a:p>
                       <a:r>
-                        <a:rPr sz="1100" b="1">
+                        <a:rPr sz="1250" b="1">
                           <a:solidFill>
                             <a:srgbClr val="1A1F27"/>
                           </a:solidFill>
                           <a:latin typeface="Segoe UI"/>
                         </a:rPr>
-                        <a:t>upgrade_attempts</a:t>
+                        <a:t>Roll-up scores</a:t>
                       </a:r>
                     </a:p>
                   </a:txBody>
-                  <a:tcPr anchor="ctr" marL="82296" marR="54864" marT="18288" marB="18288">
+                  <a:tcPr anchor="ctr" marL="91440" marR="54864" marT="18288" marB="18288">
                     <a:solidFill>
                       <a:srgbClr val="F7F9F8"/>
                     </a:solidFill>
@@ -5517,17 +4299,17 @@
                     <a:lstStyle/>
                     <a:p>
                       <a:r>
-                        <a:rPr sz="1100" b="0">
+                        <a:rPr sz="1250" b="0">
                           <a:solidFill>
                             <a:srgbClr val="535C6A"/>
                           </a:solidFill>
                           <a:latin typeface="Segoe UI"/>
                         </a:rPr>
-                        <a:t>Upgrade pitches where an opportunity existed</a:t>
+                        <a:t>performance status</a:t>
                       </a:r>
                     </a:p>
                   </a:txBody>
-                  <a:tcPr anchor="ctr" marL="82296" marR="54864" marT="18288" marB="18288">
+                  <a:tcPr anchor="ctr" marL="91440" marR="54864" marT="18288" marB="18288">
                     <a:solidFill>
                       <a:srgbClr val="F7F9F8"/>
                     </a:solidFill>
@@ -5539,109 +4321,17 @@
                     <a:lstStyle/>
                     <a:p>
                       <a:r>
-                        <a:rPr sz="1100" b="0">
+                        <a:rPr sz="1250" b="0">
                           <a:solidFill>
                             <a:srgbClr val="535C6A"/>
                           </a:solidFill>
                           <a:latin typeface="Segoe UI"/>
                         </a:rPr>
-                        <a:t>count</a:t>
+                        <a:t>Calculated from the above</a:t>
                       </a:r>
                     </a:p>
                   </a:txBody>
-                  <a:tcPr anchor="ctr" marL="82296" marR="54864" marT="18288" marB="18288">
-                    <a:solidFill>
-                      <a:srgbClr val="F7F9F8"/>
-                    </a:solidFill>
-                  </a:tcPr>
-                </a:tc>
-              </a:tr>
-              <a:tr h="329184">
-                <a:tc>
-                  <a:txBody>
-                    <a:bodyPr wrap="square"/>
-                    <a:lstStyle/>
-                    <a:p>
-                      <a:r>
-                        <a:rPr sz="1100" b="1">
-                          <a:solidFill>
-                            <a:srgbClr val="1A1F27"/>
-                          </a:solidFill>
-                          <a:latin typeface="Segoe UI"/>
-                        </a:rPr>
-                        <a:t>upgrade_opportunity_exists</a:t>
-                      </a:r>
-                    </a:p>
-                  </a:txBody>
-                  <a:tcPr anchor="ctr" marL="82296" marR="54864" marT="18288" marB="18288">
-                    <a:solidFill>
-                      <a:srgbClr val="FFFFFF"/>
-                    </a:solidFill>
-                  </a:tcPr>
-                </a:tc>
-                <a:tc>
-                  <a:txBody>
-                    <a:bodyPr wrap="square"/>
-                    <a:lstStyle/>
-                    <a:p>
-                      <a:r>
-                        <a:rPr sz="1100" b="0">
-                          <a:solidFill>
-                            <a:srgbClr val="535C6A"/>
-                          </a:solidFill>
-                          <a:latin typeface="Segoe UI"/>
-                        </a:rPr>
-                        <a:t>Upgrade opportunities present</a:t>
-                      </a:r>
-                    </a:p>
-                  </a:txBody>
-                  <a:tcPr anchor="ctr" marL="82296" marR="54864" marT="18288" marB="18288">
-                    <a:solidFill>
-                      <a:srgbClr val="FFFFFF"/>
-                    </a:solidFill>
-                  </a:tcPr>
-                </a:tc>
-                <a:tc>
-                  <a:txBody>
-                    <a:bodyPr wrap="square"/>
-                    <a:lstStyle/>
-                    <a:p>
-                      <a:r>
-                        <a:rPr sz="1100" b="0">
-                          <a:solidFill>
-                            <a:srgbClr val="535C6A"/>
-                          </a:solidFill>
-                          <a:latin typeface="Segoe UI"/>
-                        </a:rPr>
-                        <a:t>count</a:t>
-                      </a:r>
-                    </a:p>
-                  </a:txBody>
-                  <a:tcPr anchor="ctr" marL="82296" marR="54864" marT="18288" marB="18288">
-                    <a:solidFill>
-                      <a:srgbClr val="FFFFFF"/>
-                    </a:solidFill>
-                  </a:tcPr>
-                </a:tc>
-              </a:tr>
-              <a:tr h="329184">
-                <a:tc>
-                  <a:txBody>
-                    <a:bodyPr wrap="square"/>
-                    <a:lstStyle/>
-                    <a:p>
-                      <a:r>
-                        <a:rPr sz="1100" b="1">
-                          <a:solidFill>
-                            <a:srgbClr val="1A1F27"/>
-                          </a:solidFill>
-                          <a:latin typeface="Segoe UI"/>
-                        </a:rPr>
-                        <a:t>upgrade_opportunity_missed</a:t>
-                      </a:r>
-                    </a:p>
-                  </a:txBody>
-                  <a:tcPr anchor="ctr" marL="82296" marR="54864" marT="18288" marB="18288">
+                  <a:tcPr anchor="ctr" marL="91440" marR="54864" marT="18288" marB="18288">
                     <a:solidFill>
                       <a:srgbClr val="F7F9F8"/>
                     </a:solidFill>
@@ -5653,447 +4343,17 @@
                     <a:lstStyle/>
                     <a:p>
                       <a:r>
-                        <a:rPr sz="1100" b="0">
+                        <a:rPr sz="1250" b="0">
                           <a:solidFill>
                             <a:srgbClr val="535C6A"/>
                           </a:solidFill>
                           <a:latin typeface="Segoe UI"/>
                         </a:rPr>
-                        <a:t>Share of upgrade opportunities not pitched</a:t>
+                        <a:t>Automated tests</a:t>
                       </a:r>
                     </a:p>
                   </a:txBody>
-                  <a:tcPr anchor="ctr" marL="82296" marR="54864" marT="18288" marB="18288">
-                    <a:solidFill>
-                      <a:srgbClr val="F7F9F8"/>
-                    </a:solidFill>
-                  </a:tcPr>
-                </a:tc>
-                <a:tc>
-                  <a:txBody>
-                    <a:bodyPr wrap="square"/>
-                    <a:lstStyle/>
-                    <a:p>
-                      <a:r>
-                        <a:rPr sz="1100" b="0">
-                          <a:solidFill>
-                            <a:srgbClr val="535C6A"/>
-                          </a:solidFill>
-                          <a:latin typeface="Segoe UI"/>
-                        </a:rPr>
-                        <a:t>rate</a:t>
-                      </a:r>
-                    </a:p>
-                  </a:txBody>
-                  <a:tcPr anchor="ctr" marL="82296" marR="54864" marT="18288" marB="18288">
-                    <a:solidFill>
-                      <a:srgbClr val="F7F9F8"/>
-                    </a:solidFill>
-                  </a:tcPr>
-                </a:tc>
-              </a:tr>
-              <a:tr h="329184">
-                <a:tc>
-                  <a:txBody>
-                    <a:bodyPr wrap="square"/>
-                    <a:lstStyle/>
-                    <a:p>
-                      <a:r>
-                        <a:rPr sz="1100" b="1">
-                          <a:solidFill>
-                            <a:srgbClr val="1A1F27"/>
-                          </a:solidFill>
-                          <a:latin typeface="Segoe UI"/>
-                        </a:rPr>
-                        <a:t>save_attempts</a:t>
-                      </a:r>
-                    </a:p>
-                  </a:txBody>
-                  <a:tcPr anchor="ctr" marL="82296" marR="54864" marT="18288" marB="18288">
-                    <a:solidFill>
-                      <a:srgbClr val="FFFFFF"/>
-                    </a:solidFill>
-                  </a:tcPr>
-                </a:tc>
-                <a:tc>
-                  <a:txBody>
-                    <a:bodyPr wrap="square"/>
-                    <a:lstStyle/>
-                    <a:p>
-                      <a:r>
-                        <a:rPr sz="1100" b="0">
-                          <a:solidFill>
-                            <a:srgbClr val="535C6A"/>
-                          </a:solidFill>
-                          <a:latin typeface="Segoe UI"/>
-                        </a:rPr>
-                        <a:t>Retention save attempts</a:t>
-                      </a:r>
-                    </a:p>
-                  </a:txBody>
-                  <a:tcPr anchor="ctr" marL="82296" marR="54864" marT="18288" marB="18288">
-                    <a:solidFill>
-                      <a:srgbClr val="FFFFFF"/>
-                    </a:solidFill>
-                  </a:tcPr>
-                </a:tc>
-                <a:tc>
-                  <a:txBody>
-                    <a:bodyPr wrap="square"/>
-                    <a:lstStyle/>
-                    <a:p>
-                      <a:r>
-                        <a:rPr sz="1100" b="0">
-                          <a:solidFill>
-                            <a:srgbClr val="535C6A"/>
-                          </a:solidFill>
-                          <a:latin typeface="Segoe UI"/>
-                        </a:rPr>
-                        <a:t>count</a:t>
-                      </a:r>
-                    </a:p>
-                  </a:txBody>
-                  <a:tcPr anchor="ctr" marL="82296" marR="54864" marT="18288" marB="18288">
-                    <a:solidFill>
-                      <a:srgbClr val="FFFFFF"/>
-                    </a:solidFill>
-                  </a:tcPr>
-                </a:tc>
-              </a:tr>
-              <a:tr h="329184">
-                <a:tc>
-                  <a:txBody>
-                    <a:bodyPr wrap="square"/>
-                    <a:lstStyle/>
-                    <a:p>
-                      <a:r>
-                        <a:rPr sz="1100" b="1">
-                          <a:solidFill>
-                            <a:srgbClr val="1A1F27"/>
-                          </a:solidFill>
-                          <a:latin typeface="Segoe UI"/>
-                        </a:rPr>
-                        <a:t>escalations</a:t>
-                      </a:r>
-                    </a:p>
-                  </a:txBody>
-                  <a:tcPr anchor="ctr" marL="82296" marR="54864" marT="18288" marB="18288">
-                    <a:solidFill>
-                      <a:srgbClr val="F7F9F8"/>
-                    </a:solidFill>
-                  </a:tcPr>
-                </a:tc>
-                <a:tc>
-                  <a:txBody>
-                    <a:bodyPr wrap="square"/>
-                    <a:lstStyle/>
-                    <a:p>
-                      <a:r>
-                        <a:rPr sz="1100" b="0">
-                          <a:solidFill>
-                            <a:srgbClr val="535C6A"/>
-                          </a:solidFill>
-                          <a:latin typeface="Segoe UI"/>
-                        </a:rPr>
-                        <a:t>Calls with an escalation</a:t>
-                      </a:r>
-                    </a:p>
-                  </a:txBody>
-                  <a:tcPr anchor="ctr" marL="82296" marR="54864" marT="18288" marB="18288">
-                    <a:solidFill>
-                      <a:srgbClr val="F7F9F8"/>
-                    </a:solidFill>
-                  </a:tcPr>
-                </a:tc>
-                <a:tc>
-                  <a:txBody>
-                    <a:bodyPr wrap="square"/>
-                    <a:lstStyle/>
-                    <a:p>
-                      <a:r>
-                        <a:rPr sz="1100" b="0">
-                          <a:solidFill>
-                            <a:srgbClr val="535C6A"/>
-                          </a:solidFill>
-                          <a:latin typeface="Segoe UI"/>
-                        </a:rPr>
-                        <a:t>count</a:t>
-                      </a:r>
-                    </a:p>
-                  </a:txBody>
-                  <a:tcPr anchor="ctr" marL="82296" marR="54864" marT="18288" marB="18288">
-                    <a:solidFill>
-                      <a:srgbClr val="F7F9F8"/>
-                    </a:solidFill>
-                  </a:tcPr>
-                </a:tc>
-              </a:tr>
-              <a:tr h="329184">
-                <a:tc>
-                  <a:txBody>
-                    <a:bodyPr wrap="square"/>
-                    <a:lstStyle/>
-                    <a:p>
-                      <a:r>
-                        <a:rPr sz="1100" b="1">
-                          <a:solidFill>
-                            <a:srgbClr val="1A1F27"/>
-                          </a:solidFill>
-                          <a:latin typeface="Segoe UI"/>
-                        </a:rPr>
-                        <a:t>fwa_attempts</a:t>
-                      </a:r>
-                    </a:p>
-                  </a:txBody>
-                  <a:tcPr anchor="ctr" marL="82296" marR="54864" marT="18288" marB="18288">
-                    <a:solidFill>
-                      <a:srgbClr val="FFFFFF"/>
-                    </a:solidFill>
-                  </a:tcPr>
-                </a:tc>
-                <a:tc>
-                  <a:txBody>
-                    <a:bodyPr wrap="square"/>
-                    <a:lstStyle/>
-                    <a:p>
-                      <a:r>
-                        <a:rPr sz="1100" b="0">
-                          <a:solidFill>
-                            <a:srgbClr val="535C6A"/>
-                          </a:solidFill>
-                          <a:latin typeface="Segoe UI"/>
-                        </a:rPr>
-                        <a:t>Fixed-wireless-access pitches</a:t>
-                      </a:r>
-                    </a:p>
-                  </a:txBody>
-                  <a:tcPr anchor="ctr" marL="82296" marR="54864" marT="18288" marB="18288">
-                    <a:solidFill>
-                      <a:srgbClr val="FFFFFF"/>
-                    </a:solidFill>
-                  </a:tcPr>
-                </a:tc>
-                <a:tc>
-                  <a:txBody>
-                    <a:bodyPr wrap="square"/>
-                    <a:lstStyle/>
-                    <a:p>
-                      <a:r>
-                        <a:rPr sz="1100" b="0">
-                          <a:solidFill>
-                            <a:srgbClr val="535C6A"/>
-                          </a:solidFill>
-                          <a:latin typeface="Segoe UI"/>
-                        </a:rPr>
-                        <a:t>count</a:t>
-                      </a:r>
-                    </a:p>
-                  </a:txBody>
-                  <a:tcPr anchor="ctr" marL="82296" marR="54864" marT="18288" marB="18288">
-                    <a:solidFill>
-                      <a:srgbClr val="FFFFFF"/>
-                    </a:solidFill>
-                  </a:tcPr>
-                </a:tc>
-              </a:tr>
-              <a:tr h="329184">
-                <a:tc>
-                  <a:txBody>
-                    <a:bodyPr wrap="square"/>
-                    <a:lstStyle/>
-                    <a:p>
-                      <a:r>
-                        <a:rPr sz="1100" b="1">
-                          <a:solidFill>
-                            <a:srgbClr val="1A1F27"/>
-                          </a:solidFill>
-                          <a:latin typeface="Segoe UI"/>
-                        </a:rPr>
-                        <a:t>mobile_protection_attempts</a:t>
-                      </a:r>
-                    </a:p>
-                  </a:txBody>
-                  <a:tcPr anchor="ctr" marL="82296" marR="54864" marT="18288" marB="18288">
-                    <a:solidFill>
-                      <a:srgbClr val="F7F9F8"/>
-                    </a:solidFill>
-                  </a:tcPr>
-                </a:tc>
-                <a:tc>
-                  <a:txBody>
-                    <a:bodyPr wrap="square"/>
-                    <a:lstStyle/>
-                    <a:p>
-                      <a:r>
-                        <a:rPr sz="1100" b="0">
-                          <a:solidFill>
-                            <a:srgbClr val="535C6A"/>
-                          </a:solidFill>
-                          <a:latin typeface="Segoe UI"/>
-                        </a:rPr>
-                        <a:t>Mobile-protection pitches</a:t>
-                      </a:r>
-                    </a:p>
-                  </a:txBody>
-                  <a:tcPr anchor="ctr" marL="82296" marR="54864" marT="18288" marB="18288">
-                    <a:solidFill>
-                      <a:srgbClr val="F7F9F8"/>
-                    </a:solidFill>
-                  </a:tcPr>
-                </a:tc>
-                <a:tc>
-                  <a:txBody>
-                    <a:bodyPr wrap="square"/>
-                    <a:lstStyle/>
-                    <a:p>
-                      <a:r>
-                        <a:rPr sz="1100" b="0">
-                          <a:solidFill>
-                            <a:srgbClr val="535C6A"/>
-                          </a:solidFill>
-                          <a:latin typeface="Segoe UI"/>
-                        </a:rPr>
-                        <a:t>count</a:t>
-                      </a:r>
-                    </a:p>
-                  </a:txBody>
-                  <a:tcPr anchor="ctr" marL="82296" marR="54864" marT="18288" marB="18288">
-                    <a:solidFill>
-                      <a:srgbClr val="F7F9F8"/>
-                    </a:solidFill>
-                  </a:tcPr>
-                </a:tc>
-              </a:tr>
-              <a:tr h="329184">
-                <a:tc>
-                  <a:txBody>
-                    <a:bodyPr wrap="square"/>
-                    <a:lstStyle/>
-                    <a:p>
-                      <a:r>
-                        <a:rPr sz="1100" b="1">
-                          <a:solidFill>
-                            <a:srgbClr val="1A1F27"/>
-                          </a:solidFill>
-                          <a:latin typeface="Segoe UI"/>
-                        </a:rPr>
-                        <a:t>we_got_you_utterances</a:t>
-                      </a:r>
-                    </a:p>
-                  </a:txBody>
-                  <a:tcPr anchor="ctr" marL="82296" marR="54864" marT="18288" marB="18288">
-                    <a:solidFill>
-                      <a:srgbClr val="FFFFFF"/>
-                    </a:solidFill>
-                  </a:tcPr>
-                </a:tc>
-                <a:tc>
-                  <a:txBody>
-                    <a:bodyPr wrap="square"/>
-                    <a:lstStyle/>
-                    <a:p>
-                      <a:r>
-                        <a:rPr sz="1100" b="0">
-                          <a:solidFill>
-                            <a:srgbClr val="535C6A"/>
-                          </a:solidFill>
-                          <a:latin typeface="Segoe UI"/>
-                        </a:rPr>
-                        <a:t>Reassurance phrasing used</a:t>
-                      </a:r>
-                    </a:p>
-                  </a:txBody>
-                  <a:tcPr anchor="ctr" marL="82296" marR="54864" marT="18288" marB="18288">
-                    <a:solidFill>
-                      <a:srgbClr val="FFFFFF"/>
-                    </a:solidFill>
-                  </a:tcPr>
-                </a:tc>
-                <a:tc>
-                  <a:txBody>
-                    <a:bodyPr wrap="square"/>
-                    <a:lstStyle/>
-                    <a:p>
-                      <a:r>
-                        <a:rPr sz="1100" b="0">
-                          <a:solidFill>
-                            <a:srgbClr val="535C6A"/>
-                          </a:solidFill>
-                          <a:latin typeface="Segoe UI"/>
-                        </a:rPr>
-                        <a:t>count</a:t>
-                      </a:r>
-                    </a:p>
-                  </a:txBody>
-                  <a:tcPr anchor="ctr" marL="82296" marR="54864" marT="18288" marB="18288">
-                    <a:solidFill>
-                      <a:srgbClr val="FFFFFF"/>
-                    </a:solidFill>
-                  </a:tcPr>
-                </a:tc>
-              </a:tr>
-              <a:tr h="329184">
-                <a:tc>
-                  <a:txBody>
-                    <a:bodyPr wrap="square"/>
-                    <a:lstStyle/>
-                    <a:p>
-                      <a:r>
-                        <a:rPr sz="1100" b="1">
-                          <a:solidFill>
-                            <a:srgbClr val="1A1F27"/>
-                          </a:solidFill>
-                          <a:latin typeface="Segoe UI"/>
-                        </a:rPr>
-                        <a:t>customer_experience</a:t>
-                      </a:r>
-                    </a:p>
-                  </a:txBody>
-                  <a:tcPr anchor="ctr" marL="82296" marR="54864" marT="18288" marB="18288">
-                    <a:solidFill>
-                      <a:srgbClr val="F7F9F8"/>
-                    </a:solidFill>
-                  </a:tcPr>
-                </a:tc>
-                <a:tc>
-                  <a:txBody>
-                    <a:bodyPr wrap="square"/>
-                    <a:lstStyle/>
-                    <a:p>
-                      <a:r>
-                        <a:rPr sz="1100" b="0">
-                          <a:solidFill>
-                            <a:srgbClr val="535C6A"/>
-                          </a:solidFill>
-                          <a:latin typeface="Segoe UI"/>
-                        </a:rPr>
-                        <a:t>Rated calls not rated “Poor”</a:t>
-                      </a:r>
-                    </a:p>
-                  </a:txBody>
-                  <a:tcPr anchor="ctr" marL="82296" marR="54864" marT="18288" marB="18288">
-                    <a:solidFill>
-                      <a:srgbClr val="F7F9F8"/>
-                    </a:solidFill>
-                  </a:tcPr>
-                </a:tc>
-                <a:tc>
-                  <a:txBody>
-                    <a:bodyPr wrap="square"/>
-                    <a:lstStyle/>
-                    <a:p>
-                      <a:r>
-                        <a:rPr sz="1100" b="0">
-                          <a:solidFill>
-                            <a:srgbClr val="535C6A"/>
-                          </a:solidFill>
-                          <a:latin typeface="Segoe UI"/>
-                        </a:rPr>
-                        <a:t>rate</a:t>
-                      </a:r>
-                    </a:p>
-                  </a:txBody>
-                  <a:tcPr anchor="ctr" marL="82296" marR="54864" marT="18288" marB="18288">
+                  <a:tcPr anchor="ctr" marL="91440" marR="54864" marT="18288" marB="18288">
                     <a:solidFill>
                       <a:srgbClr val="F7F9F8"/>
                     </a:solidFill>
@@ -6104,6 +4364,63 @@
           </a:graphicData>
         </a:graphic>
       </p:graphicFrame>
+      <p:sp>
+        <p:nvSpPr>
+          <p:cNvPr id="5" name="Rounded Rectangle 4"/>
+          <p:cNvSpPr/>
+          <p:nvPr/>
+        </p:nvSpPr>
+        <p:spPr>
+          <a:xfrm>
+            <a:off x="640080" y="5806440"/>
+            <a:ext cx="10927080" cy="749808"/>
+          </a:xfrm>
+          <a:prstGeom prst="roundRect">
+            <a:avLst/>
+          </a:prstGeom>
+          <a:solidFill>
+            <a:srgbClr val="E1F0EE"/>
+          </a:solidFill>
+          <a:ln>
+            <a:noFill/>
+          </a:ln>
+          <a:effectLst/>
+        </p:spPr>
+        <p:style>
+          <a:lnRef idx="1">
+            <a:schemeClr val="accent1"/>
+          </a:lnRef>
+          <a:fillRef idx="3">
+            <a:schemeClr val="accent1"/>
+          </a:fillRef>
+          <a:effectRef idx="2">
+            <a:schemeClr val="accent1"/>
+          </a:effectRef>
+          <a:fontRef idx="minor">
+            <a:schemeClr val="lt1"/>
+          </a:fontRef>
+        </p:style>
+        <p:txBody>
+          <a:bodyPr rtlCol="0" anchor="ctr" wrap="square" lIns="201168" rIns="201168"/>
+          <a:lstStyle/>
+          <a:p>
+            <a:pPr algn="ctr">
+              <a:spcAft>
+                <a:spcPts val="0"/>
+              </a:spcAft>
+            </a:pPr>
+            <a:r>
+              <a:rPr sz="1400" b="1">
+                <a:solidFill>
+                  <a:srgbClr val="0A5B55"/>
+                </a:solidFill>
+                <a:latin typeface="Segoe UI"/>
+              </a:rPr>
+              <a:t>Only the AI's per-call judgments need “golden data”. KPIs are arithmetic; operational metrics are external. That is what makes the system testable.</a:t>
+            </a:r>
+          </a:p>
+        </p:txBody>
+      </p:sp>
     </p:spTree>
   </p:cSld>
   <p:clrMapOvr>
@@ -6150,6 +4467,7 @@
           <a:ln>
             <a:noFill/>
           </a:ln>
+          <a:effectLst/>
         </p:spPr>
         <p:style>
           <a:lnRef idx="1">
@@ -6181,8 +4499,8 @@
         </p:nvSpPr>
         <p:spPr>
           <a:xfrm>
-            <a:off x="640080" y="384048"/>
-            <a:ext cx="11155680" cy="1280160"/>
+            <a:off x="640080" y="365760"/>
+            <a:ext cx="11247120" cy="1234440"/>
           </a:xfrm>
           <a:prstGeom prst="rect">
             <a:avLst/>
@@ -6197,880 +4515,532 @@
           <a:p>
             <a:pPr>
               <a:spcAft>
-                <a:spcPts val="500"/>
+                <a:spcPts val="400"/>
+              </a:spcAft>
+            </a:pPr>
+            <a:r>
+              <a:rPr sz="1200" b="1">
+                <a:solidFill>
+                  <a:srgbClr val="0E7C74"/>
+                </a:solidFill>
+                <a:latin typeface="Segoe UI"/>
+              </a:rPr>
+              <a:t>WORKED EXAMPLE</a:t>
+            </a:r>
+          </a:p>
+          <a:p>
+            <a:pPr>
+              <a:spcAft>
+                <a:spcPts val="0"/>
+              </a:spcAft>
+            </a:pPr>
+            <a:r>
+              <a:rPr sz="2500" b="1">
+                <a:solidFill>
+                  <a:srgbClr val="1A1F27"/>
+                </a:solidFill>
+                <a:latin typeface="Segoe UI"/>
+              </a:rPr>
+              <a:t>Two calls, side by side — the same situation, handled two ways</a:t>
+            </a:r>
+          </a:p>
+        </p:txBody>
+      </p:sp>
+      <p:sp>
+        <p:nvSpPr>
+          <p:cNvPr id="4" name="Rounded Rectangle 3"/>
+          <p:cNvSpPr/>
+          <p:nvPr/>
+        </p:nvSpPr>
+        <p:spPr>
+          <a:xfrm>
+            <a:off x="640080" y="1828800"/>
+            <a:ext cx="5486400" cy="3657600"/>
+          </a:xfrm>
+          <a:prstGeom prst="roundRect">
+            <a:avLst/>
+          </a:prstGeom>
+          <a:solidFill>
+            <a:srgbClr val="E4F3EB"/>
+          </a:solidFill>
+          <a:ln w="9525">
+            <a:solidFill>
+              <a:srgbClr val="D9DFE5"/>
+            </a:solidFill>
+          </a:ln>
+          <a:effectLst/>
+        </p:spPr>
+        <p:style>
+          <a:lnRef idx="1">
+            <a:schemeClr val="accent1"/>
+          </a:lnRef>
+          <a:fillRef idx="3">
+            <a:schemeClr val="accent1"/>
+          </a:fillRef>
+          <a:effectRef idx="2">
+            <a:schemeClr val="accent1"/>
+          </a:effectRef>
+          <a:fontRef idx="minor">
+            <a:schemeClr val="lt1"/>
+          </a:fontRef>
+        </p:style>
+        <p:txBody>
+          <a:bodyPr rtlCol="0" anchor="ctr" wrap="square" lIns="146304" rIns="128016" tIns="118872" bIns="91440"/>
+          <a:lstStyle/>
+          <a:p>
+            <a:pPr algn="ctr">
+              <a:spcAft>
+                <a:spcPts val="700"/>
               </a:spcAft>
             </a:pPr>
             <a:r>
               <a:rPr sz="1250" b="1">
                 <a:solidFill>
-                  <a:srgbClr val="0E7C74"/>
+                  <a:srgbClr val="2E8B5E"/>
                 </a:solidFill>
                 <a:latin typeface="Segoe UI"/>
               </a:rPr>
-              <a:t>KPIS · WCC (11)</a:t>
+              <a:t>CALL A · opportunity taken</a:t>
             </a:r>
           </a:p>
           <a:p>
             <a:pPr>
               <a:spcAft>
+                <a:spcPts val="300"/>
+              </a:spcAft>
+            </a:pPr>
+            <a:r>
+              <a:rPr sz="1150" b="0">
+                <a:solidFill>
+                  <a:srgbClr val="535C6A"/>
+                </a:solidFill>
+                <a:latin typeface="Segoe UI"/>
+              </a:rPr>
+              <a:t>Customer asks about the bill. Agent</a:t>
+            </a:r>
+          </a:p>
+          <a:p>
+            <a:pPr>
+              <a:spcAft>
+                <a:spcPts val="300"/>
+              </a:spcAft>
+            </a:pPr>
+            <a:r>
+              <a:rPr sz="1150" b="0">
+                <a:solidFill>
+                  <a:srgbClr val="535C6A"/>
+                </a:solidFill>
+                <a:latin typeface="Segoe UI"/>
+              </a:rPr>
+              <a:t>resolves it, then offers a second line.</a:t>
+            </a:r>
+          </a:p>
+          <a:p>
+            <a:pPr>
+              <a:spcAft>
+                <a:spcPts val="300"/>
+              </a:spcAft>
+            </a:pPr>
+            <a:r>
+              <a:rPr sz="1150" b="0">
+                <a:solidFill>
+                  <a:srgbClr val="535C6A"/>
+                </a:solidFill>
+                <a:latin typeface="Segoe UI"/>
+              </a:rPr>
+              <a:t>Customer accepts.</a:t>
+            </a:r>
+          </a:p>
+          <a:p>
+            <a:pPr>
+              <a:spcAft>
+                <a:spcPts val="300"/>
+              </a:spcAft>
+            </a:pPr>
+            <a:r>
+              <a:rPr sz="1150" b="0">
+                <a:solidFill>
+                  <a:srgbClr val="1A1F27"/>
+                </a:solidFill>
+                <a:latin typeface="Segoe UI"/>
+              </a:rPr>
+              <a:t/>
+            </a:r>
+          </a:p>
+          <a:p>
+            <a:pPr>
+              <a:spcAft>
+                <a:spcPts val="300"/>
+              </a:spcAft>
+            </a:pPr>
+            <a:r>
+              <a:rPr sz="1150" b="0">
+                <a:solidFill>
+                  <a:srgbClr val="0A5B55"/>
+                </a:solidFill>
+                <a:latin typeface="Consolas"/>
+              </a:rPr>
+              <a:t>new_line_opportunity_exists = true</a:t>
+            </a:r>
+          </a:p>
+          <a:p>
+            <a:pPr>
+              <a:spcAft>
+                <a:spcPts val="300"/>
+              </a:spcAft>
+            </a:pPr>
+            <a:r>
+              <a:rPr sz="1150" b="0">
+                <a:solidFill>
+                  <a:srgbClr val="0A5B55"/>
+                </a:solidFill>
+                <a:latin typeface="Consolas"/>
+              </a:rPr>
+              <a:t>pitched_new_line            = true</a:t>
+            </a:r>
+          </a:p>
+          <a:p>
+            <a:pPr>
+              <a:spcAft>
+                <a:spcPts val="300"/>
+              </a:spcAft>
+            </a:pPr>
+            <a:r>
+              <a:rPr sz="1150" b="0">
+                <a:solidFill>
+                  <a:srgbClr val="0A5B55"/>
+                </a:solidFill>
+                <a:latin typeface="Consolas"/>
+              </a:rPr>
+              <a:t>sale_made                   = true</a:t>
+            </a:r>
+          </a:p>
+          <a:p>
+            <a:pPr>
+              <a:spcAft>
+                <a:spcPts val="300"/>
+              </a:spcAft>
+            </a:pPr>
+            <a:r>
+              <a:rPr sz="1150" b="0">
+                <a:solidFill>
+                  <a:srgbClr val="0A5B55"/>
+                </a:solidFill>
+                <a:latin typeface="Consolas"/>
+              </a:rPr>
+              <a:t>customer_experience         = Good</a:t>
+            </a:r>
+          </a:p>
+          <a:p>
+            <a:pPr>
+              <a:spcAft>
+                <a:spcPts val="300"/>
+              </a:spcAft>
+            </a:pPr>
+            <a:r>
+              <a:rPr sz="1150" b="0">
+                <a:solidFill>
+                  <a:srgbClr val="1A1F27"/>
+                </a:solidFill>
+                <a:latin typeface="Segoe UI"/>
+              </a:rPr>
+              <a:t/>
+            </a:r>
+          </a:p>
+          <a:p>
+            <a:pPr>
+              <a:spcAft>
+                <a:spcPts val="300"/>
+              </a:spcAft>
+            </a:pPr>
+            <a:r>
+              <a:rPr sz="1150" b="0">
+                <a:solidFill>
+                  <a:srgbClr val="2E8B5E"/>
+                </a:solidFill>
+                <a:latin typeface="Segoe UI"/>
+              </a:rPr>
+              <a:t>→ counts toward PITCHES + a good week</a:t>
+            </a:r>
+          </a:p>
+        </p:txBody>
+      </p:sp>
+      <p:sp>
+        <p:nvSpPr>
+          <p:cNvPr id="5" name="Rounded Rectangle 4"/>
+          <p:cNvSpPr/>
+          <p:nvPr/>
+        </p:nvSpPr>
+        <p:spPr>
+          <a:xfrm>
+            <a:off x="6355080" y="1828800"/>
+            <a:ext cx="5212080" cy="3657600"/>
+          </a:xfrm>
+          <a:prstGeom prst="roundRect">
+            <a:avLst/>
+          </a:prstGeom>
+          <a:solidFill>
+            <a:srgbClr val="F6ECD6"/>
+          </a:solidFill>
+          <a:ln w="9525">
+            <a:solidFill>
+              <a:srgbClr val="D9DFE5"/>
+            </a:solidFill>
+          </a:ln>
+          <a:effectLst/>
+        </p:spPr>
+        <p:style>
+          <a:lnRef idx="1">
+            <a:schemeClr val="accent1"/>
+          </a:lnRef>
+          <a:fillRef idx="3">
+            <a:schemeClr val="accent1"/>
+          </a:fillRef>
+          <a:effectRef idx="2">
+            <a:schemeClr val="accent1"/>
+          </a:effectRef>
+          <a:fontRef idx="minor">
+            <a:schemeClr val="lt1"/>
+          </a:fontRef>
+        </p:style>
+        <p:txBody>
+          <a:bodyPr rtlCol="0" anchor="ctr" wrap="square" lIns="146304" rIns="128016" tIns="118872" bIns="91440"/>
+          <a:lstStyle/>
+          <a:p>
+            <a:pPr algn="ctr">
+              <a:spcAft>
+                <a:spcPts val="700"/>
+              </a:spcAft>
+            </a:pPr>
+            <a:r>
+              <a:rPr sz="1250" b="1">
+                <a:solidFill>
+                  <a:srgbClr val="A96E12"/>
+                </a:solidFill>
+                <a:latin typeface="Segoe UI"/>
+              </a:rPr>
+              <a:t>CALL B · opportunity missed</a:t>
+            </a:r>
+          </a:p>
+          <a:p>
+            <a:pPr>
+              <a:spcAft>
+                <a:spcPts val="300"/>
+              </a:spcAft>
+            </a:pPr>
+            <a:r>
+              <a:rPr sz="1150" b="0">
+                <a:solidFill>
+                  <a:srgbClr val="535C6A"/>
+                </a:solidFill>
+                <a:latin typeface="Segoe UI"/>
+              </a:rPr>
+              <a:t>Same bill question. Agent resolves it</a:t>
+            </a:r>
+          </a:p>
+          <a:p>
+            <a:pPr>
+              <a:spcAft>
+                <a:spcPts val="300"/>
+              </a:spcAft>
+            </a:pPr>
+            <a:r>
+              <a:rPr sz="1150" b="0">
+                <a:solidFill>
+                  <a:srgbClr val="535C6A"/>
+                </a:solidFill>
+                <a:latin typeface="Segoe UI"/>
+              </a:rPr>
+              <a:t>but never mentions a second line —</a:t>
+            </a:r>
+          </a:p>
+          <a:p>
+            <a:pPr>
+              <a:spcAft>
+                <a:spcPts val="300"/>
+              </a:spcAft>
+            </a:pPr>
+            <a:r>
+              <a:rPr sz="1150" b="0">
+                <a:solidFill>
+                  <a:srgbClr val="535C6A"/>
+                </a:solidFill>
+                <a:latin typeface="Segoe UI"/>
+              </a:rPr>
+              <a:t>though the customer was a clear fit.</a:t>
+            </a:r>
+          </a:p>
+          <a:p>
+            <a:pPr>
+              <a:spcAft>
+                <a:spcPts val="300"/>
+              </a:spcAft>
+            </a:pPr>
+            <a:r>
+              <a:rPr sz="1150" b="0">
+                <a:solidFill>
+                  <a:srgbClr val="1A1F27"/>
+                </a:solidFill>
+                <a:latin typeface="Segoe UI"/>
+              </a:rPr>
+              <a:t/>
+            </a:r>
+          </a:p>
+          <a:p>
+            <a:pPr>
+              <a:spcAft>
+                <a:spcPts val="300"/>
+              </a:spcAft>
+            </a:pPr>
+            <a:r>
+              <a:rPr sz="1150" b="0">
+                <a:solidFill>
+                  <a:srgbClr val="0A5B55"/>
+                </a:solidFill>
+                <a:latin typeface="Consolas"/>
+              </a:rPr>
+              <a:t>new_line_opportunity_exists = true</a:t>
+            </a:r>
+          </a:p>
+          <a:p>
+            <a:pPr>
+              <a:spcAft>
+                <a:spcPts val="300"/>
+              </a:spcAft>
+            </a:pPr>
+            <a:r>
+              <a:rPr sz="1150" b="0">
+                <a:solidFill>
+                  <a:srgbClr val="0A5B55"/>
+                </a:solidFill>
+                <a:latin typeface="Consolas"/>
+              </a:rPr>
+              <a:t>pitched_new_line            = false</a:t>
+            </a:r>
+          </a:p>
+          <a:p>
+            <a:pPr>
+              <a:spcAft>
+                <a:spcPts val="300"/>
+              </a:spcAft>
+            </a:pPr>
+            <a:r>
+              <a:rPr sz="1150" b="0">
+                <a:solidFill>
+                  <a:srgbClr val="0A5B55"/>
+                </a:solidFill>
+                <a:latin typeface="Consolas"/>
+              </a:rPr>
+              <a:t>issue_resolved              = true</a:t>
+            </a:r>
+          </a:p>
+          <a:p>
+            <a:pPr>
+              <a:spcAft>
+                <a:spcPts val="300"/>
+              </a:spcAft>
+            </a:pPr>
+            <a:r>
+              <a:rPr sz="1150" b="0">
+                <a:solidFill>
+                  <a:srgbClr val="0A5B55"/>
+                </a:solidFill>
+                <a:latin typeface="Consolas"/>
+              </a:rPr>
+              <a:t>customer_experience         = Medium</a:t>
+            </a:r>
+          </a:p>
+          <a:p>
+            <a:pPr>
+              <a:spcAft>
+                <a:spcPts val="300"/>
+              </a:spcAft>
+            </a:pPr>
+            <a:r>
+              <a:rPr sz="1150" b="0">
+                <a:solidFill>
+                  <a:srgbClr val="1A1F27"/>
+                </a:solidFill>
+                <a:latin typeface="Segoe UI"/>
+              </a:rPr>
+              <a:t/>
+            </a:r>
+          </a:p>
+          <a:p>
+            <a:pPr>
+              <a:spcAft>
+                <a:spcPts val="300"/>
+              </a:spcAft>
+            </a:pPr>
+            <a:r>
+              <a:rPr sz="1150" b="0">
+                <a:solidFill>
+                  <a:srgbClr val="A96E12"/>
+                </a:solidFill>
+                <a:latin typeface="Segoe UI"/>
+              </a:rPr>
+              <a:t>→ counts toward OPPORTUNITY MISSED</a:t>
+            </a:r>
+          </a:p>
+        </p:txBody>
+      </p:sp>
+      <p:sp>
+        <p:nvSpPr>
+          <p:cNvPr id="6" name="Rounded Rectangle 5"/>
+          <p:cNvSpPr/>
+          <p:nvPr/>
+        </p:nvSpPr>
+        <p:spPr>
+          <a:xfrm>
+            <a:off x="640080" y="5806440"/>
+            <a:ext cx="10927080" cy="749808"/>
+          </a:xfrm>
+          <a:prstGeom prst="roundRect">
+            <a:avLst/>
+          </a:prstGeom>
+          <a:solidFill>
+            <a:srgbClr val="E1F0EE"/>
+          </a:solidFill>
+          <a:ln>
+            <a:noFill/>
+          </a:ln>
+          <a:effectLst/>
+        </p:spPr>
+        <p:style>
+          <a:lnRef idx="1">
+            <a:schemeClr val="accent1"/>
+          </a:lnRef>
+          <a:fillRef idx="3">
+            <a:schemeClr val="accent1"/>
+          </a:fillRef>
+          <a:effectRef idx="2">
+            <a:schemeClr val="accent1"/>
+          </a:effectRef>
+          <a:fontRef idx="minor">
+            <a:schemeClr val="lt1"/>
+          </a:fontRef>
+        </p:style>
+        <p:txBody>
+          <a:bodyPr rtlCol="0" anchor="ctr" wrap="square" lIns="201168" rIns="201168"/>
+          <a:lstStyle/>
+          <a:p>
+            <a:pPr algn="ctr">
+              <a:spcAft>
                 <a:spcPts val="0"/>
               </a:spcAft>
             </a:pPr>
             <a:r>
-              <a:rPr sz="2700" b="1">
-                <a:solidFill>
-                  <a:srgbClr val="1A1F27"/>
+              <a:rPr sz="1400" b="1">
+                <a:solidFill>
+                  <a:srgbClr val="0A5B55"/>
                 </a:solidFill>
                 <a:latin typeface="Segoe UI"/>
               </a:rPr>
-              <a:t>Care &amp; retention</a:t>
-            </a:r>
-          </a:p>
-        </p:txBody>
-      </p:sp>
-      <p:graphicFrame>
-        <p:nvGraphicFramePr>
-          <p:cNvPr id="4" name="Table 3"/>
-          <p:cNvGraphicFramePr>
-            <a:graphicFrameLocks noGrp="1"/>
-          </p:cNvGraphicFramePr>
-          <p:nvPr/>
-        </p:nvGraphicFramePr>
-        <p:xfrm>
-          <a:off x="640080" y="1783080"/>
-          <a:ext cx="10927080" cy="4169664"/>
-        </p:xfrm>
-        <a:graphic>
-          <a:graphicData uri="http://schemas.openxmlformats.org/drawingml/2006/table">
-            <a:tbl>
-              <a:tblPr firstRow="1">
-                <a:tableStyleId>{5C22544A-7EE6-4342-B048-85BDC9FD1C3A}</a:tableStyleId>
-              </a:tblPr>
-              <a:tblGrid>
-                <a:gridCol w="3200400"/>
-                <a:gridCol w="6446520"/>
-                <a:gridCol w="1280160"/>
-              </a:tblGrid>
-              <a:tr h="347472">
-                <a:tc>
-                  <a:txBody>
-                    <a:bodyPr wrap="square"/>
-                    <a:lstStyle/>
-                    <a:p>
-                      <a:r>
-                        <a:rPr sz="1100" b="1">
-                          <a:solidFill>
-                            <a:srgbClr val="FFFFFF"/>
-                          </a:solidFill>
-                          <a:latin typeface="Segoe UI"/>
-                        </a:rPr>
-                        <a:t>KPI</a:t>
-                      </a:r>
-                    </a:p>
-                  </a:txBody>
-                  <a:tcPr anchor="ctr" marL="82296" marR="54864" marT="18288" marB="18288">
-                    <a:solidFill>
-                      <a:srgbClr val="0E7C74"/>
-                    </a:solidFill>
-                  </a:tcPr>
-                </a:tc>
-                <a:tc>
-                  <a:txBody>
-                    <a:bodyPr wrap="square"/>
-                    <a:lstStyle/>
-                    <a:p>
-                      <a:r>
-                        <a:rPr sz="1100" b="1">
-                          <a:solidFill>
-                            <a:srgbClr val="FFFFFF"/>
-                          </a:solidFill>
-                          <a:latin typeface="Segoe UI"/>
-                        </a:rPr>
-                        <a:t>What it measures</a:t>
-                      </a:r>
-                    </a:p>
-                  </a:txBody>
-                  <a:tcPr anchor="ctr" marL="82296" marR="54864" marT="18288" marB="18288">
-                    <a:solidFill>
-                      <a:srgbClr val="0E7C74"/>
-                    </a:solidFill>
-                  </a:tcPr>
-                </a:tc>
-                <a:tc>
-                  <a:txBody>
-                    <a:bodyPr wrap="square"/>
-                    <a:lstStyle/>
-                    <a:p>
-                      <a:r>
-                        <a:rPr sz="1100" b="1">
-                          <a:solidFill>
-                            <a:srgbClr val="FFFFFF"/>
-                          </a:solidFill>
-                          <a:latin typeface="Segoe UI"/>
-                        </a:rPr>
-                        <a:t>Unit</a:t>
-                      </a:r>
-                    </a:p>
-                  </a:txBody>
-                  <a:tcPr anchor="ctr" marL="82296" marR="54864" marT="18288" marB="18288">
-                    <a:solidFill>
-                      <a:srgbClr val="0E7C74"/>
-                    </a:solidFill>
-                  </a:tcPr>
-                </a:tc>
-              </a:tr>
-              <a:tr h="347472">
-                <a:tc>
-                  <a:txBody>
-                    <a:bodyPr wrap="square"/>
-                    <a:lstStyle/>
-                    <a:p>
-                      <a:r>
-                        <a:rPr sz="1100" b="1">
-                          <a:solidFill>
-                            <a:srgbClr val="1A1F27"/>
-                          </a:solidFill>
-                          <a:latin typeface="Segoe UI"/>
-                        </a:rPr>
-                        <a:t>resolution_opportunities</a:t>
-                      </a:r>
-                    </a:p>
-                  </a:txBody>
-                  <a:tcPr anchor="ctr" marL="82296" marR="54864" marT="18288" marB="18288">
-                    <a:solidFill>
-                      <a:srgbClr val="FFFFFF"/>
-                    </a:solidFill>
-                  </a:tcPr>
-                </a:tc>
-                <a:tc>
-                  <a:txBody>
-                    <a:bodyPr wrap="square"/>
-                    <a:lstStyle/>
-                    <a:p>
-                      <a:r>
-                        <a:rPr sz="1100" b="0">
-                          <a:solidFill>
-                            <a:srgbClr val="535C6A"/>
-                          </a:solidFill>
-                          <a:latin typeface="Segoe UI"/>
-                        </a:rPr>
-                        <a:t>Calls where the issue could be resolved</a:t>
-                      </a:r>
-                    </a:p>
-                  </a:txBody>
-                  <a:tcPr anchor="ctr" marL="82296" marR="54864" marT="18288" marB="18288">
-                    <a:solidFill>
-                      <a:srgbClr val="FFFFFF"/>
-                    </a:solidFill>
-                  </a:tcPr>
-                </a:tc>
-                <a:tc>
-                  <a:txBody>
-                    <a:bodyPr wrap="square"/>
-                    <a:lstStyle/>
-                    <a:p>
-                      <a:r>
-                        <a:rPr sz="1100" b="0">
-                          <a:solidFill>
-                            <a:srgbClr val="535C6A"/>
-                          </a:solidFill>
-                          <a:latin typeface="Segoe UI"/>
-                        </a:rPr>
-                        <a:t>count</a:t>
-                      </a:r>
-                    </a:p>
-                  </a:txBody>
-                  <a:tcPr anchor="ctr" marL="82296" marR="54864" marT="18288" marB="18288">
-                    <a:solidFill>
-                      <a:srgbClr val="FFFFFF"/>
-                    </a:solidFill>
-                  </a:tcPr>
-                </a:tc>
-              </a:tr>
-              <a:tr h="347472">
-                <a:tc>
-                  <a:txBody>
-                    <a:bodyPr wrap="square"/>
-                    <a:lstStyle/>
-                    <a:p>
-                      <a:r>
-                        <a:rPr sz="1100" b="1">
-                          <a:solidFill>
-                            <a:srgbClr val="1A1F27"/>
-                          </a:solidFill>
-                          <a:latin typeface="Segoe UI"/>
-                        </a:rPr>
-                        <a:t>resolutions</a:t>
-                      </a:r>
-                    </a:p>
-                  </a:txBody>
-                  <a:tcPr anchor="ctr" marL="82296" marR="54864" marT="18288" marB="18288">
-                    <a:solidFill>
-                      <a:srgbClr val="F7F9F8"/>
-                    </a:solidFill>
-                  </a:tcPr>
-                </a:tc>
-                <a:tc>
-                  <a:txBody>
-                    <a:bodyPr wrap="square"/>
-                    <a:lstStyle/>
-                    <a:p>
-                      <a:r>
-                        <a:rPr sz="1100" b="0">
-                          <a:solidFill>
-                            <a:srgbClr val="535C6A"/>
-                          </a:solidFill>
-                          <a:latin typeface="Segoe UI"/>
-                        </a:rPr>
-                        <a:t>Of those, calls actually resolved</a:t>
-                      </a:r>
-                    </a:p>
-                  </a:txBody>
-                  <a:tcPr anchor="ctr" marL="82296" marR="54864" marT="18288" marB="18288">
-                    <a:solidFill>
-                      <a:srgbClr val="F7F9F8"/>
-                    </a:solidFill>
-                  </a:tcPr>
-                </a:tc>
-                <a:tc>
-                  <a:txBody>
-                    <a:bodyPr wrap="square"/>
-                    <a:lstStyle/>
-                    <a:p>
-                      <a:r>
-                        <a:rPr sz="1100" b="0">
-                          <a:solidFill>
-                            <a:srgbClr val="535C6A"/>
-                          </a:solidFill>
-                          <a:latin typeface="Segoe UI"/>
-                        </a:rPr>
-                        <a:t>count</a:t>
-                      </a:r>
-                    </a:p>
-                  </a:txBody>
-                  <a:tcPr anchor="ctr" marL="82296" marR="54864" marT="18288" marB="18288">
-                    <a:solidFill>
-                      <a:srgbClr val="F7F9F8"/>
-                    </a:solidFill>
-                  </a:tcPr>
-                </a:tc>
-              </a:tr>
-              <a:tr h="347472">
-                <a:tc>
-                  <a:txBody>
-                    <a:bodyPr wrap="square"/>
-                    <a:lstStyle/>
-                    <a:p>
-                      <a:r>
-                        <a:rPr sz="1100" b="1">
-                          <a:solidFill>
-                            <a:srgbClr val="1A1F27"/>
-                          </a:solidFill>
-                          <a:latin typeface="Segoe UI"/>
-                        </a:rPr>
-                        <a:t>survival_opportunities</a:t>
-                      </a:r>
-                    </a:p>
-                  </a:txBody>
-                  <a:tcPr anchor="ctr" marL="82296" marR="54864" marT="18288" marB="18288">
-                    <a:solidFill>
-                      <a:srgbClr val="FFFFFF"/>
-                    </a:solidFill>
-                  </a:tcPr>
-                </a:tc>
-                <a:tc>
-                  <a:txBody>
-                    <a:bodyPr wrap="square"/>
-                    <a:lstStyle/>
-                    <a:p>
-                      <a:r>
-                        <a:rPr sz="1100" b="0">
-                          <a:solidFill>
-                            <a:srgbClr val="535C6A"/>
-                          </a:solidFill>
-                          <a:latin typeface="Segoe UI"/>
-                        </a:rPr>
-                        <a:t>Calls with churn / retention risk present</a:t>
-                      </a:r>
-                    </a:p>
-                  </a:txBody>
-                  <a:tcPr anchor="ctr" marL="82296" marR="54864" marT="18288" marB="18288">
-                    <a:solidFill>
-                      <a:srgbClr val="FFFFFF"/>
-                    </a:solidFill>
-                  </a:tcPr>
-                </a:tc>
-                <a:tc>
-                  <a:txBody>
-                    <a:bodyPr wrap="square"/>
-                    <a:lstStyle/>
-                    <a:p>
-                      <a:r>
-                        <a:rPr sz="1100" b="0">
-                          <a:solidFill>
-                            <a:srgbClr val="535C6A"/>
-                          </a:solidFill>
-                          <a:latin typeface="Segoe UI"/>
-                        </a:rPr>
-                        <a:t>count</a:t>
-                      </a:r>
-                    </a:p>
-                  </a:txBody>
-                  <a:tcPr anchor="ctr" marL="82296" marR="54864" marT="18288" marB="18288">
-                    <a:solidFill>
-                      <a:srgbClr val="FFFFFF"/>
-                    </a:solidFill>
-                  </a:tcPr>
-                </a:tc>
-              </a:tr>
-              <a:tr h="347472">
-                <a:tc>
-                  <a:txBody>
-                    <a:bodyPr wrap="square"/>
-                    <a:lstStyle/>
-                    <a:p>
-                      <a:r>
-                        <a:rPr sz="1100" b="1">
-                          <a:solidFill>
-                            <a:srgbClr val="1A1F27"/>
-                          </a:solidFill>
-                          <a:latin typeface="Segoe UI"/>
-                        </a:rPr>
-                        <a:t>saves</a:t>
-                      </a:r>
-                    </a:p>
-                  </a:txBody>
-                  <a:tcPr anchor="ctr" marL="82296" marR="54864" marT="18288" marB="18288">
-                    <a:solidFill>
-                      <a:srgbClr val="F7F9F8"/>
-                    </a:solidFill>
-                  </a:tcPr>
-                </a:tc>
-                <a:tc>
-                  <a:txBody>
-                    <a:bodyPr wrap="square"/>
-                    <a:lstStyle/>
-                    <a:p>
-                      <a:r>
-                        <a:rPr sz="1100" b="0">
-                          <a:solidFill>
-                            <a:srgbClr val="535C6A"/>
-                          </a:solidFill>
-                          <a:latin typeface="Segoe UI"/>
-                        </a:rPr>
-                        <a:t>Of those, customers retained</a:t>
-                      </a:r>
-                    </a:p>
-                  </a:txBody>
-                  <a:tcPr anchor="ctr" marL="82296" marR="54864" marT="18288" marB="18288">
-                    <a:solidFill>
-                      <a:srgbClr val="F7F9F8"/>
-                    </a:solidFill>
-                  </a:tcPr>
-                </a:tc>
-                <a:tc>
-                  <a:txBody>
-                    <a:bodyPr wrap="square"/>
-                    <a:lstStyle/>
-                    <a:p>
-                      <a:r>
-                        <a:rPr sz="1100" b="0">
-                          <a:solidFill>
-                            <a:srgbClr val="535C6A"/>
-                          </a:solidFill>
-                          <a:latin typeface="Segoe UI"/>
-                        </a:rPr>
-                        <a:t>count</a:t>
-                      </a:r>
-                    </a:p>
-                  </a:txBody>
-                  <a:tcPr anchor="ctr" marL="82296" marR="54864" marT="18288" marB="18288">
-                    <a:solidFill>
-                      <a:srgbClr val="F7F9F8"/>
-                    </a:solidFill>
-                  </a:tcPr>
-                </a:tc>
-              </a:tr>
-              <a:tr h="347472">
-                <a:tc>
-                  <a:txBody>
-                    <a:bodyPr wrap="square"/>
-                    <a:lstStyle/>
-                    <a:p>
-                      <a:r>
-                        <a:rPr sz="1100" b="1">
-                          <a:solidFill>
-                            <a:srgbClr val="1A1F27"/>
-                          </a:solidFill>
-                          <a:latin typeface="Segoe UI"/>
-                        </a:rPr>
-                        <a:t>right_of_sell_opportunities</a:t>
-                      </a:r>
-                    </a:p>
-                  </a:txBody>
-                  <a:tcPr anchor="ctr" marL="82296" marR="54864" marT="18288" marB="18288">
-                    <a:solidFill>
-                      <a:srgbClr val="FFFFFF"/>
-                    </a:solidFill>
-                  </a:tcPr>
-                </a:tc>
-                <a:tc>
-                  <a:txBody>
-                    <a:bodyPr wrap="square"/>
-                    <a:lstStyle/>
-                    <a:p>
-                      <a:r>
-                        <a:rPr sz="1100" b="0">
-                          <a:solidFill>
-                            <a:srgbClr val="535C6A"/>
-                          </a:solidFill>
-                          <a:latin typeface="Segoe UI"/>
-                        </a:rPr>
-                        <a:t>Calls where a sell was appropriate</a:t>
-                      </a:r>
-                    </a:p>
-                  </a:txBody>
-                  <a:tcPr anchor="ctr" marL="82296" marR="54864" marT="18288" marB="18288">
-                    <a:solidFill>
-                      <a:srgbClr val="FFFFFF"/>
-                    </a:solidFill>
-                  </a:tcPr>
-                </a:tc>
-                <a:tc>
-                  <a:txBody>
-                    <a:bodyPr wrap="square"/>
-                    <a:lstStyle/>
-                    <a:p>
-                      <a:r>
-                        <a:rPr sz="1100" b="0">
-                          <a:solidFill>
-                            <a:srgbClr val="535C6A"/>
-                          </a:solidFill>
-                          <a:latin typeface="Segoe UI"/>
-                        </a:rPr>
-                        <a:t>count</a:t>
-                      </a:r>
-                    </a:p>
-                  </a:txBody>
-                  <a:tcPr anchor="ctr" marL="82296" marR="54864" marT="18288" marB="18288">
-                    <a:solidFill>
-                      <a:srgbClr val="FFFFFF"/>
-                    </a:solidFill>
-                  </a:tcPr>
-                </a:tc>
-              </a:tr>
-              <a:tr h="347472">
-                <a:tc>
-                  <a:txBody>
-                    <a:bodyPr wrap="square"/>
-                    <a:lstStyle/>
-                    <a:p>
-                      <a:r>
-                        <a:rPr sz="1100" b="1">
-                          <a:solidFill>
-                            <a:srgbClr val="1A1F27"/>
-                          </a:solidFill>
-                          <a:latin typeface="Segoe UI"/>
-                        </a:rPr>
-                        <a:t>right_of_sell_actuals</a:t>
-                      </a:r>
-                    </a:p>
-                  </a:txBody>
-                  <a:tcPr anchor="ctr" marL="82296" marR="54864" marT="18288" marB="18288">
-                    <a:solidFill>
-                      <a:srgbClr val="F7F9F8"/>
-                    </a:solidFill>
-                  </a:tcPr>
-                </a:tc>
-                <a:tc>
-                  <a:txBody>
-                    <a:bodyPr wrap="square"/>
-                    <a:lstStyle/>
-                    <a:p>
-                      <a:r>
-                        <a:rPr sz="1100" b="0">
-                          <a:solidFill>
-                            <a:srgbClr val="535C6A"/>
-                          </a:solidFill>
-                          <a:latin typeface="Segoe UI"/>
-                        </a:rPr>
-                        <a:t>Of those, sell attempts made</a:t>
-                      </a:r>
-                    </a:p>
-                  </a:txBody>
-                  <a:tcPr anchor="ctr" marL="82296" marR="54864" marT="18288" marB="18288">
-                    <a:solidFill>
-                      <a:srgbClr val="F7F9F8"/>
-                    </a:solidFill>
-                  </a:tcPr>
-                </a:tc>
-                <a:tc>
-                  <a:txBody>
-                    <a:bodyPr wrap="square"/>
-                    <a:lstStyle/>
-                    <a:p>
-                      <a:r>
-                        <a:rPr sz="1100" b="0">
-                          <a:solidFill>
-                            <a:srgbClr val="535C6A"/>
-                          </a:solidFill>
-                          <a:latin typeface="Segoe UI"/>
-                        </a:rPr>
-                        <a:t>count</a:t>
-                      </a:r>
-                    </a:p>
-                  </a:txBody>
-                  <a:tcPr anchor="ctr" marL="82296" marR="54864" marT="18288" marB="18288">
-                    <a:solidFill>
-                      <a:srgbClr val="F7F9F8"/>
-                    </a:solidFill>
-                  </a:tcPr>
-                </a:tc>
-              </a:tr>
-              <a:tr h="347472">
-                <a:tc>
-                  <a:txBody>
-                    <a:bodyPr wrap="square"/>
-                    <a:lstStyle/>
-                    <a:p>
-                      <a:r>
-                        <a:rPr sz="1100" b="1">
-                          <a:solidFill>
-                            <a:srgbClr val="1A1F27"/>
-                          </a:solidFill>
-                          <a:latin typeface="Segoe UI"/>
-                        </a:rPr>
-                        <a:t>sales_made</a:t>
-                      </a:r>
-                    </a:p>
-                  </a:txBody>
-                  <a:tcPr anchor="ctr" marL="82296" marR="54864" marT="18288" marB="18288">
-                    <a:solidFill>
-                      <a:srgbClr val="FFFFFF"/>
-                    </a:solidFill>
-                  </a:tcPr>
-                </a:tc>
-                <a:tc>
-                  <a:txBody>
-                    <a:bodyPr wrap="square"/>
-                    <a:lstStyle/>
-                    <a:p>
-                      <a:r>
-                        <a:rPr sz="1100" b="0">
-                          <a:solidFill>
-                            <a:srgbClr val="535C6A"/>
-                          </a:solidFill>
-                          <a:latin typeface="Segoe UI"/>
-                        </a:rPr>
-                        <a:t>Sales completed</a:t>
-                      </a:r>
-                    </a:p>
-                  </a:txBody>
-                  <a:tcPr anchor="ctr" marL="82296" marR="54864" marT="18288" marB="18288">
-                    <a:solidFill>
-                      <a:srgbClr val="FFFFFF"/>
-                    </a:solidFill>
-                  </a:tcPr>
-                </a:tc>
-                <a:tc>
-                  <a:txBody>
-                    <a:bodyPr wrap="square"/>
-                    <a:lstStyle/>
-                    <a:p>
-                      <a:r>
-                        <a:rPr sz="1100" b="0">
-                          <a:solidFill>
-                            <a:srgbClr val="535C6A"/>
-                          </a:solidFill>
-                          <a:latin typeface="Segoe UI"/>
-                        </a:rPr>
-                        <a:t>count</a:t>
-                      </a:r>
-                    </a:p>
-                  </a:txBody>
-                  <a:tcPr anchor="ctr" marL="82296" marR="54864" marT="18288" marB="18288">
-                    <a:solidFill>
-                      <a:srgbClr val="FFFFFF"/>
-                    </a:solidFill>
-                  </a:tcPr>
-                </a:tc>
-              </a:tr>
-              <a:tr h="347472">
-                <a:tc>
-                  <a:txBody>
-                    <a:bodyPr wrap="square"/>
-                    <a:lstStyle/>
-                    <a:p>
-                      <a:r>
-                        <a:rPr sz="1100" b="1">
-                          <a:solidFill>
-                            <a:srgbClr val="1A1F27"/>
-                          </a:solidFill>
-                          <a:latin typeface="Segoe UI"/>
-                        </a:rPr>
-                        <a:t>new_prospects</a:t>
-                      </a:r>
-                    </a:p>
-                  </a:txBody>
-                  <a:tcPr anchor="ctr" marL="82296" marR="54864" marT="18288" marB="18288">
-                    <a:solidFill>
-                      <a:srgbClr val="F7F9F8"/>
-                    </a:solidFill>
-                  </a:tcPr>
-                </a:tc>
-                <a:tc>
-                  <a:txBody>
-                    <a:bodyPr wrap="square"/>
-                    <a:lstStyle/>
-                    <a:p>
-                      <a:r>
-                        <a:rPr sz="1100" b="0">
-                          <a:solidFill>
-                            <a:srgbClr val="535C6A"/>
-                          </a:solidFill>
-                          <a:latin typeface="Segoe UI"/>
-                        </a:rPr>
-                        <a:t>New leads identified</a:t>
-                      </a:r>
-                    </a:p>
-                  </a:txBody>
-                  <a:tcPr anchor="ctr" marL="82296" marR="54864" marT="18288" marB="18288">
-                    <a:solidFill>
-                      <a:srgbClr val="F7F9F8"/>
-                    </a:solidFill>
-                  </a:tcPr>
-                </a:tc>
-                <a:tc>
-                  <a:txBody>
-                    <a:bodyPr wrap="square"/>
-                    <a:lstStyle/>
-                    <a:p>
-                      <a:r>
-                        <a:rPr sz="1100" b="0">
-                          <a:solidFill>
-                            <a:srgbClr val="535C6A"/>
-                          </a:solidFill>
-                          <a:latin typeface="Segoe UI"/>
-                        </a:rPr>
-                        <a:t>count</a:t>
-                      </a:r>
-                    </a:p>
-                  </a:txBody>
-                  <a:tcPr anchor="ctr" marL="82296" marR="54864" marT="18288" marB="18288">
-                    <a:solidFill>
-                      <a:srgbClr val="F7F9F8"/>
-                    </a:solidFill>
-                  </a:tcPr>
-                </a:tc>
-              </a:tr>
-              <a:tr h="347472">
-                <a:tc>
-                  <a:txBody>
-                    <a:bodyPr wrap="square"/>
-                    <a:lstStyle/>
-                    <a:p>
-                      <a:r>
-                        <a:rPr sz="1100" b="1">
-                          <a:solidFill>
-                            <a:srgbClr val="1A1F27"/>
-                          </a:solidFill>
-                          <a:latin typeface="Segoe UI"/>
-                        </a:rPr>
-                        <a:t>new_prospects_converted</a:t>
-                      </a:r>
-                    </a:p>
-                  </a:txBody>
-                  <a:tcPr anchor="ctr" marL="82296" marR="54864" marT="18288" marB="18288">
-                    <a:solidFill>
-                      <a:srgbClr val="FFFFFF"/>
-                    </a:solidFill>
-                  </a:tcPr>
-                </a:tc>
-                <a:tc>
-                  <a:txBody>
-                    <a:bodyPr wrap="square"/>
-                    <a:lstStyle/>
-                    <a:p>
-                      <a:r>
-                        <a:rPr sz="1100" b="0">
-                          <a:solidFill>
-                            <a:srgbClr val="535C6A"/>
-                          </a:solidFill>
-                          <a:latin typeface="Segoe UI"/>
-                        </a:rPr>
-                        <a:t>Leads converted</a:t>
-                      </a:r>
-                    </a:p>
-                  </a:txBody>
-                  <a:tcPr anchor="ctr" marL="82296" marR="54864" marT="18288" marB="18288">
-                    <a:solidFill>
-                      <a:srgbClr val="FFFFFF"/>
-                    </a:solidFill>
-                  </a:tcPr>
-                </a:tc>
-                <a:tc>
-                  <a:txBody>
-                    <a:bodyPr wrap="square"/>
-                    <a:lstStyle/>
-                    <a:p>
-                      <a:r>
-                        <a:rPr sz="1100" b="0">
-                          <a:solidFill>
-                            <a:srgbClr val="535C6A"/>
-                          </a:solidFill>
-                          <a:latin typeface="Segoe UI"/>
-                        </a:rPr>
-                        <a:t>count</a:t>
-                      </a:r>
-                    </a:p>
-                  </a:txBody>
-                  <a:tcPr anchor="ctr" marL="82296" marR="54864" marT="18288" marB="18288">
-                    <a:solidFill>
-                      <a:srgbClr val="FFFFFF"/>
-                    </a:solidFill>
-                  </a:tcPr>
-                </a:tc>
-              </a:tr>
-              <a:tr h="347472">
-                <a:tc>
-                  <a:txBody>
-                    <a:bodyPr wrap="square"/>
-                    <a:lstStyle/>
-                    <a:p>
-                      <a:r>
-                        <a:rPr sz="1100" b="1">
-                          <a:solidFill>
-                            <a:srgbClr val="1A1F27"/>
-                          </a:solidFill>
-                          <a:latin typeface="Segoe UI"/>
-                        </a:rPr>
-                        <a:t>escalations</a:t>
-                      </a:r>
-                    </a:p>
-                  </a:txBody>
-                  <a:tcPr anchor="ctr" marL="82296" marR="54864" marT="18288" marB="18288">
-                    <a:solidFill>
-                      <a:srgbClr val="F7F9F8"/>
-                    </a:solidFill>
-                  </a:tcPr>
-                </a:tc>
-                <a:tc>
-                  <a:txBody>
-                    <a:bodyPr wrap="square"/>
-                    <a:lstStyle/>
-                    <a:p>
-                      <a:r>
-                        <a:rPr sz="1100" b="0">
-                          <a:solidFill>
-                            <a:srgbClr val="535C6A"/>
-                          </a:solidFill>
-                          <a:latin typeface="Segoe UI"/>
-                        </a:rPr>
-                        <a:t>Calls with an escalation</a:t>
-                      </a:r>
-                    </a:p>
-                  </a:txBody>
-                  <a:tcPr anchor="ctr" marL="82296" marR="54864" marT="18288" marB="18288">
-                    <a:solidFill>
-                      <a:srgbClr val="F7F9F8"/>
-                    </a:solidFill>
-                  </a:tcPr>
-                </a:tc>
-                <a:tc>
-                  <a:txBody>
-                    <a:bodyPr wrap="square"/>
-                    <a:lstStyle/>
-                    <a:p>
-                      <a:r>
-                        <a:rPr sz="1100" b="0">
-                          <a:solidFill>
-                            <a:srgbClr val="535C6A"/>
-                          </a:solidFill>
-                          <a:latin typeface="Segoe UI"/>
-                        </a:rPr>
-                        <a:t>count</a:t>
-                      </a:r>
-                    </a:p>
-                  </a:txBody>
-                  <a:tcPr anchor="ctr" marL="82296" marR="54864" marT="18288" marB="18288">
-                    <a:solidFill>
-                      <a:srgbClr val="F7F9F8"/>
-                    </a:solidFill>
-                  </a:tcPr>
-                </a:tc>
-              </a:tr>
-              <a:tr h="347472">
-                <a:tc>
-                  <a:txBody>
-                    <a:bodyPr wrap="square"/>
-                    <a:lstStyle/>
-                    <a:p>
-                      <a:r>
-                        <a:rPr sz="1100" b="1">
-                          <a:solidFill>
-                            <a:srgbClr val="1A1F27"/>
-                          </a:solidFill>
-                          <a:latin typeface="Segoe UI"/>
-                        </a:rPr>
-                        <a:t>customer_experience</a:t>
-                      </a:r>
-                    </a:p>
-                  </a:txBody>
-                  <a:tcPr anchor="ctr" marL="82296" marR="54864" marT="18288" marB="18288">
-                    <a:solidFill>
-                      <a:srgbClr val="FFFFFF"/>
-                    </a:solidFill>
-                  </a:tcPr>
-                </a:tc>
-                <a:tc>
-                  <a:txBody>
-                    <a:bodyPr wrap="square"/>
-                    <a:lstStyle/>
-                    <a:p>
-                      <a:r>
-                        <a:rPr sz="1100" b="0">
-                          <a:solidFill>
-                            <a:srgbClr val="535C6A"/>
-                          </a:solidFill>
-                          <a:latin typeface="Segoe UI"/>
-                        </a:rPr>
-                        <a:t>Rated calls not rated “Poor”</a:t>
-                      </a:r>
-                    </a:p>
-                  </a:txBody>
-                  <a:tcPr anchor="ctr" marL="82296" marR="54864" marT="18288" marB="18288">
-                    <a:solidFill>
-                      <a:srgbClr val="FFFFFF"/>
-                    </a:solidFill>
-                  </a:tcPr>
-                </a:tc>
-                <a:tc>
-                  <a:txBody>
-                    <a:bodyPr wrap="square"/>
-                    <a:lstStyle/>
-                    <a:p>
-                      <a:r>
-                        <a:rPr sz="1100" b="0">
-                          <a:solidFill>
-                            <a:srgbClr val="535C6A"/>
-                          </a:solidFill>
-                          <a:latin typeface="Segoe UI"/>
-                        </a:rPr>
-                        <a:t>rate</a:t>
-                      </a:r>
-                    </a:p>
-                  </a:txBody>
-                  <a:tcPr anchor="ctr" marL="82296" marR="54864" marT="18288" marB="18288">
-                    <a:solidFill>
-                      <a:srgbClr val="FFFFFF"/>
-                    </a:solidFill>
-                  </a:tcPr>
-                </a:tc>
-              </a:tr>
-            </a:tbl>
-          </a:graphicData>
-        </a:graphic>
-      </p:graphicFrame>
+              <a:t>APIX captures the difference between the two — and can point to the exact moment in Call B where the pitch should have happened.</a:t>
+            </a:r>
+          </a:p>
+        </p:txBody>
+      </p:sp>
     </p:spTree>
   </p:cSld>
   <p:clrMapOvr>
@@ -7117,6 +5087,7 @@
           <a:ln>
             <a:noFill/>
           </a:ln>
+          <a:effectLst/>
         </p:spPr>
         <p:style>
           <a:lnRef idx="1">
@@ -7148,8 +5119,8 @@
         </p:nvSpPr>
         <p:spPr>
           <a:xfrm>
-            <a:off x="640080" y="384048"/>
-            <a:ext cx="11155680" cy="1280160"/>
+            <a:off x="640080" y="365760"/>
+            <a:ext cx="11247120" cy="1234440"/>
           </a:xfrm>
           <a:prstGeom prst="rect">
             <a:avLst/>
@@ -7164,17 +5135,17 @@
           <a:p>
             <a:pPr>
               <a:spcAft>
-                <a:spcPts val="500"/>
-              </a:spcAft>
-            </a:pPr>
-            <a:r>
-              <a:rPr sz="1250" b="1">
+                <a:spcPts val="400"/>
+              </a:spcAft>
+            </a:pPr>
+            <a:r>
+              <a:rPr sz="1200" b="1">
                 <a:solidFill>
                   <a:srgbClr val="0E7C74"/>
                 </a:solidFill>
                 <a:latin typeface="Segoe UI"/>
               </a:rPr>
-              <a:t>KPIS · PSO (24)</a:t>
+              <a:t>KPIS BY PROGRAM</a:t>
             </a:r>
           </a:p>
           <a:p>
@@ -7184,13 +5155,13 @@
               </a:spcAft>
             </a:pPr>
             <a:r>
-              <a:rPr sz="2700" b="1">
+              <a:rPr sz="2500" b="1">
                 <a:solidFill>
                   <a:srgbClr val="1A1F27"/>
                 </a:solidFill>
                 <a:latin typeface="Segoe UI"/>
               </a:rPr>
-              <a:t>Care — VZ Mobile (grouped)</a:t>
+              <a:t>Three lenses, compared side by side</a:t>
             </a:r>
           </a:p>
         </p:txBody>
@@ -7204,8 +5175,8 @@
           <p:nvPr/>
         </p:nvGraphicFramePr>
         <p:xfrm>
-          <a:off x="640080" y="1783080"/>
-          <a:ext cx="10927080" cy="4389120"/>
+          <a:off x="640080" y="1874519"/>
+          <a:ext cx="10927080" cy="2999232"/>
         </p:xfrm>
         <a:graphic>
           <a:graphicData uri="http://schemas.openxmlformats.org/drawingml/2006/table">
@@ -7214,11 +5185,13 @@
                 <a:tableStyleId>{5C22544A-7EE6-4342-B048-85BDC9FD1C3A}</a:tableStyleId>
               </a:tblPr>
               <a:tblGrid>
-                <a:gridCol w="2286000"/>
-                <a:gridCol w="7360920"/>
-                <a:gridCol w="1280160"/>
+                <a:gridCol w="1554480"/>
+                <a:gridCol w="2011680"/>
+                <a:gridCol w="3520440"/>
+                <a:gridCol w="822960"/>
+                <a:gridCol w="3017520"/>
               </a:tblGrid>
-              <a:tr h="548640">
+              <a:tr h="749808">
                 <a:tc>
                   <a:txBody>
                     <a:bodyPr wrap="square"/>
@@ -7231,11 +5204,11 @@
                           </a:solidFill>
                           <a:latin typeface="Segoe UI"/>
                         </a:rPr>
-                        <a:t>Group</a:t>
+                        <a:t>Program</a:t>
                       </a:r>
                     </a:p>
                   </a:txBody>
-                  <a:tcPr anchor="ctr" marL="82296" marR="54864" marT="18288" marB="18288">
+                  <a:tcPr anchor="ctr" marL="91440" marR="54864" marT="18288" marB="18288">
                     <a:solidFill>
                       <a:srgbClr val="0E7C74"/>
                     </a:solidFill>
@@ -7253,11 +5226,11 @@
                           </a:solidFill>
                           <a:latin typeface="Segoe UI"/>
                         </a:rPr>
-                        <a:t>KPIs in the group</a:t>
+                        <a:t>Lens</a:t>
                       </a:r>
                     </a:p>
                   </a:txBody>
-                  <a:tcPr anchor="ctr" marL="82296" marR="54864" marT="18288" marB="18288">
+                  <a:tcPr anchor="ctr" marL="91440" marR="54864" marT="18288" marB="18288">
                     <a:solidFill>
                       <a:srgbClr val="0E7C74"/>
                     </a:solidFill>
@@ -7275,35 +5248,79 @@
                           </a:solidFill>
                           <a:latin typeface="Segoe UI"/>
                         </a:rPr>
-                        <a:t>Unit</a:t>
+                        <a:t>Example KPIs</a:t>
                       </a:r>
                     </a:p>
                   </a:txBody>
-                  <a:tcPr anchor="ctr" marL="82296" marR="54864" marT="18288" marB="18288">
+                  <a:tcPr anchor="ctr" marL="91440" marR="54864" marT="18288" marB="18288">
+                    <a:solidFill>
+                      <a:srgbClr val="0E7C74"/>
+                    </a:solidFill>
+                  </a:tcPr>
+                </a:tc>
+                <a:tc>
+                  <a:txBody>
+                    <a:bodyPr wrap="square"/>
+                    <a:lstStyle/>
+                    <a:p>
+                      <a:r>
+                        <a:rPr sz="1100" b="1">
+                          <a:solidFill>
+                            <a:srgbClr val="FFFFFF"/>
+                          </a:solidFill>
+                          <a:latin typeface="Segoe UI"/>
+                        </a:rPr>
+                        <a:t>KPIs</a:t>
+                      </a:r>
+                    </a:p>
+                  </a:txBody>
+                  <a:tcPr anchor="ctr" marL="91440" marR="54864" marT="18288" marB="18288">
+                    <a:solidFill>
+                      <a:srgbClr val="0E7C74"/>
+                    </a:solidFill>
+                  </a:tcPr>
+                </a:tc>
+                <a:tc>
+                  <a:txBody>
+                    <a:bodyPr wrap="square"/>
+                    <a:lstStyle/>
+                    <a:p>
+                      <a:r>
+                        <a:rPr sz="1100" b="1">
+                          <a:solidFill>
+                            <a:srgbClr val="FFFFFF"/>
+                          </a:solidFill>
+                          <a:latin typeface="Segoe UI"/>
+                        </a:rPr>
+                        <a:t>A good week looks like</a:t>
+                      </a:r>
+                    </a:p>
+                  </a:txBody>
+                  <a:tcPr anchor="ctr" marL="91440" marR="54864" marT="18288" marB="18288">
                     <a:solidFill>
                       <a:srgbClr val="0E7C74"/>
                     </a:solidFill>
                   </a:tcPr>
                 </a:tc>
               </a:tr>
-              <a:tr h="548640">
+              <a:tr h="749808">
                 <a:tc>
                   <a:txBody>
                     <a:bodyPr wrap="square"/>
                     <a:lstStyle/>
                     <a:p>
                       <a:r>
-                        <a:rPr sz="1150" b="1">
+                        <a:rPr sz="1250" b="1">
                           <a:solidFill>
                             <a:srgbClr val="1A1F27"/>
                           </a:solidFill>
                           <a:latin typeface="Segoe UI"/>
                         </a:rPr>
-                        <a:t>Customer Experience</a:t>
+                        <a:t>Telesales</a:t>
                       </a:r>
                     </a:p>
                   </a:txBody>
-                  <a:tcPr anchor="ctr" marL="82296" marR="54864" marT="18288" marB="18288">
+                  <a:tcPr anchor="ctr" marL="91440" marR="54864" marT="18288" marB="18288">
                     <a:solidFill>
                       <a:srgbClr val="FFFFFF"/>
                     </a:solidFill>
@@ -7315,17 +5332,17 @@
                     <a:lstStyle/>
                     <a:p>
                       <a:r>
-                        <a:rPr sz="1150" b="0">
+                        <a:rPr sz="1250" b="0">
                           <a:solidFill>
                             <a:srgbClr val="535C6A"/>
                           </a:solidFill>
                           <a:latin typeface="Segoe UI"/>
                         </a:rPr>
-                        <a:t>Predicted CSAT · Customer confidence · Customer effort</a:t>
+                        <a:t>Sales</a:t>
                       </a:r>
                     </a:p>
                   </a:txBody>
-                  <a:tcPr anchor="ctr" marL="82296" marR="54864" marT="18288" marB="18288">
+                  <a:tcPr anchor="ctr" marL="91440" marR="54864" marT="18288" marB="18288">
                     <a:solidFill>
                       <a:srgbClr val="FFFFFF"/>
                     </a:solidFill>
@@ -7337,41 +5354,85 @@
                     <a:lstStyle/>
                     <a:p>
                       <a:r>
-                        <a:rPr sz="1150" b="0">
+                        <a:rPr sz="1250" b="0">
                           <a:solidFill>
                             <a:srgbClr val="535C6A"/>
                           </a:solidFill>
                           <a:latin typeface="Segoe UI"/>
                         </a:rPr>
-                        <a:t>rate</a:t>
+                        <a:t>New-line pitches · Upgrades · Saves</a:t>
                       </a:r>
                     </a:p>
                   </a:txBody>
-                  <a:tcPr anchor="ctr" marL="82296" marR="54864" marT="18288" marB="18288">
+                  <a:tcPr anchor="ctr" marL="91440" marR="54864" marT="18288" marB="18288">
+                    <a:solidFill>
+                      <a:srgbClr val="FFFFFF"/>
+                    </a:solidFill>
+                  </a:tcPr>
+                </a:tc>
+                <a:tc>
+                  <a:txBody>
+                    <a:bodyPr wrap="square"/>
+                    <a:lstStyle/>
+                    <a:p>
+                      <a:r>
+                        <a:rPr sz="1250" b="0">
+                          <a:solidFill>
+                            <a:srgbClr val="535C6A"/>
+                          </a:solidFill>
+                          <a:latin typeface="Segoe UI"/>
+                        </a:rPr>
+                        <a:t>12</a:t>
+                      </a:r>
+                    </a:p>
+                  </a:txBody>
+                  <a:tcPr anchor="ctr" marL="91440" marR="54864" marT="18288" marB="18288">
+                    <a:solidFill>
+                      <a:srgbClr val="FFFFFF"/>
+                    </a:solidFill>
+                  </a:tcPr>
+                </a:tc>
+                <a:tc>
+                  <a:txBody>
+                    <a:bodyPr wrap="square"/>
+                    <a:lstStyle/>
+                    <a:p>
+                      <a:r>
+                        <a:rPr sz="1250" b="0">
+                          <a:solidFill>
+                            <a:srgbClr val="535C6A"/>
+                          </a:solidFill>
+                          <a:latin typeface="Segoe UI"/>
+                        </a:rPr>
+                        <a:t>High pitch rate, few missed opportunities</a:t>
+                      </a:r>
+                    </a:p>
+                  </a:txBody>
+                  <a:tcPr anchor="ctr" marL="91440" marR="54864" marT="18288" marB="18288">
                     <a:solidFill>
                       <a:srgbClr val="FFFFFF"/>
                     </a:solidFill>
                   </a:tcPr>
                 </a:tc>
               </a:tr>
-              <a:tr h="548640">
+              <a:tr h="749808">
                 <a:tc>
                   <a:txBody>
                     <a:bodyPr wrap="square"/>
                     <a:lstStyle/>
                     <a:p>
                       <a:r>
-                        <a:rPr sz="1150" b="1">
+                        <a:rPr sz="1250" b="1">
                           <a:solidFill>
                             <a:srgbClr val="1A1F27"/>
                           </a:solidFill>
                           <a:latin typeface="Segoe UI"/>
                         </a:rPr>
-                        <a:t>Resolve</a:t>
+                        <a:t>WCC</a:t>
                       </a:r>
                     </a:p>
                   </a:txBody>
-                  <a:tcPr anchor="ctr" marL="82296" marR="54864" marT="18288" marB="18288">
+                  <a:tcPr anchor="ctr" marL="91440" marR="54864" marT="18288" marB="18288">
                     <a:solidFill>
                       <a:srgbClr val="F7F9F8"/>
                     </a:solidFill>
@@ -7383,17 +5444,17 @@
                     <a:lstStyle/>
                     <a:p>
                       <a:r>
-                        <a:rPr sz="1150" b="0">
+                        <a:rPr sz="1250" b="0">
                           <a:solidFill>
                             <a:srgbClr val="535C6A"/>
                           </a:solidFill>
                           <a:latin typeface="Segoe UI"/>
                         </a:rPr>
-                        <a:t>FCR likelihood · Resolution completeness · Resolution confidence · Next-steps clarity · Issue-resolution effectiveness</a:t>
+                        <a:t>Care &amp; retention</a:t>
                       </a:r>
                     </a:p>
                   </a:txBody>
-                  <a:tcPr anchor="ctr" marL="82296" marR="54864" marT="18288" marB="18288">
+                  <a:tcPr anchor="ctr" marL="91440" marR="54864" marT="18288" marB="18288">
                     <a:solidFill>
                       <a:srgbClr val="F7F9F8"/>
                     </a:solidFill>
@@ -7405,41 +5466,85 @@
                     <a:lstStyle/>
                     <a:p>
                       <a:r>
-                        <a:rPr sz="1150" b="0">
+                        <a:rPr sz="1250" b="0">
                           <a:solidFill>
                             <a:srgbClr val="535C6A"/>
                           </a:solidFill>
                           <a:latin typeface="Segoe UI"/>
                         </a:rPr>
-                        <a:t>rate</a:t>
+                        <a:t>Resolutions · Saves · Right-of-sell</a:t>
                       </a:r>
                     </a:p>
                   </a:txBody>
-                  <a:tcPr anchor="ctr" marL="82296" marR="54864" marT="18288" marB="18288">
+                  <a:tcPr anchor="ctr" marL="91440" marR="54864" marT="18288" marB="18288">
+                    <a:solidFill>
+                      <a:srgbClr val="F7F9F8"/>
+                    </a:solidFill>
+                  </a:tcPr>
+                </a:tc>
+                <a:tc>
+                  <a:txBody>
+                    <a:bodyPr wrap="square"/>
+                    <a:lstStyle/>
+                    <a:p>
+                      <a:r>
+                        <a:rPr sz="1250" b="0">
+                          <a:solidFill>
+                            <a:srgbClr val="535C6A"/>
+                          </a:solidFill>
+                          <a:latin typeface="Segoe UI"/>
+                        </a:rPr>
+                        <a:t>11</a:t>
+                      </a:r>
+                    </a:p>
+                  </a:txBody>
+                  <a:tcPr anchor="ctr" marL="91440" marR="54864" marT="18288" marB="18288">
+                    <a:solidFill>
+                      <a:srgbClr val="F7F9F8"/>
+                    </a:solidFill>
+                  </a:tcPr>
+                </a:tc>
+                <a:tc>
+                  <a:txBody>
+                    <a:bodyPr wrap="square"/>
+                    <a:lstStyle/>
+                    <a:p>
+                      <a:r>
+                        <a:rPr sz="1250" b="0">
+                          <a:solidFill>
+                            <a:srgbClr val="535C6A"/>
+                          </a:solidFill>
+                          <a:latin typeface="Segoe UI"/>
+                        </a:rPr>
+                        <a:t>High resolution &amp; save rate</a:t>
+                      </a:r>
+                    </a:p>
+                  </a:txBody>
+                  <a:tcPr anchor="ctr" marL="91440" marR="54864" marT="18288" marB="18288">
                     <a:solidFill>
                       <a:srgbClr val="F7F9F8"/>
                     </a:solidFill>
                   </a:tcPr>
                 </a:tc>
               </a:tr>
-              <a:tr h="548640">
+              <a:tr h="749808">
                 <a:tc>
                   <a:txBody>
                     <a:bodyPr wrap="square"/>
                     <a:lstStyle/>
                     <a:p>
                       <a:r>
-                        <a:rPr sz="1150" b="1">
+                        <a:rPr sz="1250" b="1">
                           <a:solidFill>
                             <a:srgbClr val="1A1F27"/>
                           </a:solidFill>
                           <a:latin typeface="Segoe UI"/>
                         </a:rPr>
-                        <a:t>Quality</a:t>
+                        <a:t>PSO</a:t>
                       </a:r>
                     </a:p>
                   </a:txBody>
-                  <a:tcPr anchor="ctr" marL="82296" marR="54864" marT="18288" marB="18288">
+                  <a:tcPr anchor="ctr" marL="91440" marR="54864" marT="18288" marB="18288">
                     <a:solidFill>
                       <a:srgbClr val="FFFFFF"/>
                     </a:solidFill>
@@ -7451,17 +5556,17 @@
                     <a:lstStyle/>
                     <a:p>
                       <a:r>
-                        <a:rPr sz="1150" b="0">
+                        <a:rPr sz="1250" b="0">
                           <a:solidFill>
                             <a:srgbClr val="535C6A"/>
                           </a:solidFill>
                           <a:latin typeface="Segoe UI"/>
                         </a:rPr>
-                        <a:t>Quality · Compliance · Process adherence</a:t>
+                        <a:t>VZ Mobile care</a:t>
                       </a:r>
                     </a:p>
                   </a:txBody>
-                  <a:tcPr anchor="ctr" marL="82296" marR="54864" marT="18288" marB="18288">
+                  <a:tcPr anchor="ctr" marL="91440" marR="54864" marT="18288" marB="18288">
                     <a:solidFill>
                       <a:srgbClr val="FFFFFF"/>
                     </a:solidFill>
@@ -7473,109 +5578,17 @@
                     <a:lstStyle/>
                     <a:p>
                       <a:r>
-                        <a:rPr sz="1150" b="0">
+                        <a:rPr sz="1250" b="0">
                           <a:solidFill>
                             <a:srgbClr val="535C6A"/>
                           </a:solidFill>
                           <a:latin typeface="Segoe UI"/>
                         </a:rPr>
-                        <a:t>rate</a:t>
+                        <a:t>CSAT · FCR · Quality · Repeat-risk</a:t>
                       </a:r>
                     </a:p>
                   </a:txBody>
-                  <a:tcPr anchor="ctr" marL="82296" marR="54864" marT="18288" marB="18288">
-                    <a:solidFill>
-                      <a:srgbClr val="FFFFFF"/>
-                    </a:solidFill>
-                  </a:tcPr>
-                </a:tc>
-              </a:tr>
-              <a:tr h="548640">
-                <a:tc>
-                  <a:txBody>
-                    <a:bodyPr wrap="square"/>
-                    <a:lstStyle/>
-                    <a:p>
-                      <a:r>
-                        <a:rPr sz="1150" b="1">
-                          <a:solidFill>
-                            <a:srgbClr val="1A1F27"/>
-                          </a:solidFill>
-                          <a:latin typeface="Segoe UI"/>
-                        </a:rPr>
-                        <a:t>Care Handling</a:t>
-                      </a:r>
-                    </a:p>
-                  </a:txBody>
-                  <a:tcPr anchor="ctr" marL="82296" marR="54864" marT="18288" marB="18288">
-                    <a:solidFill>
-                      <a:srgbClr val="F7F9F8"/>
-                    </a:solidFill>
-                  </a:tcPr>
-                </a:tc>
-                <a:tc>
-                  <a:txBody>
-                    <a:bodyPr wrap="square"/>
-                    <a:lstStyle/>
-                    <a:p>
-                      <a:r>
-                        <a:rPr sz="1150" b="0">
-                          <a:solidFill>
-                            <a:srgbClr val="535C6A"/>
-                          </a:solidFill>
-                          <a:latin typeface="Segoe UI"/>
-                        </a:rPr>
-                        <a:t>Issue ownership · Escalation necessity · Transfer avoidance · Case management</a:t>
-                      </a:r>
-                    </a:p>
-                  </a:txBody>
-                  <a:tcPr anchor="ctr" marL="82296" marR="54864" marT="18288" marB="18288">
-                    <a:solidFill>
-                      <a:srgbClr val="F7F9F8"/>
-                    </a:solidFill>
-                  </a:tcPr>
-                </a:tc>
-                <a:tc>
-                  <a:txBody>
-                    <a:bodyPr wrap="square"/>
-                    <a:lstStyle/>
-                    <a:p>
-                      <a:r>
-                        <a:rPr sz="1150" b="0">
-                          <a:solidFill>
-                            <a:srgbClr val="535C6A"/>
-                          </a:solidFill>
-                          <a:latin typeface="Segoe UI"/>
-                        </a:rPr>
-                        <a:t>rate</a:t>
-                      </a:r>
-                    </a:p>
-                  </a:txBody>
-                  <a:tcPr anchor="ctr" marL="82296" marR="54864" marT="18288" marB="18288">
-                    <a:solidFill>
-                      <a:srgbClr val="F7F9F8"/>
-                    </a:solidFill>
-                  </a:tcPr>
-                </a:tc>
-              </a:tr>
-              <a:tr h="548640">
-                <a:tc>
-                  <a:txBody>
-                    <a:bodyPr wrap="square"/>
-                    <a:lstStyle/>
-                    <a:p>
-                      <a:r>
-                        <a:rPr sz="1150" b="1">
-                          <a:solidFill>
-                            <a:srgbClr val="1A1F27"/>
-                          </a:solidFill>
-                          <a:latin typeface="Segoe UI"/>
-                        </a:rPr>
-                        <a:t>Operational Efficiency</a:t>
-                      </a:r>
-                    </a:p>
-                  </a:txBody>
-                  <a:tcPr anchor="ctr" marL="82296" marR="54864" marT="18288" marB="18288">
+                  <a:tcPr anchor="ctr" marL="91440" marR="54864" marT="18288" marB="18288">
                     <a:solidFill>
                       <a:srgbClr val="FFFFFF"/>
                     </a:solidFill>
@@ -7587,17 +5600,17 @@
                     <a:lstStyle/>
                     <a:p>
                       <a:r>
-                        <a:rPr sz="1150" b="0">
+                        <a:rPr sz="1250" b="0">
                           <a:solidFill>
                             <a:srgbClr val="535C6A"/>
                           </a:solidFill>
                           <a:latin typeface="Segoe UI"/>
                         </a:rPr>
-                        <a:t>AHT assessment · Contact-handling efficiency · Hold management</a:t>
+                        <a:t>24</a:t>
                       </a:r>
                     </a:p>
                   </a:txBody>
-                  <a:tcPr anchor="ctr" marL="82296" marR="54864" marT="18288" marB="18288">
+                  <a:tcPr anchor="ctr" marL="91440" marR="54864" marT="18288" marB="18288">
                     <a:solidFill>
                       <a:srgbClr val="FFFFFF"/>
                     </a:solidFill>
@@ -7609,153 +5622,17 @@
                     <a:lstStyle/>
                     <a:p>
                       <a:r>
-                        <a:rPr sz="1150" b="0">
+                        <a:rPr sz="1250" b="0">
                           <a:solidFill>
                             <a:srgbClr val="535C6A"/>
                           </a:solidFill>
                           <a:latin typeface="Segoe UI"/>
                         </a:rPr>
-                        <a:t>rate</a:t>
+                        <a:t>High FCR, low repeat-contact risk</a:t>
                       </a:r>
                     </a:p>
                   </a:txBody>
-                  <a:tcPr anchor="ctr" marL="82296" marR="54864" marT="18288" marB="18288">
-                    <a:solidFill>
-                      <a:srgbClr val="FFFFFF"/>
-                    </a:solidFill>
-                  </a:tcPr>
-                </a:tc>
-              </a:tr>
-              <a:tr h="548640">
-                <a:tc>
-                  <a:txBody>
-                    <a:bodyPr wrap="square"/>
-                    <a:lstStyle/>
-                    <a:p>
-                      <a:r>
-                        <a:rPr sz="1150" b="1">
-                          <a:solidFill>
-                            <a:srgbClr val="1A1F27"/>
-                          </a:solidFill>
-                          <a:latin typeface="Segoe UI"/>
-                        </a:rPr>
-                        <a:t>Repeat-Contact Risk</a:t>
-                      </a:r>
-                    </a:p>
-                  </a:txBody>
-                  <a:tcPr anchor="ctr" marL="82296" marR="54864" marT="18288" marB="18288">
-                    <a:solidFill>
-                      <a:srgbClr val="F7F9F8"/>
-                    </a:solidFill>
-                  </a:tcPr>
-                </a:tc>
-                <a:tc>
-                  <a:txBody>
-                    <a:bodyPr wrap="square"/>
-                    <a:lstStyle/>
-                    <a:p>
-                      <a:r>
-                        <a:rPr sz="1150" b="0">
-                          <a:solidFill>
-                            <a:srgbClr val="535C6A"/>
-                          </a:solidFill>
-                          <a:latin typeface="Segoe UI"/>
-                        </a:rPr>
-                        <a:t>Repeat-contact · Escalation · Callback · Reopen risk</a:t>
-                      </a:r>
-                    </a:p>
-                  </a:txBody>
-                  <a:tcPr anchor="ctr" marL="82296" marR="54864" marT="18288" marB="18288">
-                    <a:solidFill>
-                      <a:srgbClr val="F7F9F8"/>
-                    </a:solidFill>
-                  </a:tcPr>
-                </a:tc>
-                <a:tc>
-                  <a:txBody>
-                    <a:bodyPr wrap="square"/>
-                    <a:lstStyle/>
-                    <a:p>
-                      <a:r>
-                        <a:rPr sz="1150" b="0">
-                          <a:solidFill>
-                            <a:srgbClr val="535C6A"/>
-                          </a:solidFill>
-                          <a:latin typeface="Segoe UI"/>
-                        </a:rPr>
-                        <a:t>count</a:t>
-                      </a:r>
-                    </a:p>
-                  </a:txBody>
-                  <a:tcPr anchor="ctr" marL="82296" marR="54864" marT="18288" marB="18288">
-                    <a:solidFill>
-                      <a:srgbClr val="F7F9F8"/>
-                    </a:solidFill>
-                  </a:tcPr>
-                </a:tc>
-              </a:tr>
-              <a:tr h="548640">
-                <a:tc>
-                  <a:txBody>
-                    <a:bodyPr wrap="square"/>
-                    <a:lstStyle/>
-                    <a:p>
-                      <a:r>
-                        <a:rPr sz="1150" b="1">
-                          <a:solidFill>
-                            <a:srgbClr val="1A1F27"/>
-                          </a:solidFill>
-                          <a:latin typeface="Segoe UI"/>
-                        </a:rPr>
-                        <a:t>Customer</a:t>
-                      </a:r>
-                    </a:p>
-                  </a:txBody>
-                  <a:tcPr anchor="ctr" marL="82296" marR="54864" marT="18288" marB="18288">
-                    <a:solidFill>
-                      <a:srgbClr val="FFFFFF"/>
-                    </a:solidFill>
-                  </a:tcPr>
-                </a:tc>
-                <a:tc>
-                  <a:txBody>
-                    <a:bodyPr wrap="square"/>
-                    <a:lstStyle/>
-                    <a:p>
-                      <a:r>
-                        <a:rPr sz="1150" b="0">
-                          <a:solidFill>
-                            <a:srgbClr val="535C6A"/>
-                          </a:solidFill>
-                          <a:latin typeface="Segoe UI"/>
-                        </a:rPr>
-                        <a:t>Escalations · Customer experience</a:t>
-                      </a:r>
-                    </a:p>
-                  </a:txBody>
-                  <a:tcPr anchor="ctr" marL="82296" marR="54864" marT="18288" marB="18288">
-                    <a:solidFill>
-                      <a:srgbClr val="FFFFFF"/>
-                    </a:solidFill>
-                  </a:tcPr>
-                </a:tc>
-                <a:tc>
-                  <a:txBody>
-                    <a:bodyPr wrap="square"/>
-                    <a:lstStyle/>
-                    <a:p>
-                      <a:r>
-                        <a:rPr sz="1150" b="0">
-                          <a:solidFill>
-                            <a:srgbClr val="535C6A"/>
-                          </a:solidFill>
-                          <a:latin typeface="Segoe UI"/>
-                        </a:rPr>
-                        <a:t>count / rate</a:t>
-                      </a:r>
-                    </a:p>
-                  </a:txBody>
-                  <a:tcPr anchor="ctr" marL="82296" marR="54864" marT="18288" marB="18288">
+                  <a:tcPr anchor="ctr" marL="91440" marR="54864" marT="18288" marB="18288">
                     <a:solidFill>
                       <a:srgbClr val="FFFFFF"/>
                     </a:solidFill>
@@ -7766,6 +5643,63 @@
           </a:graphicData>
         </a:graphic>
       </p:graphicFrame>
+      <p:sp>
+        <p:nvSpPr>
+          <p:cNvPr id="5" name="Rounded Rectangle 4"/>
+          <p:cNvSpPr/>
+          <p:nvPr/>
+        </p:nvSpPr>
+        <p:spPr>
+          <a:xfrm>
+            <a:off x="640080" y="5852160"/>
+            <a:ext cx="10927080" cy="749808"/>
+          </a:xfrm>
+          <a:prstGeom prst="roundRect">
+            <a:avLst/>
+          </a:prstGeom>
+          <a:solidFill>
+            <a:srgbClr val="E1F0EE"/>
+          </a:solidFill>
+          <a:ln>
+            <a:noFill/>
+          </a:ln>
+          <a:effectLst/>
+        </p:spPr>
+        <p:style>
+          <a:lnRef idx="1">
+            <a:schemeClr val="accent1"/>
+          </a:lnRef>
+          <a:fillRef idx="3">
+            <a:schemeClr val="accent1"/>
+          </a:fillRef>
+          <a:effectRef idx="2">
+            <a:schemeClr val="accent1"/>
+          </a:effectRef>
+          <a:fontRef idx="minor">
+            <a:schemeClr val="lt1"/>
+          </a:fontRef>
+        </p:style>
+        <p:txBody>
+          <a:bodyPr rtlCol="0" anchor="ctr" wrap="square" lIns="201168" rIns="201168"/>
+          <a:lstStyle/>
+          <a:p>
+            <a:pPr algn="ctr">
+              <a:spcAft>
+                <a:spcPts val="0"/>
+              </a:spcAft>
+            </a:pPr>
+            <a:r>
+              <a:rPr sz="1400" b="1">
+                <a:solidFill>
+                  <a:srgbClr val="0A5B55"/>
+                </a:solidFill>
+                <a:latin typeface="Segoe UI"/>
+              </a:rPr>
+              <a:t>Same pipeline, different checklist — because a good sales call and a good care call are not the same thing. Each program has its own KPIs.</a:t>
+            </a:r>
+          </a:p>
+        </p:txBody>
+      </p:sp>
     </p:spTree>
   </p:cSld>
   <p:clrMapOvr>
@@ -7812,6 +5746,7 @@
           <a:ln>
             <a:noFill/>
           </a:ln>
+          <a:effectLst/>
         </p:spPr>
         <p:style>
           <a:lnRef idx="1">
@@ -7843,8 +5778,8 @@
         </p:nvSpPr>
         <p:spPr>
           <a:xfrm>
-            <a:off x="640080" y="384048"/>
-            <a:ext cx="11155680" cy="1280160"/>
+            <a:off x="640080" y="365760"/>
+            <a:ext cx="11247120" cy="1234440"/>
           </a:xfrm>
           <a:prstGeom prst="rect">
             <a:avLst/>
@@ -7859,7 +5794,201 @@
           <a:p>
             <a:pPr>
               <a:spcAft>
-                <a:spcPts val="500"/>
+                <a:spcPts val="400"/>
+              </a:spcAft>
+            </a:pPr>
+            <a:r>
+              <a:rPr sz="1200" b="1">
+                <a:solidFill>
+                  <a:srgbClr val="0E7C74"/>
+                </a:solidFill>
+                <a:latin typeface="Segoe UI"/>
+              </a:rPr>
+              <a:t>GOLDEN DATA</a:t>
+            </a:r>
+          </a:p>
+          <a:p>
+            <a:pPr>
+              <a:spcAft>
+                <a:spcPts val="0"/>
+              </a:spcAft>
+            </a:pPr>
+            <a:r>
+              <a:rPr sz="2500" b="1">
+                <a:solidFill>
+                  <a:srgbClr val="1A1F27"/>
+                </a:solidFill>
+                <a:latin typeface="Segoe UI"/>
+              </a:rPr>
+              <a:t>How we prove the scores are right</a:t>
+            </a:r>
+          </a:p>
+        </p:txBody>
+      </p:sp>
+      <p:sp>
+        <p:nvSpPr>
+          <p:cNvPr id="4" name="TextBox 3"/>
+          <p:cNvSpPr txBox="1"/>
+          <p:nvPr/>
+        </p:nvSpPr>
+        <p:spPr>
+          <a:xfrm>
+            <a:off x="685800" y="1828800"/>
+            <a:ext cx="5577840" cy="4023360"/>
+          </a:xfrm>
+          <a:prstGeom prst="rect">
+            <a:avLst/>
+          </a:prstGeom>
+          <a:noFill/>
+        </p:spPr>
+        <p:txBody>
+          <a:bodyPr wrap="square">
+            <a:spAutoFit/>
+          </a:bodyPr>
+          <a:lstStyle/>
+          <a:p>
+            <a:pPr>
+              <a:spcAft>
+                <a:spcPts val="800"/>
+              </a:spcAft>
+            </a:pPr>
+            <a:r>
+              <a:rPr sz="1400" b="0">
+                <a:solidFill>
+                  <a:srgbClr val="1A1F27"/>
+                </a:solidFill>
+                <a:latin typeface="Segoe UI"/>
+              </a:rPr>
+              <a:t>“Golden data” = real calls with business-certified correct answers.</a:t>
+            </a:r>
+          </a:p>
+          <a:p>
+            <a:pPr>
+              <a:spcAft>
+                <a:spcPts val="800"/>
+              </a:spcAft>
+            </a:pPr>
+            <a:r>
+              <a:rPr sz="1400" b="0">
+                <a:solidFill>
+                  <a:srgbClr val="1A1F27"/>
+                </a:solidFill>
+                <a:latin typeface="Segoe UI"/>
+              </a:rPr>
+              <a:t/>
+            </a:r>
+          </a:p>
+          <a:p>
+            <a:pPr>
+              <a:spcAft>
+                <a:spcPts val="800"/>
+              </a:spcAft>
+            </a:pPr>
+            <a:r>
+              <a:rPr sz="1400" b="0">
+                <a:solidFill>
+                  <a:srgbClr val="A96E12"/>
+                </a:solidFill>
+                <a:latin typeface="Segoe UI"/>
+              </a:rPr>
+              <a:t>✗  Wrong way: one call → one KPI value.</a:t>
+            </a:r>
+          </a:p>
+          <a:p>
+            <a:pPr>
+              <a:spcAft>
+                <a:spcPts val="800"/>
+              </a:spcAft>
+            </a:pPr>
+            <a:r>
+              <a:rPr sz="1400" b="0">
+                <a:solidFill>
+                  <a:srgbClr val="535C6A"/>
+                </a:solidFill>
+                <a:latin typeface="Segoe UI"/>
+              </a:rPr>
+              <a:t>     Can't validate a KPI averaged over many calls.</a:t>
+            </a:r>
+          </a:p>
+          <a:p>
+            <a:pPr>
+              <a:spcAft>
+                <a:spcPts val="800"/>
+              </a:spcAft>
+            </a:pPr>
+            <a:r>
+              <a:rPr sz="1400" b="0">
+                <a:solidFill>
+                  <a:srgbClr val="2E8B5E"/>
+                </a:solidFill>
+                <a:latin typeface="Segoe UI"/>
+              </a:rPr>
+              <a:t>✓  Right way: coaches certify the AI's per-call</a:t>
+            </a:r>
+          </a:p>
+          <a:p>
+            <a:pPr>
+              <a:spcAft>
+                <a:spcPts val="800"/>
+              </a:spcAft>
+            </a:pPr>
+            <a:r>
+              <a:rPr sz="1400" b="0">
+                <a:solidFill>
+                  <a:srgbClr val="535C6A"/>
+                </a:solidFill>
+                <a:latin typeface="Segoe UI"/>
+              </a:rPr>
+              <a:t>     judgments; the KPIs then follow by counting.</a:t>
+            </a:r>
+          </a:p>
+        </p:txBody>
+      </p:sp>
+      <p:sp>
+        <p:nvSpPr>
+          <p:cNvPr id="5" name="Rounded Rectangle 4"/>
+          <p:cNvSpPr/>
+          <p:nvPr/>
+        </p:nvSpPr>
+        <p:spPr>
+          <a:xfrm>
+            <a:off x="6400800" y="1828800"/>
+            <a:ext cx="5212080" cy="2834640"/>
+          </a:xfrm>
+          <a:prstGeom prst="roundRect">
+            <a:avLst/>
+          </a:prstGeom>
+          <a:solidFill>
+            <a:srgbClr val="E1F0EE"/>
+          </a:solidFill>
+          <a:ln w="9525">
+            <a:solidFill>
+              <a:srgbClr val="D9DFE5"/>
+            </a:solidFill>
+          </a:ln>
+          <a:effectLst/>
+        </p:spPr>
+        <p:style>
+          <a:lnRef idx="1">
+            <a:schemeClr val="accent1"/>
+          </a:lnRef>
+          <a:fillRef idx="3">
+            <a:schemeClr val="accent1"/>
+          </a:fillRef>
+          <a:effectRef idx="2">
+            <a:schemeClr val="accent1"/>
+          </a:effectRef>
+          <a:fontRef idx="minor">
+            <a:schemeClr val="lt1"/>
+          </a:fontRef>
+        </p:style>
+        <p:txBody>
+          <a:bodyPr rtlCol="0" anchor="ctr" wrap="square" lIns="146304" rIns="128016" tIns="118872" bIns="91440"/>
+          <a:lstStyle/>
+          <a:p>
+            <a:pPr algn="ctr">
+              <a:spcAft>
+                <a:spcPts val="700"/>
               </a:spcAft>
             </a:pPr>
             <a:r>
@@ -7869,38 +5998,118 @@
                 </a:solidFill>
                 <a:latin typeface="Segoe UI"/>
               </a:rPr>
-              <a:t>GOLDEN DATA · WHAT WE NEED TO HOLD</a:t>
+              <a:t>EXAMPLE · one golden record</a:t>
             </a:r>
           </a:p>
           <a:p>
             <a:pPr>
               <a:spcAft>
-                <a:spcPts val="0"/>
-              </a:spcAft>
-            </a:pPr>
-            <a:r>
-              <a:rPr sz="2700" b="1">
-                <a:solidFill>
-                  <a:srgbClr val="1A1F27"/>
+                <a:spcPts val="300"/>
+              </a:spcAft>
+            </a:pPr>
+            <a:r>
+              <a:rPr sz="1150" b="0">
+                <a:solidFill>
+                  <a:srgbClr val="535C6A"/>
                 </a:solidFill>
                 <a:latin typeface="Segoe UI"/>
               </a:rPr>
-              <a:t>The certified dataset, by the numbers</a:t>
+              <a:t>Transcript #4471 (Telesales)</a:t>
+            </a:r>
+          </a:p>
+          <a:p>
+            <a:pPr>
+              <a:spcAft>
+                <a:spcPts val="300"/>
+              </a:spcAft>
+            </a:pPr>
+            <a:r>
+              <a:rPr sz="1150" b="0">
+                <a:solidFill>
+                  <a:srgbClr val="0A5B55"/>
+                </a:solidFill>
+                <a:latin typeface="Consolas"/>
+              </a:rPr>
+              <a:t>new_line_opportunity_exists = true</a:t>
+            </a:r>
+          </a:p>
+          <a:p>
+            <a:pPr>
+              <a:spcAft>
+                <a:spcPts val="300"/>
+              </a:spcAft>
+            </a:pPr>
+            <a:r>
+              <a:rPr sz="1150" b="0">
+                <a:solidFill>
+                  <a:srgbClr val="0A5B55"/>
+                </a:solidFill>
+                <a:latin typeface="Consolas"/>
+              </a:rPr>
+              <a:t>pitched_new_line            = false</a:t>
+            </a:r>
+          </a:p>
+          <a:p>
+            <a:pPr>
+              <a:spcAft>
+                <a:spcPts val="300"/>
+              </a:spcAft>
+            </a:pPr>
+            <a:r>
+              <a:rPr sz="1150" b="0">
+                <a:solidFill>
+                  <a:srgbClr val="0A5B55"/>
+                </a:solidFill>
+                <a:latin typeface="Consolas"/>
+              </a:rPr>
+              <a:t>customer_experience         = Medium</a:t>
+            </a:r>
+          </a:p>
+          <a:p>
+            <a:pPr>
+              <a:spcAft>
+                <a:spcPts val="300"/>
+              </a:spcAft>
+            </a:pPr>
+            <a:r>
+              <a:rPr sz="1150" b="0">
+                <a:solidFill>
+                  <a:srgbClr val="535C6A"/>
+                </a:solidFill>
+                <a:latin typeface="Segoe UI"/>
+              </a:rPr>
+              <a:t>Evidence: lines 12–14</a:t>
+            </a:r>
+          </a:p>
+          <a:p>
+            <a:pPr>
+              <a:spcAft>
+                <a:spcPts val="300"/>
+              </a:spcAft>
+            </a:pPr>
+            <a:r>
+              <a:rPr sz="1150" b="0">
+                <a:solidFill>
+                  <a:srgbClr val="535C6A"/>
+                </a:solidFill>
+                <a:latin typeface="Segoe UI"/>
+              </a:rPr>
+              <a:t>Certified by: 2 coaches · 8 Sep</a:t>
             </a:r>
           </a:p>
         </p:txBody>
       </p:sp>
       <p:graphicFrame>
         <p:nvGraphicFramePr>
-          <p:cNvPr id="4" name="Table 3"/>
+          <p:cNvPr id="6" name="Table 5"/>
           <p:cNvGraphicFramePr>
             <a:graphicFrameLocks noGrp="1"/>
           </p:cNvGraphicFramePr>
           <p:nvPr/>
         </p:nvGraphicFramePr>
         <p:xfrm>
-          <a:off x="640080" y="1783080"/>
-          <a:ext cx="10927080" cy="2377440"/>
+          <a:off x="6400800" y="4800600"/>
+          <a:ext cx="10927080" cy="914400"/>
         </p:xfrm>
         <a:graphic>
           <a:graphicData uri="http://schemas.openxmlformats.org/drawingml/2006/table">
@@ -7909,20 +6118,20 @@
                 <a:tableStyleId>{5C22544A-7EE6-4342-B048-85BDC9FD1C3A}</a:tableStyleId>
               </a:tblPr>
               <a:tblGrid>
-                <a:gridCol w="2103120"/>
-                <a:gridCol w="3291840"/>
-                <a:gridCol w="1828800"/>
-                <a:gridCol w="2468880"/>
-                <a:gridCol w="1234440"/>
+                <a:gridCol w="2194560"/>
+                <a:gridCol w="2194560"/>
+                <a:gridCol w="2148840"/>
+                <a:gridCol w="2194560"/>
+                <a:gridCol w="2194560"/>
               </a:tblGrid>
-              <a:tr h="475488">
+              <a:tr h="457200">
                 <a:tc>
                   <a:txBody>
                     <a:bodyPr wrap="square"/>
                     <a:lstStyle/>
                     <a:p>
                       <a:r>
-                        <a:rPr sz="1150" b="1">
+                        <a:rPr sz="1100" b="1">
                           <a:solidFill>
                             <a:srgbClr val="FFFFFF"/>
                           </a:solidFill>
@@ -7932,7 +6141,7 @@
                       </a:r>
                     </a:p>
                   </a:txBody>
-                  <a:tcPr anchor="ctr" marL="82296" marR="54864" marT="18288" marB="18288">
+                  <a:tcPr anchor="ctr" marL="91440" marR="54864" marT="18288" marB="18288">
                     <a:solidFill>
                       <a:srgbClr val="0E7C74"/>
                     </a:solidFill>
@@ -7944,17 +6153,17 @@
                     <a:lstStyle/>
                     <a:p>
                       <a:r>
-                        <a:rPr sz="1150" b="1">
+                        <a:rPr sz="1100" b="1">
                           <a:solidFill>
                             <a:srgbClr val="FFFFFF"/>
                           </a:solidFill>
                           <a:latin typeface="Segoe UI"/>
                         </a:rPr>
-                        <a:t>Call-level fields to certify</a:t>
+                        <a:t>Telesales</a:t>
                       </a:r>
                     </a:p>
                   </a:txBody>
-                  <a:tcPr anchor="ctr" marL="82296" marR="54864" marT="18288" marB="18288">
+                  <a:tcPr anchor="ctr" marL="91440" marR="54864" marT="18288" marB="18288">
                     <a:solidFill>
                       <a:srgbClr val="0E7C74"/>
                     </a:solidFill>
@@ -7966,17 +6175,17 @@
                     <a:lstStyle/>
                     <a:p>
                       <a:r>
-                        <a:rPr sz="1150" b="1">
+                        <a:rPr sz="1100" b="1">
                           <a:solidFill>
                             <a:srgbClr val="FFFFFF"/>
                           </a:solidFill>
                           <a:latin typeface="Segoe UI"/>
                         </a:rPr>
-                        <a:t>KPIs covered</a:t>
+                        <a:t>WCC</a:t>
                       </a:r>
                     </a:p>
                   </a:txBody>
-                  <a:tcPr anchor="ctr" marL="82296" marR="54864" marT="18288" marB="18288">
+                  <a:tcPr anchor="ctr" marL="91440" marR="54864" marT="18288" marB="18288">
                     <a:solidFill>
                       <a:srgbClr val="0E7C74"/>
                     </a:solidFill>
@@ -7988,17 +6197,17 @@
                     <a:lstStyle/>
                     <a:p>
                       <a:r>
-                        <a:rPr sz="1150" b="1">
+                        <a:rPr sz="1100" b="1">
                           <a:solidFill>
                             <a:srgbClr val="FFFFFF"/>
                           </a:solidFill>
                           <a:latin typeface="Segoe UI"/>
                         </a:rPr>
-                        <a:t>Proposed golden calls</a:t>
+                        <a:t>PSO</a:t>
                       </a:r>
                     </a:p>
                   </a:txBody>
-                  <a:tcPr anchor="ctr" marL="82296" marR="54864" marT="18288" marB="18288">
+                  <a:tcPr anchor="ctr" marL="91440" marR="54864" marT="18288" marB="18288">
                     <a:solidFill>
                       <a:srgbClr val="0E7C74"/>
                     </a:solidFill>
@@ -8010,41 +6219,41 @@
                     <a:lstStyle/>
                     <a:p>
                       <a:r>
-                        <a:rPr sz="1150" b="1">
+                        <a:rPr sz="1100" b="1">
                           <a:solidFill>
                             <a:srgbClr val="FFFFFF"/>
                           </a:solidFill>
                           <a:latin typeface="Segoe UI"/>
                         </a:rPr>
-                        <a:t>Reviewers</a:t>
+                        <a:t>Total</a:t>
                       </a:r>
                     </a:p>
                   </a:txBody>
-                  <a:tcPr anchor="ctr" marL="82296" marR="54864" marT="18288" marB="18288">
+                  <a:tcPr anchor="ctr" marL="91440" marR="54864" marT="18288" marB="18288">
                     <a:solidFill>
                       <a:srgbClr val="0E7C74"/>
                     </a:solidFill>
                   </a:tcPr>
                 </a:tc>
               </a:tr>
-              <a:tr h="475488">
+              <a:tr h="457200">
                 <a:tc>
                   <a:txBody>
                     <a:bodyPr wrap="square"/>
                     <a:lstStyle/>
                     <a:p>
                       <a:r>
-                        <a:rPr sz="1300" b="1">
+                        <a:rPr sz="1200" b="1">
                           <a:solidFill>
                             <a:srgbClr val="1A1F27"/>
                           </a:solidFill>
                           <a:latin typeface="Segoe UI"/>
                         </a:rPr>
-                        <a:t>Telesales</a:t>
+                        <a:t>Golden calls</a:t>
                       </a:r>
                     </a:p>
                   </a:txBody>
-                  <a:tcPr anchor="ctr" marL="82296" marR="54864" marT="18288" marB="18288">
+                  <a:tcPr anchor="ctr" marL="91440" marR="54864" marT="18288" marB="18288">
                     <a:solidFill>
                       <a:srgbClr val="FFFFFF"/>
                     </a:solidFill>
@@ -8056,17 +6265,17 @@
                     <a:lstStyle/>
                     <a:p>
                       <a:r>
-                        <a:rPr sz="1300" b="0">
+                        <a:rPr sz="1200" b="0">
                           <a:solidFill>
                             <a:srgbClr val="535C6A"/>
                           </a:solidFill>
                           <a:latin typeface="Segoe UI"/>
                         </a:rPr>
-                        <a:t>≈30</a:t>
+                        <a:t>150</a:t>
                       </a:r>
                     </a:p>
                   </a:txBody>
-                  <a:tcPr anchor="ctr" marL="82296" marR="54864" marT="18288" marB="18288">
+                  <a:tcPr anchor="ctr" marL="91440" marR="54864" marT="18288" marB="18288">
                     <a:solidFill>
                       <a:srgbClr val="FFFFFF"/>
                     </a:solidFill>
@@ -8078,17 +6287,17 @@
                     <a:lstStyle/>
                     <a:p>
                       <a:r>
-                        <a:rPr sz="1300" b="0">
+                        <a:rPr sz="1200" b="0">
                           <a:solidFill>
                             <a:srgbClr val="535C6A"/>
                           </a:solidFill>
                           <a:latin typeface="Segoe UI"/>
                         </a:rPr>
-                        <a:t>12</a:t>
+                        <a:t>150</a:t>
                       </a:r>
                     </a:p>
                   </a:txBody>
-                  <a:tcPr anchor="ctr" marL="82296" marR="54864" marT="18288" marB="18288">
+                  <a:tcPr anchor="ctr" marL="91440" marR="54864" marT="18288" marB="18288">
                     <a:solidFill>
                       <a:srgbClr val="FFFFFF"/>
                     </a:solidFill>
@@ -8100,17 +6309,17 @@
                     <a:lstStyle/>
                     <a:p>
                       <a:r>
-                        <a:rPr sz="1300" b="0">
+                        <a:rPr sz="1200" b="0">
                           <a:solidFill>
                             <a:srgbClr val="535C6A"/>
                           </a:solidFill>
                           <a:latin typeface="Segoe UI"/>
                         </a:rPr>
-                        <a:t>150</a:t>
+                        <a:t>200</a:t>
                       </a:r>
                     </a:p>
                   </a:txBody>
-                  <a:tcPr anchor="ctr" marL="82296" marR="54864" marT="18288" marB="18288">
+                  <a:tcPr anchor="ctr" marL="91440" marR="54864" marT="18288" marB="18288">
                     <a:solidFill>
                       <a:srgbClr val="FFFFFF"/>
                     </a:solidFill>
@@ -8122,321 +6331,7 @@
                     <a:lstStyle/>
                     <a:p>
                       <a:r>
-                        <a:rPr sz="1300" b="0">
-                          <a:solidFill>
-                            <a:srgbClr val="535C6A"/>
-                          </a:solidFill>
-                          <a:latin typeface="Segoe UI"/>
-                        </a:rPr>
-                        <a:t>≥2</a:t>
-                      </a:r>
-                    </a:p>
-                  </a:txBody>
-                  <a:tcPr anchor="ctr" marL="82296" marR="54864" marT="18288" marB="18288">
-                    <a:solidFill>
-                      <a:srgbClr val="FFFFFF"/>
-                    </a:solidFill>
-                  </a:tcPr>
-                </a:tc>
-              </a:tr>
-              <a:tr h="475488">
-                <a:tc>
-                  <a:txBody>
-                    <a:bodyPr wrap="square"/>
-                    <a:lstStyle/>
-                    <a:p>
-                      <a:r>
-                        <a:rPr sz="1300" b="1">
-                          <a:solidFill>
-                            <a:srgbClr val="1A1F27"/>
-                          </a:solidFill>
-                          <a:latin typeface="Segoe UI"/>
-                        </a:rPr>
-                        <a:t>WCC</a:t>
-                      </a:r>
-                    </a:p>
-                  </a:txBody>
-                  <a:tcPr anchor="ctr" marL="82296" marR="54864" marT="18288" marB="18288">
-                    <a:solidFill>
-                      <a:srgbClr val="F7F9F8"/>
-                    </a:solidFill>
-                  </a:tcPr>
-                </a:tc>
-                <a:tc>
-                  <a:txBody>
-                    <a:bodyPr wrap="square"/>
-                    <a:lstStyle/>
-                    <a:p>
-                      <a:r>
-                        <a:rPr sz="1300" b="0">
-                          <a:solidFill>
-                            <a:srgbClr val="535C6A"/>
-                          </a:solidFill>
-                          <a:latin typeface="Segoe UI"/>
-                        </a:rPr>
-                        <a:t>≈40</a:t>
-                      </a:r>
-                    </a:p>
-                  </a:txBody>
-                  <a:tcPr anchor="ctr" marL="82296" marR="54864" marT="18288" marB="18288">
-                    <a:solidFill>
-                      <a:srgbClr val="F7F9F8"/>
-                    </a:solidFill>
-                  </a:tcPr>
-                </a:tc>
-                <a:tc>
-                  <a:txBody>
-                    <a:bodyPr wrap="square"/>
-                    <a:lstStyle/>
-                    <a:p>
-                      <a:r>
-                        <a:rPr sz="1300" b="0">
-                          <a:solidFill>
-                            <a:srgbClr val="535C6A"/>
-                          </a:solidFill>
-                          <a:latin typeface="Segoe UI"/>
-                        </a:rPr>
-                        <a:t>11</a:t>
-                      </a:r>
-                    </a:p>
-                  </a:txBody>
-                  <a:tcPr anchor="ctr" marL="82296" marR="54864" marT="18288" marB="18288">
-                    <a:solidFill>
-                      <a:srgbClr val="F7F9F8"/>
-                    </a:solidFill>
-                  </a:tcPr>
-                </a:tc>
-                <a:tc>
-                  <a:txBody>
-                    <a:bodyPr wrap="square"/>
-                    <a:lstStyle/>
-                    <a:p>
-                      <a:r>
-                        <a:rPr sz="1300" b="0">
-                          <a:solidFill>
-                            <a:srgbClr val="535C6A"/>
-                          </a:solidFill>
-                          <a:latin typeface="Segoe UI"/>
-                        </a:rPr>
-                        <a:t>150</a:t>
-                      </a:r>
-                    </a:p>
-                  </a:txBody>
-                  <a:tcPr anchor="ctr" marL="82296" marR="54864" marT="18288" marB="18288">
-                    <a:solidFill>
-                      <a:srgbClr val="F7F9F8"/>
-                    </a:solidFill>
-                  </a:tcPr>
-                </a:tc>
-                <a:tc>
-                  <a:txBody>
-                    <a:bodyPr wrap="square"/>
-                    <a:lstStyle/>
-                    <a:p>
-                      <a:r>
-                        <a:rPr sz="1300" b="0">
-                          <a:solidFill>
-                            <a:srgbClr val="535C6A"/>
-                          </a:solidFill>
-                          <a:latin typeface="Segoe UI"/>
-                        </a:rPr>
-                        <a:t>≥2</a:t>
-                      </a:r>
-                    </a:p>
-                  </a:txBody>
-                  <a:tcPr anchor="ctr" marL="82296" marR="54864" marT="18288" marB="18288">
-                    <a:solidFill>
-                      <a:srgbClr val="F7F9F8"/>
-                    </a:solidFill>
-                  </a:tcPr>
-                </a:tc>
-              </a:tr>
-              <a:tr h="475488">
-                <a:tc>
-                  <a:txBody>
-                    <a:bodyPr wrap="square"/>
-                    <a:lstStyle/>
-                    <a:p>
-                      <a:r>
-                        <a:rPr sz="1300" b="1">
-                          <a:solidFill>
-                            <a:srgbClr val="1A1F27"/>
-                          </a:solidFill>
-                          <a:latin typeface="Segoe UI"/>
-                        </a:rPr>
-                        <a:t>PSO</a:t>
-                      </a:r>
-                    </a:p>
-                  </a:txBody>
-                  <a:tcPr anchor="ctr" marL="82296" marR="54864" marT="18288" marB="18288">
-                    <a:solidFill>
-                      <a:srgbClr val="FFFFFF"/>
-                    </a:solidFill>
-                  </a:tcPr>
-                </a:tc>
-                <a:tc>
-                  <a:txBody>
-                    <a:bodyPr wrap="square"/>
-                    <a:lstStyle/>
-                    <a:p>
-                      <a:r>
-                        <a:rPr sz="1300" b="0">
-                          <a:solidFill>
-                            <a:srgbClr val="535C6A"/>
-                          </a:solidFill>
-                          <a:latin typeface="Segoe UI"/>
-                        </a:rPr>
-                        <a:t>≈60</a:t>
-                      </a:r>
-                    </a:p>
-                  </a:txBody>
-                  <a:tcPr anchor="ctr" marL="82296" marR="54864" marT="18288" marB="18288">
-                    <a:solidFill>
-                      <a:srgbClr val="FFFFFF"/>
-                    </a:solidFill>
-                  </a:tcPr>
-                </a:tc>
-                <a:tc>
-                  <a:txBody>
-                    <a:bodyPr wrap="square"/>
-                    <a:lstStyle/>
-                    <a:p>
-                      <a:r>
-                        <a:rPr sz="1300" b="0">
-                          <a:solidFill>
-                            <a:srgbClr val="535C6A"/>
-                          </a:solidFill>
-                          <a:latin typeface="Segoe UI"/>
-                        </a:rPr>
-                        <a:t>24</a:t>
-                      </a:r>
-                    </a:p>
-                  </a:txBody>
-                  <a:tcPr anchor="ctr" marL="82296" marR="54864" marT="18288" marB="18288">
-                    <a:solidFill>
-                      <a:srgbClr val="FFFFFF"/>
-                    </a:solidFill>
-                  </a:tcPr>
-                </a:tc>
-                <a:tc>
-                  <a:txBody>
-                    <a:bodyPr wrap="square"/>
-                    <a:lstStyle/>
-                    <a:p>
-                      <a:r>
-                        <a:rPr sz="1300" b="0">
-                          <a:solidFill>
-                            <a:srgbClr val="535C6A"/>
-                          </a:solidFill>
-                          <a:latin typeface="Segoe UI"/>
-                        </a:rPr>
-                        <a:t>200</a:t>
-                      </a:r>
-                    </a:p>
-                  </a:txBody>
-                  <a:tcPr anchor="ctr" marL="82296" marR="54864" marT="18288" marB="18288">
-                    <a:solidFill>
-                      <a:srgbClr val="FFFFFF"/>
-                    </a:solidFill>
-                  </a:tcPr>
-                </a:tc>
-                <a:tc>
-                  <a:txBody>
-                    <a:bodyPr wrap="square"/>
-                    <a:lstStyle/>
-                    <a:p>
-                      <a:r>
-                        <a:rPr sz="1300" b="0">
-                          <a:solidFill>
-                            <a:srgbClr val="535C6A"/>
-                          </a:solidFill>
-                          <a:latin typeface="Segoe UI"/>
-                        </a:rPr>
-                        <a:t>≥2</a:t>
-                      </a:r>
-                    </a:p>
-                  </a:txBody>
-                  <a:tcPr anchor="ctr" marL="82296" marR="54864" marT="18288" marB="18288">
-                    <a:solidFill>
-                      <a:srgbClr val="FFFFFF"/>
-                    </a:solidFill>
-                  </a:tcPr>
-                </a:tc>
-              </a:tr>
-              <a:tr h="475488">
-                <a:tc>
-                  <a:txBody>
-                    <a:bodyPr wrap="square"/>
-                    <a:lstStyle/>
-                    <a:p>
-                      <a:r>
-                        <a:rPr sz="1300" b="1">
-                          <a:solidFill>
-                            <a:srgbClr val="1A1F27"/>
-                          </a:solidFill>
-                          <a:latin typeface="Segoe UI"/>
-                        </a:rPr>
-                        <a:t>Total</a:t>
-                      </a:r>
-                    </a:p>
-                  </a:txBody>
-                  <a:tcPr anchor="ctr" marL="82296" marR="54864" marT="18288" marB="18288">
-                    <a:solidFill>
-                      <a:srgbClr val="F7F9F8"/>
-                    </a:solidFill>
-                  </a:tcPr>
-                </a:tc>
-                <a:tc>
-                  <a:txBody>
-                    <a:bodyPr wrap="square"/>
-                    <a:lstStyle/>
-                    <a:p>
-                      <a:r>
-                        <a:rPr sz="1300" b="0">
-                          <a:solidFill>
-                            <a:srgbClr val="535C6A"/>
-                          </a:solidFill>
-                          <a:latin typeface="Segoe UI"/>
-                        </a:rPr>
-                        <a:t>—</a:t>
-                      </a:r>
-                    </a:p>
-                  </a:txBody>
-                  <a:tcPr anchor="ctr" marL="82296" marR="54864" marT="18288" marB="18288">
-                    <a:solidFill>
-                      <a:srgbClr val="F7F9F8"/>
-                    </a:solidFill>
-                  </a:tcPr>
-                </a:tc>
-                <a:tc>
-                  <a:txBody>
-                    <a:bodyPr wrap="square"/>
-                    <a:lstStyle/>
-                    <a:p>
-                      <a:r>
-                        <a:rPr sz="1300" b="0">
-                          <a:solidFill>
-                            <a:srgbClr val="535C6A"/>
-                          </a:solidFill>
-                          <a:latin typeface="Segoe UI"/>
-                        </a:rPr>
-                        <a:t>47</a:t>
-                      </a:r>
-                    </a:p>
-                  </a:txBody>
-                  <a:tcPr anchor="ctr" marL="82296" marR="54864" marT="18288" marB="18288">
-                    <a:solidFill>
-                      <a:srgbClr val="F7F9F8"/>
-                    </a:solidFill>
-                  </a:tcPr>
-                </a:tc>
-                <a:tc>
-                  <a:txBody>
-                    <a:bodyPr wrap="square"/>
-                    <a:lstStyle/>
-                    <a:p>
-                      <a:r>
-                        <a:rPr sz="1300" b="0">
+                        <a:rPr sz="1200" b="0">
                           <a:solidFill>
                             <a:srgbClr val="535C6A"/>
                           </a:solidFill>
@@ -8446,31 +6341,9 @@
                       </a:r>
                     </a:p>
                   </a:txBody>
-                  <a:tcPr anchor="ctr" marL="82296" marR="54864" marT="18288" marB="18288">
+                  <a:tcPr anchor="ctr" marL="91440" marR="54864" marT="18288" marB="18288">
                     <a:solidFill>
-                      <a:srgbClr val="F7F9F8"/>
-                    </a:solidFill>
-                  </a:tcPr>
-                </a:tc>
-                <a:tc>
-                  <a:txBody>
-                    <a:bodyPr wrap="square"/>
-                    <a:lstStyle/>
-                    <a:p>
-                      <a:r>
-                        <a:rPr sz="1300" b="0">
-                          <a:solidFill>
-                            <a:srgbClr val="535C6A"/>
-                          </a:solidFill>
-                          <a:latin typeface="Segoe UI"/>
-                        </a:rPr>
-                        <a:t>—</a:t>
-                      </a:r>
-                    </a:p>
-                  </a:txBody>
-                  <a:tcPr anchor="ctr" marL="82296" marR="54864" marT="18288" marB="18288">
-                    <a:solidFill>
-                      <a:srgbClr val="F7F9F8"/>
+                      <a:srgbClr val="FFFFFF"/>
                     </a:solidFill>
                   </a:tcPr>
                 </a:tc>
@@ -8481,71 +6354,57 @@
       </p:graphicFrame>
       <p:sp>
         <p:nvSpPr>
-          <p:cNvPr id="5" name="TextBox 4"/>
-          <p:cNvSpPr txBox="1"/>
+          <p:cNvPr id="7" name="Rounded Rectangle 6"/>
+          <p:cNvSpPr/>
           <p:nvPr/>
         </p:nvSpPr>
         <p:spPr>
           <a:xfrm>
-            <a:off x="685800" y="4160520"/>
-            <a:ext cx="10881360" cy="4206240"/>
+            <a:off x="640080" y="5852160"/>
+            <a:ext cx="10927080" cy="749808"/>
           </a:xfrm>
-          <a:prstGeom prst="rect">
+          <a:prstGeom prst="roundRect">
             <a:avLst/>
           </a:prstGeom>
-          <a:noFill/>
+          <a:solidFill>
+            <a:srgbClr val="E1F0EE"/>
+          </a:solidFill>
+          <a:ln>
+            <a:noFill/>
+          </a:ln>
+          <a:effectLst/>
         </p:spPr>
-        <p:txBody>
-          <a:bodyPr wrap="square">
-            <a:spAutoFit/>
-          </a:bodyPr>
+        <p:style>
+          <a:lnRef idx="1">
+            <a:schemeClr val="accent1"/>
+          </a:lnRef>
+          <a:fillRef idx="3">
+            <a:schemeClr val="accent1"/>
+          </a:fillRef>
+          <a:effectRef idx="2">
+            <a:schemeClr val="accent1"/>
+          </a:effectRef>
+          <a:fontRef idx="minor">
+            <a:schemeClr val="lt1"/>
+          </a:fontRef>
+        </p:style>
+        <p:txBody>
+          <a:bodyPr rtlCol="0" anchor="ctr" wrap="square" lIns="201168" rIns="201168"/>
           <a:lstStyle/>
           <a:p>
-            <a:pPr>
-              <a:spcAft>
-                <a:spcPts val="1100"/>
-              </a:spcAft>
-            </a:pPr>
-            <a:r>
-              <a:rPr sz="1450" b="0">
-                <a:solidFill>
-                  <a:srgbClr val="1A1F27"/>
+            <a:pPr algn="ctr">
+              <a:spcAft>
+                <a:spcPts val="0"/>
+              </a:spcAft>
+            </a:pPr>
+            <a:r>
+              <a:rPr sz="1400" b="1">
+                <a:solidFill>
+                  <a:srgbClr val="0A5B55"/>
                 </a:solidFill>
                 <a:latin typeface="Segoe UI"/>
               </a:rPr>
-              <a:t>Certify at the call level (not the aggregate) — coaches confirm each field + its evidence.</a:t>
-            </a:r>
-          </a:p>
-          <a:p>
-            <a:pPr>
-              <a:spcAft>
-                <a:spcPts val="1100"/>
-              </a:spcAft>
-            </a:pPr>
-            <a:r>
-              <a:rPr sz="1450" b="0">
-                <a:solidFill>
-                  <a:srgbClr val="1A1F27"/>
-                </a:solidFill>
-                <a:latin typeface="Segoe UI"/>
-              </a:rPr>
-              <a:t>Coverage per KPI: ≥ 15 positive AND ≥ 15 negative certified calls; rare fields (escalations, saves, Poor CX) over-sampled.</a:t>
-            </a:r>
-          </a:p>
-          <a:p>
-            <a:pPr>
-              <a:spcAft>
-                <a:spcPts val="1100"/>
-              </a:spcAft>
-            </a:pPr>
-            <a:r>
-              <a:rPr sz="1450" b="0">
-                <a:solidFill>
-                  <a:srgbClr val="1A1F27"/>
-                </a:solidFill>
-                <a:latin typeface="Segoe UI"/>
-              </a:rPr>
-              <a:t>Keep only calls where ≥ 2 reviewers agree; disagreement = the definition needs fixing.</a:t>
+              <a:t>A transcript is “golden” only when 2+ coaches agree on its answers. Disagreement means the definition needs fixing first.</a:t>
             </a:r>
           </a:p>
         </p:txBody>
@@ -8596,6 +6455,7 @@
           <a:ln>
             <a:noFill/>
           </a:ln>
+          <a:effectLst/>
         </p:spPr>
         <p:style>
           <a:lnRef idx="1">
@@ -8627,8 +6487,8 @@
         </p:nvSpPr>
         <p:spPr>
           <a:xfrm>
-            <a:off x="640080" y="384048"/>
-            <a:ext cx="11155680" cy="1280160"/>
+            <a:off x="640080" y="365760"/>
+            <a:ext cx="11247120" cy="1234440"/>
           </a:xfrm>
           <a:prstGeom prst="rect">
             <a:avLst/>
@@ -8643,11 +6503,11 @@
           <a:p>
             <a:pPr>
               <a:spcAft>
-                <a:spcPts val="500"/>
-              </a:spcAft>
-            </a:pPr>
-            <a:r>
-              <a:rPr sz="1250" b="1">
+                <a:spcPts val="400"/>
+              </a:spcAft>
+            </a:pPr>
+            <a:r>
+              <a:rPr sz="1200" b="1">
                 <a:solidFill>
                   <a:srgbClr val="0E7C74"/>
                 </a:solidFill>
@@ -8663,251 +6523,355 @@
               </a:spcAft>
             </a:pPr>
             <a:r>
-              <a:rPr sz="2700" b="1">
+              <a:rPr sz="2500" b="1">
                 <a:solidFill>
                   <a:srgbClr val="1A1F27"/>
                 </a:solidFill>
                 <a:latin typeface="Segoe UI"/>
               </a:rPr>
-              <a:t>What's there  /  what we need</a:t>
-            </a:r>
-          </a:p>
-        </p:txBody>
-      </p:sp>
-      <p:sp>
-        <p:nvSpPr>
-          <p:cNvPr id="4" name="TextBox 3"/>
-          <p:cNvSpPr txBox="1"/>
+              <a:t>What's there  vs.  what we need</a:t>
+            </a:r>
+          </a:p>
+        </p:txBody>
+      </p:sp>
+      <p:sp>
+        <p:nvSpPr>
+          <p:cNvPr id="4" name="Rounded Rectangle 3"/>
+          <p:cNvSpPr/>
           <p:nvPr/>
         </p:nvSpPr>
         <p:spPr>
           <a:xfrm>
-            <a:off x="685800" y="1828800"/>
-            <a:ext cx="5303520" cy="4206240"/>
+            <a:off x="640080" y="1874519"/>
+            <a:ext cx="5486400" cy="3794760"/>
           </a:xfrm>
-          <a:prstGeom prst="rect">
+          <a:prstGeom prst="roundRect">
             <a:avLst/>
           </a:prstGeom>
-          <a:noFill/>
+          <a:solidFill>
+            <a:srgbClr val="E4F3EB"/>
+          </a:solidFill>
+          <a:ln w="9525">
+            <a:solidFill>
+              <a:srgbClr val="D9DFE5"/>
+            </a:solidFill>
+          </a:ln>
+          <a:effectLst/>
         </p:spPr>
-        <p:txBody>
-          <a:bodyPr wrap="square">
-            <a:spAutoFit/>
-          </a:bodyPr>
+        <p:style>
+          <a:lnRef idx="1">
+            <a:schemeClr val="accent1"/>
+          </a:lnRef>
+          <a:fillRef idx="3">
+            <a:schemeClr val="accent1"/>
+          </a:fillRef>
+          <a:effectRef idx="2">
+            <a:schemeClr val="accent1"/>
+          </a:effectRef>
+          <a:fontRef idx="minor">
+            <a:schemeClr val="lt1"/>
+          </a:fontRef>
+        </p:style>
+        <p:txBody>
+          <a:bodyPr rtlCol="0" anchor="ctr" wrap="square" lIns="146304" rIns="128016" tIns="118872" bIns="91440"/>
           <a:lstStyle/>
           <a:p>
+            <a:pPr algn="ctr">
+              <a:spcAft>
+                <a:spcPts val="700"/>
+              </a:spcAft>
+            </a:pPr>
+            <a:r>
+              <a:rPr sz="1250" b="1">
+                <a:solidFill>
+                  <a:srgbClr val="2E8B5E"/>
+                </a:solidFill>
+                <a:latin typeface="Segoe UI"/>
+              </a:rPr>
+              <a:t>WHAT'S THERE</a:t>
+            </a:r>
+          </a:p>
+          <a:p>
             <a:pPr>
               <a:spcAft>
-                <a:spcPts val="1100"/>
-              </a:spcAft>
-            </a:pPr>
-            <a:r>
-              <a:rPr sz="1500" b="0">
+                <a:spcPts val="300"/>
+              </a:spcAft>
+            </a:pPr>
+            <a:r>
+              <a:rPr sz="1150" b="0">
+                <a:solidFill>
+                  <a:srgbClr val="1A1F27"/>
+                </a:solidFill>
+                <a:latin typeface="Segoe UI"/>
+              </a:rPr>
+              <a:t>All 47 KPIs mapped: field → calc → unit</a:t>
+            </a:r>
+          </a:p>
+          <a:p>
+            <a:pPr>
+              <a:spcAft>
+                <a:spcPts val="300"/>
+              </a:spcAft>
+            </a:pPr>
+            <a:r>
+              <a:rPr sz="1150" b="0">
+                <a:solidFill>
+                  <a:srgbClr val="1A1F27"/>
+                </a:solidFill>
+                <a:latin typeface="Segoe UI"/>
+              </a:rPr>
+              <a:t>3 programs documented end to end</a:t>
+            </a:r>
+          </a:p>
+          <a:p>
+            <a:pPr>
+              <a:spcAft>
+                <a:spcPts val="300"/>
+              </a:spcAft>
+            </a:pPr>
+            <a:r>
+              <a:rPr sz="1150" b="0">
+                <a:solidFill>
+                  <a:srgbClr val="1A1F27"/>
+                </a:solidFill>
+                <a:latin typeface="Segoe UI"/>
+              </a:rPr>
+              <a:t>Evidence trail behind every score</a:t>
+            </a:r>
+          </a:p>
+          <a:p>
+            <a:pPr>
+              <a:spcAft>
+                <a:spcPts val="300"/>
+              </a:spcAft>
+            </a:pPr>
+            <a:r>
+              <a:rPr sz="1150" b="0">
+                <a:solidFill>
+                  <a:srgbClr val="1A1F27"/>
+                </a:solidFill>
+                <a:latin typeface="Segoe UI"/>
+              </a:rPr>
+              <a:t>Count-vs-rate labelling fixed</a:t>
+            </a:r>
+          </a:p>
+          <a:p>
+            <a:pPr>
+              <a:spcAft>
+                <a:spcPts val="300"/>
+              </a:spcAft>
+            </a:pPr>
+            <a:r>
+              <a:rPr sz="1150" b="0">
+                <a:solidFill>
+                  <a:srgbClr val="1A1F27"/>
+                </a:solidFill>
+                <a:latin typeface="Segoe UI"/>
+              </a:rPr>
+              <a:t>Evaluation platform integrated</a:t>
+            </a:r>
+          </a:p>
+          <a:p>
+            <a:pPr>
+              <a:spcAft>
+                <a:spcPts val="300"/>
+              </a:spcAft>
+            </a:pPr>
+            <a:r>
+              <a:rPr sz="1150" b="0">
+                <a:solidFill>
+                  <a:srgbClr val="1A1F27"/>
+                </a:solidFill>
+                <a:latin typeface="Segoe UI"/>
+              </a:rPr>
+              <a:t/>
+            </a:r>
+          </a:p>
+          <a:p>
+            <a:pPr>
+              <a:spcAft>
+                <a:spcPts val="300"/>
+              </a:spcAft>
+            </a:pPr>
+            <a:r>
+              <a:rPr sz="1150" b="0">
                 <a:solidFill>
                   <a:srgbClr val="2E8B5E"/>
                 </a:solidFill>
                 <a:latin typeface="Segoe UI"/>
               </a:rPr>
-              <a:t>WHAT'S THERE</a:t>
-            </a:r>
-          </a:p>
-          <a:p>
-            <a:pPr>
-              <a:spcAft>
-                <a:spcPts val="1100"/>
-              </a:spcAft>
-            </a:pPr>
-            <a:r>
-              <a:rPr sz="1500" b="0">
-                <a:solidFill>
-                  <a:srgbClr val="535C6A"/>
-                </a:solidFill>
-                <a:latin typeface="Segoe UI"/>
-              </a:rPr>
-              <a:t>All 47 KPIs mapped (field → calc → unit)</a:t>
-            </a:r>
-          </a:p>
-          <a:p>
-            <a:pPr>
-              <a:spcAft>
-                <a:spcPts val="1100"/>
-              </a:spcAft>
-            </a:pPr>
-            <a:r>
-              <a:rPr sz="1500" b="0">
-                <a:solidFill>
-                  <a:srgbClr val="535C6A"/>
-                </a:solidFill>
-                <a:latin typeface="Segoe UI"/>
-              </a:rPr>
-              <a:t>3 programs documented</a:t>
-            </a:r>
-          </a:p>
-          <a:p>
-            <a:pPr>
-              <a:spcAft>
-                <a:spcPts val="1100"/>
-              </a:spcAft>
-            </a:pPr>
-            <a:r>
-              <a:rPr sz="1500" b="0">
-                <a:solidFill>
-                  <a:srgbClr val="535C6A"/>
-                </a:solidFill>
-                <a:latin typeface="Segoe UI"/>
-              </a:rPr>
-              <a:t>Evidence trail on every judgment</a:t>
-            </a:r>
-          </a:p>
-          <a:p>
-            <a:pPr>
-              <a:spcAft>
-                <a:spcPts val="1100"/>
-              </a:spcAft>
-            </a:pPr>
-            <a:r>
-              <a:rPr sz="1500" b="0">
-                <a:solidFill>
-                  <a:srgbClr val="535C6A"/>
-                </a:solidFill>
-                <a:latin typeface="Segoe UI"/>
-              </a:rPr>
-              <a:t>Labelling fixed (count vs rate)</a:t>
-            </a:r>
-          </a:p>
-          <a:p>
-            <a:pPr>
-              <a:spcAft>
-                <a:spcPts val="1100"/>
-              </a:spcAft>
-            </a:pPr>
-            <a:r>
-              <a:rPr sz="1500" b="0">
-                <a:solidFill>
-                  <a:srgbClr val="535C6A"/>
-                </a:solidFill>
-                <a:latin typeface="Segoe UI"/>
-              </a:rPr>
-              <a:t>Evaluation platform integrated</a:t>
-            </a:r>
-          </a:p>
-        </p:txBody>
-      </p:sp>
-      <p:sp>
-        <p:nvSpPr>
-          <p:cNvPr id="5" name="TextBox 4"/>
-          <p:cNvSpPr txBox="1"/>
+              <a:t>A solid, documented foundation.</a:t>
+            </a:r>
+          </a:p>
+        </p:txBody>
+      </p:sp>
+      <p:sp>
+        <p:nvSpPr>
+          <p:cNvPr id="5" name="Rounded Rectangle 4"/>
+          <p:cNvSpPr/>
           <p:nvPr/>
         </p:nvSpPr>
         <p:spPr>
           <a:xfrm>
-            <a:off x="6355080" y="1828800"/>
-            <a:ext cx="5120640" cy="4206240"/>
+            <a:off x="6355080" y="1874519"/>
+            <a:ext cx="5212080" cy="3794760"/>
           </a:xfrm>
-          <a:prstGeom prst="rect">
+          <a:prstGeom prst="roundRect">
             <a:avLst/>
           </a:prstGeom>
-          <a:noFill/>
+          <a:solidFill>
+            <a:srgbClr val="F6ECD6"/>
+          </a:solidFill>
+          <a:ln w="9525">
+            <a:solidFill>
+              <a:srgbClr val="D9DFE5"/>
+            </a:solidFill>
+          </a:ln>
+          <a:effectLst/>
         </p:spPr>
-        <p:txBody>
-          <a:bodyPr wrap="square">
-            <a:spAutoFit/>
-          </a:bodyPr>
+        <p:style>
+          <a:lnRef idx="1">
+            <a:schemeClr val="accent1"/>
+          </a:lnRef>
+          <a:fillRef idx="3">
+            <a:schemeClr val="accent1"/>
+          </a:fillRef>
+          <a:effectRef idx="2">
+            <a:schemeClr val="accent1"/>
+          </a:effectRef>
+          <a:fontRef idx="minor">
+            <a:schemeClr val="lt1"/>
+          </a:fontRef>
+        </p:style>
+        <p:txBody>
+          <a:bodyPr rtlCol="0" anchor="ctr" wrap="square" lIns="146304" rIns="128016" tIns="118872" bIns="91440"/>
           <a:lstStyle/>
           <a:p>
+            <a:pPr algn="ctr">
+              <a:spcAft>
+                <a:spcPts val="700"/>
+              </a:spcAft>
+            </a:pPr>
+            <a:r>
+              <a:rPr sz="1250" b="1">
+                <a:solidFill>
+                  <a:srgbClr val="A96E12"/>
+                </a:solidFill>
+                <a:latin typeface="Segoe UI"/>
+              </a:rPr>
+              <a:t>WHAT WE NEED</a:t>
+            </a:r>
+          </a:p>
+          <a:p>
             <a:pPr>
               <a:spcAft>
-                <a:spcPts val="1100"/>
-              </a:spcAft>
-            </a:pPr>
-            <a:r>
-              <a:rPr sz="1500" b="0">
+                <a:spcPts val="300"/>
+              </a:spcAft>
+            </a:pPr>
+            <a:r>
+              <a:rPr sz="1150" b="0">
+                <a:solidFill>
+                  <a:srgbClr val="1A1F27"/>
+                </a:solidFill>
+                <a:latin typeface="Segoe UI"/>
+              </a:rPr>
+              <a:t>Golden data (certified calls) — with coaches</a:t>
+            </a:r>
+          </a:p>
+          <a:p>
+            <a:pPr>
+              <a:spcAft>
+                <a:spcPts val="300"/>
+              </a:spcAft>
+            </a:pPr>
+            <a:r>
+              <a:rPr sz="1150" b="0">
+                <a:solidFill>
+                  <a:srgbClr val="1A1F27"/>
+                </a:solidFill>
+                <a:latin typeface="Segoe UI"/>
+              </a:rPr>
+              <a:t>Roll-up score re-specified per program</a:t>
+            </a:r>
+          </a:p>
+          <a:p>
+            <a:pPr>
+              <a:spcAft>
+                <a:spcPts val="300"/>
+              </a:spcAft>
+            </a:pPr>
+            <a:r>
+              <a:rPr sz="1150" b="0">
+                <a:solidFill>
+                  <a:srgbClr val="1A1F27"/>
+                </a:solidFill>
+                <a:latin typeface="Segoe UI"/>
+              </a:rPr>
+              <a:t>WCC prompt aligned to its scorecard</a:t>
+            </a:r>
+          </a:p>
+          <a:p>
+            <a:pPr>
+              <a:spcAft>
+                <a:spcPts val="300"/>
+              </a:spcAft>
+            </a:pPr>
+            <a:r>
+              <a:rPr sz="1150" b="0">
+                <a:solidFill>
+                  <a:srgbClr val="1A1F27"/>
+                </a:solidFill>
+                <a:latin typeface="Segoe UI"/>
+              </a:rPr>
+              <a:t>Acceptance threshold per KPI</a:t>
+            </a:r>
+          </a:p>
+          <a:p>
+            <a:pPr>
+              <a:spcAft>
+                <a:spcPts val="300"/>
+              </a:spcAft>
+            </a:pPr>
+            <a:r>
+              <a:rPr sz="1150" b="0">
+                <a:solidFill>
+                  <a:srgbClr val="1A1F27"/>
+                </a:solidFill>
+                <a:latin typeface="Segoe UI"/>
+              </a:rPr>
+              <a:t>A few definitions confirmed by SMEs</a:t>
+            </a:r>
+          </a:p>
+          <a:p>
+            <a:pPr>
+              <a:spcAft>
+                <a:spcPts val="300"/>
+              </a:spcAft>
+            </a:pPr>
+            <a:r>
+              <a:rPr sz="1150" b="0">
+                <a:solidFill>
+                  <a:srgbClr val="1A1F27"/>
+                </a:solidFill>
+                <a:latin typeface="Segoe UI"/>
+              </a:rPr>
+              <a:t/>
+            </a:r>
+          </a:p>
+          <a:p>
+            <a:pPr>
+              <a:spcAft>
+                <a:spcPts val="300"/>
+              </a:spcAft>
+            </a:pPr>
+            <a:r>
+              <a:rPr sz="1150" b="0">
                 <a:solidFill>
                   <a:srgbClr val="A96E12"/>
                 </a:solidFill>
                 <a:latin typeface="Segoe UI"/>
               </a:rPr>
-              <a:t>WHAT WE NEED</a:t>
-            </a:r>
-          </a:p>
-          <a:p>
-            <a:pPr>
-              <a:spcAft>
-                <a:spcPts val="1100"/>
-              </a:spcAft>
-            </a:pPr>
-            <a:r>
-              <a:rPr sz="1500" b="0">
-                <a:solidFill>
-                  <a:srgbClr val="535C6A"/>
-                </a:solidFill>
-                <a:latin typeface="Segoe UI"/>
-              </a:rPr>
-              <a:t>Golden data (table on previous slide)</a:t>
-            </a:r>
-          </a:p>
-          <a:p>
-            <a:pPr>
-              <a:spcAft>
-                <a:spcPts val="1100"/>
-              </a:spcAft>
-            </a:pPr>
-            <a:r>
-              <a:rPr sz="1500" b="0">
-                <a:solidFill>
-                  <a:srgbClr val="535C6A"/>
-                </a:solidFill>
-                <a:latin typeface="Segoe UI"/>
-              </a:rPr>
-              <a:t>Roll-up score re-specified per program</a:t>
-            </a:r>
-          </a:p>
-          <a:p>
-            <a:pPr>
-              <a:spcAft>
-                <a:spcPts val="1100"/>
-              </a:spcAft>
-            </a:pPr>
-            <a:r>
-              <a:rPr sz="1500" b="0">
-                <a:solidFill>
-                  <a:srgbClr val="535C6A"/>
-                </a:solidFill>
-                <a:latin typeface="Segoe UI"/>
-              </a:rPr>
-              <a:t>WCC prompt aligned to its scorecard</a:t>
-            </a:r>
-          </a:p>
-          <a:p>
-            <a:pPr>
-              <a:spcAft>
-                <a:spcPts val="1100"/>
-              </a:spcAft>
-            </a:pPr>
-            <a:r>
-              <a:rPr sz="1500" b="0">
-                <a:solidFill>
-                  <a:srgbClr val="535C6A"/>
-                </a:solidFill>
-                <a:latin typeface="Segoe UI"/>
-              </a:rPr>
-              <a:t>Acceptance threshold per KPI</a:t>
-            </a:r>
-          </a:p>
-          <a:p>
-            <a:pPr>
-              <a:spcAft>
-                <a:spcPts val="1100"/>
-              </a:spcAft>
-            </a:pPr>
-            <a:r>
-              <a:rPr sz="1500" b="0">
-                <a:solidFill>
-                  <a:srgbClr val="535C6A"/>
-                </a:solidFill>
-                <a:latin typeface="Segoe UI"/>
-              </a:rPr>
-              <a:t>A few definitions confirmed by SMEs</a:t>
+              <a:t>Mostly business input, not code.</a:t>
             </a:r>
           </a:p>
         </p:txBody>
@@ -8958,6 +6922,7 @@
           <a:ln>
             <a:noFill/>
           </a:ln>
+          <a:effectLst/>
         </p:spPr>
         <p:style>
           <a:lnRef idx="1">
@@ -8989,8 +6954,8 @@
         </p:nvSpPr>
         <p:spPr>
           <a:xfrm>
-            <a:off x="640080" y="384048"/>
-            <a:ext cx="11155680" cy="1280160"/>
+            <a:off x="640080" y="365760"/>
+            <a:ext cx="11247120" cy="1234440"/>
           </a:xfrm>
           <a:prstGeom prst="rect">
             <a:avLst/>
@@ -9005,17 +6970,17 @@
           <a:p>
             <a:pPr>
               <a:spcAft>
-                <a:spcPts val="500"/>
-              </a:spcAft>
-            </a:pPr>
-            <a:r>
-              <a:rPr sz="1250" b="1">
+                <a:spcPts val="400"/>
+              </a:spcAft>
+            </a:pPr>
+            <a:r>
+              <a:rPr sz="1200" b="1">
                 <a:solidFill>
                   <a:srgbClr val="0E7C74"/>
                 </a:solidFill>
                 <a:latin typeface="Segoe UI"/>
               </a:rPr>
-              <a:t>WHAT WE ASK THE BUSINESS</a:t>
+              <a:t>WHAT WE NEED FROM YOU, AND WHAT'S NEXT</a:t>
             </a:r>
           </a:p>
           <a:p>
@@ -9025,13 +6990,13 @@
               </a:spcAft>
             </a:pPr>
             <a:r>
-              <a:rPr sz="2700" b="1">
+              <a:rPr sz="2500" b="1">
                 <a:solidFill>
                   <a:srgbClr val="1A1F27"/>
                 </a:solidFill>
                 <a:latin typeface="Segoe UI"/>
               </a:rPr>
-              <a:t>Five focused requests</a:t>
+              <a:t>Five focused asks</a:t>
             </a:r>
           </a:p>
         </p:txBody>
@@ -9045,8 +7010,8 @@
           <p:nvPr/>
         </p:nvGraphicFramePr>
         <p:xfrm>
-          <a:off x="640080" y="1783080"/>
-          <a:ext cx="10927080" cy="3291840"/>
+          <a:off x="640080" y="1874519"/>
+          <a:ext cx="10927079" cy="3291840"/>
         </p:xfrm>
         <a:graphic>
           <a:graphicData uri="http://schemas.openxmlformats.org/drawingml/2006/table">
@@ -9056,8 +7021,8 @@
               </a:tblPr>
               <a:tblGrid>
                 <a:gridCol w="640080"/>
-                <a:gridCol w="6766560"/>
-                <a:gridCol w="3520440"/>
+                <a:gridCol w="6309360"/>
+                <a:gridCol w="3977639"/>
               </a:tblGrid>
               <a:tr h="548640">
                 <a:tc>
@@ -9066,7 +7031,7 @@
                     <a:lstStyle/>
                     <a:p>
                       <a:r>
-                        <a:rPr sz="1150" b="1">
+                        <a:rPr sz="1100" b="1">
                           <a:solidFill>
                             <a:srgbClr val="FFFFFF"/>
                           </a:solidFill>
@@ -9076,7 +7041,7 @@
                       </a:r>
                     </a:p>
                   </a:txBody>
-                  <a:tcPr anchor="ctr" marL="82296" marR="54864" marT="18288" marB="18288">
+                  <a:tcPr anchor="ctr" marL="91440" marR="54864" marT="18288" marB="18288">
                     <a:solidFill>
                       <a:srgbClr val="0E7C74"/>
                     </a:solidFill>
@@ -9088,7 +7053,7 @@
                     <a:lstStyle/>
                     <a:p>
                       <a:r>
-                        <a:rPr sz="1150" b="1">
+                        <a:rPr sz="1100" b="1">
                           <a:solidFill>
                             <a:srgbClr val="FFFFFF"/>
                           </a:solidFill>
@@ -9098,7 +7063,7 @@
                       </a:r>
                     </a:p>
                   </a:txBody>
-                  <a:tcPr anchor="ctr" marL="82296" marR="54864" marT="18288" marB="18288">
+                  <a:tcPr anchor="ctr" marL="91440" marR="54864" marT="18288" marB="18288">
                     <a:solidFill>
                       <a:srgbClr val="0E7C74"/>
                     </a:solidFill>
@@ -9110,17 +7075,17 @@
                     <a:lstStyle/>
                     <a:p>
                       <a:r>
-                        <a:rPr sz="1150" b="1">
+                        <a:rPr sz="1100" b="1">
                           <a:solidFill>
                             <a:srgbClr val="FFFFFF"/>
                           </a:solidFill>
                           <a:latin typeface="Segoe UI"/>
                         </a:rPr>
-                        <a:t>Gives us</a:t>
+                        <a:t>What it gives us</a:t>
                       </a:r>
                     </a:p>
                   </a:txBody>
-                  <a:tcPr anchor="ctr" marL="82296" marR="54864" marT="18288" marB="18288">
+                  <a:tcPr anchor="ctr" marL="91440" marR="54864" marT="18288" marB="18288">
                     <a:solidFill>
                       <a:srgbClr val="0E7C74"/>
                     </a:solidFill>
@@ -9144,7 +7109,7 @@
                       </a:r>
                     </a:p>
                   </a:txBody>
-                  <a:tcPr anchor="ctr" marL="82296" marR="54864" marT="18288" marB="18288">
+                  <a:tcPr anchor="ctr" marL="91440" marR="54864" marT="18288" marB="18288">
                     <a:solidFill>
                       <a:srgbClr val="FFFFFF"/>
                     </a:solidFill>
@@ -9162,11 +7127,11 @@
                           </a:solidFill>
                           <a:latin typeface="Segoe UI"/>
                         </a:rPr>
-                        <a:t>Certify labels on the proposed golden calls</a:t>
+                        <a:t>Certify labels on a sample of calls</a:t>
                       </a:r>
                     </a:p>
                   </a:txBody>
-                  <a:tcPr anchor="ctr" marL="82296" marR="54864" marT="18288" marB="18288">
+                  <a:tcPr anchor="ctr" marL="91440" marR="54864" marT="18288" marB="18288">
                     <a:solidFill>
                       <a:srgbClr val="FFFFFF"/>
                     </a:solidFill>
@@ -9188,7 +7153,7 @@
                       </a:r>
                     </a:p>
                   </a:txBody>
-                  <a:tcPr anchor="ctr" marL="82296" marR="54864" marT="18288" marB="18288">
+                  <a:tcPr anchor="ctr" marL="91440" marR="54864" marT="18288" marB="18288">
                     <a:solidFill>
                       <a:srgbClr val="FFFFFF"/>
                     </a:solidFill>
@@ -9212,7 +7177,7 @@
                       </a:r>
                     </a:p>
                   </a:txBody>
-                  <a:tcPr anchor="ctr" marL="82296" marR="54864" marT="18288" marB="18288">
+                  <a:tcPr anchor="ctr" marL="91440" marR="54864" marT="18288" marB="18288">
                     <a:solidFill>
                       <a:srgbClr val="F7F9F8"/>
                     </a:solidFill>
@@ -9230,11 +7195,11 @@
                           </a:solidFill>
                           <a:latin typeface="Segoe UI"/>
                         </a:rPr>
-                        <a:t>Confirm the flagged ambiguous KPI definitions</a:t>
+                        <a:t>Confirm the flagged KPI definitions</a:t>
                       </a:r>
                     </a:p>
                   </a:txBody>
-                  <a:tcPr anchor="ctr" marL="82296" marR="54864" marT="18288" marB="18288">
+                  <a:tcPr anchor="ctr" marL="91440" marR="54864" marT="18288" marB="18288">
                     <a:solidFill>
                       <a:srgbClr val="F7F9F8"/>
                     </a:solidFill>
@@ -9256,7 +7221,7 @@
                       </a:r>
                     </a:p>
                   </a:txBody>
-                  <a:tcPr anchor="ctr" marL="82296" marR="54864" marT="18288" marB="18288">
+                  <a:tcPr anchor="ctr" marL="91440" marR="54864" marT="18288" marB="18288">
                     <a:solidFill>
                       <a:srgbClr val="F7F9F8"/>
                     </a:solidFill>
@@ -9280,7 +7245,7 @@
                       </a:r>
                     </a:p>
                   </a:txBody>
-                  <a:tcPr anchor="ctr" marL="82296" marR="54864" marT="18288" marB="18288">
+                  <a:tcPr anchor="ctr" marL="91440" marR="54864" marT="18288" marB="18288">
                     <a:solidFill>
                       <a:srgbClr val="FFFFFF"/>
                     </a:solidFill>
@@ -9298,11 +7263,11 @@
                           </a:solidFill>
                           <a:latin typeface="Segoe UI"/>
                         </a:rPr>
-                        <a:t>Define what makes a coaching recommendation “good”</a:t>
+                        <a:t>Define what a “good” coaching tip is</a:t>
                       </a:r>
                     </a:p>
                   </a:txBody>
-                  <a:tcPr anchor="ctr" marL="82296" marR="54864" marT="18288" marB="18288">
+                  <a:tcPr anchor="ctr" marL="91440" marR="54864" marT="18288" marB="18288">
                     <a:solidFill>
                       <a:srgbClr val="FFFFFF"/>
                     </a:solidFill>
@@ -9320,11 +7285,11 @@
                           </a:solidFill>
                           <a:latin typeface="Segoe UI"/>
                         </a:rPr>
-                        <a:t>The coaching rubric</a:t>
+                        <a:t>The scoring rubric</a:t>
                       </a:r>
                     </a:p>
                   </a:txBody>
-                  <a:tcPr anchor="ctr" marL="82296" marR="54864" marT="18288" marB="18288">
+                  <a:tcPr anchor="ctr" marL="91440" marR="54864" marT="18288" marB="18288">
                     <a:solidFill>
                       <a:srgbClr val="FFFFFF"/>
                     </a:solidFill>
@@ -9348,7 +7313,7 @@
                       </a:r>
                     </a:p>
                   </a:txBody>
-                  <a:tcPr anchor="ctr" marL="82296" marR="54864" marT="18288" marB="18288">
+                  <a:tcPr anchor="ctr" marL="91440" marR="54864" marT="18288" marB="18288">
                     <a:solidFill>
                       <a:srgbClr val="F7F9F8"/>
                     </a:solidFill>
@@ -9370,7 +7335,7 @@
                       </a:r>
                     </a:p>
                   </a:txBody>
-                  <a:tcPr anchor="ctr" marL="82296" marR="54864" marT="18288" marB="18288">
+                  <a:tcPr anchor="ctr" marL="91440" marR="54864" marT="18288" marB="18288">
                     <a:solidFill>
                       <a:srgbClr val="F7F9F8"/>
                     </a:solidFill>
@@ -9392,7 +7357,7 @@
                       </a:r>
                     </a:p>
                   </a:txBody>
-                  <a:tcPr anchor="ctr" marL="82296" marR="54864" marT="18288" marB="18288">
+                  <a:tcPr anchor="ctr" marL="91440" marR="54864" marT="18288" marB="18288">
                     <a:solidFill>
                       <a:srgbClr val="F7F9F8"/>
                     </a:solidFill>
@@ -9416,7 +7381,7 @@
                       </a:r>
                     </a:p>
                   </a:txBody>
-                  <a:tcPr anchor="ctr" marL="82296" marR="54864" marT="18288" marB="18288">
+                  <a:tcPr anchor="ctr" marL="91440" marR="54864" marT="18288" marB="18288">
                     <a:solidFill>
                       <a:srgbClr val="FFFFFF"/>
                     </a:solidFill>
@@ -9438,7 +7403,7 @@
                       </a:r>
                     </a:p>
                   </a:txBody>
-                  <a:tcPr anchor="ctr" marL="82296" marR="54864" marT="18288" marB="18288">
+                  <a:tcPr anchor="ctr" marL="91440" marR="54864" marT="18288" marB="18288">
                     <a:solidFill>
                       <a:srgbClr val="FFFFFF"/>
                     </a:solidFill>
@@ -9460,7 +7425,7 @@
                       </a:r>
                     </a:p>
                   </a:txBody>
-                  <a:tcPr anchor="ctr" marL="82296" marR="54864" marT="18288" marB="18288">
+                  <a:tcPr anchor="ctr" marL="91440" marR="54864" marT="18288" marB="18288">
                     <a:solidFill>
                       <a:srgbClr val="FFFFFF"/>
                     </a:solidFill>
@@ -9471,52 +7436,27 @@
           </a:graphicData>
         </a:graphic>
       </p:graphicFrame>
-    </p:spTree>
-  </p:cSld>
-  <p:clrMapOvr>
-    <a:masterClrMapping/>
-  </p:clrMapOvr>
-</p:sld>
-</file>
-
-<file path=ppt/slides/slide9.xml><?xml version="1.0" encoding="utf-8"?>
-<p:sld xmlns:a="http://schemas.openxmlformats.org/drawingml/2006/main" xmlns:p="http://schemas.openxmlformats.org/presentationml/2006/main" xmlns:r="http://schemas.openxmlformats.org/officeDocument/2006/relationships">
-  <p:cSld>
-    <p:bg>
-      <p:bgPr>
-        <a:solidFill>
-          <a:srgbClr val="FFFFFF"/>
-        </a:solidFill>
-        <a:effectLst/>
-      </p:bgPr>
-    </p:bg>
-    <p:spTree>
-      <p:nvGrpSpPr>
-        <p:cNvPr id="1" name=""/>
-        <p:cNvGrpSpPr/>
-        <p:nvPr/>
-      </p:nvGrpSpPr>
-      <p:grpSpPr/>
-      <p:sp>
-        <p:nvSpPr>
-          <p:cNvPr id="2" name="Rectangle 1"/>
+      <p:sp>
+        <p:nvSpPr>
+          <p:cNvPr id="5" name="Rounded Rectangle 4"/>
           <p:cNvSpPr/>
           <p:nvPr/>
         </p:nvSpPr>
         <p:spPr>
           <a:xfrm>
-            <a:off x="0" y="0"/>
-            <a:ext cx="12191695" cy="128016"/>
+            <a:off x="640080" y="5806440"/>
+            <a:ext cx="10927080" cy="749808"/>
           </a:xfrm>
-          <a:prstGeom prst="rect">
+          <a:prstGeom prst="roundRect">
             <a:avLst/>
           </a:prstGeom>
           <a:solidFill>
-            <a:srgbClr val="0E7C74"/>
+            <a:srgbClr val="E1F0EE"/>
           </a:solidFill>
           <a:ln>
             <a:noFill/>
           </a:ln>
+          <a:effectLst/>
         </p:spPr>
         <p:style>
           <a:lnRef idx="1">
@@ -9533,167 +7473,22 @@
           </a:fontRef>
         </p:style>
         <p:txBody>
-          <a:bodyPr rtlCol="0" anchor="ctr"/>
+          <a:bodyPr rtlCol="0" anchor="ctr" wrap="square" lIns="201168" rIns="201168"/>
           <a:lstStyle/>
           <a:p>
-            <a:pPr algn="ctr"/>
-          </a:p>
-        </p:txBody>
-      </p:sp>
-      <p:sp>
-        <p:nvSpPr>
-          <p:cNvPr id="3" name="TextBox 2"/>
-          <p:cNvSpPr txBox="1"/>
-          <p:nvPr/>
-        </p:nvSpPr>
-        <p:spPr>
-          <a:xfrm>
-            <a:off x="640080" y="384048"/>
-            <a:ext cx="11155680" cy="1280160"/>
-          </a:xfrm>
-          <a:prstGeom prst="rect">
-            <a:avLst/>
-          </a:prstGeom>
-          <a:noFill/>
-        </p:spPr>
-        <p:txBody>
-          <a:bodyPr wrap="square">
-            <a:spAutoFit/>
-          </a:bodyPr>
-          <a:lstStyle/>
-          <a:p>
-            <a:pPr>
-              <a:spcAft>
-                <a:spcPts val="500"/>
-              </a:spcAft>
-            </a:pPr>
-            <a:r>
-              <a:rPr sz="1250" b="1">
-                <a:solidFill>
-                  <a:srgbClr val="0E7C74"/>
+            <a:pPr algn="ctr">
+              <a:spcAft>
+                <a:spcPts val="0"/>
+              </a:spcAft>
+            </a:pPr>
+            <a:r>
+              <a:rPr sz="1300" b="1">
+                <a:solidFill>
+                  <a:srgbClr val="0A5B55"/>
                 </a:solidFill>
                 <a:latin typeface="Segoe UI"/>
               </a:rPr>
-              <a:t>NEXT</a:t>
-            </a:r>
-          </a:p>
-          <a:p>
-            <a:pPr>
-              <a:spcAft>
-                <a:spcPts val="0"/>
-              </a:spcAft>
-            </a:pPr>
-            <a:r>
-              <a:rPr sz="2700" b="1">
-                <a:solidFill>
-                  <a:srgbClr val="1A1F27"/>
-                </a:solidFill>
-                <a:latin typeface="Segoe UI"/>
-              </a:rPr>
-              <a:t>Proposed next steps</a:t>
-            </a:r>
-          </a:p>
-        </p:txBody>
-      </p:sp>
-      <p:sp>
-        <p:nvSpPr>
-          <p:cNvPr id="4" name="TextBox 3"/>
-          <p:cNvSpPr txBox="1"/>
-          <p:nvPr/>
-        </p:nvSpPr>
-        <p:spPr>
-          <a:xfrm>
-            <a:off x="685800" y="1920240"/>
-            <a:ext cx="10881360" cy="4206240"/>
-          </a:xfrm>
-          <a:prstGeom prst="rect">
-            <a:avLst/>
-          </a:prstGeom>
-          <a:noFill/>
-        </p:spPr>
-        <p:txBody>
-          <a:bodyPr wrap="square">
-            <a:spAutoFit/>
-          </a:bodyPr>
-          <a:lstStyle/>
-          <a:p>
-            <a:pPr>
-              <a:spcAft>
-                <a:spcPts val="1600"/>
-              </a:spcAft>
-            </a:pPr>
-            <a:r>
-              <a:rPr sz="1800" b="0">
-                <a:solidFill>
-                  <a:srgbClr val="1A1F27"/>
-                </a:solidFill>
-                <a:latin typeface="Segoe UI"/>
-              </a:rPr>
-              <a:t>1.   Agree the golden-call sample &amp; certification with coaches.</a:t>
-            </a:r>
-          </a:p>
-          <a:p>
-            <a:pPr>
-              <a:spcAft>
-                <a:spcPts val="1600"/>
-              </a:spcAft>
-            </a:pPr>
-            <a:r>
-              <a:rPr sz="1800" b="0">
-                <a:solidFill>
-                  <a:srgbClr val="1A1F27"/>
-                </a:solidFill>
-                <a:latin typeface="Segoe UI"/>
-              </a:rPr>
-              <a:t>2.   Confirm the flagged definitions and acceptance thresholds.</a:t>
-            </a:r>
-          </a:p>
-          <a:p>
-            <a:pPr>
-              <a:spcAft>
-                <a:spcPts val="1600"/>
-              </a:spcAft>
-            </a:pPr>
-            <a:r>
-              <a:rPr sz="1800" b="0">
-                <a:solidFill>
-                  <a:srgbClr val="1A1F27"/>
-                </a:solidFill>
-                <a:latin typeface="Segoe UI"/>
-              </a:rPr>
-              <a:t>3.   In parallel, we re-spec the roll-up score and align WCC.</a:t>
-            </a:r>
-          </a:p>
-          <a:p>
-            <a:pPr>
-              <a:spcAft>
-                <a:spcPts val="1600"/>
-              </a:spcAft>
-            </a:pPr>
-            <a:r>
-              <a:rPr sz="1800" b="0">
-                <a:solidFill>
-                  <a:srgbClr val="1A1F27"/>
-                </a:solidFill>
-                <a:latin typeface="Segoe UI"/>
-              </a:rPr>
-              <a:t/>
-            </a:r>
-          </a:p>
-          <a:p>
-            <a:pPr>
-              <a:spcAft>
-                <a:spcPts val="1600"/>
-              </a:spcAft>
-            </a:pPr>
-            <a:r>
-              <a:rPr sz="1800" b="0">
-                <a:solidFill>
-                  <a:srgbClr val="0E7C74"/>
-                </a:solidFill>
-                <a:latin typeface="Segoe UI"/>
-              </a:rPr>
-              <a:t>Then: the evaluation gate goes live — prompt improvements without code changes.</a:t>
+              <a:t>Next:  1) agree the golden-call sample with coaches   2) confirm definitions &amp; thresholds   3) we re-spec the roll-up score &amp; align WCC in parallel.</a:t>
             </a:r>
           </a:p>
         </p:txBody>

--- a/usecases/ai_pipeline 2/docs/APIX_Metrics_Discussion.pptx
+++ b/usecases/ai_pipeline 2/docs/APIX_Metrics_Discussion.pptx
@@ -3155,8 +3155,8 @@
         </p:nvSpPr>
         <p:spPr>
           <a:xfrm>
-            <a:off x="731520" y="1874519"/>
-            <a:ext cx="10698480" cy="3108960"/>
+            <a:off x="731520" y="1828800"/>
+            <a:ext cx="10881360" cy="3200400"/>
           </a:xfrm>
           <a:prstGeom prst="rect">
             <a:avLst/>
@@ -3171,17 +3171,49 @@
           <a:p>
             <a:pPr>
               <a:spcAft>
+                <a:spcPts val="1300"/>
+              </a:spcAft>
+            </a:pPr>
+            <a:r>
+              <a:rPr sz="1350" b="1">
+                <a:solidFill>
+                  <a:srgbClr val="0E7C74"/>
+                </a:solidFill>
+                <a:latin typeface="Segoe UI"/>
+              </a:rPr>
+              <a:t>APIX  ·  AI PIPELINE  ·  METRICS EXPLAINED</a:t>
+            </a:r>
+          </a:p>
+          <a:p>
+            <a:pPr>
+              <a:spcAft>
+                <a:spcPts val="0"/>
+              </a:spcAft>
+            </a:pPr>
+            <a:r>
+              <a:rPr sz="3400" b="1">
+                <a:solidFill>
+                  <a:srgbClr val="1A1F27"/>
+                </a:solidFill>
+                <a:latin typeface="Segoe UI"/>
+              </a:rPr>
+              <a:t>What we measure on every call —</a:t>
+            </a:r>
+          </a:p>
+          <a:p>
+            <a:pPr>
+              <a:spcAft>
                 <a:spcPts val="1400"/>
               </a:spcAft>
             </a:pPr>
             <a:r>
-              <a:rPr sz="1350" b="1">
-                <a:solidFill>
-                  <a:srgbClr val="0E7C74"/>
+              <a:rPr sz="3400" b="1">
+                <a:solidFill>
+                  <a:srgbClr val="1A1F27"/>
                 </a:solidFill>
                 <a:latin typeface="Segoe UI"/>
               </a:rPr>
-              <a:t>APIX (AFNI PERFORMANCE INDEX)  ·  THE METRICS, EXPLAINED</a:t>
+              <a:t>shown on real transcripts</a:t>
             </a:r>
           </a:p>
           <a:p>
@@ -3191,45 +3223,13 @@
               </a:spcAft>
             </a:pPr>
             <a:r>
-              <a:rPr sz="3700" b="1">
-                <a:solidFill>
-                  <a:srgbClr val="1A1F27"/>
+              <a:rPr sz="1650" b="0">
+                <a:solidFill>
+                  <a:srgbClr val="535C6A"/>
                 </a:solidFill>
                 <a:latin typeface="Segoe UI"/>
               </a:rPr>
-              <a:t>The AI that scores every</a:t>
-            </a:r>
-          </a:p>
-          <a:p>
-            <a:pPr>
-              <a:spcAft>
-                <a:spcPts val="1500"/>
-              </a:spcAft>
-            </a:pPr>
-            <a:r>
-              <a:rPr sz="3700" b="1">
-                <a:solidFill>
-                  <a:srgbClr val="1A1F27"/>
-                </a:solidFill>
-                <a:latin typeface="Segoe UI"/>
-              </a:rPr>
-              <a:t>customer call</a:t>
-            </a:r>
-          </a:p>
-          <a:p>
-            <a:pPr>
-              <a:spcAft>
-                <a:spcPts val="0"/>
-              </a:spcAft>
-            </a:pPr>
-            <a:r>
-              <a:rPr sz="1750" b="0">
-                <a:solidFill>
-                  <a:srgbClr val="535C6A"/>
-                </a:solidFill>
-                <a:latin typeface="Segoe UI"/>
-              </a:rPr>
-              <a:t>How APIX turns calls into per-agent coaching — the metrics, with worked examples and program comparisons.</a:t>
+              <a:t>Each metric is tied to the exact line of the call that proves it. Scope: the AI-pipeline part of APIX.</a:t>
             </a:r>
           </a:p>
         </p:txBody>
@@ -3242,8 +3242,8 @@
         </p:nvSpPr>
         <p:spPr>
           <a:xfrm>
-            <a:off x="731520" y="5897880"/>
-            <a:ext cx="10698480" cy="640080"/>
+            <a:off x="731520" y="5852160"/>
+            <a:ext cx="10881360" cy="640080"/>
           </a:xfrm>
           <a:prstGeom prst="rect">
             <a:avLst/>
@@ -3262,13 +3262,13 @@
               </a:spcAft>
             </a:pPr>
             <a:r>
-              <a:rPr sz="1300" b="0">
+              <a:rPr sz="1250" b="0">
                 <a:solidFill>
                   <a:srgbClr val="8A93A1"/>
                 </a:solidFill>
                 <a:latin typeface="Segoe UI"/>
               </a:rPr>
-              <a:t>3 programs  (Telesales · WCC · PSO)      47 KPIs      ~500 golden calls proposed      9 Sep 2026</a:t>
+              <a:t>3 programs (Telesales · WCC · PSO)     47 KPIs + behaviours + soft skills     every metric evidence-backed     9 Sep 2026</a:t>
             </a:r>
           </a:p>
         </p:txBody>
@@ -3351,8 +3351,8 @@
         </p:nvSpPr>
         <p:spPr>
           <a:xfrm>
-            <a:off x="640080" y="365760"/>
-            <a:ext cx="11247120" cy="1234440"/>
+            <a:off x="640080" y="347472"/>
+            <a:ext cx="11247120" cy="1188720"/>
           </a:xfrm>
           <a:prstGeom prst="rect">
             <a:avLst/>
@@ -3377,7 +3377,7 @@
                 </a:solidFill>
                 <a:latin typeface="Segoe UI"/>
               </a:rPr>
-              <a:t>WHAT APIX DOES</a:t>
+              <a:t>HOW IT WORKS</a:t>
             </a:r>
           </a:p>
           <a:p>
@@ -3387,130 +3387,27 @@
               </a:spcAft>
             </a:pPr>
             <a:r>
-              <a:rPr sz="2500" b="1">
+              <a:rPr sz="2400" b="1">
                 <a:solidFill>
                   <a:srgbClr val="1A1F27"/>
                 </a:solidFill>
                 <a:latin typeface="Segoe UI"/>
               </a:rPr>
-              <a:t>Every week: raw calls → a coaching scorecard</a:t>
-            </a:r>
-          </a:p>
-        </p:txBody>
-      </p:sp>
-      <p:sp>
-        <p:nvSpPr>
-          <p:cNvPr id="4" name="TextBox 3"/>
-          <p:cNvSpPr txBox="1"/>
+              <a:t>How a call turns into measured metrics</a:t>
+            </a:r>
+          </a:p>
+        </p:txBody>
+      </p:sp>
+      <p:sp>
+        <p:nvSpPr>
+          <p:cNvPr id="4" name="Rounded Rectangle 3"/>
+          <p:cNvSpPr/>
           <p:nvPr/>
         </p:nvSpPr>
         <p:spPr>
           <a:xfrm>
-            <a:off x="685800" y="1920240"/>
-            <a:ext cx="5394960" cy="4023360"/>
-          </a:xfrm>
-          <a:prstGeom prst="rect">
-            <a:avLst/>
-          </a:prstGeom>
-          <a:noFill/>
-        </p:spPr>
-        <p:txBody>
-          <a:bodyPr wrap="square">
-            <a:spAutoFit/>
-          </a:bodyPr>
-          <a:lstStyle/>
-          <a:p>
-            <a:pPr>
-              <a:spcAft>
-                <a:spcPts val="1500"/>
-              </a:spcAft>
-            </a:pPr>
-            <a:r>
-              <a:rPr sz="1500" b="0">
-                <a:solidFill>
-                  <a:srgbClr val="1A1F27"/>
-                </a:solidFill>
-                <a:latin typeface="Segoe UI"/>
-              </a:rPr>
-              <a:t>1 · Denoise  — clean messy speech-to-text</a:t>
-            </a:r>
-          </a:p>
-          <a:p>
-            <a:pPr>
-              <a:spcAft>
-                <a:spcPts val="1500"/>
-              </a:spcAft>
-            </a:pPr>
-            <a:r>
-              <a:rPr sz="1500" b="0">
-                <a:solidFill>
-                  <a:srgbClr val="1A1F27"/>
-                </a:solidFill>
-                <a:latin typeface="Segoe UI"/>
-              </a:rPr>
-              <a:t>2 · Analysis — the AI scores every call, with evidence</a:t>
-            </a:r>
-          </a:p>
-          <a:p>
-            <a:pPr>
-              <a:spcAft>
-                <a:spcPts val="1500"/>
-              </a:spcAft>
-            </a:pPr>
-            <a:r>
-              <a:rPr sz="1500" b="0">
-                <a:solidFill>
-                  <a:srgbClr val="1A1F27"/>
-                </a:solidFill>
-                <a:latin typeface="Segoe UI"/>
-              </a:rPr>
-              <a:t>3 · Summary  — roll a week of calls into per-agent scores</a:t>
-            </a:r>
-          </a:p>
-          <a:p>
-            <a:pPr>
-              <a:spcAft>
-                <a:spcPts val="1500"/>
-              </a:spcAft>
-            </a:pPr>
-            <a:r>
-              <a:rPr sz="1500" b="0">
-                <a:solidFill>
-                  <a:srgbClr val="1A1F27"/>
-                </a:solidFill>
-                <a:latin typeface="Segoe UI"/>
-              </a:rPr>
-              <a:t>4 · Individual metrics — add Verizon operational data + tips</a:t>
-            </a:r>
-          </a:p>
-          <a:p>
-            <a:pPr>
-              <a:spcAft>
-                <a:spcPts val="1500"/>
-              </a:spcAft>
-            </a:pPr>
-            <a:r>
-              <a:rPr sz="1500" b="0">
-                <a:solidFill>
-                  <a:srgbClr val="1A1F27"/>
-                </a:solidFill>
-                <a:latin typeface="Segoe UI"/>
-              </a:rPr>
-              <a:t>5 · KPI aggregator — build the weekly dashboard file</a:t>
-            </a:r>
-          </a:p>
-        </p:txBody>
-      </p:sp>
-      <p:sp>
-        <p:nvSpPr>
-          <p:cNvPr id="5" name="Rounded Rectangle 4"/>
-          <p:cNvSpPr/>
-          <p:nvPr/>
-        </p:nvSpPr>
-        <p:spPr>
-          <a:xfrm>
-            <a:off x="6400800" y="1874519"/>
-            <a:ext cx="5212080" cy="3566160"/>
+            <a:off x="640080" y="1691640"/>
+            <a:ext cx="5486400" cy="1828800"/>
           </a:xfrm>
           <a:prstGeom prst="roundRect">
             <a:avLst/>
@@ -3540,12 +3437,12 @@
           </a:fontRef>
         </p:style>
         <p:txBody>
-          <a:bodyPr rtlCol="0" anchor="ctr" wrap="square" lIns="146304" rIns="128016" tIns="118872" bIns="91440"/>
+          <a:bodyPr rtlCol="0" anchor="ctr" wrap="square" lIns="137160" rIns="109728" tIns="109728" bIns="73152"/>
           <a:lstStyle/>
           <a:p>
             <a:pPr algn="ctr">
               <a:spcAft>
-                <a:spcPts val="700"/>
+                <a:spcPts val="600"/>
               </a:spcAft>
             </a:pPr>
             <a:r>
@@ -3555,13 +3452,13 @@
                 </a:solidFill>
                 <a:latin typeface="Segoe UI"/>
               </a:rPr>
-              <a:t>EXAMPLE · one call flowing through</a:t>
-            </a:r>
-          </a:p>
-          <a:p>
-            <a:pPr>
-              <a:spcAft>
-                <a:spcPts val="300"/>
+              <a:t>The 5 steps</a:t>
+            </a:r>
+          </a:p>
+          <a:p>
+            <a:pPr>
+              <a:spcAft>
+                <a:spcPts val="200"/>
               </a:spcAft>
             </a:pPr>
             <a:r>
@@ -3571,13 +3468,13 @@
                 </a:solidFill>
                 <a:latin typeface="Segoe UI"/>
               </a:rPr>
-              <a:t>Customer asks about their bill.</a:t>
-            </a:r>
-          </a:p>
-          <a:p>
-            <a:pPr>
-              <a:spcAft>
-                <a:spcPts val="300"/>
+              <a:t>1 · Denoise — clean the transcript</a:t>
+            </a:r>
+          </a:p>
+          <a:p>
+            <a:pPr>
+              <a:spcAft>
+                <a:spcPts val="200"/>
               </a:spcAft>
             </a:pPr>
             <a:r>
@@ -3587,13 +3484,13 @@
                 </a:solidFill>
                 <a:latin typeface="Segoe UI"/>
               </a:rPr>
-              <a:t>Agent fixes it, then offers a second</a:t>
-            </a:r>
-          </a:p>
-          <a:p>
-            <a:pPr>
-              <a:spcAft>
-                <a:spcPts val="300"/>
+              <a:t>2 · Analysis — the AI scores each call (with evidence)</a:t>
+            </a:r>
+          </a:p>
+          <a:p>
+            <a:pPr>
+              <a:spcAft>
+                <a:spcPts val="200"/>
               </a:spcAft>
             </a:pPr>
             <a:r>
@@ -3603,110 +3500,3718 @@
                 </a:solidFill>
                 <a:latin typeface="Segoe UI"/>
               </a:rPr>
-              <a:t>line. Customer declines.</a:t>
-            </a:r>
-          </a:p>
-          <a:p>
-            <a:pPr>
-              <a:spcAft>
-                <a:spcPts val="300"/>
+              <a:t>3 · Summary — roll a week into per-agent scores</a:t>
+            </a:r>
+          </a:p>
+          <a:p>
+            <a:pPr>
+              <a:spcAft>
+                <a:spcPts val="200"/>
               </a:spcAft>
             </a:pPr>
             <a:r>
               <a:rPr sz="1150" b="0">
                 <a:solidFill>
+                  <a:srgbClr val="535C6A"/>
+                </a:solidFill>
+                <a:latin typeface="Segoe UI"/>
+              </a:rPr>
+              <a:t>4 · Individual metrics — add Verizon data + tips</a:t>
+            </a:r>
+          </a:p>
+          <a:p>
+            <a:pPr>
+              <a:spcAft>
+                <a:spcPts val="200"/>
+              </a:spcAft>
+            </a:pPr>
+            <a:r>
+              <a:rPr sz="1150" b="0">
+                <a:solidFill>
+                  <a:srgbClr val="535C6A"/>
+                </a:solidFill>
+                <a:latin typeface="Segoe UI"/>
+              </a:rPr>
+              <a:t>5 · KPI aggregator — build the dashboard file</a:t>
+            </a:r>
+          </a:p>
+        </p:txBody>
+      </p:sp>
+      <p:sp>
+        <p:nvSpPr>
+          <p:cNvPr id="5" name="Rounded Rectangle 4"/>
+          <p:cNvSpPr/>
+          <p:nvPr/>
+        </p:nvSpPr>
+        <p:spPr>
+          <a:xfrm>
+            <a:off x="6355080" y="1691640"/>
+            <a:ext cx="5212080" cy="1828800"/>
+          </a:xfrm>
+          <a:prstGeom prst="roundRect">
+            <a:avLst/>
+          </a:prstGeom>
+          <a:solidFill>
+            <a:srgbClr val="E1F0EE"/>
+          </a:solidFill>
+          <a:ln w="9525">
+            <a:solidFill>
+              <a:srgbClr val="D9DFE5"/>
+            </a:solidFill>
+          </a:ln>
+          <a:effectLst/>
+        </p:spPr>
+        <p:style>
+          <a:lnRef idx="1">
+            <a:schemeClr val="accent1"/>
+          </a:lnRef>
+          <a:fillRef idx="3">
+            <a:schemeClr val="accent1"/>
+          </a:fillRef>
+          <a:effectRef idx="2">
+            <a:schemeClr val="accent1"/>
+          </a:effectRef>
+          <a:fontRef idx="minor">
+            <a:schemeClr val="lt1"/>
+          </a:fontRef>
+        </p:style>
+        <p:txBody>
+          <a:bodyPr rtlCol="0" anchor="ctr" wrap="square" lIns="137160" rIns="109728" tIns="109728" bIns="73152"/>
+          <a:lstStyle/>
+          <a:p>
+            <a:pPr algn="ctr">
+              <a:spcAft>
+                <a:spcPts val="600"/>
+              </a:spcAft>
+            </a:pPr>
+            <a:r>
+              <a:rPr sz="1250" b="1">
+                <a:solidFill>
+                  <a:srgbClr val="0E7C74"/>
+                </a:solidFill>
+                <a:latin typeface="Segoe UI"/>
+              </a:rPr>
+              <a:t>Four kinds of metric</a:t>
+            </a:r>
+          </a:p>
+          <a:p>
+            <a:pPr>
+              <a:spcAft>
+                <a:spcPts val="200"/>
+              </a:spcAft>
+            </a:pPr>
+            <a:r>
+              <a:rPr sz="1150" b="0">
+                <a:solidFill>
+                  <a:srgbClr val="535C6A"/>
+                </a:solidFill>
+                <a:latin typeface="Segoe UI"/>
+              </a:rPr>
+              <a:t>KPIs — counts &amp; rates (e.g. pitches)</a:t>
+            </a:r>
+          </a:p>
+          <a:p>
+            <a:pPr>
+              <a:spcAft>
+                <a:spcPts val="200"/>
+              </a:spcAft>
+            </a:pPr>
+            <a:r>
+              <a:rPr sz="1150" b="0">
+                <a:solidFill>
+                  <a:srgbClr val="535C6A"/>
+                </a:solidFill>
+                <a:latin typeface="Segoe UI"/>
+              </a:rPr>
+              <a:t>Behaviour / soft skills — 0–1 scores</a:t>
+            </a:r>
+          </a:p>
+          <a:p>
+            <a:pPr>
+              <a:spcAft>
+                <a:spcPts val="200"/>
+              </a:spcAft>
+            </a:pPr>
+            <a:r>
+              <a:rPr sz="1150" b="0">
+                <a:solidFill>
+                  <a:srgbClr val="535C6A"/>
+                </a:solidFill>
+                <a:latin typeface="Segoe UI"/>
+              </a:rPr>
+              <a:t>Operational — AHT, VXS (Verizon data, not AI)</a:t>
+            </a:r>
+          </a:p>
+          <a:p>
+            <a:pPr>
+              <a:spcAft>
+                <a:spcPts val="200"/>
+              </a:spcAft>
+            </a:pPr>
+            <a:r>
+              <a:rPr sz="1150" b="0">
+                <a:solidFill>
+                  <a:srgbClr val="535C6A"/>
+                </a:solidFill>
+                <a:latin typeface="Segoe UI"/>
+              </a:rPr>
+              <a:t>Roll-up — the weekly status score</a:t>
+            </a:r>
+          </a:p>
+        </p:txBody>
+      </p:sp>
+      <p:sp>
+        <p:nvSpPr>
+          <p:cNvPr id="6" name="Rounded Rectangle 5"/>
+          <p:cNvSpPr/>
+          <p:nvPr/>
+        </p:nvSpPr>
+        <p:spPr>
+          <a:xfrm>
+            <a:off x="640080" y="3794760"/>
+            <a:ext cx="10927080" cy="868680"/>
+          </a:xfrm>
+          <a:prstGeom prst="roundRect">
+            <a:avLst/>
+          </a:prstGeom>
+          <a:solidFill>
+            <a:srgbClr val="E1F0EE"/>
+          </a:solidFill>
+          <a:ln>
+            <a:noFill/>
+          </a:ln>
+          <a:effectLst/>
+        </p:spPr>
+        <p:style>
+          <a:lnRef idx="1">
+            <a:schemeClr val="accent1"/>
+          </a:lnRef>
+          <a:fillRef idx="3">
+            <a:schemeClr val="accent1"/>
+          </a:fillRef>
+          <a:effectRef idx="2">
+            <a:schemeClr val="accent1"/>
+          </a:effectRef>
+          <a:fontRef idx="minor">
+            <a:schemeClr val="lt1"/>
+          </a:fontRef>
+        </p:style>
+        <p:txBody>
+          <a:bodyPr rtlCol="0" anchor="ctr" wrap="square" lIns="201168" rIns="201168"/>
+          <a:lstStyle/>
+          <a:p>
+            <a:pPr algn="ctr">
+              <a:spcAft>
+                <a:spcPts val="0"/>
+              </a:spcAft>
+            </a:pPr>
+            <a:r>
+              <a:rPr sz="1400" b="1">
+                <a:solidFill>
+                  <a:srgbClr val="0A5B55"/>
+                </a:solidFill>
+                <a:latin typeface="Segoe UI"/>
+              </a:rPr>
+              <a:t>Only step 2 uses AI judgment; the rest is counting. And every judgment records the exact call line behind it — so any score can be shown and defended.</a:t>
+            </a:r>
+          </a:p>
+        </p:txBody>
+      </p:sp>
+      <p:sp>
+        <p:nvSpPr>
+          <p:cNvPr id="7" name="Rounded Rectangle 6"/>
+          <p:cNvSpPr/>
+          <p:nvPr/>
+        </p:nvSpPr>
+        <p:spPr>
+          <a:xfrm>
+            <a:off x="640080" y="4892040"/>
+            <a:ext cx="10927080" cy="1234440"/>
+          </a:xfrm>
+          <a:prstGeom prst="roundRect">
+            <a:avLst/>
+          </a:prstGeom>
+          <a:solidFill>
+            <a:srgbClr val="E1F0EE"/>
+          </a:solidFill>
+          <a:ln w="9525">
+            <a:solidFill>
+              <a:srgbClr val="D9DFE5"/>
+            </a:solidFill>
+          </a:ln>
+          <a:effectLst/>
+        </p:spPr>
+        <p:style>
+          <a:lnRef idx="1">
+            <a:schemeClr val="accent1"/>
+          </a:lnRef>
+          <a:fillRef idx="3">
+            <a:schemeClr val="accent1"/>
+          </a:fillRef>
+          <a:effectRef idx="2">
+            <a:schemeClr val="accent1"/>
+          </a:effectRef>
+          <a:fontRef idx="minor">
+            <a:schemeClr val="lt1"/>
+          </a:fontRef>
+        </p:style>
+        <p:txBody>
+          <a:bodyPr rtlCol="0" anchor="ctr" wrap="square" lIns="137160" rIns="109728" tIns="109728" bIns="73152"/>
+          <a:lstStyle/>
+          <a:p>
+            <a:pPr algn="ctr">
+              <a:spcAft>
+                <a:spcPts val="600"/>
+              </a:spcAft>
+            </a:pPr>
+            <a:r>
+              <a:rPr sz="1250" b="1">
+                <a:solidFill>
+                  <a:srgbClr val="0E7C74"/>
+                </a:solidFill>
+                <a:latin typeface="Segoe UI"/>
+              </a:rPr>
+              <a:t>WHY THIS MATTERS FOR THE CONVERSATION</a:t>
+            </a:r>
+          </a:p>
+          <a:p>
+            <a:pPr>
+              <a:spcAft>
+                <a:spcPts val="200"/>
+              </a:spcAft>
+            </a:pPr>
+            <a:r>
+              <a:rPr sz="1100" b="0">
+                <a:solidFill>
+                  <a:srgbClr val="0A5B55"/>
+                </a:solidFill>
+                <a:latin typeface="Segoe UI"/>
+              </a:rPr>
+              <a:t>Because each metric points to a line in the transcript, we can always answer “why did the agent get this score?”</a:t>
+            </a:r>
+          </a:p>
+          <a:p>
+            <a:pPr>
+              <a:spcAft>
+                <a:spcPts val="200"/>
+              </a:spcAft>
+            </a:pPr>
+            <a:r>
+              <a:rPr sz="1100" b="0">
+                <a:solidFill>
+                  <a:srgbClr val="535C6A"/>
+                </a:solidFill>
+                <a:latin typeface="Segoe UI"/>
+              </a:rPr>
+              <a:t>The next slides show three real calls and exactly what the pipeline measures on each.</a:t>
+            </a:r>
+          </a:p>
+        </p:txBody>
+      </p:sp>
+    </p:spTree>
+  </p:cSld>
+  <p:clrMapOvr>
+    <a:masterClrMapping/>
+  </p:clrMapOvr>
+</p:sld>
+</file>
+
+<file path=ppt/slides/slide3.xml><?xml version="1.0" encoding="utf-8"?>
+<p:sld xmlns:a="http://schemas.openxmlformats.org/drawingml/2006/main" xmlns:p="http://schemas.openxmlformats.org/presentationml/2006/main" xmlns:r="http://schemas.openxmlformats.org/officeDocument/2006/relationships">
+  <p:cSld>
+    <p:bg>
+      <p:bgPr>
+        <a:solidFill>
+          <a:srgbClr val="FFFFFF"/>
+        </a:solidFill>
+        <a:effectLst/>
+      </p:bgPr>
+    </p:bg>
+    <p:spTree>
+      <p:nvGrpSpPr>
+        <p:cNvPr id="1" name=""/>
+        <p:cNvGrpSpPr/>
+        <p:nvPr/>
+      </p:nvGrpSpPr>
+      <p:grpSpPr/>
+      <p:sp>
+        <p:nvSpPr>
+          <p:cNvPr id="2" name="Rectangle 1"/>
+          <p:cNvSpPr/>
+          <p:nvPr/>
+        </p:nvSpPr>
+        <p:spPr>
+          <a:xfrm>
+            <a:off x="0" y="0"/>
+            <a:ext cx="12191695" cy="128016"/>
+          </a:xfrm>
+          <a:prstGeom prst="rect">
+            <a:avLst/>
+          </a:prstGeom>
+          <a:solidFill>
+            <a:srgbClr val="0E7C74"/>
+          </a:solidFill>
+          <a:ln>
+            <a:noFill/>
+          </a:ln>
+          <a:effectLst/>
+        </p:spPr>
+        <p:style>
+          <a:lnRef idx="1">
+            <a:schemeClr val="accent1"/>
+          </a:lnRef>
+          <a:fillRef idx="3">
+            <a:schemeClr val="accent1"/>
+          </a:fillRef>
+          <a:effectRef idx="2">
+            <a:schemeClr val="accent1"/>
+          </a:effectRef>
+          <a:fontRef idx="minor">
+            <a:schemeClr val="lt1"/>
+          </a:fontRef>
+        </p:style>
+        <p:txBody>
+          <a:bodyPr rtlCol="0" anchor="ctr"/>
+          <a:lstStyle/>
+          <a:p>
+            <a:pPr algn="ctr"/>
+          </a:p>
+        </p:txBody>
+      </p:sp>
+      <p:sp>
+        <p:nvSpPr>
+          <p:cNvPr id="3" name="TextBox 2"/>
+          <p:cNvSpPr txBox="1"/>
+          <p:nvPr/>
+        </p:nvSpPr>
+        <p:spPr>
+          <a:xfrm>
+            <a:off x="640080" y="347472"/>
+            <a:ext cx="11247120" cy="1188720"/>
+          </a:xfrm>
+          <a:prstGeom prst="rect">
+            <a:avLst/>
+          </a:prstGeom>
+          <a:noFill/>
+        </p:spPr>
+        <p:txBody>
+          <a:bodyPr wrap="square">
+            <a:spAutoFit/>
+          </a:bodyPr>
+          <a:lstStyle/>
+          <a:p>
+            <a:pPr>
+              <a:spcAft>
+                <a:spcPts val="400"/>
+              </a:spcAft>
+            </a:pPr>
+            <a:r>
+              <a:rPr sz="1200" b="1">
+                <a:solidFill>
+                  <a:srgbClr val="0E7C74"/>
+                </a:solidFill>
+                <a:latin typeface="Segoe UI"/>
+              </a:rPr>
+              <a:t>EXAMPLE 1 · TELESALES</a:t>
+            </a:r>
+          </a:p>
+          <a:p>
+            <a:pPr>
+              <a:spcAft>
+                <a:spcPts val="0"/>
+              </a:spcAft>
+            </a:pPr>
+            <a:r>
+              <a:rPr sz="2400" b="1">
+                <a:solidFill>
                   <a:srgbClr val="1A1F27"/>
                 </a:solidFill>
                 <a:latin typeface="Segoe UI"/>
               </a:rPr>
+              <a:t>A bill fix that becomes a sale — fully scored</a:t>
+            </a:r>
+          </a:p>
+        </p:txBody>
+      </p:sp>
+      <p:sp>
+        <p:nvSpPr>
+          <p:cNvPr id="4" name="Rounded Rectangle 3"/>
+          <p:cNvSpPr/>
+          <p:nvPr/>
+        </p:nvSpPr>
+        <p:spPr>
+          <a:xfrm>
+            <a:off x="640080" y="1691640"/>
+            <a:ext cx="6035040" cy="3977639"/>
+          </a:xfrm>
+          <a:prstGeom prst="roundRect">
+            <a:avLst/>
+          </a:prstGeom>
+          <a:solidFill>
+            <a:srgbClr val="F3F1EA"/>
+          </a:solidFill>
+          <a:ln w="9525">
+            <a:solidFill>
+              <a:srgbClr val="D9DFE5"/>
+            </a:solidFill>
+          </a:ln>
+          <a:effectLst/>
+        </p:spPr>
+        <p:style>
+          <a:lnRef idx="1">
+            <a:schemeClr val="accent1"/>
+          </a:lnRef>
+          <a:fillRef idx="3">
+            <a:schemeClr val="accent1"/>
+          </a:fillRef>
+          <a:effectRef idx="2">
+            <a:schemeClr val="accent1"/>
+          </a:effectRef>
+          <a:fontRef idx="minor">
+            <a:schemeClr val="lt1"/>
+          </a:fontRef>
+        </p:style>
+        <p:txBody>
+          <a:bodyPr rtlCol="0" anchor="ctr" wrap="square" lIns="137160" rIns="109728" tIns="109728" bIns="73152"/>
+          <a:lstStyle/>
+          <a:p>
+            <a:pPr algn="ctr">
+              <a:spcAft>
+                <a:spcPts val="600"/>
+              </a:spcAft>
+            </a:pPr>
+            <a:r>
+              <a:rPr sz="1250" b="1">
+                <a:solidFill>
+                  <a:srgbClr val="0A5B55"/>
+                </a:solidFill>
+                <a:latin typeface="Segoe UI"/>
+              </a:rPr>
+              <a:t>TRANSCRIPT (excerpt)</a:t>
+            </a:r>
+          </a:p>
+          <a:p>
+            <a:pPr>
+              <a:spcAft>
+                <a:spcPts val="200"/>
+              </a:spcAft>
+            </a:pPr>
+            <a:r>
+              <a:rPr sz="1050" b="0">
+                <a:solidFill>
+                  <a:srgbClr val="1A1F27"/>
+                </a:solidFill>
+                <a:latin typeface="Consolas"/>
+              </a:rPr>
+              <a:t>[1] Agent: Thanks for calling Verizon, this is Maria.</a:t>
+            </a:r>
+          </a:p>
+          <a:p>
+            <a:pPr>
+              <a:spcAft>
+                <a:spcPts val="200"/>
+              </a:spcAft>
+            </a:pPr>
+            <a:r>
+              <a:rPr sz="1050" b="0">
+                <a:solidFill>
+                  <a:srgbClr val="1A1F27"/>
+                </a:solidFill>
+                <a:latin typeface="Consolas"/>
+              </a:rPr>
+              <a:t>[2] Cust : My bill went up $15 and I don't know why.</a:t>
+            </a:r>
+          </a:p>
+          <a:p>
+            <a:pPr>
+              <a:spcAft>
+                <a:spcPts val="200"/>
+              </a:spcAft>
+            </a:pPr>
+            <a:r>
+              <a:rPr sz="1050" b="0">
+                <a:solidFill>
+                  <a:srgbClr val="1A1F27"/>
+                </a:solidFill>
+                <a:latin typeface="Consolas"/>
+              </a:rPr>
+              <a:t>[3] Agent: I see a one-time fee — I'll credit it today.</a:t>
+            </a:r>
+          </a:p>
+          <a:p>
+            <a:pPr>
+              <a:spcAft>
+                <a:spcPts val="200"/>
+              </a:spcAft>
+            </a:pPr>
+            <a:r>
+              <a:rPr sz="1050" b="0">
+                <a:solidFill>
+                  <a:srgbClr val="1A1F27"/>
+                </a:solidFill>
+                <a:latin typeface="Consolas"/>
+              </a:rPr>
+              <a:t>[4] Cust : Oh, great — thank you!</a:t>
+            </a:r>
+          </a:p>
+          <a:p>
+            <a:pPr>
+              <a:spcAft>
+                <a:spcPts val="200"/>
+              </a:spcAft>
+            </a:pPr>
+            <a:r>
+              <a:rPr sz="1050" b="0">
+                <a:solidFill>
+                  <a:srgbClr val="1A1F27"/>
+                </a:solidFill>
+                <a:latin typeface="Consolas"/>
+              </a:rPr>
+              <a:t>[5] Agent: You're on one line; a second is $30 and</a:t>
+            </a:r>
+          </a:p>
+          <a:p>
+            <a:pPr>
+              <a:spcAft>
+                <a:spcPts val="200"/>
+              </a:spcAft>
+            </a:pPr>
+            <a:r>
+              <a:rPr sz="1050" b="0">
+                <a:solidFill>
+                  <a:srgbClr val="1A1F27"/>
+                </a:solidFill>
+                <a:latin typeface="Consolas"/>
+              </a:rPr>
+              <a:t>           saves on both. Want me to set it up?</a:t>
+            </a:r>
+          </a:p>
+          <a:p>
+            <a:pPr>
+              <a:spcAft>
+                <a:spcPts val="200"/>
+              </a:spcAft>
+            </a:pPr>
+            <a:r>
+              <a:rPr sz="1050" b="0">
+                <a:solidFill>
+                  <a:srgbClr val="1A1F27"/>
+                </a:solidFill>
+                <a:latin typeface="Consolas"/>
+              </a:rPr>
+              <a:t>[6] Cust : Sure, let's do it.</a:t>
+            </a:r>
+          </a:p>
+          <a:p>
+            <a:pPr>
+              <a:spcAft>
+                <a:spcPts val="200"/>
+              </a:spcAft>
+            </a:pPr>
+            <a:r>
+              <a:rPr sz="1050" b="0">
+                <a:solidFill>
+                  <a:srgbClr val="1A1F27"/>
+                </a:solidFill>
+                <a:latin typeface="Consolas"/>
+              </a:rPr>
+              <a:t>[7] Agent: Done! Anything else? ... Have a great day.</a:t>
+            </a:r>
+          </a:p>
+        </p:txBody>
+      </p:sp>
+      <p:sp>
+        <p:nvSpPr>
+          <p:cNvPr id="5" name="Rounded Rectangle 4"/>
+          <p:cNvSpPr/>
+          <p:nvPr/>
+        </p:nvSpPr>
+        <p:spPr>
+          <a:xfrm>
+            <a:off x="6903720" y="1691640"/>
+            <a:ext cx="4663440" cy="3977639"/>
+          </a:xfrm>
+          <a:prstGeom prst="roundRect">
+            <a:avLst/>
+          </a:prstGeom>
+          <a:solidFill>
+            <a:srgbClr val="E4F3EB"/>
+          </a:solidFill>
+          <a:ln w="9525">
+            <a:solidFill>
+              <a:srgbClr val="D9DFE5"/>
+            </a:solidFill>
+          </a:ln>
+          <a:effectLst/>
+        </p:spPr>
+        <p:style>
+          <a:lnRef idx="1">
+            <a:schemeClr val="accent1"/>
+          </a:lnRef>
+          <a:fillRef idx="3">
+            <a:schemeClr val="accent1"/>
+          </a:fillRef>
+          <a:effectRef idx="2">
+            <a:schemeClr val="accent1"/>
+          </a:effectRef>
+          <a:fontRef idx="minor">
+            <a:schemeClr val="lt1"/>
+          </a:fontRef>
+        </p:style>
+        <p:txBody>
+          <a:bodyPr rtlCol="0" anchor="ctr" wrap="square" lIns="137160" rIns="109728" tIns="109728" bIns="73152"/>
+          <a:lstStyle/>
+          <a:p>
+            <a:pPr algn="ctr">
+              <a:spcAft>
+                <a:spcPts val="600"/>
+              </a:spcAft>
+            </a:pPr>
+            <a:r>
+              <a:rPr sz="1250" b="1">
+                <a:solidFill>
+                  <a:srgbClr val="2E8B5E"/>
+                </a:solidFill>
+                <a:latin typeface="Segoe UI"/>
+              </a:rPr>
+              <a:t>WHAT THE PIPELINE MEASURES</a:t>
+            </a:r>
+          </a:p>
+          <a:p>
+            <a:pPr>
+              <a:spcAft>
+                <a:spcPts val="200"/>
+              </a:spcAft>
+            </a:pPr>
+            <a:r>
+              <a:rPr sz="1050" b="0">
+                <a:solidFill>
+                  <a:srgbClr val="0A5B55"/>
+                </a:solidFill>
+                <a:latin typeface="Consolas"/>
+              </a:rPr>
+              <a:t>issue_resolved        = true    [3]</a:t>
+            </a:r>
+          </a:p>
+          <a:p>
+            <a:pPr>
+              <a:spcAft>
+                <a:spcPts val="200"/>
+              </a:spcAft>
+            </a:pPr>
+            <a:r>
+              <a:rPr sz="1050" b="0">
+                <a:solidFill>
+                  <a:srgbClr val="0A5B55"/>
+                </a:solidFill>
+                <a:latin typeface="Consolas"/>
+              </a:rPr>
+              <a:t>customer_experience   = Good    [4]</a:t>
+            </a:r>
+          </a:p>
+          <a:p>
+            <a:pPr>
+              <a:spcAft>
+                <a:spcPts val="200"/>
+              </a:spcAft>
+            </a:pPr>
+            <a:r>
+              <a:rPr sz="1050" b="0">
+                <a:solidFill>
+                  <a:srgbClr val="0A5B55"/>
+                </a:solidFill>
+                <a:latin typeface="Consolas"/>
+              </a:rPr>
+              <a:t>empathy / acknowledge = true    [3]</a:t>
+            </a:r>
+          </a:p>
+          <a:p>
+            <a:pPr>
+              <a:spcAft>
+                <a:spcPts val="200"/>
+              </a:spcAft>
+            </a:pPr>
+            <a:r>
+              <a:rPr sz="1050" b="0">
+                <a:solidFill>
+                  <a:srgbClr val="0A5B55"/>
+                </a:solidFill>
+                <a:latin typeface="Consolas"/>
+              </a:rPr>
+              <a:t>new_line_opportunity  = true    [5]</a:t>
+            </a:r>
+          </a:p>
+          <a:p>
+            <a:pPr>
+              <a:spcAft>
+                <a:spcPts val="200"/>
+              </a:spcAft>
+            </a:pPr>
+            <a:r>
+              <a:rPr sz="1050" b="0">
+                <a:solidFill>
+                  <a:srgbClr val="0A5B55"/>
+                </a:solidFill>
+                <a:latin typeface="Consolas"/>
+              </a:rPr>
+              <a:t>pitched_new_line      = true    [5]</a:t>
+            </a:r>
+          </a:p>
+          <a:p>
+            <a:pPr>
+              <a:spcAft>
+                <a:spcPts val="200"/>
+              </a:spcAft>
+            </a:pPr>
+            <a:r>
+              <a:rPr sz="1050" b="0">
+                <a:solidFill>
+                  <a:srgbClr val="0A5B55"/>
+                </a:solidFill>
+                <a:latin typeface="Consolas"/>
+              </a:rPr>
+              <a:t>sale_made             = true    [6]</a:t>
+            </a:r>
+          </a:p>
+          <a:p>
+            <a:pPr>
+              <a:spcAft>
+                <a:spcPts val="200"/>
+              </a:spcAft>
+            </a:pPr>
+            <a:r>
+              <a:rPr sz="1050" b="0">
+                <a:solidFill>
+                  <a:srgbClr val="0A5B55"/>
+                </a:solidFill>
+                <a:latin typeface="Consolas"/>
+              </a:rPr>
+              <a:t>professional_tone     = true  [1,7]</a:t>
+            </a:r>
+          </a:p>
+          <a:p>
+            <a:pPr>
+              <a:spcAft>
+                <a:spcPts val="200"/>
+              </a:spcAft>
+            </a:pPr>
+            <a:r>
+              <a:rPr sz="1050" b="0">
+                <a:solidFill>
+                  <a:srgbClr val="0A5B55"/>
+                </a:solidFill>
+                <a:latin typeface="Consolas"/>
+              </a:rPr>
+              <a:t>escalation            = none     —</a:t>
+            </a:r>
+          </a:p>
+          <a:p>
+            <a:pPr>
+              <a:spcAft>
+                <a:spcPts val="200"/>
+              </a:spcAft>
+            </a:pPr>
+            <a:r>
+              <a:rPr sz="1050" b="0">
+                <a:solidFill>
+                  <a:srgbClr val="1A1F27"/>
+                </a:solidFill>
+                <a:latin typeface="Segoe UI"/>
+              </a:rPr>
               <a:t/>
             </a:r>
           </a:p>
           <a:p>
             <a:pPr>
               <a:spcAft>
-                <a:spcPts val="300"/>
-              </a:spcAft>
-            </a:pPr>
-            <a:r>
-              <a:rPr sz="1150" b="0">
+                <a:spcPts val="200"/>
+              </a:spcAft>
+            </a:pPr>
+            <a:r>
+              <a:rPr sz="1050" b="0">
+                <a:solidFill>
+                  <a:srgbClr val="2E8B5E"/>
+                </a:solidFill>
+                <a:latin typeface="Segoe UI"/>
+              </a:rPr>
+              <a:t>→ KPIs: new_line_pitches +1, sale +1</a:t>
+            </a:r>
+          </a:p>
+        </p:txBody>
+      </p:sp>
+      <p:sp>
+        <p:nvSpPr>
+          <p:cNvPr id="6" name="Rounded Rectangle 5"/>
+          <p:cNvSpPr/>
+          <p:nvPr/>
+        </p:nvSpPr>
+        <p:spPr>
+          <a:xfrm>
+            <a:off x="640080" y="5806440"/>
+            <a:ext cx="10927080" cy="731520"/>
+          </a:xfrm>
+          <a:prstGeom prst="roundRect">
+            <a:avLst/>
+          </a:prstGeom>
+          <a:solidFill>
+            <a:srgbClr val="E1F0EE"/>
+          </a:solidFill>
+          <a:ln>
+            <a:noFill/>
+          </a:ln>
+          <a:effectLst/>
+        </p:spPr>
+        <p:style>
+          <a:lnRef idx="1">
+            <a:schemeClr val="accent1"/>
+          </a:lnRef>
+          <a:fillRef idx="3">
+            <a:schemeClr val="accent1"/>
+          </a:fillRef>
+          <a:effectRef idx="2">
+            <a:schemeClr val="accent1"/>
+          </a:effectRef>
+          <a:fontRef idx="minor">
+            <a:schemeClr val="lt1"/>
+          </a:fontRef>
+        </p:style>
+        <p:txBody>
+          <a:bodyPr rtlCol="0" anchor="ctr" wrap="square" lIns="201168" rIns="201168"/>
+          <a:lstStyle/>
+          <a:p>
+            <a:pPr algn="ctr">
+              <a:spcAft>
+                <a:spcPts val="0"/>
+              </a:spcAft>
+            </a:pPr>
+            <a:r>
+              <a:rPr sz="1350" b="1">
                 <a:solidFill>
                   <a:srgbClr val="0A5B55"/>
                 </a:solidFill>
                 <a:latin typeface="Segoe UI"/>
               </a:rPr>
-              <a:t>The AI (step 2) records:</a:t>
-            </a:r>
-          </a:p>
-          <a:p>
-            <a:pPr>
-              <a:spcAft>
-                <a:spcPts val="300"/>
-              </a:spcAft>
-            </a:pPr>
-            <a:r>
-              <a:rPr sz="1150" b="0">
+              <a:t>Eight lines of call → nine metrics, each pinned to a line number. Nothing is a black box.</a:t>
+            </a:r>
+          </a:p>
+        </p:txBody>
+      </p:sp>
+    </p:spTree>
+  </p:cSld>
+  <p:clrMapOvr>
+    <a:masterClrMapping/>
+  </p:clrMapOvr>
+</p:sld>
+</file>
+
+<file path=ppt/slides/slide4.xml><?xml version="1.0" encoding="utf-8"?>
+<p:sld xmlns:a="http://schemas.openxmlformats.org/drawingml/2006/main" xmlns:p="http://schemas.openxmlformats.org/presentationml/2006/main" xmlns:r="http://schemas.openxmlformats.org/officeDocument/2006/relationships">
+  <p:cSld>
+    <p:bg>
+      <p:bgPr>
+        <a:solidFill>
+          <a:srgbClr val="FFFFFF"/>
+        </a:solidFill>
+        <a:effectLst/>
+      </p:bgPr>
+    </p:bg>
+    <p:spTree>
+      <p:nvGrpSpPr>
+        <p:cNvPr id="1" name=""/>
+        <p:cNvGrpSpPr/>
+        <p:nvPr/>
+      </p:nvGrpSpPr>
+      <p:grpSpPr/>
+      <p:sp>
+        <p:nvSpPr>
+          <p:cNvPr id="2" name="Rectangle 1"/>
+          <p:cNvSpPr/>
+          <p:nvPr/>
+        </p:nvSpPr>
+        <p:spPr>
+          <a:xfrm>
+            <a:off x="0" y="0"/>
+            <a:ext cx="12191695" cy="128016"/>
+          </a:xfrm>
+          <a:prstGeom prst="rect">
+            <a:avLst/>
+          </a:prstGeom>
+          <a:solidFill>
+            <a:srgbClr val="0E7C74"/>
+          </a:solidFill>
+          <a:ln>
+            <a:noFill/>
+          </a:ln>
+          <a:effectLst/>
+        </p:spPr>
+        <p:style>
+          <a:lnRef idx="1">
+            <a:schemeClr val="accent1"/>
+          </a:lnRef>
+          <a:fillRef idx="3">
+            <a:schemeClr val="accent1"/>
+          </a:fillRef>
+          <a:effectRef idx="2">
+            <a:schemeClr val="accent1"/>
+          </a:effectRef>
+          <a:fontRef idx="minor">
+            <a:schemeClr val="lt1"/>
+          </a:fontRef>
+        </p:style>
+        <p:txBody>
+          <a:bodyPr rtlCol="0" anchor="ctr"/>
+          <a:lstStyle/>
+          <a:p>
+            <a:pPr algn="ctr"/>
+          </a:p>
+        </p:txBody>
+      </p:sp>
+      <p:sp>
+        <p:nvSpPr>
+          <p:cNvPr id="3" name="TextBox 2"/>
+          <p:cNvSpPr txBox="1"/>
+          <p:nvPr/>
+        </p:nvSpPr>
+        <p:spPr>
+          <a:xfrm>
+            <a:off x="640080" y="347472"/>
+            <a:ext cx="11247120" cy="1188720"/>
+          </a:xfrm>
+          <a:prstGeom prst="rect">
+            <a:avLst/>
+          </a:prstGeom>
+          <a:noFill/>
+        </p:spPr>
+        <p:txBody>
+          <a:bodyPr wrap="square">
+            <a:spAutoFit/>
+          </a:bodyPr>
+          <a:lstStyle/>
+          <a:p>
+            <a:pPr>
+              <a:spcAft>
+                <a:spcPts val="400"/>
+              </a:spcAft>
+            </a:pPr>
+            <a:r>
+              <a:rPr sz="1200" b="1">
+                <a:solidFill>
+                  <a:srgbClr val="0E7C74"/>
+                </a:solidFill>
+                <a:latin typeface="Segoe UI"/>
+              </a:rPr>
+              <a:t>EXAMPLE 2 · THE NUANCE</a:t>
+            </a:r>
+          </a:p>
+          <a:p>
+            <a:pPr>
+              <a:spcAft>
+                <a:spcPts val="0"/>
+              </a:spcAft>
+            </a:pPr>
+            <a:r>
+              <a:rPr sz="2400" b="1">
+                <a:solidFill>
+                  <a:srgbClr val="1A1F27"/>
+                </a:solidFill>
+                <a:latin typeface="Segoe UI"/>
+              </a:rPr>
+              <a:t>A frustrated repeat caller — where judgment matters</a:t>
+            </a:r>
+          </a:p>
+        </p:txBody>
+      </p:sp>
+      <p:sp>
+        <p:nvSpPr>
+          <p:cNvPr id="4" name="Rounded Rectangle 3"/>
+          <p:cNvSpPr/>
+          <p:nvPr/>
+        </p:nvSpPr>
+        <p:spPr>
+          <a:xfrm>
+            <a:off x="640080" y="1691640"/>
+            <a:ext cx="6035040" cy="3977639"/>
+          </a:xfrm>
+          <a:prstGeom prst="roundRect">
+            <a:avLst/>
+          </a:prstGeom>
+          <a:solidFill>
+            <a:srgbClr val="F3F1EA"/>
+          </a:solidFill>
+          <a:ln w="9525">
+            <a:solidFill>
+              <a:srgbClr val="D9DFE5"/>
+            </a:solidFill>
+          </a:ln>
+          <a:effectLst/>
+        </p:spPr>
+        <p:style>
+          <a:lnRef idx="1">
+            <a:schemeClr val="accent1"/>
+          </a:lnRef>
+          <a:fillRef idx="3">
+            <a:schemeClr val="accent1"/>
+          </a:fillRef>
+          <a:effectRef idx="2">
+            <a:schemeClr val="accent1"/>
+          </a:effectRef>
+          <a:fontRef idx="minor">
+            <a:schemeClr val="lt1"/>
+          </a:fontRef>
+        </p:style>
+        <p:txBody>
+          <a:bodyPr rtlCol="0" anchor="ctr" wrap="square" lIns="137160" rIns="109728" tIns="109728" bIns="73152"/>
+          <a:lstStyle/>
+          <a:p>
+            <a:pPr algn="ctr">
+              <a:spcAft>
+                <a:spcPts val="600"/>
+              </a:spcAft>
+            </a:pPr>
+            <a:r>
+              <a:rPr sz="1250" b="1">
                 <a:solidFill>
                   <a:srgbClr val="0A5B55"/>
                 </a:solidFill>
+                <a:latin typeface="Segoe UI"/>
+              </a:rPr>
+              <a:t>TRANSCRIPT (excerpt)</a:t>
+            </a:r>
+          </a:p>
+          <a:p>
+            <a:pPr>
+              <a:spcAft>
+                <a:spcPts val="200"/>
+              </a:spcAft>
+            </a:pPr>
+            <a:r>
+              <a:rPr sz="1050" b="0">
+                <a:solidFill>
+                  <a:srgbClr val="1A1F27"/>
+                </a:solidFill>
                 <a:latin typeface="Consolas"/>
               </a:rPr>
-              <a:t>new_line_opportunity_exists = true</a:t>
-            </a:r>
-          </a:p>
-          <a:p>
-            <a:pPr>
-              <a:spcAft>
-                <a:spcPts val="300"/>
-              </a:spcAft>
-            </a:pPr>
-            <a:r>
-              <a:rPr sz="1150" b="0">
+              <a:t>[1] Cust : I've called twice about my hotspot.</a:t>
+            </a:r>
+          </a:p>
+          <a:p>
+            <a:pPr>
+              <a:spcAft>
+                <a:spcPts val="200"/>
+              </a:spcAft>
+            </a:pPr>
+            <a:r>
+              <a:rPr sz="1050" b="0">
+                <a:solidFill>
+                  <a:srgbClr val="1A1F27"/>
+                </a:solidFill>
+                <a:latin typeface="Consolas"/>
+              </a:rPr>
+              <a:t>           This is ridiculous.</a:t>
+            </a:r>
+          </a:p>
+          <a:p>
+            <a:pPr>
+              <a:spcAft>
+                <a:spcPts val="200"/>
+              </a:spcAft>
+            </a:pPr>
+            <a:r>
+              <a:rPr sz="1050" b="0">
+                <a:solidFill>
+                  <a:srgbClr val="1A1F27"/>
+                </a:solidFill>
+                <a:latin typeface="Consolas"/>
+              </a:rPr>
+              <a:t>[2] Agent: Let me check... try toggling this setting.</a:t>
+            </a:r>
+          </a:p>
+          <a:p>
+            <a:pPr>
+              <a:spcAft>
+                <a:spcPts val="200"/>
+              </a:spcAft>
+            </a:pPr>
+            <a:r>
+              <a:rPr sz="1050" b="0">
+                <a:solidFill>
+                  <a:srgbClr val="1A1F27"/>
+                </a:solidFill>
+                <a:latin typeface="Consolas"/>
+              </a:rPr>
+              <a:t>[3] Cust : Fine. That worked. Finally.</a:t>
+            </a:r>
+          </a:p>
+          <a:p>
+            <a:pPr>
+              <a:spcAft>
+                <a:spcPts val="200"/>
+              </a:spcAft>
+            </a:pPr>
+            <a:r>
+              <a:rPr sz="1050" b="0">
+                <a:solidFill>
+                  <a:srgbClr val="1A1F27"/>
+                </a:solidFill>
+                <a:latin typeface="Consolas"/>
+              </a:rPr>
+              <a:t>[4] Agent: Glad it's sorted. Anything else?</a:t>
+            </a:r>
+          </a:p>
+          <a:p>
+            <a:pPr>
+              <a:spcAft>
+                <a:spcPts val="200"/>
+              </a:spcAft>
+            </a:pPr>
+            <a:r>
+              <a:rPr sz="1050" b="0">
+                <a:solidFill>
+                  <a:srgbClr val="1A1F27"/>
+                </a:solidFill>
+                <a:latin typeface="Consolas"/>
+              </a:rPr>
+              <a:t>[5] Cust : No. Bye.</a:t>
+            </a:r>
+          </a:p>
+        </p:txBody>
+      </p:sp>
+      <p:sp>
+        <p:nvSpPr>
+          <p:cNvPr id="5" name="Rounded Rectangle 4"/>
+          <p:cNvSpPr/>
+          <p:nvPr/>
+        </p:nvSpPr>
+        <p:spPr>
+          <a:xfrm>
+            <a:off x="6903720" y="1691640"/>
+            <a:ext cx="4663440" cy="3977639"/>
+          </a:xfrm>
+          <a:prstGeom prst="roundRect">
+            <a:avLst/>
+          </a:prstGeom>
+          <a:solidFill>
+            <a:srgbClr val="F6ECD6"/>
+          </a:solidFill>
+          <a:ln w="9525">
+            <a:solidFill>
+              <a:srgbClr val="D9DFE5"/>
+            </a:solidFill>
+          </a:ln>
+          <a:effectLst/>
+        </p:spPr>
+        <p:style>
+          <a:lnRef idx="1">
+            <a:schemeClr val="accent1"/>
+          </a:lnRef>
+          <a:fillRef idx="3">
+            <a:schemeClr val="accent1"/>
+          </a:fillRef>
+          <a:effectRef idx="2">
+            <a:schemeClr val="accent1"/>
+          </a:effectRef>
+          <a:fontRef idx="minor">
+            <a:schemeClr val="lt1"/>
+          </a:fontRef>
+        </p:style>
+        <p:txBody>
+          <a:bodyPr rtlCol="0" anchor="ctr" wrap="square" lIns="137160" rIns="109728" tIns="109728" bIns="73152"/>
+          <a:lstStyle/>
+          <a:p>
+            <a:pPr algn="ctr">
+              <a:spcAft>
+                <a:spcPts val="600"/>
+              </a:spcAft>
+            </a:pPr>
+            <a:r>
+              <a:rPr sz="1250" b="1">
+                <a:solidFill>
+                  <a:srgbClr val="A96E12"/>
+                </a:solidFill>
+                <a:latin typeface="Segoe UI"/>
+              </a:rPr>
+              <a:t>NUANCES THE PIPELINE CAPTURES</a:t>
+            </a:r>
+          </a:p>
+          <a:p>
+            <a:pPr>
+              <a:spcAft>
+                <a:spcPts val="200"/>
+              </a:spcAft>
+            </a:pPr>
+            <a:r>
+              <a:rPr sz="1050" b="0">
                 <a:solidFill>
                   <a:srgbClr val="0A5B55"/>
                 </a:solidFill>
                 <a:latin typeface="Consolas"/>
               </a:rPr>
-              <a:t>pitched_new_line            = true</a:t>
-            </a:r>
-          </a:p>
-          <a:p>
-            <a:pPr>
-              <a:spcAft>
-                <a:spcPts val="300"/>
-              </a:spcAft>
-            </a:pPr>
-            <a:r>
-              <a:rPr sz="1150" b="0">
+              <a:t>frustration: start 7 → end 3   [1→3]</a:t>
+            </a:r>
+          </a:p>
+          <a:p>
+            <a:pPr>
+              <a:spcAft>
+                <a:spcPts val="200"/>
+              </a:spcAft>
+            </a:pPr>
+            <a:r>
+              <a:rPr sz="1050" b="0">
+                <a:solidFill>
+                  <a:srgbClr val="A96E12"/>
+                </a:solidFill>
+                <a:latin typeface="Consolas"/>
+              </a:rPr>
+              <a:t>escalation = none  (frustrated,</a:t>
+            </a:r>
+          </a:p>
+          <a:p>
+            <a:pPr>
+              <a:spcAft>
+                <a:spcPts val="200"/>
+              </a:spcAft>
+            </a:pPr>
+            <a:r>
+              <a:rPr sz="1050" b="0">
+                <a:solidFill>
+                  <a:srgbClr val="A96E12"/>
+                </a:solidFill>
+                <a:latin typeface="Consolas"/>
+              </a:rPr>
+              <a:t>   but never asked to escalate) [1]</a:t>
+            </a:r>
+          </a:p>
+          <a:p>
+            <a:pPr>
+              <a:spcAft>
+                <a:spcPts val="200"/>
+              </a:spcAft>
+            </a:pPr>
+            <a:r>
+              <a:rPr sz="1050" b="0">
                 <a:solidFill>
                   <a:srgbClr val="0A5B55"/>
                 </a:solidFill>
                 <a:latin typeface="Consolas"/>
               </a:rPr>
-              <a:t>issue_resolved              = true</a:t>
-            </a:r>
-          </a:p>
-          <a:p>
-            <a:pPr>
-              <a:spcAft>
-                <a:spcPts val="300"/>
-              </a:spcAft>
-            </a:pPr>
-            <a:r>
-              <a:rPr sz="1150" b="0">
+              <a:t>issue_resolved = true          [3]</a:t>
+            </a:r>
+          </a:p>
+          <a:p>
+            <a:pPr>
+              <a:spcAft>
+                <a:spcPts val="200"/>
+              </a:spcAft>
+            </a:pPr>
+            <a:r>
+              <a:rPr sz="1050" b="0">
+                <a:solidFill>
+                  <a:srgbClr val="A96E12"/>
+                </a:solidFill>
+                <a:latin typeface="Consolas"/>
+              </a:rPr>
+              <a:t>repeat_contact_risk = true</a:t>
+            </a:r>
+          </a:p>
+          <a:p>
+            <a:pPr>
+              <a:spcAft>
+                <a:spcPts val="200"/>
+              </a:spcAft>
+            </a:pPr>
+            <a:r>
+              <a:rPr sz="1050" b="0">
+                <a:solidFill>
+                  <a:srgbClr val="A96E12"/>
+                </a:solidFill>
+                <a:latin typeface="Consolas"/>
+              </a:rPr>
+              <a:t>   ("called twice")           [1]</a:t>
+            </a:r>
+          </a:p>
+          <a:p>
+            <a:pPr>
+              <a:spcAft>
+                <a:spcPts val="200"/>
+              </a:spcAft>
+            </a:pPr>
+            <a:r>
+              <a:rPr sz="1050" b="0">
+                <a:solidFill>
+                  <a:srgbClr val="A96E12"/>
+                </a:solidFill>
+                <a:latin typeface="Consolas"/>
+              </a:rPr>
+              <a:t>acknowledgment = weak (didn't</a:t>
+            </a:r>
+          </a:p>
+          <a:p>
+            <a:pPr>
+              <a:spcAft>
+                <a:spcPts val="200"/>
+              </a:spcAft>
+            </a:pPr>
+            <a:r>
+              <a:rPr sz="1050" b="0">
+                <a:solidFill>
+                  <a:srgbClr val="A96E12"/>
+                </a:solidFill>
+                <a:latin typeface="Consolas"/>
+              </a:rPr>
+              <a:t>   own the repeat contact)     [2]</a:t>
+            </a:r>
+          </a:p>
+          <a:p>
+            <a:pPr>
+              <a:spcAft>
+                <a:spcPts val="200"/>
+              </a:spcAft>
+            </a:pPr>
+            <a:r>
+              <a:rPr sz="1050" b="0">
+                <a:solidFill>
+                  <a:srgbClr val="1A1F27"/>
+                </a:solidFill>
+                <a:latin typeface="Segoe UI"/>
+              </a:rPr>
+              <a:t/>
+            </a:r>
+          </a:p>
+          <a:p>
+            <a:pPr>
+              <a:spcAft>
+                <a:spcPts val="200"/>
+              </a:spcAft>
+            </a:pPr>
+            <a:r>
+              <a:rPr sz="1050" b="0">
+                <a:solidFill>
+                  <a:srgbClr val="2E8B5E"/>
+                </a:solidFill>
+                <a:latin typeface="Segoe UI"/>
+              </a:rPr>
+              <a:t>→ coaching: acknowledge the repeat</a:t>
+            </a:r>
+          </a:p>
+          <a:p>
+            <a:pPr>
+              <a:spcAft>
+                <a:spcPts val="200"/>
+              </a:spcAft>
+            </a:pPr>
+            <a:r>
+              <a:rPr sz="1050" b="0">
+                <a:solidFill>
+                  <a:srgbClr val="2E8B5E"/>
+                </a:solidFill>
+                <a:latin typeface="Segoe UI"/>
+              </a:rPr>
+              <a:t>   contact; check data-plan fit</a:t>
+            </a:r>
+          </a:p>
+        </p:txBody>
+      </p:sp>
+      <p:sp>
+        <p:nvSpPr>
+          <p:cNvPr id="6" name="Rounded Rectangle 5"/>
+          <p:cNvSpPr/>
+          <p:nvPr/>
+        </p:nvSpPr>
+        <p:spPr>
+          <a:xfrm>
+            <a:off x="640080" y="5806440"/>
+            <a:ext cx="10927080" cy="731520"/>
+          </a:xfrm>
+          <a:prstGeom prst="roundRect">
+            <a:avLst/>
+          </a:prstGeom>
+          <a:solidFill>
+            <a:srgbClr val="E1F0EE"/>
+          </a:solidFill>
+          <a:ln>
+            <a:noFill/>
+          </a:ln>
+          <a:effectLst/>
+        </p:spPr>
+        <p:style>
+          <a:lnRef idx="1">
+            <a:schemeClr val="accent1"/>
+          </a:lnRef>
+          <a:fillRef idx="3">
+            <a:schemeClr val="accent1"/>
+          </a:fillRef>
+          <a:effectRef idx="2">
+            <a:schemeClr val="accent1"/>
+          </a:effectRef>
+          <a:fontRef idx="minor">
+            <a:schemeClr val="lt1"/>
+          </a:fontRef>
+        </p:style>
+        <p:txBody>
+          <a:bodyPr rtlCol="0" anchor="ctr" wrap="square" lIns="201168" rIns="201168"/>
+          <a:lstStyle/>
+          <a:p>
+            <a:pPr algn="ctr">
+              <a:spcAft>
+                <a:spcPts val="0"/>
+              </a:spcAft>
+            </a:pPr>
+            <a:r>
+              <a:rPr sz="1350" b="1">
                 <a:solidFill>
                   <a:srgbClr val="0A5B55"/>
                 </a:solidFill>
+                <a:latin typeface="Segoe UI"/>
+              </a:rPr>
+              <a:t>The hard cases are handled: frustration is NOT the same as an escalation; a resolved call can still be a missed opportunity and a repeat-contact risk.</a:t>
+            </a:r>
+          </a:p>
+        </p:txBody>
+      </p:sp>
+    </p:spTree>
+  </p:cSld>
+  <p:clrMapOvr>
+    <a:masterClrMapping/>
+  </p:clrMapOvr>
+</p:sld>
+</file>
+
+<file path=ppt/slides/slide5.xml><?xml version="1.0" encoding="utf-8"?>
+<p:sld xmlns:a="http://schemas.openxmlformats.org/drawingml/2006/main" xmlns:p="http://schemas.openxmlformats.org/presentationml/2006/main" xmlns:r="http://schemas.openxmlformats.org/officeDocument/2006/relationships">
+  <p:cSld>
+    <p:bg>
+      <p:bgPr>
+        <a:solidFill>
+          <a:srgbClr val="FFFFFF"/>
+        </a:solidFill>
+        <a:effectLst/>
+      </p:bgPr>
+    </p:bg>
+    <p:spTree>
+      <p:nvGrpSpPr>
+        <p:cNvPr id="1" name=""/>
+        <p:cNvGrpSpPr/>
+        <p:nvPr/>
+      </p:nvGrpSpPr>
+      <p:grpSpPr/>
+      <p:sp>
+        <p:nvSpPr>
+          <p:cNvPr id="2" name="Rectangle 1"/>
+          <p:cNvSpPr/>
+          <p:nvPr/>
+        </p:nvSpPr>
+        <p:spPr>
+          <a:xfrm>
+            <a:off x="0" y="0"/>
+            <a:ext cx="12191695" cy="128016"/>
+          </a:xfrm>
+          <a:prstGeom prst="rect">
+            <a:avLst/>
+          </a:prstGeom>
+          <a:solidFill>
+            <a:srgbClr val="0E7C74"/>
+          </a:solidFill>
+          <a:ln>
+            <a:noFill/>
+          </a:ln>
+          <a:effectLst/>
+        </p:spPr>
+        <p:style>
+          <a:lnRef idx="1">
+            <a:schemeClr val="accent1"/>
+          </a:lnRef>
+          <a:fillRef idx="3">
+            <a:schemeClr val="accent1"/>
+          </a:fillRef>
+          <a:effectRef idx="2">
+            <a:schemeClr val="accent1"/>
+          </a:effectRef>
+          <a:fontRef idx="minor">
+            <a:schemeClr val="lt1"/>
+          </a:fontRef>
+        </p:style>
+        <p:txBody>
+          <a:bodyPr rtlCol="0" anchor="ctr"/>
+          <a:lstStyle/>
+          <a:p>
+            <a:pPr algn="ctr"/>
+          </a:p>
+        </p:txBody>
+      </p:sp>
+      <p:sp>
+        <p:nvSpPr>
+          <p:cNvPr id="3" name="TextBox 2"/>
+          <p:cNvSpPr txBox="1"/>
+          <p:nvPr/>
+        </p:nvSpPr>
+        <p:spPr>
+          <a:xfrm>
+            <a:off x="640080" y="347472"/>
+            <a:ext cx="11247120" cy="1188720"/>
+          </a:xfrm>
+          <a:prstGeom prst="rect">
+            <a:avLst/>
+          </a:prstGeom>
+          <a:noFill/>
+        </p:spPr>
+        <p:txBody>
+          <a:bodyPr wrap="square">
+            <a:spAutoFit/>
+          </a:bodyPr>
+          <a:lstStyle/>
+          <a:p>
+            <a:pPr>
+              <a:spcAft>
+                <a:spcPts val="400"/>
+              </a:spcAft>
+            </a:pPr>
+            <a:r>
+              <a:rPr sz="1200" b="1">
+                <a:solidFill>
+                  <a:srgbClr val="0E7C74"/>
+                </a:solidFill>
+                <a:latin typeface="Segoe UI"/>
+              </a:rPr>
+              <a:t>METRIC COVERAGE</a:t>
+            </a:r>
+          </a:p>
+          <a:p>
+            <a:pPr>
+              <a:spcAft>
+                <a:spcPts val="0"/>
+              </a:spcAft>
+            </a:pPr>
+            <a:r>
+              <a:rPr sz="2400" b="1">
+                <a:solidFill>
+                  <a:srgbClr val="1A1F27"/>
+                </a:solidFill>
+                <a:latin typeface="Segoe UI"/>
+              </a:rPr>
+              <a:t>One 90-second call — everything the pipeline measures</a:t>
+            </a:r>
+          </a:p>
+        </p:txBody>
+      </p:sp>
+      <p:graphicFrame>
+        <p:nvGraphicFramePr>
+          <p:cNvPr id="4" name="Table 3"/>
+          <p:cNvGraphicFramePr>
+            <a:graphicFrameLocks noGrp="1"/>
+          </p:cNvGraphicFramePr>
+          <p:nvPr/>
+        </p:nvGraphicFramePr>
+        <p:xfrm>
+          <a:off x="640080" y="1783080"/>
+          <a:ext cx="10927080" cy="4389120"/>
+        </p:xfrm>
+        <a:graphic>
+          <a:graphicData uri="http://schemas.openxmlformats.org/drawingml/2006/table">
+            <a:tbl>
+              <a:tblPr firstRow="1">
+                <a:tableStyleId>{5C22544A-7EE6-4342-B048-85BDC9FD1C3A}</a:tableStyleId>
+              </a:tblPr>
+              <a:tblGrid>
+                <a:gridCol w="1828800"/>
+                <a:gridCol w="4114800"/>
+                <a:gridCol w="2468880"/>
+                <a:gridCol w="2514600"/>
+              </a:tblGrid>
+              <a:tr h="548640">
+                <a:tc>
+                  <a:txBody>
+                    <a:bodyPr wrap="square"/>
+                    <a:lstStyle/>
+                    <a:p>
+                      <a:r>
+                        <a:rPr sz="1100" b="1">
+                          <a:solidFill>
+                            <a:srgbClr val="FFFFFF"/>
+                          </a:solidFill>
+                          <a:latin typeface="Segoe UI"/>
+                        </a:rPr>
+                        <a:t>Category</a:t>
+                      </a:r>
+                    </a:p>
+                  </a:txBody>
+                  <a:tcPr anchor="ctr" marL="82296" marR="45720" marT="18288" marB="18288">
+                    <a:solidFill>
+                      <a:srgbClr val="0E7C74"/>
+                    </a:solidFill>
+                  </a:tcPr>
+                </a:tc>
+                <a:tc>
+                  <a:txBody>
+                    <a:bodyPr wrap="square"/>
+                    <a:lstStyle/>
+                    <a:p>
+                      <a:r>
+                        <a:rPr sz="1100" b="1">
+                          <a:solidFill>
+                            <a:srgbClr val="FFFFFF"/>
+                          </a:solidFill>
+                          <a:latin typeface="Segoe UI"/>
+                        </a:rPr>
+                        <a:t>Metric</a:t>
+                      </a:r>
+                    </a:p>
+                  </a:txBody>
+                  <a:tcPr anchor="ctr" marL="82296" marR="45720" marT="18288" marB="18288">
+                    <a:solidFill>
+                      <a:srgbClr val="0E7C74"/>
+                    </a:solidFill>
+                  </a:tcPr>
+                </a:tc>
+                <a:tc>
+                  <a:txBody>
+                    <a:bodyPr wrap="square"/>
+                    <a:lstStyle/>
+                    <a:p>
+                      <a:r>
+                        <a:rPr sz="1100" b="1">
+                          <a:solidFill>
+                            <a:srgbClr val="FFFFFF"/>
+                          </a:solidFill>
+                          <a:latin typeface="Segoe UI"/>
+                        </a:rPr>
+                        <a:t>Value</a:t>
+                      </a:r>
+                    </a:p>
+                  </a:txBody>
+                  <a:tcPr anchor="ctr" marL="82296" marR="45720" marT="18288" marB="18288">
+                    <a:solidFill>
+                      <a:srgbClr val="0E7C74"/>
+                    </a:solidFill>
+                  </a:tcPr>
+                </a:tc>
+                <a:tc>
+                  <a:txBody>
+                    <a:bodyPr wrap="square"/>
+                    <a:lstStyle/>
+                    <a:p>
+                      <a:r>
+                        <a:rPr sz="1100" b="1">
+                          <a:solidFill>
+                            <a:srgbClr val="FFFFFF"/>
+                          </a:solidFill>
+                          <a:latin typeface="Segoe UI"/>
+                        </a:rPr>
+                        <a:t>Evidence</a:t>
+                      </a:r>
+                    </a:p>
+                  </a:txBody>
+                  <a:tcPr anchor="ctr" marL="82296" marR="45720" marT="18288" marB="18288">
+                    <a:solidFill>
+                      <a:srgbClr val="0E7C74"/>
+                    </a:solidFill>
+                  </a:tcPr>
+                </a:tc>
+              </a:tr>
+              <a:tr h="548640">
+                <a:tc>
+                  <a:txBody>
+                    <a:bodyPr wrap="square"/>
+                    <a:lstStyle/>
+                    <a:p>
+                      <a:r>
+                        <a:rPr sz="1250" b="1">
+                          <a:solidFill>
+                            <a:srgbClr val="1A1F27"/>
+                          </a:solidFill>
+                          <a:latin typeface="Segoe UI"/>
+                        </a:rPr>
+                        <a:t>Outcome</a:t>
+                      </a:r>
+                    </a:p>
+                  </a:txBody>
+                  <a:tcPr anchor="ctr" marL="82296" marR="45720" marT="18288" marB="18288">
+                    <a:solidFill>
+                      <a:srgbClr val="FFFFFF"/>
+                    </a:solidFill>
+                  </a:tcPr>
+                </a:tc>
+                <a:tc>
+                  <a:txBody>
+                    <a:bodyPr wrap="square"/>
+                    <a:lstStyle/>
+                    <a:p>
+                      <a:r>
+                        <a:rPr sz="1250" b="0">
+                          <a:solidFill>
+                            <a:srgbClr val="535C6A"/>
+                          </a:solidFill>
+                          <a:latin typeface="Consolas"/>
+                        </a:rPr>
+                        <a:t>issue_resolved</a:t>
+                      </a:r>
+                    </a:p>
+                  </a:txBody>
+                  <a:tcPr anchor="ctr" marL="82296" marR="45720" marT="18288" marB="18288">
+                    <a:solidFill>
+                      <a:srgbClr val="FFFFFF"/>
+                    </a:solidFill>
+                  </a:tcPr>
+                </a:tc>
+                <a:tc>
+                  <a:txBody>
+                    <a:bodyPr wrap="square"/>
+                    <a:lstStyle/>
+                    <a:p>
+                      <a:r>
+                        <a:rPr sz="1250" b="0">
+                          <a:solidFill>
+                            <a:srgbClr val="535C6A"/>
+                          </a:solidFill>
+                          <a:latin typeface="Consolas"/>
+                        </a:rPr>
+                        <a:t>true</a:t>
+                      </a:r>
+                    </a:p>
+                  </a:txBody>
+                  <a:tcPr anchor="ctr" marL="82296" marR="45720" marT="18288" marB="18288">
+                    <a:solidFill>
+                      <a:srgbClr val="FFFFFF"/>
+                    </a:solidFill>
+                  </a:tcPr>
+                </a:tc>
+                <a:tc>
+                  <a:txBody>
+                    <a:bodyPr wrap="square"/>
+                    <a:lstStyle/>
+                    <a:p>
+                      <a:r>
+                        <a:rPr sz="1250" b="0">
+                          <a:solidFill>
+                            <a:srgbClr val="535C6A"/>
+                          </a:solidFill>
+                          <a:latin typeface="Consolas"/>
+                        </a:rPr>
+                        <a:t>line 3</a:t>
+                      </a:r>
+                    </a:p>
+                  </a:txBody>
+                  <a:tcPr anchor="ctr" marL="82296" marR="45720" marT="18288" marB="18288">
+                    <a:solidFill>
+                      <a:srgbClr val="FFFFFF"/>
+                    </a:solidFill>
+                  </a:tcPr>
+                </a:tc>
+              </a:tr>
+              <a:tr h="548640">
+                <a:tc>
+                  <a:txBody>
+                    <a:bodyPr wrap="square"/>
+                    <a:lstStyle/>
+                    <a:p>
+                      <a:r>
+                        <a:rPr sz="1250" b="1">
+                          <a:solidFill>
+                            <a:srgbClr val="1A1F27"/>
+                          </a:solidFill>
+                          <a:latin typeface="Segoe UI"/>
+                        </a:rPr>
+                        <a:t>Sales</a:t>
+                      </a:r>
+                    </a:p>
+                  </a:txBody>
+                  <a:tcPr anchor="ctr" marL="82296" marR="45720" marT="18288" marB="18288">
+                    <a:solidFill>
+                      <a:srgbClr val="F7F9F8"/>
+                    </a:solidFill>
+                  </a:tcPr>
+                </a:tc>
+                <a:tc>
+                  <a:txBody>
+                    <a:bodyPr wrap="square"/>
+                    <a:lstStyle/>
+                    <a:p>
+                      <a:r>
+                        <a:rPr sz="1250" b="0">
+                          <a:solidFill>
+                            <a:srgbClr val="535C6A"/>
+                          </a:solidFill>
+                          <a:latin typeface="Consolas"/>
+                        </a:rPr>
+                        <a:t>new_line pitched / sale_made</a:t>
+                      </a:r>
+                    </a:p>
+                  </a:txBody>
+                  <a:tcPr anchor="ctr" marL="82296" marR="45720" marT="18288" marB="18288">
+                    <a:solidFill>
+                      <a:srgbClr val="F7F9F8"/>
+                    </a:solidFill>
+                  </a:tcPr>
+                </a:tc>
+                <a:tc>
+                  <a:txBody>
+                    <a:bodyPr wrap="square"/>
+                    <a:lstStyle/>
+                    <a:p>
+                      <a:r>
+                        <a:rPr sz="1250" b="0">
+                          <a:solidFill>
+                            <a:srgbClr val="535C6A"/>
+                          </a:solidFill>
+                          <a:latin typeface="Consolas"/>
+                        </a:rPr>
+                        <a:t>true / true</a:t>
+                      </a:r>
+                    </a:p>
+                  </a:txBody>
+                  <a:tcPr anchor="ctr" marL="82296" marR="45720" marT="18288" marB="18288">
+                    <a:solidFill>
+                      <a:srgbClr val="F7F9F8"/>
+                    </a:solidFill>
+                  </a:tcPr>
+                </a:tc>
+                <a:tc>
+                  <a:txBody>
+                    <a:bodyPr wrap="square"/>
+                    <a:lstStyle/>
+                    <a:p>
+                      <a:r>
+                        <a:rPr sz="1250" b="0">
+                          <a:solidFill>
+                            <a:srgbClr val="535C6A"/>
+                          </a:solidFill>
+                          <a:latin typeface="Consolas"/>
+                        </a:rPr>
+                        <a:t>lines 5, 6</a:t>
+                      </a:r>
+                    </a:p>
+                  </a:txBody>
+                  <a:tcPr anchor="ctr" marL="82296" marR="45720" marT="18288" marB="18288">
+                    <a:solidFill>
+                      <a:srgbClr val="F7F9F8"/>
+                    </a:solidFill>
+                  </a:tcPr>
+                </a:tc>
+              </a:tr>
+              <a:tr h="548640">
+                <a:tc>
+                  <a:txBody>
+                    <a:bodyPr wrap="square"/>
+                    <a:lstStyle/>
+                    <a:p>
+                      <a:r>
+                        <a:rPr sz="1250" b="1">
+                          <a:solidFill>
+                            <a:srgbClr val="1A1F27"/>
+                          </a:solidFill>
+                          <a:latin typeface="Segoe UI"/>
+                        </a:rPr>
+                        <a:t>Experience</a:t>
+                      </a:r>
+                    </a:p>
+                  </a:txBody>
+                  <a:tcPr anchor="ctr" marL="82296" marR="45720" marT="18288" marB="18288">
+                    <a:solidFill>
+                      <a:srgbClr val="FFFFFF"/>
+                    </a:solidFill>
+                  </a:tcPr>
+                </a:tc>
+                <a:tc>
+                  <a:txBody>
+                    <a:bodyPr wrap="square"/>
+                    <a:lstStyle/>
+                    <a:p>
+                      <a:r>
+                        <a:rPr sz="1250" b="0">
+                          <a:solidFill>
+                            <a:srgbClr val="535C6A"/>
+                          </a:solidFill>
+                          <a:latin typeface="Consolas"/>
+                        </a:rPr>
+                        <a:t>customer_experience</a:t>
+                      </a:r>
+                    </a:p>
+                  </a:txBody>
+                  <a:tcPr anchor="ctr" marL="82296" marR="45720" marT="18288" marB="18288">
+                    <a:solidFill>
+                      <a:srgbClr val="FFFFFF"/>
+                    </a:solidFill>
+                  </a:tcPr>
+                </a:tc>
+                <a:tc>
+                  <a:txBody>
+                    <a:bodyPr wrap="square"/>
+                    <a:lstStyle/>
+                    <a:p>
+                      <a:r>
+                        <a:rPr sz="1250" b="0">
+                          <a:solidFill>
+                            <a:srgbClr val="535C6A"/>
+                          </a:solidFill>
+                          <a:latin typeface="Consolas"/>
+                        </a:rPr>
+                        <a:t>Good</a:t>
+                      </a:r>
+                    </a:p>
+                  </a:txBody>
+                  <a:tcPr anchor="ctr" marL="82296" marR="45720" marT="18288" marB="18288">
+                    <a:solidFill>
+                      <a:srgbClr val="FFFFFF"/>
+                    </a:solidFill>
+                  </a:tcPr>
+                </a:tc>
+                <a:tc>
+                  <a:txBody>
+                    <a:bodyPr wrap="square"/>
+                    <a:lstStyle/>
+                    <a:p>
+                      <a:r>
+                        <a:rPr sz="1250" b="0">
+                          <a:solidFill>
+                            <a:srgbClr val="535C6A"/>
+                          </a:solidFill>
+                          <a:latin typeface="Consolas"/>
+                        </a:rPr>
+                        <a:t>line 4</a:t>
+                      </a:r>
+                    </a:p>
+                  </a:txBody>
+                  <a:tcPr anchor="ctr" marL="82296" marR="45720" marT="18288" marB="18288">
+                    <a:solidFill>
+                      <a:srgbClr val="FFFFFF"/>
+                    </a:solidFill>
+                  </a:tcPr>
+                </a:tc>
+              </a:tr>
+              <a:tr h="548640">
+                <a:tc>
+                  <a:txBody>
+                    <a:bodyPr wrap="square"/>
+                    <a:lstStyle/>
+                    <a:p>
+                      <a:r>
+                        <a:rPr sz="1250" b="1">
+                          <a:solidFill>
+                            <a:srgbClr val="1A1F27"/>
+                          </a:solidFill>
+                          <a:latin typeface="Segoe UI"/>
+                        </a:rPr>
+                        <a:t>Sentiment</a:t>
+                      </a:r>
+                    </a:p>
+                  </a:txBody>
+                  <a:tcPr anchor="ctr" marL="82296" marR="45720" marT="18288" marB="18288">
+                    <a:solidFill>
+                      <a:srgbClr val="F7F9F8"/>
+                    </a:solidFill>
+                  </a:tcPr>
+                </a:tc>
+                <a:tc>
+                  <a:txBody>
+                    <a:bodyPr wrap="square"/>
+                    <a:lstStyle/>
+                    <a:p>
+                      <a:r>
+                        <a:rPr sz="1250" b="0">
+                          <a:solidFill>
+                            <a:srgbClr val="535C6A"/>
+                          </a:solidFill>
+                          <a:latin typeface="Consolas"/>
+                        </a:rPr>
+                        <a:t>frustration (start → end)</a:t>
+                      </a:r>
+                    </a:p>
+                  </a:txBody>
+                  <a:tcPr anchor="ctr" marL="82296" marR="45720" marT="18288" marB="18288">
+                    <a:solidFill>
+                      <a:srgbClr val="F7F9F8"/>
+                    </a:solidFill>
+                  </a:tcPr>
+                </a:tc>
+                <a:tc>
+                  <a:txBody>
+                    <a:bodyPr wrap="square"/>
+                    <a:lstStyle/>
+                    <a:p>
+                      <a:r>
+                        <a:rPr sz="1250" b="0">
+                          <a:solidFill>
+                            <a:srgbClr val="535C6A"/>
+                          </a:solidFill>
+                          <a:latin typeface="Consolas"/>
+                        </a:rPr>
+                        <a:t>3 → 1</a:t>
+                      </a:r>
+                    </a:p>
+                  </a:txBody>
+                  <a:tcPr anchor="ctr" marL="82296" marR="45720" marT="18288" marB="18288">
+                    <a:solidFill>
+                      <a:srgbClr val="F7F9F8"/>
+                    </a:solidFill>
+                  </a:tcPr>
+                </a:tc>
+                <a:tc>
+                  <a:txBody>
+                    <a:bodyPr wrap="square"/>
+                    <a:lstStyle/>
+                    <a:p>
+                      <a:r>
+                        <a:rPr sz="1250" b="0">
+                          <a:solidFill>
+                            <a:srgbClr val="535C6A"/>
+                          </a:solidFill>
+                          <a:latin typeface="Consolas"/>
+                        </a:rPr>
+                        <a:t>lines 2, 4</a:t>
+                      </a:r>
+                    </a:p>
+                  </a:txBody>
+                  <a:tcPr anchor="ctr" marL="82296" marR="45720" marT="18288" marB="18288">
+                    <a:solidFill>
+                      <a:srgbClr val="F7F9F8"/>
+                    </a:solidFill>
+                  </a:tcPr>
+                </a:tc>
+              </a:tr>
+              <a:tr h="548640">
+                <a:tc>
+                  <a:txBody>
+                    <a:bodyPr wrap="square"/>
+                    <a:lstStyle/>
+                    <a:p>
+                      <a:r>
+                        <a:rPr sz="1250" b="1">
+                          <a:solidFill>
+                            <a:srgbClr val="1A1F27"/>
+                          </a:solidFill>
+                          <a:latin typeface="Segoe UI"/>
+                        </a:rPr>
+                        <a:t>Behaviour</a:t>
+                      </a:r>
+                    </a:p>
+                  </a:txBody>
+                  <a:tcPr anchor="ctr" marL="82296" marR="45720" marT="18288" marB="18288">
+                    <a:solidFill>
+                      <a:srgbClr val="FFFFFF"/>
+                    </a:solidFill>
+                  </a:tcPr>
+                </a:tc>
+                <a:tc>
+                  <a:txBody>
+                    <a:bodyPr wrap="square"/>
+                    <a:lstStyle/>
+                    <a:p>
+                      <a:r>
+                        <a:rPr sz="1250" b="0">
+                          <a:solidFill>
+                            <a:srgbClr val="535C6A"/>
+                          </a:solidFill>
+                          <a:latin typeface="Consolas"/>
+                        </a:rPr>
+                        <a:t>acknowledgment · empathy</a:t>
+                      </a:r>
+                    </a:p>
+                  </a:txBody>
+                  <a:tcPr anchor="ctr" marL="82296" marR="45720" marT="18288" marB="18288">
+                    <a:solidFill>
+                      <a:srgbClr val="FFFFFF"/>
+                    </a:solidFill>
+                  </a:tcPr>
+                </a:tc>
+                <a:tc>
+                  <a:txBody>
+                    <a:bodyPr wrap="square"/>
+                    <a:lstStyle/>
+                    <a:p>
+                      <a:r>
+                        <a:rPr sz="1250" b="0">
+                          <a:solidFill>
+                            <a:srgbClr val="535C6A"/>
+                          </a:solidFill>
+                          <a:latin typeface="Consolas"/>
+                        </a:rPr>
+                        <a:t>true · true</a:t>
+                      </a:r>
+                    </a:p>
+                  </a:txBody>
+                  <a:tcPr anchor="ctr" marL="82296" marR="45720" marT="18288" marB="18288">
+                    <a:solidFill>
+                      <a:srgbClr val="FFFFFF"/>
+                    </a:solidFill>
+                  </a:tcPr>
+                </a:tc>
+                <a:tc>
+                  <a:txBody>
+                    <a:bodyPr wrap="square"/>
+                    <a:lstStyle/>
+                    <a:p>
+                      <a:r>
+                        <a:rPr sz="1250" b="0">
+                          <a:solidFill>
+                            <a:srgbClr val="535C6A"/>
+                          </a:solidFill>
+                          <a:latin typeface="Consolas"/>
+                        </a:rPr>
+                        <a:t>line 3</a:t>
+                      </a:r>
+                    </a:p>
+                  </a:txBody>
+                  <a:tcPr anchor="ctr" marL="82296" marR="45720" marT="18288" marB="18288">
+                    <a:solidFill>
+                      <a:srgbClr val="FFFFFF"/>
+                    </a:solidFill>
+                  </a:tcPr>
+                </a:tc>
+              </a:tr>
+              <a:tr h="548640">
+                <a:tc>
+                  <a:txBody>
+                    <a:bodyPr wrap="square"/>
+                    <a:lstStyle/>
+                    <a:p>
+                      <a:r>
+                        <a:rPr sz="1250" b="1">
+                          <a:solidFill>
+                            <a:srgbClr val="1A1F27"/>
+                          </a:solidFill>
+                          <a:latin typeface="Segoe UI"/>
+                        </a:rPr>
+                        <a:t>Soft skill</a:t>
+                      </a:r>
+                    </a:p>
+                  </a:txBody>
+                  <a:tcPr anchor="ctr" marL="82296" marR="45720" marT="18288" marB="18288">
+                    <a:solidFill>
+                      <a:srgbClr val="F7F9F8"/>
+                    </a:solidFill>
+                  </a:tcPr>
+                </a:tc>
+                <a:tc>
+                  <a:txBody>
+                    <a:bodyPr wrap="square"/>
+                    <a:lstStyle/>
+                    <a:p>
+                      <a:r>
+                        <a:rPr sz="1250" b="0">
+                          <a:solidFill>
+                            <a:srgbClr val="535C6A"/>
+                          </a:solidFill>
+                          <a:latin typeface="Consolas"/>
+                        </a:rPr>
+                        <a:t>professional_tone</a:t>
+                      </a:r>
+                    </a:p>
+                  </a:txBody>
+                  <a:tcPr anchor="ctr" marL="82296" marR="45720" marT="18288" marB="18288">
+                    <a:solidFill>
+                      <a:srgbClr val="F7F9F8"/>
+                    </a:solidFill>
+                  </a:tcPr>
+                </a:tc>
+                <a:tc>
+                  <a:txBody>
+                    <a:bodyPr wrap="square"/>
+                    <a:lstStyle/>
+                    <a:p>
+                      <a:r>
+                        <a:rPr sz="1250" b="0">
+                          <a:solidFill>
+                            <a:srgbClr val="535C6A"/>
+                          </a:solidFill>
+                          <a:latin typeface="Consolas"/>
+                        </a:rPr>
+                        <a:t>true</a:t>
+                      </a:r>
+                    </a:p>
+                  </a:txBody>
+                  <a:tcPr anchor="ctr" marL="82296" marR="45720" marT="18288" marB="18288">
+                    <a:solidFill>
+                      <a:srgbClr val="F7F9F8"/>
+                    </a:solidFill>
+                  </a:tcPr>
+                </a:tc>
+                <a:tc>
+                  <a:txBody>
+                    <a:bodyPr wrap="square"/>
+                    <a:lstStyle/>
+                    <a:p>
+                      <a:r>
+                        <a:rPr sz="1250" b="0">
+                          <a:solidFill>
+                            <a:srgbClr val="535C6A"/>
+                          </a:solidFill>
+                          <a:latin typeface="Consolas"/>
+                        </a:rPr>
+                        <a:t>lines 1, 7</a:t>
+                      </a:r>
+                    </a:p>
+                  </a:txBody>
+                  <a:tcPr anchor="ctr" marL="82296" marR="45720" marT="18288" marB="18288">
+                    <a:solidFill>
+                      <a:srgbClr val="F7F9F8"/>
+                    </a:solidFill>
+                  </a:tcPr>
+                </a:tc>
+              </a:tr>
+              <a:tr h="548640">
+                <a:tc>
+                  <a:txBody>
+                    <a:bodyPr wrap="square"/>
+                    <a:lstStyle/>
+                    <a:p>
+                      <a:r>
+                        <a:rPr sz="1250" b="1">
+                          <a:solidFill>
+                            <a:srgbClr val="1A1F27"/>
+                          </a:solidFill>
+                          <a:latin typeface="Segoe UI"/>
+                        </a:rPr>
+                        <a:t>Escalation</a:t>
+                      </a:r>
+                    </a:p>
+                  </a:txBody>
+                  <a:tcPr anchor="ctr" marL="82296" marR="45720" marT="18288" marB="18288">
+                    <a:solidFill>
+                      <a:srgbClr val="FFFFFF"/>
+                    </a:solidFill>
+                  </a:tcPr>
+                </a:tc>
+                <a:tc>
+                  <a:txBody>
+                    <a:bodyPr wrap="square"/>
+                    <a:lstStyle/>
+                    <a:p>
+                      <a:r>
+                        <a:rPr sz="1250" b="0">
+                          <a:solidFill>
+                            <a:srgbClr val="535C6A"/>
+                          </a:solidFill>
+                          <a:latin typeface="Consolas"/>
+                        </a:rPr>
+                        <a:t>escalation</a:t>
+                      </a:r>
+                    </a:p>
+                  </a:txBody>
+                  <a:tcPr anchor="ctr" marL="82296" marR="45720" marT="18288" marB="18288">
+                    <a:solidFill>
+                      <a:srgbClr val="FFFFFF"/>
+                    </a:solidFill>
+                  </a:tcPr>
+                </a:tc>
+                <a:tc>
+                  <a:txBody>
+                    <a:bodyPr wrap="square"/>
+                    <a:lstStyle/>
+                    <a:p>
+                      <a:r>
+                        <a:rPr sz="1250" b="0">
+                          <a:solidFill>
+                            <a:srgbClr val="535C6A"/>
+                          </a:solidFill>
+                          <a:latin typeface="Consolas"/>
+                        </a:rPr>
+                        <a:t>none</a:t>
+                      </a:r>
+                    </a:p>
+                  </a:txBody>
+                  <a:tcPr anchor="ctr" marL="82296" marR="45720" marT="18288" marB="18288">
+                    <a:solidFill>
+                      <a:srgbClr val="FFFFFF"/>
+                    </a:solidFill>
+                  </a:tcPr>
+                </a:tc>
+                <a:tc>
+                  <a:txBody>
+                    <a:bodyPr wrap="square"/>
+                    <a:lstStyle/>
+                    <a:p>
+                      <a:r>
+                        <a:rPr sz="1250" b="0">
+                          <a:solidFill>
+                            <a:srgbClr val="535C6A"/>
+                          </a:solidFill>
+                          <a:latin typeface="Consolas"/>
+                        </a:rPr>
+                        <a:t>—</a:t>
+                      </a:r>
+                    </a:p>
+                  </a:txBody>
+                  <a:tcPr anchor="ctr" marL="82296" marR="45720" marT="18288" marB="18288">
+                    <a:solidFill>
+                      <a:srgbClr val="FFFFFF"/>
+                    </a:solidFill>
+                  </a:tcPr>
+                </a:tc>
+              </a:tr>
+            </a:tbl>
+          </a:graphicData>
+        </a:graphic>
+      </p:graphicFrame>
+      <p:sp>
+        <p:nvSpPr>
+          <p:cNvPr id="5" name="Rounded Rectangle 4"/>
+          <p:cNvSpPr/>
+          <p:nvPr/>
+        </p:nvSpPr>
+        <p:spPr>
+          <a:xfrm>
+            <a:off x="640080" y="5806440"/>
+            <a:ext cx="10927080" cy="777240"/>
+          </a:xfrm>
+          <a:prstGeom prst="roundRect">
+            <a:avLst/>
+          </a:prstGeom>
+          <a:solidFill>
+            <a:srgbClr val="E1F0EE"/>
+          </a:solidFill>
+          <a:ln>
+            <a:noFill/>
+          </a:ln>
+          <a:effectLst/>
+        </p:spPr>
+        <p:style>
+          <a:lnRef idx="1">
+            <a:schemeClr val="accent1"/>
+          </a:lnRef>
+          <a:fillRef idx="3">
+            <a:schemeClr val="accent1"/>
+          </a:fillRef>
+          <a:effectRef idx="2">
+            <a:schemeClr val="accent1"/>
+          </a:effectRef>
+          <a:fontRef idx="minor">
+            <a:schemeClr val="lt1"/>
+          </a:fontRef>
+        </p:style>
+        <p:txBody>
+          <a:bodyPr rtlCol="0" anchor="ctr" wrap="square" lIns="201168" rIns="201168"/>
+          <a:lstStyle/>
+          <a:p>
+            <a:pPr algn="ctr">
+              <a:spcAft>
+                <a:spcPts val="0"/>
+              </a:spcAft>
+            </a:pPr>
+            <a:r>
+              <a:rPr sz="1400" b="1">
+                <a:solidFill>
+                  <a:srgbClr val="0A5B55"/>
+                </a:solidFill>
+                <a:latin typeface="Segoe UI"/>
+              </a:rPr>
+              <a:t>A single call is scored on ~30 fields across 7 categories — behaviours, outcomes, sentiment and evidence — not just one number. That breadth is the coverage.</a:t>
+            </a:r>
+          </a:p>
+        </p:txBody>
+      </p:sp>
+    </p:spTree>
+  </p:cSld>
+  <p:clrMapOvr>
+    <a:masterClrMapping/>
+  </p:clrMapOvr>
+</p:sld>
+</file>
+
+<file path=ppt/slides/slide6.xml><?xml version="1.0" encoding="utf-8"?>
+<p:sld xmlns:a="http://schemas.openxmlformats.org/drawingml/2006/main" xmlns:p="http://schemas.openxmlformats.org/presentationml/2006/main" xmlns:r="http://schemas.openxmlformats.org/officeDocument/2006/relationships">
+  <p:cSld>
+    <p:bg>
+      <p:bgPr>
+        <a:solidFill>
+          <a:srgbClr val="FFFFFF"/>
+        </a:solidFill>
+        <a:effectLst/>
+      </p:bgPr>
+    </p:bg>
+    <p:spTree>
+      <p:nvGrpSpPr>
+        <p:cNvPr id="1" name=""/>
+        <p:cNvGrpSpPr/>
+        <p:nvPr/>
+      </p:nvGrpSpPr>
+      <p:grpSpPr/>
+      <p:sp>
+        <p:nvSpPr>
+          <p:cNvPr id="2" name="Rectangle 1"/>
+          <p:cNvSpPr/>
+          <p:nvPr/>
+        </p:nvSpPr>
+        <p:spPr>
+          <a:xfrm>
+            <a:off x="0" y="0"/>
+            <a:ext cx="12191695" cy="128016"/>
+          </a:xfrm>
+          <a:prstGeom prst="rect">
+            <a:avLst/>
+          </a:prstGeom>
+          <a:solidFill>
+            <a:srgbClr val="0E7C74"/>
+          </a:solidFill>
+          <a:ln>
+            <a:noFill/>
+          </a:ln>
+          <a:effectLst/>
+        </p:spPr>
+        <p:style>
+          <a:lnRef idx="1">
+            <a:schemeClr val="accent1"/>
+          </a:lnRef>
+          <a:fillRef idx="3">
+            <a:schemeClr val="accent1"/>
+          </a:fillRef>
+          <a:effectRef idx="2">
+            <a:schemeClr val="accent1"/>
+          </a:effectRef>
+          <a:fontRef idx="minor">
+            <a:schemeClr val="lt1"/>
+          </a:fontRef>
+        </p:style>
+        <p:txBody>
+          <a:bodyPr rtlCol="0" anchor="ctr"/>
+          <a:lstStyle/>
+          <a:p>
+            <a:pPr algn="ctr"/>
+          </a:p>
+        </p:txBody>
+      </p:sp>
+      <p:sp>
+        <p:nvSpPr>
+          <p:cNvPr id="3" name="TextBox 2"/>
+          <p:cNvSpPr txBox="1"/>
+          <p:nvPr/>
+        </p:nvSpPr>
+        <p:spPr>
+          <a:xfrm>
+            <a:off x="640080" y="347472"/>
+            <a:ext cx="11247120" cy="1188720"/>
+          </a:xfrm>
+          <a:prstGeom prst="rect">
+            <a:avLst/>
+          </a:prstGeom>
+          <a:noFill/>
+        </p:spPr>
+        <p:txBody>
+          <a:bodyPr wrap="square">
+            <a:spAutoFit/>
+          </a:bodyPr>
+          <a:lstStyle/>
+          <a:p>
+            <a:pPr>
+              <a:spcAft>
+                <a:spcPts val="400"/>
+              </a:spcAft>
+            </a:pPr>
+            <a:r>
+              <a:rPr sz="1200" b="1">
+                <a:solidFill>
+                  <a:srgbClr val="0E7C74"/>
+                </a:solidFill>
+                <a:latin typeface="Segoe UI"/>
+              </a:rPr>
+              <a:t>KPIS BY PROGRAM</a:t>
+            </a:r>
+          </a:p>
+          <a:p>
+            <a:pPr>
+              <a:spcAft>
+                <a:spcPts val="0"/>
+              </a:spcAft>
+            </a:pPr>
+            <a:r>
+              <a:rPr sz="2400" b="1">
+                <a:solidFill>
+                  <a:srgbClr val="1A1F27"/>
+                </a:solidFill>
+                <a:latin typeface="Segoe UI"/>
+              </a:rPr>
+              <a:t>The same pipeline, three checklists — compared</a:t>
+            </a:r>
+          </a:p>
+        </p:txBody>
+      </p:sp>
+      <p:graphicFrame>
+        <p:nvGraphicFramePr>
+          <p:cNvPr id="4" name="Table 3"/>
+          <p:cNvGraphicFramePr>
+            <a:graphicFrameLocks noGrp="1"/>
+          </p:cNvGraphicFramePr>
+          <p:nvPr/>
+        </p:nvGraphicFramePr>
+        <p:xfrm>
+          <a:off x="640080" y="1828800"/>
+          <a:ext cx="10927080" cy="3108960"/>
+        </p:xfrm>
+        <a:graphic>
+          <a:graphicData uri="http://schemas.openxmlformats.org/drawingml/2006/table">
+            <a:tbl>
+              <a:tblPr firstRow="1">
+                <a:tableStyleId>{5C22544A-7EE6-4342-B048-85BDC9FD1C3A}</a:tableStyleId>
+              </a:tblPr>
+              <a:tblGrid>
+                <a:gridCol w="1554480"/>
+                <a:gridCol w="2011680"/>
+                <a:gridCol w="3520440"/>
+                <a:gridCol w="822960"/>
+                <a:gridCol w="3017520"/>
+              </a:tblGrid>
+              <a:tr h="777240">
+                <a:tc>
+                  <a:txBody>
+                    <a:bodyPr wrap="square"/>
+                    <a:lstStyle/>
+                    <a:p>
+                      <a:r>
+                        <a:rPr sz="1100" b="1">
+                          <a:solidFill>
+                            <a:srgbClr val="FFFFFF"/>
+                          </a:solidFill>
+                          <a:latin typeface="Segoe UI"/>
+                        </a:rPr>
+                        <a:t>Program</a:t>
+                      </a:r>
+                    </a:p>
+                  </a:txBody>
+                  <a:tcPr anchor="ctr" marL="82296" marR="45720" marT="18288" marB="18288">
+                    <a:solidFill>
+                      <a:srgbClr val="0E7C74"/>
+                    </a:solidFill>
+                  </a:tcPr>
+                </a:tc>
+                <a:tc>
+                  <a:txBody>
+                    <a:bodyPr wrap="square"/>
+                    <a:lstStyle/>
+                    <a:p>
+                      <a:r>
+                        <a:rPr sz="1100" b="1">
+                          <a:solidFill>
+                            <a:srgbClr val="FFFFFF"/>
+                          </a:solidFill>
+                          <a:latin typeface="Segoe UI"/>
+                        </a:rPr>
+                        <a:t>Lens</a:t>
+                      </a:r>
+                    </a:p>
+                  </a:txBody>
+                  <a:tcPr anchor="ctr" marL="82296" marR="45720" marT="18288" marB="18288">
+                    <a:solidFill>
+                      <a:srgbClr val="0E7C74"/>
+                    </a:solidFill>
+                  </a:tcPr>
+                </a:tc>
+                <a:tc>
+                  <a:txBody>
+                    <a:bodyPr wrap="square"/>
+                    <a:lstStyle/>
+                    <a:p>
+                      <a:r>
+                        <a:rPr sz="1100" b="1">
+                          <a:solidFill>
+                            <a:srgbClr val="FFFFFF"/>
+                          </a:solidFill>
+                          <a:latin typeface="Segoe UI"/>
+                        </a:rPr>
+                        <a:t>Example KPIs</a:t>
+                      </a:r>
+                    </a:p>
+                  </a:txBody>
+                  <a:tcPr anchor="ctr" marL="82296" marR="45720" marT="18288" marB="18288">
+                    <a:solidFill>
+                      <a:srgbClr val="0E7C74"/>
+                    </a:solidFill>
+                  </a:tcPr>
+                </a:tc>
+                <a:tc>
+                  <a:txBody>
+                    <a:bodyPr wrap="square"/>
+                    <a:lstStyle/>
+                    <a:p>
+                      <a:r>
+                        <a:rPr sz="1100" b="1">
+                          <a:solidFill>
+                            <a:srgbClr val="FFFFFF"/>
+                          </a:solidFill>
+                          <a:latin typeface="Segoe UI"/>
+                        </a:rPr>
+                        <a:t>KPIs</a:t>
+                      </a:r>
+                    </a:p>
+                  </a:txBody>
+                  <a:tcPr anchor="ctr" marL="82296" marR="45720" marT="18288" marB="18288">
+                    <a:solidFill>
+                      <a:srgbClr val="0E7C74"/>
+                    </a:solidFill>
+                  </a:tcPr>
+                </a:tc>
+                <a:tc>
+                  <a:txBody>
+                    <a:bodyPr wrap="square"/>
+                    <a:lstStyle/>
+                    <a:p>
+                      <a:r>
+                        <a:rPr sz="1100" b="1">
+                          <a:solidFill>
+                            <a:srgbClr val="FFFFFF"/>
+                          </a:solidFill>
+                          <a:latin typeface="Segoe UI"/>
+                        </a:rPr>
+                        <a:t>A good week looks like</a:t>
+                      </a:r>
+                    </a:p>
+                  </a:txBody>
+                  <a:tcPr anchor="ctr" marL="82296" marR="45720" marT="18288" marB="18288">
+                    <a:solidFill>
+                      <a:srgbClr val="0E7C74"/>
+                    </a:solidFill>
+                  </a:tcPr>
+                </a:tc>
+              </a:tr>
+              <a:tr h="777240">
+                <a:tc>
+                  <a:txBody>
+                    <a:bodyPr wrap="square"/>
+                    <a:lstStyle/>
+                    <a:p>
+                      <a:r>
+                        <a:rPr sz="1250" b="1">
+                          <a:solidFill>
+                            <a:srgbClr val="1A1F27"/>
+                          </a:solidFill>
+                          <a:latin typeface="Segoe UI"/>
+                        </a:rPr>
+                        <a:t>Telesales</a:t>
+                      </a:r>
+                    </a:p>
+                  </a:txBody>
+                  <a:tcPr anchor="ctr" marL="82296" marR="45720" marT="18288" marB="18288">
+                    <a:solidFill>
+                      <a:srgbClr val="FFFFFF"/>
+                    </a:solidFill>
+                  </a:tcPr>
+                </a:tc>
+                <a:tc>
+                  <a:txBody>
+                    <a:bodyPr wrap="square"/>
+                    <a:lstStyle/>
+                    <a:p>
+                      <a:r>
+                        <a:rPr sz="1250" b="0">
+                          <a:solidFill>
+                            <a:srgbClr val="535C6A"/>
+                          </a:solidFill>
+                          <a:latin typeface="Consolas"/>
+                        </a:rPr>
+                        <a:t>Sales</a:t>
+                      </a:r>
+                    </a:p>
+                  </a:txBody>
+                  <a:tcPr anchor="ctr" marL="82296" marR="45720" marT="18288" marB="18288">
+                    <a:solidFill>
+                      <a:srgbClr val="FFFFFF"/>
+                    </a:solidFill>
+                  </a:tcPr>
+                </a:tc>
+                <a:tc>
+                  <a:txBody>
+                    <a:bodyPr wrap="square"/>
+                    <a:lstStyle/>
+                    <a:p>
+                      <a:r>
+                        <a:rPr sz="1250" b="0">
+                          <a:solidFill>
+                            <a:srgbClr val="535C6A"/>
+                          </a:solidFill>
+                          <a:latin typeface="Consolas"/>
+                        </a:rPr>
+                        <a:t>New-line pitches · Upgrades · Saves</a:t>
+                      </a:r>
+                    </a:p>
+                  </a:txBody>
+                  <a:tcPr anchor="ctr" marL="82296" marR="45720" marT="18288" marB="18288">
+                    <a:solidFill>
+                      <a:srgbClr val="FFFFFF"/>
+                    </a:solidFill>
+                  </a:tcPr>
+                </a:tc>
+                <a:tc>
+                  <a:txBody>
+                    <a:bodyPr wrap="square"/>
+                    <a:lstStyle/>
+                    <a:p>
+                      <a:r>
+                        <a:rPr sz="1250" b="0">
+                          <a:solidFill>
+                            <a:srgbClr val="535C6A"/>
+                          </a:solidFill>
+                          <a:latin typeface="Consolas"/>
+                        </a:rPr>
+                        <a:t>12</a:t>
+                      </a:r>
+                    </a:p>
+                  </a:txBody>
+                  <a:tcPr anchor="ctr" marL="82296" marR="45720" marT="18288" marB="18288">
+                    <a:solidFill>
+                      <a:srgbClr val="FFFFFF"/>
+                    </a:solidFill>
+                  </a:tcPr>
+                </a:tc>
+                <a:tc>
+                  <a:txBody>
+                    <a:bodyPr wrap="square"/>
+                    <a:lstStyle/>
+                    <a:p>
+                      <a:r>
+                        <a:rPr sz="1250" b="0">
+                          <a:solidFill>
+                            <a:srgbClr val="535C6A"/>
+                          </a:solidFill>
+                          <a:latin typeface="Consolas"/>
+                        </a:rPr>
+                        <a:t>High pitch rate, few missed opportunities</a:t>
+                      </a:r>
+                    </a:p>
+                  </a:txBody>
+                  <a:tcPr anchor="ctr" marL="82296" marR="45720" marT="18288" marB="18288">
+                    <a:solidFill>
+                      <a:srgbClr val="FFFFFF"/>
+                    </a:solidFill>
+                  </a:tcPr>
+                </a:tc>
+              </a:tr>
+              <a:tr h="777240">
+                <a:tc>
+                  <a:txBody>
+                    <a:bodyPr wrap="square"/>
+                    <a:lstStyle/>
+                    <a:p>
+                      <a:r>
+                        <a:rPr sz="1250" b="1">
+                          <a:solidFill>
+                            <a:srgbClr val="1A1F27"/>
+                          </a:solidFill>
+                          <a:latin typeface="Segoe UI"/>
+                        </a:rPr>
+                        <a:t>WCC</a:t>
+                      </a:r>
+                    </a:p>
+                  </a:txBody>
+                  <a:tcPr anchor="ctr" marL="82296" marR="45720" marT="18288" marB="18288">
+                    <a:solidFill>
+                      <a:srgbClr val="F7F9F8"/>
+                    </a:solidFill>
+                  </a:tcPr>
+                </a:tc>
+                <a:tc>
+                  <a:txBody>
+                    <a:bodyPr wrap="square"/>
+                    <a:lstStyle/>
+                    <a:p>
+                      <a:r>
+                        <a:rPr sz="1250" b="0">
+                          <a:solidFill>
+                            <a:srgbClr val="535C6A"/>
+                          </a:solidFill>
+                          <a:latin typeface="Consolas"/>
+                        </a:rPr>
+                        <a:t>Care &amp; retention</a:t>
+                      </a:r>
+                    </a:p>
+                  </a:txBody>
+                  <a:tcPr anchor="ctr" marL="82296" marR="45720" marT="18288" marB="18288">
+                    <a:solidFill>
+                      <a:srgbClr val="F7F9F8"/>
+                    </a:solidFill>
+                  </a:tcPr>
+                </a:tc>
+                <a:tc>
+                  <a:txBody>
+                    <a:bodyPr wrap="square"/>
+                    <a:lstStyle/>
+                    <a:p>
+                      <a:r>
+                        <a:rPr sz="1250" b="0">
+                          <a:solidFill>
+                            <a:srgbClr val="535C6A"/>
+                          </a:solidFill>
+                          <a:latin typeface="Consolas"/>
+                        </a:rPr>
+                        <a:t>Resolutions · Saves · Right-of-sell</a:t>
+                      </a:r>
+                    </a:p>
+                  </a:txBody>
+                  <a:tcPr anchor="ctr" marL="82296" marR="45720" marT="18288" marB="18288">
+                    <a:solidFill>
+                      <a:srgbClr val="F7F9F8"/>
+                    </a:solidFill>
+                  </a:tcPr>
+                </a:tc>
+                <a:tc>
+                  <a:txBody>
+                    <a:bodyPr wrap="square"/>
+                    <a:lstStyle/>
+                    <a:p>
+                      <a:r>
+                        <a:rPr sz="1250" b="0">
+                          <a:solidFill>
+                            <a:srgbClr val="535C6A"/>
+                          </a:solidFill>
+                          <a:latin typeface="Consolas"/>
+                        </a:rPr>
+                        <a:t>11</a:t>
+                      </a:r>
+                    </a:p>
+                  </a:txBody>
+                  <a:tcPr anchor="ctr" marL="82296" marR="45720" marT="18288" marB="18288">
+                    <a:solidFill>
+                      <a:srgbClr val="F7F9F8"/>
+                    </a:solidFill>
+                  </a:tcPr>
+                </a:tc>
+                <a:tc>
+                  <a:txBody>
+                    <a:bodyPr wrap="square"/>
+                    <a:lstStyle/>
+                    <a:p>
+                      <a:r>
+                        <a:rPr sz="1250" b="0">
+                          <a:solidFill>
+                            <a:srgbClr val="535C6A"/>
+                          </a:solidFill>
+                          <a:latin typeface="Consolas"/>
+                        </a:rPr>
+                        <a:t>High resolution &amp; save rate</a:t>
+                      </a:r>
+                    </a:p>
+                  </a:txBody>
+                  <a:tcPr anchor="ctr" marL="82296" marR="45720" marT="18288" marB="18288">
+                    <a:solidFill>
+                      <a:srgbClr val="F7F9F8"/>
+                    </a:solidFill>
+                  </a:tcPr>
+                </a:tc>
+              </a:tr>
+              <a:tr h="777240">
+                <a:tc>
+                  <a:txBody>
+                    <a:bodyPr wrap="square"/>
+                    <a:lstStyle/>
+                    <a:p>
+                      <a:r>
+                        <a:rPr sz="1250" b="1">
+                          <a:solidFill>
+                            <a:srgbClr val="1A1F27"/>
+                          </a:solidFill>
+                          <a:latin typeface="Segoe UI"/>
+                        </a:rPr>
+                        <a:t>PSO</a:t>
+                      </a:r>
+                    </a:p>
+                  </a:txBody>
+                  <a:tcPr anchor="ctr" marL="82296" marR="45720" marT="18288" marB="18288">
+                    <a:solidFill>
+                      <a:srgbClr val="FFFFFF"/>
+                    </a:solidFill>
+                  </a:tcPr>
+                </a:tc>
+                <a:tc>
+                  <a:txBody>
+                    <a:bodyPr wrap="square"/>
+                    <a:lstStyle/>
+                    <a:p>
+                      <a:r>
+                        <a:rPr sz="1250" b="0">
+                          <a:solidFill>
+                            <a:srgbClr val="535C6A"/>
+                          </a:solidFill>
+                          <a:latin typeface="Consolas"/>
+                        </a:rPr>
+                        <a:t>VZ Mobile care</a:t>
+                      </a:r>
+                    </a:p>
+                  </a:txBody>
+                  <a:tcPr anchor="ctr" marL="82296" marR="45720" marT="18288" marB="18288">
+                    <a:solidFill>
+                      <a:srgbClr val="FFFFFF"/>
+                    </a:solidFill>
+                  </a:tcPr>
+                </a:tc>
+                <a:tc>
+                  <a:txBody>
+                    <a:bodyPr wrap="square"/>
+                    <a:lstStyle/>
+                    <a:p>
+                      <a:r>
+                        <a:rPr sz="1250" b="0">
+                          <a:solidFill>
+                            <a:srgbClr val="535C6A"/>
+                          </a:solidFill>
+                          <a:latin typeface="Consolas"/>
+                        </a:rPr>
+                        <a:t>CSAT · FCR · Quality · Repeat-risk</a:t>
+                      </a:r>
+                    </a:p>
+                  </a:txBody>
+                  <a:tcPr anchor="ctr" marL="82296" marR="45720" marT="18288" marB="18288">
+                    <a:solidFill>
+                      <a:srgbClr val="FFFFFF"/>
+                    </a:solidFill>
+                  </a:tcPr>
+                </a:tc>
+                <a:tc>
+                  <a:txBody>
+                    <a:bodyPr wrap="square"/>
+                    <a:lstStyle/>
+                    <a:p>
+                      <a:r>
+                        <a:rPr sz="1250" b="0">
+                          <a:solidFill>
+                            <a:srgbClr val="535C6A"/>
+                          </a:solidFill>
+                          <a:latin typeface="Consolas"/>
+                        </a:rPr>
+                        <a:t>24</a:t>
+                      </a:r>
+                    </a:p>
+                  </a:txBody>
+                  <a:tcPr anchor="ctr" marL="82296" marR="45720" marT="18288" marB="18288">
+                    <a:solidFill>
+                      <a:srgbClr val="FFFFFF"/>
+                    </a:solidFill>
+                  </a:tcPr>
+                </a:tc>
+                <a:tc>
+                  <a:txBody>
+                    <a:bodyPr wrap="square"/>
+                    <a:lstStyle/>
+                    <a:p>
+                      <a:r>
+                        <a:rPr sz="1250" b="0">
+                          <a:solidFill>
+                            <a:srgbClr val="535C6A"/>
+                          </a:solidFill>
+                          <a:latin typeface="Consolas"/>
+                        </a:rPr>
+                        <a:t>High FCR, low repeat-contact risk</a:t>
+                      </a:r>
+                    </a:p>
+                  </a:txBody>
+                  <a:tcPr anchor="ctr" marL="82296" marR="45720" marT="18288" marB="18288">
+                    <a:solidFill>
+                      <a:srgbClr val="FFFFFF"/>
+                    </a:solidFill>
+                  </a:tcPr>
+                </a:tc>
+              </a:tr>
+            </a:tbl>
+          </a:graphicData>
+        </a:graphic>
+      </p:graphicFrame>
+      <p:sp>
+        <p:nvSpPr>
+          <p:cNvPr id="5" name="Rounded Rectangle 4"/>
+          <p:cNvSpPr/>
+          <p:nvPr/>
+        </p:nvSpPr>
+        <p:spPr>
+          <a:xfrm>
+            <a:off x="640080" y="5852160"/>
+            <a:ext cx="10927080" cy="749808"/>
+          </a:xfrm>
+          <a:prstGeom prst="roundRect">
+            <a:avLst/>
+          </a:prstGeom>
+          <a:solidFill>
+            <a:srgbClr val="E1F0EE"/>
+          </a:solidFill>
+          <a:ln>
+            <a:noFill/>
+          </a:ln>
+          <a:effectLst/>
+        </p:spPr>
+        <p:style>
+          <a:lnRef idx="1">
+            <a:schemeClr val="accent1"/>
+          </a:lnRef>
+          <a:fillRef idx="3">
+            <a:schemeClr val="accent1"/>
+          </a:fillRef>
+          <a:effectRef idx="2">
+            <a:schemeClr val="accent1"/>
+          </a:effectRef>
+          <a:fontRef idx="minor">
+            <a:schemeClr val="lt1"/>
+          </a:fontRef>
+        </p:style>
+        <p:txBody>
+          <a:bodyPr rtlCol="0" anchor="ctr" wrap="square" lIns="201168" rIns="201168"/>
+          <a:lstStyle/>
+          <a:p>
+            <a:pPr algn="ctr">
+              <a:spcAft>
+                <a:spcPts val="0"/>
+              </a:spcAft>
+            </a:pPr>
+            <a:r>
+              <a:rPr sz="1350" b="1">
+                <a:solidFill>
+                  <a:srgbClr val="0A5B55"/>
+                </a:solidFill>
+                <a:latin typeface="Segoe UI"/>
+              </a:rPr>
+              <a:t>“New-line pitches” only exists for Telesales; “FCR” only for PSO. Each program measures what a good call means for its own line of business.</a:t>
+            </a:r>
+          </a:p>
+        </p:txBody>
+      </p:sp>
+    </p:spTree>
+  </p:cSld>
+  <p:clrMapOvr>
+    <a:masterClrMapping/>
+  </p:clrMapOvr>
+</p:sld>
+</file>
+
+<file path=ppt/slides/slide7.xml><?xml version="1.0" encoding="utf-8"?>
+<p:sld xmlns:a="http://schemas.openxmlformats.org/drawingml/2006/main" xmlns:p="http://schemas.openxmlformats.org/presentationml/2006/main" xmlns:r="http://schemas.openxmlformats.org/officeDocument/2006/relationships">
+  <p:cSld>
+    <p:bg>
+      <p:bgPr>
+        <a:solidFill>
+          <a:srgbClr val="FFFFFF"/>
+        </a:solidFill>
+        <a:effectLst/>
+      </p:bgPr>
+    </p:bg>
+    <p:spTree>
+      <p:nvGrpSpPr>
+        <p:cNvPr id="1" name=""/>
+        <p:cNvGrpSpPr/>
+        <p:nvPr/>
+      </p:nvGrpSpPr>
+      <p:grpSpPr/>
+      <p:sp>
+        <p:nvSpPr>
+          <p:cNvPr id="2" name="Rectangle 1"/>
+          <p:cNvSpPr/>
+          <p:nvPr/>
+        </p:nvSpPr>
+        <p:spPr>
+          <a:xfrm>
+            <a:off x="0" y="0"/>
+            <a:ext cx="12191695" cy="128016"/>
+          </a:xfrm>
+          <a:prstGeom prst="rect">
+            <a:avLst/>
+          </a:prstGeom>
+          <a:solidFill>
+            <a:srgbClr val="0E7C74"/>
+          </a:solidFill>
+          <a:ln>
+            <a:noFill/>
+          </a:ln>
+          <a:effectLst/>
+        </p:spPr>
+        <p:style>
+          <a:lnRef idx="1">
+            <a:schemeClr val="accent1"/>
+          </a:lnRef>
+          <a:fillRef idx="3">
+            <a:schemeClr val="accent1"/>
+          </a:fillRef>
+          <a:effectRef idx="2">
+            <a:schemeClr val="accent1"/>
+          </a:effectRef>
+          <a:fontRef idx="minor">
+            <a:schemeClr val="lt1"/>
+          </a:fontRef>
+        </p:style>
+        <p:txBody>
+          <a:bodyPr rtlCol="0" anchor="ctr"/>
+          <a:lstStyle/>
+          <a:p>
+            <a:pPr algn="ctr"/>
+          </a:p>
+        </p:txBody>
+      </p:sp>
+      <p:sp>
+        <p:nvSpPr>
+          <p:cNvPr id="3" name="TextBox 2"/>
+          <p:cNvSpPr txBox="1"/>
+          <p:nvPr/>
+        </p:nvSpPr>
+        <p:spPr>
+          <a:xfrm>
+            <a:off x="640080" y="347472"/>
+            <a:ext cx="11247120" cy="1188720"/>
+          </a:xfrm>
+          <a:prstGeom prst="rect">
+            <a:avLst/>
+          </a:prstGeom>
+          <a:noFill/>
+        </p:spPr>
+        <p:txBody>
+          <a:bodyPr wrap="square">
+            <a:spAutoFit/>
+          </a:bodyPr>
+          <a:lstStyle/>
+          <a:p>
+            <a:pPr>
+              <a:spcAft>
+                <a:spcPts val="400"/>
+              </a:spcAft>
+            </a:pPr>
+            <a:r>
+              <a:rPr sz="1200" b="1">
+                <a:solidFill>
+                  <a:srgbClr val="0E7C74"/>
+                </a:solidFill>
+                <a:latin typeface="Segoe UI"/>
+              </a:rPr>
+              <a:t>GOLDEN DATA</a:t>
+            </a:r>
+          </a:p>
+          <a:p>
+            <a:pPr>
+              <a:spcAft>
+                <a:spcPts val="0"/>
+              </a:spcAft>
+            </a:pPr>
+            <a:r>
+              <a:rPr sz="2400" b="1">
+                <a:solidFill>
+                  <a:srgbClr val="1A1F27"/>
+                </a:solidFill>
+                <a:latin typeface="Segoe UI"/>
+              </a:rPr>
+              <a:t>How we prove the scores are right — using the same calls</a:t>
+            </a:r>
+          </a:p>
+        </p:txBody>
+      </p:sp>
+      <p:sp>
+        <p:nvSpPr>
+          <p:cNvPr id="4" name="TextBox 3"/>
+          <p:cNvSpPr txBox="1"/>
+          <p:nvPr/>
+        </p:nvSpPr>
+        <p:spPr>
+          <a:xfrm>
+            <a:off x="685800" y="1737360"/>
+            <a:ext cx="5486400" cy="3840480"/>
+          </a:xfrm>
+          <a:prstGeom prst="rect">
+            <a:avLst/>
+          </a:prstGeom>
+          <a:noFill/>
+        </p:spPr>
+        <p:txBody>
+          <a:bodyPr wrap="square">
+            <a:spAutoFit/>
+          </a:bodyPr>
+          <a:lstStyle/>
+          <a:p>
+            <a:pPr>
+              <a:spcAft>
+                <a:spcPts val="600"/>
+              </a:spcAft>
+            </a:pPr>
+            <a:r>
+              <a:rPr sz="1350" b="0">
+                <a:solidFill>
+                  <a:srgbClr val="1A1F27"/>
+                </a:solidFill>
+                <a:latin typeface="Segoe UI"/>
+              </a:rPr>
+              <a:t>“Golden data” = real calls where coaches have</a:t>
+            </a:r>
+          </a:p>
+          <a:p>
+            <a:pPr>
+              <a:spcAft>
+                <a:spcPts val="600"/>
+              </a:spcAft>
+            </a:pPr>
+            <a:r>
+              <a:rPr sz="1350" b="0">
+                <a:solidFill>
+                  <a:srgbClr val="1A1F27"/>
+                </a:solidFill>
+                <a:latin typeface="Segoe UI"/>
+              </a:rPr>
+              <a:t>certified the correct answers.</a:t>
+            </a:r>
+          </a:p>
+          <a:p>
+            <a:pPr>
+              <a:spcAft>
+                <a:spcPts val="600"/>
+              </a:spcAft>
+            </a:pPr>
+            <a:r>
+              <a:rPr sz="1350" b="0">
+                <a:solidFill>
+                  <a:srgbClr val="1A1F27"/>
+                </a:solidFill>
+                <a:latin typeface="Segoe UI"/>
+              </a:rPr>
+              <a:t/>
+            </a:r>
+          </a:p>
+          <a:p>
+            <a:pPr>
+              <a:spcAft>
+                <a:spcPts val="600"/>
+              </a:spcAft>
+            </a:pPr>
+            <a:r>
+              <a:rPr sz="1350" b="0">
+                <a:solidFill>
+                  <a:srgbClr val="A96E12"/>
+                </a:solidFill>
+                <a:latin typeface="Segoe UI"/>
+              </a:rPr>
+              <a:t>✗ one call → one KPI value  (can't validate</a:t>
+            </a:r>
+          </a:p>
+          <a:p>
+            <a:pPr>
+              <a:spcAft>
+                <a:spcPts val="600"/>
+              </a:spcAft>
+            </a:pPr>
+            <a:r>
+              <a:rPr sz="1350" b="0">
+                <a:solidFill>
+                  <a:srgbClr val="535C6A"/>
+                </a:solidFill>
+                <a:latin typeface="Segoe UI"/>
+              </a:rPr>
+              <a:t>   a KPI averaged over many calls)</a:t>
+            </a:r>
+          </a:p>
+          <a:p>
+            <a:pPr>
+              <a:spcAft>
+                <a:spcPts val="600"/>
+              </a:spcAft>
+            </a:pPr>
+            <a:r>
+              <a:rPr sz="1350" b="0">
+                <a:solidFill>
+                  <a:srgbClr val="2E8B5E"/>
+                </a:solidFill>
+                <a:latin typeface="Segoe UI"/>
+              </a:rPr>
+              <a:t>✓ certify the per-call judgments; KPIs then</a:t>
+            </a:r>
+          </a:p>
+          <a:p>
+            <a:pPr>
+              <a:spcAft>
+                <a:spcPts val="600"/>
+              </a:spcAft>
+            </a:pPr>
+            <a:r>
+              <a:rPr sz="1350" b="0">
+                <a:solidFill>
+                  <a:srgbClr val="535C6A"/>
+                </a:solidFill>
+                <a:latin typeface="Segoe UI"/>
+              </a:rPr>
+              <a:t>   follow by counting — correct by construction</a:t>
+            </a:r>
+          </a:p>
+        </p:txBody>
+      </p:sp>
+      <p:sp>
+        <p:nvSpPr>
+          <p:cNvPr id="5" name="Rounded Rectangle 4"/>
+          <p:cNvSpPr/>
+          <p:nvPr/>
+        </p:nvSpPr>
+        <p:spPr>
+          <a:xfrm>
+            <a:off x="6400800" y="1737360"/>
+            <a:ext cx="5166360" cy="2651760"/>
+          </a:xfrm>
+          <a:prstGeom prst="roundRect">
+            <a:avLst/>
+          </a:prstGeom>
+          <a:solidFill>
+            <a:srgbClr val="F3F1EA"/>
+          </a:solidFill>
+          <a:ln w="9525">
+            <a:solidFill>
+              <a:srgbClr val="D9DFE5"/>
+            </a:solidFill>
+          </a:ln>
+          <a:effectLst/>
+        </p:spPr>
+        <p:style>
+          <a:lnRef idx="1">
+            <a:schemeClr val="accent1"/>
+          </a:lnRef>
+          <a:fillRef idx="3">
+            <a:schemeClr val="accent1"/>
+          </a:fillRef>
+          <a:effectRef idx="2">
+            <a:schemeClr val="accent1"/>
+          </a:effectRef>
+          <a:fontRef idx="minor">
+            <a:schemeClr val="lt1"/>
+          </a:fontRef>
+        </p:style>
+        <p:txBody>
+          <a:bodyPr rtlCol="0" anchor="ctr" wrap="square" lIns="137160" rIns="109728" tIns="109728" bIns="73152"/>
+          <a:lstStyle/>
+          <a:p>
+            <a:pPr algn="ctr">
+              <a:spcAft>
+                <a:spcPts val="600"/>
+              </a:spcAft>
+            </a:pPr>
+            <a:r>
+              <a:rPr sz="1250" b="1">
+                <a:solidFill>
+                  <a:srgbClr val="0A5B55"/>
+                </a:solidFill>
+                <a:latin typeface="Segoe UI"/>
+              </a:rPr>
+              <a:t>ONE GOLDEN RECORD (from Example 2)</a:t>
+            </a:r>
+          </a:p>
+          <a:p>
+            <a:pPr>
+              <a:spcAft>
+                <a:spcPts val="200"/>
+              </a:spcAft>
+            </a:pPr>
+            <a:r>
+              <a:rPr sz="1050" b="0">
+                <a:solidFill>
+                  <a:srgbClr val="0A5B55"/>
+                </a:solidFill>
                 <a:latin typeface="Consolas"/>
               </a:rPr>
-              <a:t>customer_experience         = Good</a:t>
-            </a:r>
-          </a:p>
-        </p:txBody>
-      </p:sp>
-      <p:sp>
-        <p:nvSpPr>
-          <p:cNvPr id="6" name="Rounded Rectangle 5"/>
+              <a:t>frustration_start   = 7        [1]</a:t>
+            </a:r>
+          </a:p>
+          <a:p>
+            <a:pPr>
+              <a:spcAft>
+                <a:spcPts val="200"/>
+              </a:spcAft>
+            </a:pPr>
+            <a:r>
+              <a:rPr sz="1050" b="0">
+                <a:solidFill>
+                  <a:srgbClr val="0A5B55"/>
+                </a:solidFill>
+                <a:latin typeface="Consolas"/>
+              </a:rPr>
+              <a:t>escalation          = none     [1]</a:t>
+            </a:r>
+          </a:p>
+          <a:p>
+            <a:pPr>
+              <a:spcAft>
+                <a:spcPts val="200"/>
+              </a:spcAft>
+            </a:pPr>
+            <a:r>
+              <a:rPr sz="1050" b="0">
+                <a:solidFill>
+                  <a:srgbClr val="0A5B55"/>
+                </a:solidFill>
+                <a:latin typeface="Consolas"/>
+              </a:rPr>
+              <a:t>issue_resolved      = true     [3]</a:t>
+            </a:r>
+          </a:p>
+          <a:p>
+            <a:pPr>
+              <a:spcAft>
+                <a:spcPts val="200"/>
+              </a:spcAft>
+            </a:pPr>
+            <a:r>
+              <a:rPr sz="1050" b="0">
+                <a:solidFill>
+                  <a:srgbClr val="0A5B55"/>
+                </a:solidFill>
+                <a:latin typeface="Consolas"/>
+              </a:rPr>
+              <a:t>repeat_contact_risk = true     [1]</a:t>
+            </a:r>
+          </a:p>
+          <a:p>
+            <a:pPr>
+              <a:spcAft>
+                <a:spcPts val="200"/>
+              </a:spcAft>
+            </a:pPr>
+            <a:r>
+              <a:rPr sz="1050" b="0">
+                <a:solidFill>
+                  <a:srgbClr val="535C6A"/>
+                </a:solidFill>
+                <a:latin typeface="Segoe UI"/>
+              </a:rPr>
+              <a:t>Certified by: 2 coaches · 8 Sep</a:t>
+            </a:r>
+          </a:p>
+        </p:txBody>
+      </p:sp>
+      <p:graphicFrame>
+        <p:nvGraphicFramePr>
+          <p:cNvPr id="6" name="Table 5"/>
+          <p:cNvGraphicFramePr>
+            <a:graphicFrameLocks noGrp="1"/>
+          </p:cNvGraphicFramePr>
+          <p:nvPr/>
+        </p:nvGraphicFramePr>
+        <p:xfrm>
+          <a:off x="6400800" y="4617720"/>
+          <a:ext cx="10881360" cy="914400"/>
+        </p:xfrm>
+        <a:graphic>
+          <a:graphicData uri="http://schemas.openxmlformats.org/drawingml/2006/table">
+            <a:tbl>
+              <a:tblPr firstRow="1">
+                <a:tableStyleId>{5C22544A-7EE6-4342-B048-85BDC9FD1C3A}</a:tableStyleId>
+              </a:tblPr>
+              <a:tblGrid>
+                <a:gridCol w="2148840"/>
+                <a:gridCol w="2194560"/>
+                <a:gridCol w="2148840"/>
+                <a:gridCol w="2194560"/>
+                <a:gridCol w="2194560"/>
+              </a:tblGrid>
+              <a:tr h="457200">
+                <a:tc>
+                  <a:txBody>
+                    <a:bodyPr wrap="square"/>
+                    <a:lstStyle/>
+                    <a:p>
+                      <a:r>
+                        <a:rPr sz="1100" b="1">
+                          <a:solidFill>
+                            <a:srgbClr val="FFFFFF"/>
+                          </a:solidFill>
+                          <a:latin typeface="Segoe UI"/>
+                        </a:rPr>
+                        <a:t>Program</a:t>
+                      </a:r>
+                    </a:p>
+                  </a:txBody>
+                  <a:tcPr anchor="ctr" marL="82296" marR="45720" marT="18288" marB="18288">
+                    <a:solidFill>
+                      <a:srgbClr val="0E7C74"/>
+                    </a:solidFill>
+                  </a:tcPr>
+                </a:tc>
+                <a:tc>
+                  <a:txBody>
+                    <a:bodyPr wrap="square"/>
+                    <a:lstStyle/>
+                    <a:p>
+                      <a:r>
+                        <a:rPr sz="1100" b="1">
+                          <a:solidFill>
+                            <a:srgbClr val="FFFFFF"/>
+                          </a:solidFill>
+                          <a:latin typeface="Segoe UI"/>
+                        </a:rPr>
+                        <a:t>Telesales</a:t>
+                      </a:r>
+                    </a:p>
+                  </a:txBody>
+                  <a:tcPr anchor="ctr" marL="82296" marR="45720" marT="18288" marB="18288">
+                    <a:solidFill>
+                      <a:srgbClr val="0E7C74"/>
+                    </a:solidFill>
+                  </a:tcPr>
+                </a:tc>
+                <a:tc>
+                  <a:txBody>
+                    <a:bodyPr wrap="square"/>
+                    <a:lstStyle/>
+                    <a:p>
+                      <a:r>
+                        <a:rPr sz="1100" b="1">
+                          <a:solidFill>
+                            <a:srgbClr val="FFFFFF"/>
+                          </a:solidFill>
+                          <a:latin typeface="Segoe UI"/>
+                        </a:rPr>
+                        <a:t>WCC</a:t>
+                      </a:r>
+                    </a:p>
+                  </a:txBody>
+                  <a:tcPr anchor="ctr" marL="82296" marR="45720" marT="18288" marB="18288">
+                    <a:solidFill>
+                      <a:srgbClr val="0E7C74"/>
+                    </a:solidFill>
+                  </a:tcPr>
+                </a:tc>
+                <a:tc>
+                  <a:txBody>
+                    <a:bodyPr wrap="square"/>
+                    <a:lstStyle/>
+                    <a:p>
+                      <a:r>
+                        <a:rPr sz="1100" b="1">
+                          <a:solidFill>
+                            <a:srgbClr val="FFFFFF"/>
+                          </a:solidFill>
+                          <a:latin typeface="Segoe UI"/>
+                        </a:rPr>
+                        <a:t>PSO</a:t>
+                      </a:r>
+                    </a:p>
+                  </a:txBody>
+                  <a:tcPr anchor="ctr" marL="82296" marR="45720" marT="18288" marB="18288">
+                    <a:solidFill>
+                      <a:srgbClr val="0E7C74"/>
+                    </a:solidFill>
+                  </a:tcPr>
+                </a:tc>
+                <a:tc>
+                  <a:txBody>
+                    <a:bodyPr wrap="square"/>
+                    <a:lstStyle/>
+                    <a:p>
+                      <a:r>
+                        <a:rPr sz="1100" b="1">
+                          <a:solidFill>
+                            <a:srgbClr val="FFFFFF"/>
+                          </a:solidFill>
+                          <a:latin typeface="Segoe UI"/>
+                        </a:rPr>
+                        <a:t>Total</a:t>
+                      </a:r>
+                    </a:p>
+                  </a:txBody>
+                  <a:tcPr anchor="ctr" marL="82296" marR="45720" marT="18288" marB="18288">
+                    <a:solidFill>
+                      <a:srgbClr val="0E7C74"/>
+                    </a:solidFill>
+                  </a:tcPr>
+                </a:tc>
+              </a:tr>
+              <a:tr h="457200">
+                <a:tc>
+                  <a:txBody>
+                    <a:bodyPr wrap="square"/>
+                    <a:lstStyle/>
+                    <a:p>
+                      <a:r>
+                        <a:rPr sz="1200" b="1">
+                          <a:solidFill>
+                            <a:srgbClr val="1A1F27"/>
+                          </a:solidFill>
+                          <a:latin typeface="Segoe UI"/>
+                        </a:rPr>
+                        <a:t>Golden calls</a:t>
+                      </a:r>
+                    </a:p>
+                  </a:txBody>
+                  <a:tcPr anchor="ctr" marL="82296" marR="45720" marT="18288" marB="18288">
+                    <a:solidFill>
+                      <a:srgbClr val="FFFFFF"/>
+                    </a:solidFill>
+                  </a:tcPr>
+                </a:tc>
+                <a:tc>
+                  <a:txBody>
+                    <a:bodyPr wrap="square"/>
+                    <a:lstStyle/>
+                    <a:p>
+                      <a:r>
+                        <a:rPr sz="1200" b="0">
+                          <a:solidFill>
+                            <a:srgbClr val="535C6A"/>
+                          </a:solidFill>
+                          <a:latin typeface="Consolas"/>
+                        </a:rPr>
+                        <a:t>150</a:t>
+                      </a:r>
+                    </a:p>
+                  </a:txBody>
+                  <a:tcPr anchor="ctr" marL="82296" marR="45720" marT="18288" marB="18288">
+                    <a:solidFill>
+                      <a:srgbClr val="FFFFFF"/>
+                    </a:solidFill>
+                  </a:tcPr>
+                </a:tc>
+                <a:tc>
+                  <a:txBody>
+                    <a:bodyPr wrap="square"/>
+                    <a:lstStyle/>
+                    <a:p>
+                      <a:r>
+                        <a:rPr sz="1200" b="0">
+                          <a:solidFill>
+                            <a:srgbClr val="535C6A"/>
+                          </a:solidFill>
+                          <a:latin typeface="Consolas"/>
+                        </a:rPr>
+                        <a:t>150</a:t>
+                      </a:r>
+                    </a:p>
+                  </a:txBody>
+                  <a:tcPr anchor="ctr" marL="82296" marR="45720" marT="18288" marB="18288">
+                    <a:solidFill>
+                      <a:srgbClr val="FFFFFF"/>
+                    </a:solidFill>
+                  </a:tcPr>
+                </a:tc>
+                <a:tc>
+                  <a:txBody>
+                    <a:bodyPr wrap="square"/>
+                    <a:lstStyle/>
+                    <a:p>
+                      <a:r>
+                        <a:rPr sz="1200" b="0">
+                          <a:solidFill>
+                            <a:srgbClr val="535C6A"/>
+                          </a:solidFill>
+                          <a:latin typeface="Consolas"/>
+                        </a:rPr>
+                        <a:t>200</a:t>
+                      </a:r>
+                    </a:p>
+                  </a:txBody>
+                  <a:tcPr anchor="ctr" marL="82296" marR="45720" marT="18288" marB="18288">
+                    <a:solidFill>
+                      <a:srgbClr val="FFFFFF"/>
+                    </a:solidFill>
+                  </a:tcPr>
+                </a:tc>
+                <a:tc>
+                  <a:txBody>
+                    <a:bodyPr wrap="square"/>
+                    <a:lstStyle/>
+                    <a:p>
+                      <a:r>
+                        <a:rPr sz="1200" b="0">
+                          <a:solidFill>
+                            <a:srgbClr val="535C6A"/>
+                          </a:solidFill>
+                          <a:latin typeface="Consolas"/>
+                        </a:rPr>
+                        <a:t>500</a:t>
+                      </a:r>
+                    </a:p>
+                  </a:txBody>
+                  <a:tcPr anchor="ctr" marL="82296" marR="45720" marT="18288" marB="18288">
+                    <a:solidFill>
+                      <a:srgbClr val="FFFFFF"/>
+                    </a:solidFill>
+                  </a:tcPr>
+                </a:tc>
+              </a:tr>
+            </a:tbl>
+          </a:graphicData>
+        </a:graphic>
+      </p:graphicFrame>
+      <p:sp>
+        <p:nvSpPr>
+          <p:cNvPr id="7" name="Rounded Rectangle 6"/>
           <p:cNvSpPr/>
           <p:nvPr/>
         </p:nvSpPr>
@@ -3750,13 +7255,13 @@
               </a:spcAft>
             </a:pPr>
             <a:r>
-              <a:rPr sz="1400" b="1">
+              <a:rPr sz="1350" b="1">
                 <a:solidFill>
                   <a:srgbClr val="0A5B55"/>
                 </a:solidFill>
                 <a:latin typeface="Segoe UI"/>
               </a:rPr>
-              <a:t>The AI only judges each call. Everything after is counting — and every judgment links to the exact call moment behind it.</a:t>
+              <a:t>A call is “golden” only when 2+ coaches agree. If they disagree, the definition is unclear — we fix it before it counts.</a:t>
             </a:r>
           </a:p>
         </p:txBody>
@@ -3769,7 +7274,7 @@
 </p:sld>
 </file>
 
-<file path=ppt/slides/slide3.xml><?xml version="1.0" encoding="utf-8"?>
+<file path=ppt/slides/slide8.xml><?xml version="1.0" encoding="utf-8"?>
 <p:sld xmlns:a="http://schemas.openxmlformats.org/drawingml/2006/main" xmlns:p="http://schemas.openxmlformats.org/presentationml/2006/main" xmlns:r="http://schemas.openxmlformats.org/officeDocument/2006/relationships">
   <p:cSld>
     <p:bg>
@@ -3839,8 +7344,8 @@
         </p:nvSpPr>
         <p:spPr>
           <a:xfrm>
-            <a:off x="640080" y="365760"/>
-            <a:ext cx="11247120" cy="1234440"/>
+            <a:off x="640080" y="347472"/>
+            <a:ext cx="11247120" cy="1188720"/>
           </a:xfrm>
           <a:prstGeom prst="rect">
             <a:avLst/>
@@ -3865,7 +7370,7 @@
                 </a:solidFill>
                 <a:latin typeface="Segoe UI"/>
               </a:rPr>
-              <a:t>THE FOUR KINDS OF METRIC</a:t>
+              <a:t>STATUS &amp; ASKS</a:t>
             </a:r>
           </a:p>
           <a:p>
@@ -3875,673 +7380,13 @@
               </a:spcAft>
             </a:pPr>
             <a:r>
-              <a:rPr sz="2500" b="1">
+              <a:rPr sz="2400" b="1">
                 <a:solidFill>
                   <a:srgbClr val="1A1F27"/>
                 </a:solidFill>
                 <a:latin typeface="Segoe UI"/>
               </a:rPr>
-              <a:t>What comes from the AI — and what doesn't</a:t>
-            </a:r>
-          </a:p>
-        </p:txBody>
-      </p:sp>
-      <p:graphicFrame>
-        <p:nvGraphicFramePr>
-          <p:cNvPr id="4" name="Table 3"/>
-          <p:cNvGraphicFramePr>
-            <a:graphicFrameLocks noGrp="1"/>
-          </p:cNvGraphicFramePr>
-          <p:nvPr/>
-        </p:nvGraphicFramePr>
-        <p:xfrm>
-          <a:off x="640080" y="1874519"/>
-          <a:ext cx="10927080" cy="3291840"/>
-        </p:xfrm>
-        <a:graphic>
-          <a:graphicData uri="http://schemas.openxmlformats.org/drawingml/2006/table">
-            <a:tbl>
-              <a:tblPr firstRow="1">
-                <a:tableStyleId>{5C22544A-7EE6-4342-B048-85BDC9FD1C3A}</a:tableStyleId>
-              </a:tblPr>
-              <a:tblGrid>
-                <a:gridCol w="2743200"/>
-                <a:gridCol w="2834640"/>
-                <a:gridCol w="3063240"/>
-                <a:gridCol w="2286000"/>
-              </a:tblGrid>
-              <a:tr h="658368">
-                <a:tc>
-                  <a:txBody>
-                    <a:bodyPr wrap="square"/>
-                    <a:lstStyle/>
-                    <a:p>
-                      <a:r>
-                        <a:rPr sz="1100" b="1">
-                          <a:solidFill>
-                            <a:srgbClr val="FFFFFF"/>
-                          </a:solidFill>
-                          <a:latin typeface="Segoe UI"/>
-                        </a:rPr>
-                        <a:t>Metric type</a:t>
-                      </a:r>
-                    </a:p>
-                  </a:txBody>
-                  <a:tcPr anchor="ctr" marL="91440" marR="54864" marT="18288" marB="18288">
-                    <a:solidFill>
-                      <a:srgbClr val="0E7C74"/>
-                    </a:solidFill>
-                  </a:tcPr>
-                </a:tc>
-                <a:tc>
-                  <a:txBody>
-                    <a:bodyPr wrap="square"/>
-                    <a:lstStyle/>
-                    <a:p>
-                      <a:r>
-                        <a:rPr sz="1100" b="1">
-                          <a:solidFill>
-                            <a:srgbClr val="FFFFFF"/>
-                          </a:solidFill>
-                          <a:latin typeface="Segoe UI"/>
-                        </a:rPr>
-                        <a:t>Example</a:t>
-                      </a:r>
-                    </a:p>
-                  </a:txBody>
-                  <a:tcPr anchor="ctr" marL="91440" marR="54864" marT="18288" marB="18288">
-                    <a:solidFill>
-                      <a:srgbClr val="0E7C74"/>
-                    </a:solidFill>
-                  </a:tcPr>
-                </a:tc>
-                <a:tc>
-                  <a:txBody>
-                    <a:bodyPr wrap="square"/>
-                    <a:lstStyle/>
-                    <a:p>
-                      <a:r>
-                        <a:rPr sz="1100" b="1">
-                          <a:solidFill>
-                            <a:srgbClr val="FFFFFF"/>
-                          </a:solidFill>
-                          <a:latin typeface="Segoe UI"/>
-                        </a:rPr>
-                        <a:t>Where it comes from</a:t>
-                      </a:r>
-                    </a:p>
-                  </a:txBody>
-                  <a:tcPr anchor="ctr" marL="91440" marR="54864" marT="18288" marB="18288">
-                    <a:solidFill>
-                      <a:srgbClr val="0E7C74"/>
-                    </a:solidFill>
-                  </a:tcPr>
-                </a:tc>
-                <a:tc>
-                  <a:txBody>
-                    <a:bodyPr wrap="square"/>
-                    <a:lstStyle/>
-                    <a:p>
-                      <a:r>
-                        <a:rPr sz="1100" b="1">
-                          <a:solidFill>
-                            <a:srgbClr val="FFFFFF"/>
-                          </a:solidFill>
-                          <a:latin typeface="Segoe UI"/>
-                        </a:rPr>
-                        <a:t>How it's checked</a:t>
-                      </a:r>
-                    </a:p>
-                  </a:txBody>
-                  <a:tcPr anchor="ctr" marL="91440" marR="54864" marT="18288" marB="18288">
-                    <a:solidFill>
-                      <a:srgbClr val="0E7C74"/>
-                    </a:solidFill>
-                  </a:tcPr>
-                </a:tc>
-              </a:tr>
-              <a:tr h="658368">
-                <a:tc>
-                  <a:txBody>
-                    <a:bodyPr wrap="square"/>
-                    <a:lstStyle/>
-                    <a:p>
-                      <a:r>
-                        <a:rPr sz="1250" b="1">
-                          <a:solidFill>
-                            <a:srgbClr val="1A1F27"/>
-                          </a:solidFill>
-                          <a:latin typeface="Segoe UI"/>
-                        </a:rPr>
-                        <a:t>KPIs (counts &amp; rates)</a:t>
-                      </a:r>
-                    </a:p>
-                  </a:txBody>
-                  <a:tcPr anchor="ctr" marL="91440" marR="54864" marT="18288" marB="18288">
-                    <a:solidFill>
-                      <a:srgbClr val="FFFFFF"/>
-                    </a:solidFill>
-                  </a:tcPr>
-                </a:tc>
-                <a:tc>
-                  <a:txBody>
-                    <a:bodyPr wrap="square"/>
-                    <a:lstStyle/>
-                    <a:p>
-                      <a:r>
-                        <a:rPr sz="1250" b="0">
-                          <a:solidFill>
-                            <a:srgbClr val="535C6A"/>
-                          </a:solidFill>
-                          <a:latin typeface="Segoe UI"/>
-                        </a:rPr>
-                        <a:t>new_line_pitches = 12</a:t>
-                      </a:r>
-                    </a:p>
-                  </a:txBody>
-                  <a:tcPr anchor="ctr" marL="91440" marR="54864" marT="18288" marB="18288">
-                    <a:solidFill>
-                      <a:srgbClr val="FFFFFF"/>
-                    </a:solidFill>
-                  </a:tcPr>
-                </a:tc>
-                <a:tc>
-                  <a:txBody>
-                    <a:bodyPr wrap="square"/>
-                    <a:lstStyle/>
-                    <a:p>
-                      <a:r>
-                        <a:rPr sz="1250" b="0">
-                          <a:solidFill>
-                            <a:srgbClr val="535C6A"/>
-                          </a:solidFill>
-                          <a:latin typeface="Segoe UI"/>
-                        </a:rPr>
-                        <a:t>AI judgments, added up</a:t>
-                      </a:r>
-                    </a:p>
-                  </a:txBody>
-                  <a:tcPr anchor="ctr" marL="91440" marR="54864" marT="18288" marB="18288">
-                    <a:solidFill>
-                      <a:srgbClr val="FFFFFF"/>
-                    </a:solidFill>
-                  </a:tcPr>
-                </a:tc>
-                <a:tc>
-                  <a:txBody>
-                    <a:bodyPr wrap="square"/>
-                    <a:lstStyle/>
-                    <a:p>
-                      <a:r>
-                        <a:rPr sz="1250" b="0">
-                          <a:solidFill>
-                            <a:srgbClr val="535C6A"/>
-                          </a:solidFill>
-                          <a:latin typeface="Segoe UI"/>
-                        </a:rPr>
-                        <a:t>Automated tests</a:t>
-                      </a:r>
-                    </a:p>
-                  </a:txBody>
-                  <a:tcPr anchor="ctr" marL="91440" marR="54864" marT="18288" marB="18288">
-                    <a:solidFill>
-                      <a:srgbClr val="FFFFFF"/>
-                    </a:solidFill>
-                  </a:tcPr>
-                </a:tc>
-              </a:tr>
-              <a:tr h="658368">
-                <a:tc>
-                  <a:txBody>
-                    <a:bodyPr wrap="square"/>
-                    <a:lstStyle/>
-                    <a:p>
-                      <a:r>
-                        <a:rPr sz="1250" b="1">
-                          <a:solidFill>
-                            <a:srgbClr val="1A1F27"/>
-                          </a:solidFill>
-                          <a:latin typeface="Segoe UI"/>
-                        </a:rPr>
-                        <a:t>Behaviour / soft skills</a:t>
-                      </a:r>
-                    </a:p>
-                  </a:txBody>
-                  <a:tcPr anchor="ctr" marL="91440" marR="54864" marT="18288" marB="18288">
-                    <a:solidFill>
-                      <a:srgbClr val="F7F9F8"/>
-                    </a:solidFill>
-                  </a:tcPr>
-                </a:tc>
-                <a:tc>
-                  <a:txBody>
-                    <a:bodyPr wrap="square"/>
-                    <a:lstStyle/>
-                    <a:p>
-                      <a:r>
-                        <a:rPr sz="1250" b="0">
-                          <a:solidFill>
-                            <a:srgbClr val="535C6A"/>
-                          </a:solidFill>
-                          <a:latin typeface="Segoe UI"/>
-                        </a:rPr>
-                        <a:t>empathy = 0.80 (0–1)</a:t>
-                      </a:r>
-                    </a:p>
-                  </a:txBody>
-                  <a:tcPr anchor="ctr" marL="91440" marR="54864" marT="18288" marB="18288">
-                    <a:solidFill>
-                      <a:srgbClr val="F7F9F8"/>
-                    </a:solidFill>
-                  </a:tcPr>
-                </a:tc>
-                <a:tc>
-                  <a:txBody>
-                    <a:bodyPr wrap="square"/>
-                    <a:lstStyle/>
-                    <a:p>
-                      <a:r>
-                        <a:rPr sz="1250" b="0">
-                          <a:solidFill>
-                            <a:srgbClr val="535C6A"/>
-                          </a:solidFill>
-                          <a:latin typeface="Segoe UI"/>
-                        </a:rPr>
-                        <a:t>AI judgments, averaged</a:t>
-                      </a:r>
-                    </a:p>
-                  </a:txBody>
-                  <a:tcPr anchor="ctr" marL="91440" marR="54864" marT="18288" marB="18288">
-                    <a:solidFill>
-                      <a:srgbClr val="F7F9F8"/>
-                    </a:solidFill>
-                  </a:tcPr>
-                </a:tc>
-                <a:tc>
-                  <a:txBody>
-                    <a:bodyPr wrap="square"/>
-                    <a:lstStyle/>
-                    <a:p>
-                      <a:r>
-                        <a:rPr sz="1250" b="0">
-                          <a:solidFill>
-                            <a:srgbClr val="535C6A"/>
-                          </a:solidFill>
-                          <a:latin typeface="Segoe UI"/>
-                        </a:rPr>
-                        <a:t>Golden data</a:t>
-                      </a:r>
-                    </a:p>
-                  </a:txBody>
-                  <a:tcPr anchor="ctr" marL="91440" marR="54864" marT="18288" marB="18288">
-                    <a:solidFill>
-                      <a:srgbClr val="F7F9F8"/>
-                    </a:solidFill>
-                  </a:tcPr>
-                </a:tc>
-              </a:tr>
-              <a:tr h="658368">
-                <a:tc>
-                  <a:txBody>
-                    <a:bodyPr wrap="square"/>
-                    <a:lstStyle/>
-                    <a:p>
-                      <a:r>
-                        <a:rPr sz="1250" b="1">
-                          <a:solidFill>
-                            <a:srgbClr val="1A1F27"/>
-                          </a:solidFill>
-                          <a:latin typeface="Segoe UI"/>
-                        </a:rPr>
-                        <a:t>Operational metrics</a:t>
-                      </a:r>
-                    </a:p>
-                  </a:txBody>
-                  <a:tcPr anchor="ctr" marL="91440" marR="54864" marT="18288" marB="18288">
-                    <a:solidFill>
-                      <a:srgbClr val="FFFFFF"/>
-                    </a:solidFill>
-                  </a:tcPr>
-                </a:tc>
-                <a:tc>
-                  <a:txBody>
-                    <a:bodyPr wrap="square"/>
-                    <a:lstStyle/>
-                    <a:p>
-                      <a:r>
-                        <a:rPr sz="1250" b="0">
-                          <a:solidFill>
-                            <a:srgbClr val="535C6A"/>
-                          </a:solidFill>
-                          <a:latin typeface="Segoe UI"/>
-                        </a:rPr>
-                        <a:t>AHT, VXS, resolve %</a:t>
-                      </a:r>
-                    </a:p>
-                  </a:txBody>
-                  <a:tcPr anchor="ctr" marL="91440" marR="54864" marT="18288" marB="18288">
-                    <a:solidFill>
-                      <a:srgbClr val="FFFFFF"/>
-                    </a:solidFill>
-                  </a:tcPr>
-                </a:tc>
-                <a:tc>
-                  <a:txBody>
-                    <a:bodyPr wrap="square"/>
-                    <a:lstStyle/>
-                    <a:p>
-                      <a:r>
-                        <a:rPr sz="1250" b="0">
-                          <a:solidFill>
-                            <a:srgbClr val="535C6A"/>
-                          </a:solidFill>
-                          <a:latin typeface="Segoe UI"/>
-                        </a:rPr>
-                        <a:t>Verizon data warehouse</a:t>
-                      </a:r>
-                    </a:p>
-                  </a:txBody>
-                  <a:tcPr anchor="ctr" marL="91440" marR="54864" marT="18288" marB="18288">
-                    <a:solidFill>
-                      <a:srgbClr val="FFFFFF"/>
-                    </a:solidFill>
-                  </a:tcPr>
-                </a:tc>
-                <a:tc>
-                  <a:txBody>
-                    <a:bodyPr wrap="square"/>
-                    <a:lstStyle/>
-                    <a:p>
-                      <a:r>
-                        <a:rPr sz="1250" b="0">
-                          <a:solidFill>
-                            <a:srgbClr val="535C6A"/>
-                          </a:solidFill>
-                          <a:latin typeface="Segoe UI"/>
-                        </a:rPr>
-                        <a:t>Validate the query</a:t>
-                      </a:r>
-                    </a:p>
-                  </a:txBody>
-                  <a:tcPr anchor="ctr" marL="91440" marR="54864" marT="18288" marB="18288">
-                    <a:solidFill>
-                      <a:srgbClr val="FFFFFF"/>
-                    </a:solidFill>
-                  </a:tcPr>
-                </a:tc>
-              </a:tr>
-              <a:tr h="658368">
-                <a:tc>
-                  <a:txBody>
-                    <a:bodyPr wrap="square"/>
-                    <a:lstStyle/>
-                    <a:p>
-                      <a:r>
-                        <a:rPr sz="1250" b="1">
-                          <a:solidFill>
-                            <a:srgbClr val="1A1F27"/>
-                          </a:solidFill>
-                          <a:latin typeface="Segoe UI"/>
-                        </a:rPr>
-                        <a:t>Roll-up scores</a:t>
-                      </a:r>
-                    </a:p>
-                  </a:txBody>
-                  <a:tcPr anchor="ctr" marL="91440" marR="54864" marT="18288" marB="18288">
-                    <a:solidFill>
-                      <a:srgbClr val="F7F9F8"/>
-                    </a:solidFill>
-                  </a:tcPr>
-                </a:tc>
-                <a:tc>
-                  <a:txBody>
-                    <a:bodyPr wrap="square"/>
-                    <a:lstStyle/>
-                    <a:p>
-                      <a:r>
-                        <a:rPr sz="1250" b="0">
-                          <a:solidFill>
-                            <a:srgbClr val="535C6A"/>
-                          </a:solidFill>
-                          <a:latin typeface="Segoe UI"/>
-                        </a:rPr>
-                        <a:t>performance status</a:t>
-                      </a:r>
-                    </a:p>
-                  </a:txBody>
-                  <a:tcPr anchor="ctr" marL="91440" marR="54864" marT="18288" marB="18288">
-                    <a:solidFill>
-                      <a:srgbClr val="F7F9F8"/>
-                    </a:solidFill>
-                  </a:tcPr>
-                </a:tc>
-                <a:tc>
-                  <a:txBody>
-                    <a:bodyPr wrap="square"/>
-                    <a:lstStyle/>
-                    <a:p>
-                      <a:r>
-                        <a:rPr sz="1250" b="0">
-                          <a:solidFill>
-                            <a:srgbClr val="535C6A"/>
-                          </a:solidFill>
-                          <a:latin typeface="Segoe UI"/>
-                        </a:rPr>
-                        <a:t>Calculated from the above</a:t>
-                      </a:r>
-                    </a:p>
-                  </a:txBody>
-                  <a:tcPr anchor="ctr" marL="91440" marR="54864" marT="18288" marB="18288">
-                    <a:solidFill>
-                      <a:srgbClr val="F7F9F8"/>
-                    </a:solidFill>
-                  </a:tcPr>
-                </a:tc>
-                <a:tc>
-                  <a:txBody>
-                    <a:bodyPr wrap="square"/>
-                    <a:lstStyle/>
-                    <a:p>
-                      <a:r>
-                        <a:rPr sz="1250" b="0">
-                          <a:solidFill>
-                            <a:srgbClr val="535C6A"/>
-                          </a:solidFill>
-                          <a:latin typeface="Segoe UI"/>
-                        </a:rPr>
-                        <a:t>Automated tests</a:t>
-                      </a:r>
-                    </a:p>
-                  </a:txBody>
-                  <a:tcPr anchor="ctr" marL="91440" marR="54864" marT="18288" marB="18288">
-                    <a:solidFill>
-                      <a:srgbClr val="F7F9F8"/>
-                    </a:solidFill>
-                  </a:tcPr>
-                </a:tc>
-              </a:tr>
-            </a:tbl>
-          </a:graphicData>
-        </a:graphic>
-      </p:graphicFrame>
-      <p:sp>
-        <p:nvSpPr>
-          <p:cNvPr id="5" name="Rounded Rectangle 4"/>
-          <p:cNvSpPr/>
-          <p:nvPr/>
-        </p:nvSpPr>
-        <p:spPr>
-          <a:xfrm>
-            <a:off x="640080" y="5806440"/>
-            <a:ext cx="10927080" cy="749808"/>
-          </a:xfrm>
-          <a:prstGeom prst="roundRect">
-            <a:avLst/>
-          </a:prstGeom>
-          <a:solidFill>
-            <a:srgbClr val="E1F0EE"/>
-          </a:solidFill>
-          <a:ln>
-            <a:noFill/>
-          </a:ln>
-          <a:effectLst/>
-        </p:spPr>
-        <p:style>
-          <a:lnRef idx="1">
-            <a:schemeClr val="accent1"/>
-          </a:lnRef>
-          <a:fillRef idx="3">
-            <a:schemeClr val="accent1"/>
-          </a:fillRef>
-          <a:effectRef idx="2">
-            <a:schemeClr val="accent1"/>
-          </a:effectRef>
-          <a:fontRef idx="minor">
-            <a:schemeClr val="lt1"/>
-          </a:fontRef>
-        </p:style>
-        <p:txBody>
-          <a:bodyPr rtlCol="0" anchor="ctr" wrap="square" lIns="201168" rIns="201168"/>
-          <a:lstStyle/>
-          <a:p>
-            <a:pPr algn="ctr">
-              <a:spcAft>
-                <a:spcPts val="0"/>
-              </a:spcAft>
-            </a:pPr>
-            <a:r>
-              <a:rPr sz="1400" b="1">
-                <a:solidFill>
-                  <a:srgbClr val="0A5B55"/>
-                </a:solidFill>
-                <a:latin typeface="Segoe UI"/>
-              </a:rPr>
-              <a:t>Only the AI's per-call judgments need “golden data”. KPIs are arithmetic; operational metrics are external. That is what makes the system testable.</a:t>
-            </a:r>
-          </a:p>
-        </p:txBody>
-      </p:sp>
-    </p:spTree>
-  </p:cSld>
-  <p:clrMapOvr>
-    <a:masterClrMapping/>
-  </p:clrMapOvr>
-</p:sld>
-</file>
-
-<file path=ppt/slides/slide4.xml><?xml version="1.0" encoding="utf-8"?>
-<p:sld xmlns:a="http://schemas.openxmlformats.org/drawingml/2006/main" xmlns:p="http://schemas.openxmlformats.org/presentationml/2006/main" xmlns:r="http://schemas.openxmlformats.org/officeDocument/2006/relationships">
-  <p:cSld>
-    <p:bg>
-      <p:bgPr>
-        <a:solidFill>
-          <a:srgbClr val="FFFFFF"/>
-        </a:solidFill>
-        <a:effectLst/>
-      </p:bgPr>
-    </p:bg>
-    <p:spTree>
-      <p:nvGrpSpPr>
-        <p:cNvPr id="1" name=""/>
-        <p:cNvGrpSpPr/>
-        <p:nvPr/>
-      </p:nvGrpSpPr>
-      <p:grpSpPr/>
-      <p:sp>
-        <p:nvSpPr>
-          <p:cNvPr id="2" name="Rectangle 1"/>
-          <p:cNvSpPr/>
-          <p:nvPr/>
-        </p:nvSpPr>
-        <p:spPr>
-          <a:xfrm>
-            <a:off x="0" y="0"/>
-            <a:ext cx="12191695" cy="128016"/>
-          </a:xfrm>
-          <a:prstGeom prst="rect">
-            <a:avLst/>
-          </a:prstGeom>
-          <a:solidFill>
-            <a:srgbClr val="0E7C74"/>
-          </a:solidFill>
-          <a:ln>
-            <a:noFill/>
-          </a:ln>
-          <a:effectLst/>
-        </p:spPr>
-        <p:style>
-          <a:lnRef idx="1">
-            <a:schemeClr val="accent1"/>
-          </a:lnRef>
-          <a:fillRef idx="3">
-            <a:schemeClr val="accent1"/>
-          </a:fillRef>
-          <a:effectRef idx="2">
-            <a:schemeClr val="accent1"/>
-          </a:effectRef>
-          <a:fontRef idx="minor">
-            <a:schemeClr val="lt1"/>
-          </a:fontRef>
-        </p:style>
-        <p:txBody>
-          <a:bodyPr rtlCol="0" anchor="ctr"/>
-          <a:lstStyle/>
-          <a:p>
-            <a:pPr algn="ctr"/>
-          </a:p>
-        </p:txBody>
-      </p:sp>
-      <p:sp>
-        <p:nvSpPr>
-          <p:cNvPr id="3" name="TextBox 2"/>
-          <p:cNvSpPr txBox="1"/>
-          <p:nvPr/>
-        </p:nvSpPr>
-        <p:spPr>
-          <a:xfrm>
-            <a:off x="640080" y="365760"/>
-            <a:ext cx="11247120" cy="1234440"/>
-          </a:xfrm>
-          <a:prstGeom prst="rect">
-            <a:avLst/>
-          </a:prstGeom>
-          <a:noFill/>
-        </p:spPr>
-        <p:txBody>
-          <a:bodyPr wrap="square">
-            <a:spAutoFit/>
-          </a:bodyPr>
-          <a:lstStyle/>
-          <a:p>
-            <a:pPr>
-              <a:spcAft>
-                <a:spcPts val="400"/>
-              </a:spcAft>
-            </a:pPr>
-            <a:r>
-              <a:rPr sz="1200" b="1">
-                <a:solidFill>
-                  <a:srgbClr val="0E7C74"/>
-                </a:solidFill>
-                <a:latin typeface="Segoe UI"/>
-              </a:rPr>
-              <a:t>WORKED EXAMPLE</a:t>
-            </a:r>
-          </a:p>
-          <a:p>
-            <a:pPr>
-              <a:spcAft>
-                <a:spcPts val="0"/>
-              </a:spcAft>
-            </a:pPr>
-            <a:r>
-              <a:rPr sz="2500" b="1">
-                <a:solidFill>
-                  <a:srgbClr val="1A1F27"/>
-                </a:solidFill>
-                <a:latin typeface="Segoe UI"/>
-              </a:rPr>
-              <a:t>Two calls, side by side — the same situation, handled two ways</a:t>
+              <a:t>Where we are, and what we need from the business</a:t>
             </a:r>
           </a:p>
         </p:txBody>
@@ -4554,8 +7399,8 @@
         </p:nvSpPr>
         <p:spPr>
           <a:xfrm>
-            <a:off x="640080" y="1828800"/>
-            <a:ext cx="5486400" cy="3657600"/>
+            <a:off x="640080" y="1737360"/>
+            <a:ext cx="5486400" cy="2286000"/>
           </a:xfrm>
           <a:prstGeom prst="roundRect">
             <a:avLst/>
@@ -4585,12 +7430,12 @@
           </a:fontRef>
         </p:style>
         <p:txBody>
-          <a:bodyPr rtlCol="0" anchor="ctr" wrap="square" lIns="146304" rIns="128016" tIns="118872" bIns="91440"/>
+          <a:bodyPr rtlCol="0" anchor="ctr" wrap="square" lIns="137160" rIns="109728" tIns="109728" bIns="73152"/>
           <a:lstStyle/>
           <a:p>
             <a:pPr algn="ctr">
               <a:spcAft>
-                <a:spcPts val="700"/>
+                <a:spcPts val="600"/>
               </a:spcAft>
             </a:pPr>
             <a:r>
@@ -4600,61 +7445,61 @@
                 </a:solidFill>
                 <a:latin typeface="Segoe UI"/>
               </a:rPr>
-              <a:t>CALL A · opportunity taken</a:t>
-            </a:r>
-          </a:p>
-          <a:p>
-            <a:pPr>
-              <a:spcAft>
-                <a:spcPts val="300"/>
+              <a:t>WHAT'S THERE</a:t>
+            </a:r>
+          </a:p>
+          <a:p>
+            <a:pPr>
+              <a:spcAft>
+                <a:spcPts val="200"/>
               </a:spcAft>
             </a:pPr>
             <a:r>
               <a:rPr sz="1150" b="0">
                 <a:solidFill>
-                  <a:srgbClr val="535C6A"/>
+                  <a:srgbClr val="1A1F27"/>
                 </a:solidFill>
                 <a:latin typeface="Segoe UI"/>
               </a:rPr>
-              <a:t>Customer asks about the bill. Agent</a:t>
-            </a:r>
-          </a:p>
-          <a:p>
-            <a:pPr>
-              <a:spcAft>
-                <a:spcPts val="300"/>
+              <a:t>47 KPIs mapped — field → calc → unit</a:t>
+            </a:r>
+          </a:p>
+          <a:p>
+            <a:pPr>
+              <a:spcAft>
+                <a:spcPts val="200"/>
               </a:spcAft>
             </a:pPr>
             <a:r>
               <a:rPr sz="1150" b="0">
                 <a:solidFill>
-                  <a:srgbClr val="535C6A"/>
+                  <a:srgbClr val="1A1F27"/>
                 </a:solidFill>
                 <a:latin typeface="Segoe UI"/>
               </a:rPr>
-              <a:t>resolves it, then offers a second line.</a:t>
-            </a:r>
-          </a:p>
-          <a:p>
-            <a:pPr>
-              <a:spcAft>
-                <a:spcPts val="300"/>
+              <a:t>Every score tied to call evidence</a:t>
+            </a:r>
+          </a:p>
+          <a:p>
+            <a:pPr>
+              <a:spcAft>
+                <a:spcPts val="200"/>
               </a:spcAft>
             </a:pPr>
             <a:r>
               <a:rPr sz="1150" b="0">
                 <a:solidFill>
-                  <a:srgbClr val="535C6A"/>
+                  <a:srgbClr val="1A1F27"/>
                 </a:solidFill>
                 <a:latin typeface="Segoe UI"/>
               </a:rPr>
-              <a:t>Customer accepts.</a:t>
-            </a:r>
-          </a:p>
-          <a:p>
-            <a:pPr>
-              <a:spcAft>
-                <a:spcPts val="300"/>
+              <a:t>3 programs documented; labelling fixed</a:t>
+            </a:r>
+          </a:p>
+          <a:p>
+            <a:pPr>
+              <a:spcAft>
+                <a:spcPts val="200"/>
               </a:spcAft>
             </a:pPr>
             <a:r>
@@ -4664,103 +7509,7 @@
                 </a:solidFill>
                 <a:latin typeface="Segoe UI"/>
               </a:rPr>
-              <a:t/>
-            </a:r>
-          </a:p>
-          <a:p>
-            <a:pPr>
-              <a:spcAft>
-                <a:spcPts val="300"/>
-              </a:spcAft>
-            </a:pPr>
-            <a:r>
-              <a:rPr sz="1150" b="0">
-                <a:solidFill>
-                  <a:srgbClr val="0A5B55"/>
-                </a:solidFill>
-                <a:latin typeface="Consolas"/>
-              </a:rPr>
-              <a:t>new_line_opportunity_exists = true</a:t>
-            </a:r>
-          </a:p>
-          <a:p>
-            <a:pPr>
-              <a:spcAft>
-                <a:spcPts val="300"/>
-              </a:spcAft>
-            </a:pPr>
-            <a:r>
-              <a:rPr sz="1150" b="0">
-                <a:solidFill>
-                  <a:srgbClr val="0A5B55"/>
-                </a:solidFill>
-                <a:latin typeface="Consolas"/>
-              </a:rPr>
-              <a:t>pitched_new_line            = true</a:t>
-            </a:r>
-          </a:p>
-          <a:p>
-            <a:pPr>
-              <a:spcAft>
-                <a:spcPts val="300"/>
-              </a:spcAft>
-            </a:pPr>
-            <a:r>
-              <a:rPr sz="1150" b="0">
-                <a:solidFill>
-                  <a:srgbClr val="0A5B55"/>
-                </a:solidFill>
-                <a:latin typeface="Consolas"/>
-              </a:rPr>
-              <a:t>sale_made                   = true</a:t>
-            </a:r>
-          </a:p>
-          <a:p>
-            <a:pPr>
-              <a:spcAft>
-                <a:spcPts val="300"/>
-              </a:spcAft>
-            </a:pPr>
-            <a:r>
-              <a:rPr sz="1150" b="0">
-                <a:solidFill>
-                  <a:srgbClr val="0A5B55"/>
-                </a:solidFill>
-                <a:latin typeface="Consolas"/>
-              </a:rPr>
-              <a:t>customer_experience         = Good</a:t>
-            </a:r>
-          </a:p>
-          <a:p>
-            <a:pPr>
-              <a:spcAft>
-                <a:spcPts val="300"/>
-              </a:spcAft>
-            </a:pPr>
-            <a:r>
-              <a:rPr sz="1150" b="0">
-                <a:solidFill>
-                  <a:srgbClr val="1A1F27"/>
-                </a:solidFill>
-                <a:latin typeface="Segoe UI"/>
-              </a:rPr>
-              <a:t/>
-            </a:r>
-          </a:p>
-          <a:p>
-            <a:pPr>
-              <a:spcAft>
-                <a:spcPts val="300"/>
-              </a:spcAft>
-            </a:pPr>
-            <a:r>
-              <a:rPr sz="1150" b="0">
-                <a:solidFill>
-                  <a:srgbClr val="2E8B5E"/>
-                </a:solidFill>
-                <a:latin typeface="Segoe UI"/>
-              </a:rPr>
-              <a:t>→ counts toward PITCHES + a good week</a:t>
+              <a:t>Evaluation platform integrated</a:t>
             </a:r>
           </a:p>
         </p:txBody>
@@ -4773,8 +7522,8 @@
         </p:nvSpPr>
         <p:spPr>
           <a:xfrm>
-            <a:off x="6355080" y="1828800"/>
-            <a:ext cx="5212080" cy="3657600"/>
+            <a:off x="6355080" y="1737360"/>
+            <a:ext cx="5212080" cy="2286000"/>
           </a:xfrm>
           <a:prstGeom prst="roundRect">
             <a:avLst/>
@@ -4804,12 +7553,12 @@
           </a:fontRef>
         </p:style>
         <p:txBody>
-          <a:bodyPr rtlCol="0" anchor="ctr" wrap="square" lIns="146304" rIns="128016" tIns="118872" bIns="91440"/>
+          <a:bodyPr rtlCol="0" anchor="ctr" wrap="square" lIns="137160" rIns="109728" tIns="109728" bIns="73152"/>
           <a:lstStyle/>
           <a:p>
             <a:pPr algn="ctr">
               <a:spcAft>
-                <a:spcPts val="700"/>
+                <a:spcPts val="600"/>
               </a:spcAft>
             </a:pPr>
             <a:r>
@@ -4819,61 +7568,61 @@
                 </a:solidFill>
                 <a:latin typeface="Segoe UI"/>
               </a:rPr>
-              <a:t>CALL B · opportunity missed</a:t>
-            </a:r>
-          </a:p>
-          <a:p>
-            <a:pPr>
-              <a:spcAft>
-                <a:spcPts val="300"/>
+              <a:t>WHAT WE NEED</a:t>
+            </a:r>
+          </a:p>
+          <a:p>
+            <a:pPr>
+              <a:spcAft>
+                <a:spcPts val="200"/>
               </a:spcAft>
             </a:pPr>
             <a:r>
               <a:rPr sz="1150" b="0">
                 <a:solidFill>
-                  <a:srgbClr val="535C6A"/>
+                  <a:srgbClr val="1A1F27"/>
                 </a:solidFill>
                 <a:latin typeface="Segoe UI"/>
               </a:rPr>
-              <a:t>Same bill question. Agent resolves it</a:t>
-            </a:r>
-          </a:p>
-          <a:p>
-            <a:pPr>
-              <a:spcAft>
-                <a:spcPts val="300"/>
+              <a:t>Golden data (certified calls) — with coaches</a:t>
+            </a:r>
+          </a:p>
+          <a:p>
+            <a:pPr>
+              <a:spcAft>
+                <a:spcPts val="200"/>
               </a:spcAft>
             </a:pPr>
             <a:r>
               <a:rPr sz="1150" b="0">
                 <a:solidFill>
-                  <a:srgbClr val="535C6A"/>
+                  <a:srgbClr val="1A1F27"/>
                 </a:solidFill>
                 <a:latin typeface="Segoe UI"/>
               </a:rPr>
-              <a:t>but never mentions a second line —</a:t>
-            </a:r>
-          </a:p>
-          <a:p>
-            <a:pPr>
-              <a:spcAft>
-                <a:spcPts val="300"/>
+              <a:t>Roll-up score re-specified per program</a:t>
+            </a:r>
+          </a:p>
+          <a:p>
+            <a:pPr>
+              <a:spcAft>
+                <a:spcPts val="200"/>
               </a:spcAft>
             </a:pPr>
             <a:r>
               <a:rPr sz="1150" b="0">
                 <a:solidFill>
-                  <a:srgbClr val="535C6A"/>
+                  <a:srgbClr val="1A1F27"/>
                 </a:solidFill>
                 <a:latin typeface="Segoe UI"/>
               </a:rPr>
-              <a:t>though the customer was a clear fit.</a:t>
-            </a:r>
-          </a:p>
-          <a:p>
-            <a:pPr>
-              <a:spcAft>
-                <a:spcPts val="300"/>
+              <a:t>Acceptance threshold per KPI</a:t>
+            </a:r>
+          </a:p>
+          <a:p>
+            <a:pPr>
+              <a:spcAft>
+                <a:spcPts val="200"/>
               </a:spcAft>
             </a:pPr>
             <a:r>
@@ -4883,117 +7632,231 @@
                 </a:solidFill>
                 <a:latin typeface="Segoe UI"/>
               </a:rPr>
-              <a:t/>
-            </a:r>
-          </a:p>
-          <a:p>
-            <a:pPr>
-              <a:spcAft>
-                <a:spcPts val="300"/>
-              </a:spcAft>
-            </a:pPr>
-            <a:r>
-              <a:rPr sz="1150" b="0">
-                <a:solidFill>
-                  <a:srgbClr val="0A5B55"/>
-                </a:solidFill>
-                <a:latin typeface="Consolas"/>
-              </a:rPr>
-              <a:t>new_line_opportunity_exists = true</a:t>
-            </a:r>
-          </a:p>
-          <a:p>
-            <a:pPr>
-              <a:spcAft>
-                <a:spcPts val="300"/>
-              </a:spcAft>
-            </a:pPr>
-            <a:r>
-              <a:rPr sz="1150" b="0">
-                <a:solidFill>
-                  <a:srgbClr val="0A5B55"/>
-                </a:solidFill>
-                <a:latin typeface="Consolas"/>
-              </a:rPr>
-              <a:t>pitched_new_line            = false</a:t>
-            </a:r>
-          </a:p>
-          <a:p>
-            <a:pPr>
-              <a:spcAft>
-                <a:spcPts val="300"/>
-              </a:spcAft>
-            </a:pPr>
-            <a:r>
-              <a:rPr sz="1150" b="0">
-                <a:solidFill>
-                  <a:srgbClr val="0A5B55"/>
-                </a:solidFill>
-                <a:latin typeface="Consolas"/>
-              </a:rPr>
-              <a:t>issue_resolved              = true</a:t>
-            </a:r>
-          </a:p>
-          <a:p>
-            <a:pPr>
-              <a:spcAft>
-                <a:spcPts val="300"/>
-              </a:spcAft>
-            </a:pPr>
-            <a:r>
-              <a:rPr sz="1150" b="0">
-                <a:solidFill>
-                  <a:srgbClr val="0A5B55"/>
-                </a:solidFill>
-                <a:latin typeface="Consolas"/>
-              </a:rPr>
-              <a:t>customer_experience         = Medium</a:t>
-            </a:r>
-          </a:p>
-          <a:p>
-            <a:pPr>
-              <a:spcAft>
-                <a:spcPts val="300"/>
-              </a:spcAft>
-            </a:pPr>
-            <a:r>
-              <a:rPr sz="1150" b="0">
-                <a:solidFill>
-                  <a:srgbClr val="1A1F27"/>
-                </a:solidFill>
-                <a:latin typeface="Segoe UI"/>
-              </a:rPr>
-              <a:t/>
-            </a:r>
-          </a:p>
-          <a:p>
-            <a:pPr>
-              <a:spcAft>
-                <a:spcPts val="300"/>
-              </a:spcAft>
-            </a:pPr>
-            <a:r>
-              <a:rPr sz="1150" b="0">
-                <a:solidFill>
-                  <a:srgbClr val="A96E12"/>
-                </a:solidFill>
-                <a:latin typeface="Segoe UI"/>
-              </a:rPr>
-              <a:t>→ counts toward OPPORTUNITY MISSED</a:t>
-            </a:r>
-          </a:p>
-        </p:txBody>
-      </p:sp>
-      <p:sp>
-        <p:nvSpPr>
-          <p:cNvPr id="6" name="Rounded Rectangle 5"/>
+              <a:t>A few definitions confirmed by SMEs</a:t>
+            </a:r>
+          </a:p>
+        </p:txBody>
+      </p:sp>
+      <p:graphicFrame>
+        <p:nvGraphicFramePr>
+          <p:cNvPr id="6" name="Table 5"/>
+          <p:cNvGraphicFramePr>
+            <a:graphicFrameLocks noGrp="1"/>
+          </p:cNvGraphicFramePr>
+          <p:nvPr/>
+        </p:nvGraphicFramePr>
+        <p:xfrm>
+          <a:off x="640080" y="4251960"/>
+          <a:ext cx="10927079" cy="1828800"/>
+        </p:xfrm>
+        <a:graphic>
+          <a:graphicData uri="http://schemas.openxmlformats.org/drawingml/2006/table">
+            <a:tbl>
+              <a:tblPr firstRow="1">
+                <a:tableStyleId>{5C22544A-7EE6-4342-B048-85BDC9FD1C3A}</a:tableStyleId>
+              </a:tblPr>
+              <a:tblGrid>
+                <a:gridCol w="6949440"/>
+                <a:gridCol w="3977639"/>
+              </a:tblGrid>
+              <a:tr h="457200">
+                <a:tc>
+                  <a:txBody>
+                    <a:bodyPr wrap="square"/>
+                    <a:lstStyle/>
+                    <a:p>
+                      <a:r>
+                        <a:rPr sz="1100" b="1">
+                          <a:solidFill>
+                            <a:srgbClr val="FFFFFF"/>
+                          </a:solidFill>
+                          <a:latin typeface="Segoe UI"/>
+                        </a:rPr>
+                        <a:t>Ask the business</a:t>
+                      </a:r>
+                    </a:p>
+                  </a:txBody>
+                  <a:tcPr anchor="ctr" marL="82296" marR="45720" marT="18288" marB="18288">
+                    <a:solidFill>
+                      <a:srgbClr val="0E7C74"/>
+                    </a:solidFill>
+                  </a:tcPr>
+                </a:tc>
+                <a:tc>
+                  <a:txBody>
+                    <a:bodyPr wrap="square"/>
+                    <a:lstStyle/>
+                    <a:p>
+                      <a:r>
+                        <a:rPr sz="1100" b="1">
+                          <a:solidFill>
+                            <a:srgbClr val="FFFFFF"/>
+                          </a:solidFill>
+                          <a:latin typeface="Segoe UI"/>
+                        </a:rPr>
+                        <a:t>Gives us</a:t>
+                      </a:r>
+                    </a:p>
+                  </a:txBody>
+                  <a:tcPr anchor="ctr" marL="82296" marR="45720" marT="18288" marB="18288">
+                    <a:solidFill>
+                      <a:srgbClr val="0E7C74"/>
+                    </a:solidFill>
+                  </a:tcPr>
+                </a:tc>
+              </a:tr>
+              <a:tr h="457200">
+                <a:tc>
+                  <a:txBody>
+                    <a:bodyPr wrap="square"/>
+                    <a:lstStyle/>
+                    <a:p>
+                      <a:r>
+                        <a:rPr sz="1300" b="1">
+                          <a:solidFill>
+                            <a:srgbClr val="1A1F27"/>
+                          </a:solidFill>
+                          <a:latin typeface="Segoe UI"/>
+                        </a:rPr>
+                        <a:t>Certify labels on a sample of calls</a:t>
+                      </a:r>
+                    </a:p>
+                  </a:txBody>
+                  <a:tcPr anchor="ctr" marL="82296" marR="45720" marT="18288" marB="18288">
+                    <a:solidFill>
+                      <a:srgbClr val="FFFFFF"/>
+                    </a:solidFill>
+                  </a:tcPr>
+                </a:tc>
+                <a:tc>
+                  <a:txBody>
+                    <a:bodyPr wrap="square"/>
+                    <a:lstStyle/>
+                    <a:p>
+                      <a:r>
+                        <a:rPr sz="1300" b="0">
+                          <a:solidFill>
+                            <a:srgbClr val="535C6A"/>
+                          </a:solidFill>
+                          <a:latin typeface="Consolas"/>
+                        </a:rPr>
+                        <a:t>The golden dataset</a:t>
+                      </a:r>
+                    </a:p>
+                  </a:txBody>
+                  <a:tcPr anchor="ctr" marL="82296" marR="45720" marT="18288" marB="18288">
+                    <a:solidFill>
+                      <a:srgbClr val="FFFFFF"/>
+                    </a:solidFill>
+                  </a:tcPr>
+                </a:tc>
+              </a:tr>
+              <a:tr h="457200">
+                <a:tc>
+                  <a:txBody>
+                    <a:bodyPr wrap="square"/>
+                    <a:lstStyle/>
+                    <a:p>
+                      <a:r>
+                        <a:rPr sz="1300" b="1">
+                          <a:solidFill>
+                            <a:srgbClr val="1A1F27"/>
+                          </a:solidFill>
+                          <a:latin typeface="Segoe UI"/>
+                        </a:rPr>
+                        <a:t>Confirm the flagged KPI definitions</a:t>
+                      </a:r>
+                    </a:p>
+                  </a:txBody>
+                  <a:tcPr anchor="ctr" marL="82296" marR="45720" marT="18288" marB="18288">
+                    <a:solidFill>
+                      <a:srgbClr val="F7F9F8"/>
+                    </a:solidFill>
+                  </a:tcPr>
+                </a:tc>
+                <a:tc>
+                  <a:txBody>
+                    <a:bodyPr wrap="square"/>
+                    <a:lstStyle/>
+                    <a:p>
+                      <a:r>
+                        <a:rPr sz="1300" b="0">
+                          <a:solidFill>
+                            <a:srgbClr val="535C6A"/>
+                          </a:solidFill>
+                          <a:latin typeface="Consolas"/>
+                        </a:rPr>
+                        <a:t>Correct metrics</a:t>
+                      </a:r>
+                    </a:p>
+                  </a:txBody>
+                  <a:tcPr anchor="ctr" marL="82296" marR="45720" marT="18288" marB="18288">
+                    <a:solidFill>
+                      <a:srgbClr val="F7F9F8"/>
+                    </a:solidFill>
+                  </a:tcPr>
+                </a:tc>
+              </a:tr>
+              <a:tr h="457200">
+                <a:tc>
+                  <a:txBody>
+                    <a:bodyPr wrap="square"/>
+                    <a:lstStyle/>
+                    <a:p>
+                      <a:r>
+                        <a:rPr sz="1300" b="1">
+                          <a:solidFill>
+                            <a:srgbClr val="1A1F27"/>
+                          </a:solidFill>
+                          <a:latin typeface="Segoe UI"/>
+                        </a:rPr>
+                        <a:t>Set the acceptable range per KPI</a:t>
+                      </a:r>
+                    </a:p>
+                  </a:txBody>
+                  <a:tcPr anchor="ctr" marL="82296" marR="45720" marT="18288" marB="18288">
+                    <a:solidFill>
+                      <a:srgbClr val="FFFFFF"/>
+                    </a:solidFill>
+                  </a:tcPr>
+                </a:tc>
+                <a:tc>
+                  <a:txBody>
+                    <a:bodyPr wrap="square"/>
+                    <a:lstStyle/>
+                    <a:p>
+                      <a:r>
+                        <a:rPr sz="1300" b="0">
+                          <a:solidFill>
+                            <a:srgbClr val="535C6A"/>
+                          </a:solidFill>
+                          <a:latin typeface="Consolas"/>
+                        </a:rPr>
+                        <a:t>The evaluation threshold</a:t>
+                      </a:r>
+                    </a:p>
+                  </a:txBody>
+                  <a:tcPr anchor="ctr" marL="82296" marR="45720" marT="18288" marB="18288">
+                    <a:solidFill>
+                      <a:srgbClr val="FFFFFF"/>
+                    </a:solidFill>
+                  </a:tcPr>
+                </a:tc>
+              </a:tr>
+            </a:tbl>
+          </a:graphicData>
+        </a:graphic>
+      </p:graphicFrame>
+      <p:sp>
+        <p:nvSpPr>
+          <p:cNvPr id="7" name="Rounded Rectangle 6"/>
           <p:cNvSpPr/>
           <p:nvPr/>
         </p:nvSpPr>
         <p:spPr>
           <a:xfrm>
-            <a:off x="640080" y="5806440"/>
-            <a:ext cx="10927080" cy="749808"/>
+            <a:off x="640080" y="5943600"/>
+            <a:ext cx="10927080" cy="658368"/>
           </a:xfrm>
           <a:prstGeom prst="roundRect">
             <a:avLst/>
@@ -5030,2465 +7893,13 @@
               </a:spcAft>
             </a:pPr>
             <a:r>
-              <a:rPr sz="1400" b="1">
+              <a:rPr sz="1300" b="1">
                 <a:solidFill>
                   <a:srgbClr val="0A5B55"/>
                 </a:solidFill>
                 <a:latin typeface="Segoe UI"/>
               </a:rPr>
-              <a:t>APIX captures the difference between the two — and can point to the exact moment in Call B where the pitch should have happened.</a:t>
-            </a:r>
-          </a:p>
-        </p:txBody>
-      </p:sp>
-    </p:spTree>
-  </p:cSld>
-  <p:clrMapOvr>
-    <a:masterClrMapping/>
-  </p:clrMapOvr>
-</p:sld>
-</file>
-
-<file path=ppt/slides/slide5.xml><?xml version="1.0" encoding="utf-8"?>
-<p:sld xmlns:a="http://schemas.openxmlformats.org/drawingml/2006/main" xmlns:p="http://schemas.openxmlformats.org/presentationml/2006/main" xmlns:r="http://schemas.openxmlformats.org/officeDocument/2006/relationships">
-  <p:cSld>
-    <p:bg>
-      <p:bgPr>
-        <a:solidFill>
-          <a:srgbClr val="FFFFFF"/>
-        </a:solidFill>
-        <a:effectLst/>
-      </p:bgPr>
-    </p:bg>
-    <p:spTree>
-      <p:nvGrpSpPr>
-        <p:cNvPr id="1" name=""/>
-        <p:cNvGrpSpPr/>
-        <p:nvPr/>
-      </p:nvGrpSpPr>
-      <p:grpSpPr/>
-      <p:sp>
-        <p:nvSpPr>
-          <p:cNvPr id="2" name="Rectangle 1"/>
-          <p:cNvSpPr/>
-          <p:nvPr/>
-        </p:nvSpPr>
-        <p:spPr>
-          <a:xfrm>
-            <a:off x="0" y="0"/>
-            <a:ext cx="12191695" cy="128016"/>
-          </a:xfrm>
-          <a:prstGeom prst="rect">
-            <a:avLst/>
-          </a:prstGeom>
-          <a:solidFill>
-            <a:srgbClr val="0E7C74"/>
-          </a:solidFill>
-          <a:ln>
-            <a:noFill/>
-          </a:ln>
-          <a:effectLst/>
-        </p:spPr>
-        <p:style>
-          <a:lnRef idx="1">
-            <a:schemeClr val="accent1"/>
-          </a:lnRef>
-          <a:fillRef idx="3">
-            <a:schemeClr val="accent1"/>
-          </a:fillRef>
-          <a:effectRef idx="2">
-            <a:schemeClr val="accent1"/>
-          </a:effectRef>
-          <a:fontRef idx="minor">
-            <a:schemeClr val="lt1"/>
-          </a:fontRef>
-        </p:style>
-        <p:txBody>
-          <a:bodyPr rtlCol="0" anchor="ctr"/>
-          <a:lstStyle/>
-          <a:p>
-            <a:pPr algn="ctr"/>
-          </a:p>
-        </p:txBody>
-      </p:sp>
-      <p:sp>
-        <p:nvSpPr>
-          <p:cNvPr id="3" name="TextBox 2"/>
-          <p:cNvSpPr txBox="1"/>
-          <p:nvPr/>
-        </p:nvSpPr>
-        <p:spPr>
-          <a:xfrm>
-            <a:off x="640080" y="365760"/>
-            <a:ext cx="11247120" cy="1234440"/>
-          </a:xfrm>
-          <a:prstGeom prst="rect">
-            <a:avLst/>
-          </a:prstGeom>
-          <a:noFill/>
-        </p:spPr>
-        <p:txBody>
-          <a:bodyPr wrap="square">
-            <a:spAutoFit/>
-          </a:bodyPr>
-          <a:lstStyle/>
-          <a:p>
-            <a:pPr>
-              <a:spcAft>
-                <a:spcPts val="400"/>
-              </a:spcAft>
-            </a:pPr>
-            <a:r>
-              <a:rPr sz="1200" b="1">
-                <a:solidFill>
-                  <a:srgbClr val="0E7C74"/>
-                </a:solidFill>
-                <a:latin typeface="Segoe UI"/>
-              </a:rPr>
-              <a:t>KPIS BY PROGRAM</a:t>
-            </a:r>
-          </a:p>
-          <a:p>
-            <a:pPr>
-              <a:spcAft>
-                <a:spcPts val="0"/>
-              </a:spcAft>
-            </a:pPr>
-            <a:r>
-              <a:rPr sz="2500" b="1">
-                <a:solidFill>
-                  <a:srgbClr val="1A1F27"/>
-                </a:solidFill>
-                <a:latin typeface="Segoe UI"/>
-              </a:rPr>
-              <a:t>Three lenses, compared side by side</a:t>
-            </a:r>
-          </a:p>
-        </p:txBody>
-      </p:sp>
-      <p:graphicFrame>
-        <p:nvGraphicFramePr>
-          <p:cNvPr id="4" name="Table 3"/>
-          <p:cNvGraphicFramePr>
-            <a:graphicFrameLocks noGrp="1"/>
-          </p:cNvGraphicFramePr>
-          <p:nvPr/>
-        </p:nvGraphicFramePr>
-        <p:xfrm>
-          <a:off x="640080" y="1874519"/>
-          <a:ext cx="10927080" cy="2999232"/>
-        </p:xfrm>
-        <a:graphic>
-          <a:graphicData uri="http://schemas.openxmlformats.org/drawingml/2006/table">
-            <a:tbl>
-              <a:tblPr firstRow="1">
-                <a:tableStyleId>{5C22544A-7EE6-4342-B048-85BDC9FD1C3A}</a:tableStyleId>
-              </a:tblPr>
-              <a:tblGrid>
-                <a:gridCol w="1554480"/>
-                <a:gridCol w="2011680"/>
-                <a:gridCol w="3520440"/>
-                <a:gridCol w="822960"/>
-                <a:gridCol w="3017520"/>
-              </a:tblGrid>
-              <a:tr h="749808">
-                <a:tc>
-                  <a:txBody>
-                    <a:bodyPr wrap="square"/>
-                    <a:lstStyle/>
-                    <a:p>
-                      <a:r>
-                        <a:rPr sz="1100" b="1">
-                          <a:solidFill>
-                            <a:srgbClr val="FFFFFF"/>
-                          </a:solidFill>
-                          <a:latin typeface="Segoe UI"/>
-                        </a:rPr>
-                        <a:t>Program</a:t>
-                      </a:r>
-                    </a:p>
-                  </a:txBody>
-                  <a:tcPr anchor="ctr" marL="91440" marR="54864" marT="18288" marB="18288">
-                    <a:solidFill>
-                      <a:srgbClr val="0E7C74"/>
-                    </a:solidFill>
-                  </a:tcPr>
-                </a:tc>
-                <a:tc>
-                  <a:txBody>
-                    <a:bodyPr wrap="square"/>
-                    <a:lstStyle/>
-                    <a:p>
-                      <a:r>
-                        <a:rPr sz="1100" b="1">
-                          <a:solidFill>
-                            <a:srgbClr val="FFFFFF"/>
-                          </a:solidFill>
-                          <a:latin typeface="Segoe UI"/>
-                        </a:rPr>
-                        <a:t>Lens</a:t>
-                      </a:r>
-                    </a:p>
-                  </a:txBody>
-                  <a:tcPr anchor="ctr" marL="91440" marR="54864" marT="18288" marB="18288">
-                    <a:solidFill>
-                      <a:srgbClr val="0E7C74"/>
-                    </a:solidFill>
-                  </a:tcPr>
-                </a:tc>
-                <a:tc>
-                  <a:txBody>
-                    <a:bodyPr wrap="square"/>
-                    <a:lstStyle/>
-                    <a:p>
-                      <a:r>
-                        <a:rPr sz="1100" b="1">
-                          <a:solidFill>
-                            <a:srgbClr val="FFFFFF"/>
-                          </a:solidFill>
-                          <a:latin typeface="Segoe UI"/>
-                        </a:rPr>
-                        <a:t>Example KPIs</a:t>
-                      </a:r>
-                    </a:p>
-                  </a:txBody>
-                  <a:tcPr anchor="ctr" marL="91440" marR="54864" marT="18288" marB="18288">
-                    <a:solidFill>
-                      <a:srgbClr val="0E7C74"/>
-                    </a:solidFill>
-                  </a:tcPr>
-                </a:tc>
-                <a:tc>
-                  <a:txBody>
-                    <a:bodyPr wrap="square"/>
-                    <a:lstStyle/>
-                    <a:p>
-                      <a:r>
-                        <a:rPr sz="1100" b="1">
-                          <a:solidFill>
-                            <a:srgbClr val="FFFFFF"/>
-                          </a:solidFill>
-                          <a:latin typeface="Segoe UI"/>
-                        </a:rPr>
-                        <a:t>KPIs</a:t>
-                      </a:r>
-                    </a:p>
-                  </a:txBody>
-                  <a:tcPr anchor="ctr" marL="91440" marR="54864" marT="18288" marB="18288">
-                    <a:solidFill>
-                      <a:srgbClr val="0E7C74"/>
-                    </a:solidFill>
-                  </a:tcPr>
-                </a:tc>
-                <a:tc>
-                  <a:txBody>
-                    <a:bodyPr wrap="square"/>
-                    <a:lstStyle/>
-                    <a:p>
-                      <a:r>
-                        <a:rPr sz="1100" b="1">
-                          <a:solidFill>
-                            <a:srgbClr val="FFFFFF"/>
-                          </a:solidFill>
-                          <a:latin typeface="Segoe UI"/>
-                        </a:rPr>
-                        <a:t>A good week looks like</a:t>
-                      </a:r>
-                    </a:p>
-                  </a:txBody>
-                  <a:tcPr anchor="ctr" marL="91440" marR="54864" marT="18288" marB="18288">
-                    <a:solidFill>
-                      <a:srgbClr val="0E7C74"/>
-                    </a:solidFill>
-                  </a:tcPr>
-                </a:tc>
-              </a:tr>
-              <a:tr h="749808">
-                <a:tc>
-                  <a:txBody>
-                    <a:bodyPr wrap="square"/>
-                    <a:lstStyle/>
-                    <a:p>
-                      <a:r>
-                        <a:rPr sz="1250" b="1">
-                          <a:solidFill>
-                            <a:srgbClr val="1A1F27"/>
-                          </a:solidFill>
-                          <a:latin typeface="Segoe UI"/>
-                        </a:rPr>
-                        <a:t>Telesales</a:t>
-                      </a:r>
-                    </a:p>
-                  </a:txBody>
-                  <a:tcPr anchor="ctr" marL="91440" marR="54864" marT="18288" marB="18288">
-                    <a:solidFill>
-                      <a:srgbClr val="FFFFFF"/>
-                    </a:solidFill>
-                  </a:tcPr>
-                </a:tc>
-                <a:tc>
-                  <a:txBody>
-                    <a:bodyPr wrap="square"/>
-                    <a:lstStyle/>
-                    <a:p>
-                      <a:r>
-                        <a:rPr sz="1250" b="0">
-                          <a:solidFill>
-                            <a:srgbClr val="535C6A"/>
-                          </a:solidFill>
-                          <a:latin typeface="Segoe UI"/>
-                        </a:rPr>
-                        <a:t>Sales</a:t>
-                      </a:r>
-                    </a:p>
-                  </a:txBody>
-                  <a:tcPr anchor="ctr" marL="91440" marR="54864" marT="18288" marB="18288">
-                    <a:solidFill>
-                      <a:srgbClr val="FFFFFF"/>
-                    </a:solidFill>
-                  </a:tcPr>
-                </a:tc>
-                <a:tc>
-                  <a:txBody>
-                    <a:bodyPr wrap="square"/>
-                    <a:lstStyle/>
-                    <a:p>
-                      <a:r>
-                        <a:rPr sz="1250" b="0">
-                          <a:solidFill>
-                            <a:srgbClr val="535C6A"/>
-                          </a:solidFill>
-                          <a:latin typeface="Segoe UI"/>
-                        </a:rPr>
-                        <a:t>New-line pitches · Upgrades · Saves</a:t>
-                      </a:r>
-                    </a:p>
-                  </a:txBody>
-                  <a:tcPr anchor="ctr" marL="91440" marR="54864" marT="18288" marB="18288">
-                    <a:solidFill>
-                      <a:srgbClr val="FFFFFF"/>
-                    </a:solidFill>
-                  </a:tcPr>
-                </a:tc>
-                <a:tc>
-                  <a:txBody>
-                    <a:bodyPr wrap="square"/>
-                    <a:lstStyle/>
-                    <a:p>
-                      <a:r>
-                        <a:rPr sz="1250" b="0">
-                          <a:solidFill>
-                            <a:srgbClr val="535C6A"/>
-                          </a:solidFill>
-                          <a:latin typeface="Segoe UI"/>
-                        </a:rPr>
-                        <a:t>12</a:t>
-                      </a:r>
-                    </a:p>
-                  </a:txBody>
-                  <a:tcPr anchor="ctr" marL="91440" marR="54864" marT="18288" marB="18288">
-                    <a:solidFill>
-                      <a:srgbClr val="FFFFFF"/>
-                    </a:solidFill>
-                  </a:tcPr>
-                </a:tc>
-                <a:tc>
-                  <a:txBody>
-                    <a:bodyPr wrap="square"/>
-                    <a:lstStyle/>
-                    <a:p>
-                      <a:r>
-                        <a:rPr sz="1250" b="0">
-                          <a:solidFill>
-                            <a:srgbClr val="535C6A"/>
-                          </a:solidFill>
-                          <a:latin typeface="Segoe UI"/>
-                        </a:rPr>
-                        <a:t>High pitch rate, few missed opportunities</a:t>
-                      </a:r>
-                    </a:p>
-                  </a:txBody>
-                  <a:tcPr anchor="ctr" marL="91440" marR="54864" marT="18288" marB="18288">
-                    <a:solidFill>
-                      <a:srgbClr val="FFFFFF"/>
-                    </a:solidFill>
-                  </a:tcPr>
-                </a:tc>
-              </a:tr>
-              <a:tr h="749808">
-                <a:tc>
-                  <a:txBody>
-                    <a:bodyPr wrap="square"/>
-                    <a:lstStyle/>
-                    <a:p>
-                      <a:r>
-                        <a:rPr sz="1250" b="1">
-                          <a:solidFill>
-                            <a:srgbClr val="1A1F27"/>
-                          </a:solidFill>
-                          <a:latin typeface="Segoe UI"/>
-                        </a:rPr>
-                        <a:t>WCC</a:t>
-                      </a:r>
-                    </a:p>
-                  </a:txBody>
-                  <a:tcPr anchor="ctr" marL="91440" marR="54864" marT="18288" marB="18288">
-                    <a:solidFill>
-                      <a:srgbClr val="F7F9F8"/>
-                    </a:solidFill>
-                  </a:tcPr>
-                </a:tc>
-                <a:tc>
-                  <a:txBody>
-                    <a:bodyPr wrap="square"/>
-                    <a:lstStyle/>
-                    <a:p>
-                      <a:r>
-                        <a:rPr sz="1250" b="0">
-                          <a:solidFill>
-                            <a:srgbClr val="535C6A"/>
-                          </a:solidFill>
-                          <a:latin typeface="Segoe UI"/>
-                        </a:rPr>
-                        <a:t>Care &amp; retention</a:t>
-                      </a:r>
-                    </a:p>
-                  </a:txBody>
-                  <a:tcPr anchor="ctr" marL="91440" marR="54864" marT="18288" marB="18288">
-                    <a:solidFill>
-                      <a:srgbClr val="F7F9F8"/>
-                    </a:solidFill>
-                  </a:tcPr>
-                </a:tc>
-                <a:tc>
-                  <a:txBody>
-                    <a:bodyPr wrap="square"/>
-                    <a:lstStyle/>
-                    <a:p>
-                      <a:r>
-                        <a:rPr sz="1250" b="0">
-                          <a:solidFill>
-                            <a:srgbClr val="535C6A"/>
-                          </a:solidFill>
-                          <a:latin typeface="Segoe UI"/>
-                        </a:rPr>
-                        <a:t>Resolutions · Saves · Right-of-sell</a:t>
-                      </a:r>
-                    </a:p>
-                  </a:txBody>
-                  <a:tcPr anchor="ctr" marL="91440" marR="54864" marT="18288" marB="18288">
-                    <a:solidFill>
-                      <a:srgbClr val="F7F9F8"/>
-                    </a:solidFill>
-                  </a:tcPr>
-                </a:tc>
-                <a:tc>
-                  <a:txBody>
-                    <a:bodyPr wrap="square"/>
-                    <a:lstStyle/>
-                    <a:p>
-                      <a:r>
-                        <a:rPr sz="1250" b="0">
-                          <a:solidFill>
-                            <a:srgbClr val="535C6A"/>
-                          </a:solidFill>
-                          <a:latin typeface="Segoe UI"/>
-                        </a:rPr>
-                        <a:t>11</a:t>
-                      </a:r>
-                    </a:p>
-                  </a:txBody>
-                  <a:tcPr anchor="ctr" marL="91440" marR="54864" marT="18288" marB="18288">
-                    <a:solidFill>
-                      <a:srgbClr val="F7F9F8"/>
-                    </a:solidFill>
-                  </a:tcPr>
-                </a:tc>
-                <a:tc>
-                  <a:txBody>
-                    <a:bodyPr wrap="square"/>
-                    <a:lstStyle/>
-                    <a:p>
-                      <a:r>
-                        <a:rPr sz="1250" b="0">
-                          <a:solidFill>
-                            <a:srgbClr val="535C6A"/>
-                          </a:solidFill>
-                          <a:latin typeface="Segoe UI"/>
-                        </a:rPr>
-                        <a:t>High resolution &amp; save rate</a:t>
-                      </a:r>
-                    </a:p>
-                  </a:txBody>
-                  <a:tcPr anchor="ctr" marL="91440" marR="54864" marT="18288" marB="18288">
-                    <a:solidFill>
-                      <a:srgbClr val="F7F9F8"/>
-                    </a:solidFill>
-                  </a:tcPr>
-                </a:tc>
-              </a:tr>
-              <a:tr h="749808">
-                <a:tc>
-                  <a:txBody>
-                    <a:bodyPr wrap="square"/>
-                    <a:lstStyle/>
-                    <a:p>
-                      <a:r>
-                        <a:rPr sz="1250" b="1">
-                          <a:solidFill>
-                            <a:srgbClr val="1A1F27"/>
-                          </a:solidFill>
-                          <a:latin typeface="Segoe UI"/>
-                        </a:rPr>
-                        <a:t>PSO</a:t>
-                      </a:r>
-                    </a:p>
-                  </a:txBody>
-                  <a:tcPr anchor="ctr" marL="91440" marR="54864" marT="18288" marB="18288">
-                    <a:solidFill>
-                      <a:srgbClr val="FFFFFF"/>
-                    </a:solidFill>
-                  </a:tcPr>
-                </a:tc>
-                <a:tc>
-                  <a:txBody>
-                    <a:bodyPr wrap="square"/>
-                    <a:lstStyle/>
-                    <a:p>
-                      <a:r>
-                        <a:rPr sz="1250" b="0">
-                          <a:solidFill>
-                            <a:srgbClr val="535C6A"/>
-                          </a:solidFill>
-                          <a:latin typeface="Segoe UI"/>
-                        </a:rPr>
-                        <a:t>VZ Mobile care</a:t>
-                      </a:r>
-                    </a:p>
-                  </a:txBody>
-                  <a:tcPr anchor="ctr" marL="91440" marR="54864" marT="18288" marB="18288">
-                    <a:solidFill>
-                      <a:srgbClr val="FFFFFF"/>
-                    </a:solidFill>
-                  </a:tcPr>
-                </a:tc>
-                <a:tc>
-                  <a:txBody>
-                    <a:bodyPr wrap="square"/>
-                    <a:lstStyle/>
-                    <a:p>
-                      <a:r>
-                        <a:rPr sz="1250" b="0">
-                          <a:solidFill>
-                            <a:srgbClr val="535C6A"/>
-                          </a:solidFill>
-                          <a:latin typeface="Segoe UI"/>
-                        </a:rPr>
-                        <a:t>CSAT · FCR · Quality · Repeat-risk</a:t>
-                      </a:r>
-                    </a:p>
-                  </a:txBody>
-                  <a:tcPr anchor="ctr" marL="91440" marR="54864" marT="18288" marB="18288">
-                    <a:solidFill>
-                      <a:srgbClr val="FFFFFF"/>
-                    </a:solidFill>
-                  </a:tcPr>
-                </a:tc>
-                <a:tc>
-                  <a:txBody>
-                    <a:bodyPr wrap="square"/>
-                    <a:lstStyle/>
-                    <a:p>
-                      <a:r>
-                        <a:rPr sz="1250" b="0">
-                          <a:solidFill>
-                            <a:srgbClr val="535C6A"/>
-                          </a:solidFill>
-                          <a:latin typeface="Segoe UI"/>
-                        </a:rPr>
-                        <a:t>24</a:t>
-                      </a:r>
-                    </a:p>
-                  </a:txBody>
-                  <a:tcPr anchor="ctr" marL="91440" marR="54864" marT="18288" marB="18288">
-                    <a:solidFill>
-                      <a:srgbClr val="FFFFFF"/>
-                    </a:solidFill>
-                  </a:tcPr>
-                </a:tc>
-                <a:tc>
-                  <a:txBody>
-                    <a:bodyPr wrap="square"/>
-                    <a:lstStyle/>
-                    <a:p>
-                      <a:r>
-                        <a:rPr sz="1250" b="0">
-                          <a:solidFill>
-                            <a:srgbClr val="535C6A"/>
-                          </a:solidFill>
-                          <a:latin typeface="Segoe UI"/>
-                        </a:rPr>
-                        <a:t>High FCR, low repeat-contact risk</a:t>
-                      </a:r>
-                    </a:p>
-                  </a:txBody>
-                  <a:tcPr anchor="ctr" marL="91440" marR="54864" marT="18288" marB="18288">
-                    <a:solidFill>
-                      <a:srgbClr val="FFFFFF"/>
-                    </a:solidFill>
-                  </a:tcPr>
-                </a:tc>
-              </a:tr>
-            </a:tbl>
-          </a:graphicData>
-        </a:graphic>
-      </p:graphicFrame>
-      <p:sp>
-        <p:nvSpPr>
-          <p:cNvPr id="5" name="Rounded Rectangle 4"/>
-          <p:cNvSpPr/>
-          <p:nvPr/>
-        </p:nvSpPr>
-        <p:spPr>
-          <a:xfrm>
-            <a:off x="640080" y="5852160"/>
-            <a:ext cx="10927080" cy="749808"/>
-          </a:xfrm>
-          <a:prstGeom prst="roundRect">
-            <a:avLst/>
-          </a:prstGeom>
-          <a:solidFill>
-            <a:srgbClr val="E1F0EE"/>
-          </a:solidFill>
-          <a:ln>
-            <a:noFill/>
-          </a:ln>
-          <a:effectLst/>
-        </p:spPr>
-        <p:style>
-          <a:lnRef idx="1">
-            <a:schemeClr val="accent1"/>
-          </a:lnRef>
-          <a:fillRef idx="3">
-            <a:schemeClr val="accent1"/>
-          </a:fillRef>
-          <a:effectRef idx="2">
-            <a:schemeClr val="accent1"/>
-          </a:effectRef>
-          <a:fontRef idx="minor">
-            <a:schemeClr val="lt1"/>
-          </a:fontRef>
-        </p:style>
-        <p:txBody>
-          <a:bodyPr rtlCol="0" anchor="ctr" wrap="square" lIns="201168" rIns="201168"/>
-          <a:lstStyle/>
-          <a:p>
-            <a:pPr algn="ctr">
-              <a:spcAft>
-                <a:spcPts val="0"/>
-              </a:spcAft>
-            </a:pPr>
-            <a:r>
-              <a:rPr sz="1400" b="1">
-                <a:solidFill>
-                  <a:srgbClr val="0A5B55"/>
-                </a:solidFill>
-                <a:latin typeface="Segoe UI"/>
-              </a:rPr>
-              <a:t>Same pipeline, different checklist — because a good sales call and a good care call are not the same thing. Each program has its own KPIs.</a:t>
-            </a:r>
-          </a:p>
-        </p:txBody>
-      </p:sp>
-    </p:spTree>
-  </p:cSld>
-  <p:clrMapOvr>
-    <a:masterClrMapping/>
-  </p:clrMapOvr>
-</p:sld>
-</file>
-
-<file path=ppt/slides/slide6.xml><?xml version="1.0" encoding="utf-8"?>
-<p:sld xmlns:a="http://schemas.openxmlformats.org/drawingml/2006/main" xmlns:p="http://schemas.openxmlformats.org/presentationml/2006/main" xmlns:r="http://schemas.openxmlformats.org/officeDocument/2006/relationships">
-  <p:cSld>
-    <p:bg>
-      <p:bgPr>
-        <a:solidFill>
-          <a:srgbClr val="FFFFFF"/>
-        </a:solidFill>
-        <a:effectLst/>
-      </p:bgPr>
-    </p:bg>
-    <p:spTree>
-      <p:nvGrpSpPr>
-        <p:cNvPr id="1" name=""/>
-        <p:cNvGrpSpPr/>
-        <p:nvPr/>
-      </p:nvGrpSpPr>
-      <p:grpSpPr/>
-      <p:sp>
-        <p:nvSpPr>
-          <p:cNvPr id="2" name="Rectangle 1"/>
-          <p:cNvSpPr/>
-          <p:nvPr/>
-        </p:nvSpPr>
-        <p:spPr>
-          <a:xfrm>
-            <a:off x="0" y="0"/>
-            <a:ext cx="12191695" cy="128016"/>
-          </a:xfrm>
-          <a:prstGeom prst="rect">
-            <a:avLst/>
-          </a:prstGeom>
-          <a:solidFill>
-            <a:srgbClr val="0E7C74"/>
-          </a:solidFill>
-          <a:ln>
-            <a:noFill/>
-          </a:ln>
-          <a:effectLst/>
-        </p:spPr>
-        <p:style>
-          <a:lnRef idx="1">
-            <a:schemeClr val="accent1"/>
-          </a:lnRef>
-          <a:fillRef idx="3">
-            <a:schemeClr val="accent1"/>
-          </a:fillRef>
-          <a:effectRef idx="2">
-            <a:schemeClr val="accent1"/>
-          </a:effectRef>
-          <a:fontRef idx="minor">
-            <a:schemeClr val="lt1"/>
-          </a:fontRef>
-        </p:style>
-        <p:txBody>
-          <a:bodyPr rtlCol="0" anchor="ctr"/>
-          <a:lstStyle/>
-          <a:p>
-            <a:pPr algn="ctr"/>
-          </a:p>
-        </p:txBody>
-      </p:sp>
-      <p:sp>
-        <p:nvSpPr>
-          <p:cNvPr id="3" name="TextBox 2"/>
-          <p:cNvSpPr txBox="1"/>
-          <p:nvPr/>
-        </p:nvSpPr>
-        <p:spPr>
-          <a:xfrm>
-            <a:off x="640080" y="365760"/>
-            <a:ext cx="11247120" cy="1234440"/>
-          </a:xfrm>
-          <a:prstGeom prst="rect">
-            <a:avLst/>
-          </a:prstGeom>
-          <a:noFill/>
-        </p:spPr>
-        <p:txBody>
-          <a:bodyPr wrap="square">
-            <a:spAutoFit/>
-          </a:bodyPr>
-          <a:lstStyle/>
-          <a:p>
-            <a:pPr>
-              <a:spcAft>
-                <a:spcPts val="400"/>
-              </a:spcAft>
-            </a:pPr>
-            <a:r>
-              <a:rPr sz="1200" b="1">
-                <a:solidFill>
-                  <a:srgbClr val="0E7C74"/>
-                </a:solidFill>
-                <a:latin typeface="Segoe UI"/>
-              </a:rPr>
-              <a:t>GOLDEN DATA</a:t>
-            </a:r>
-          </a:p>
-          <a:p>
-            <a:pPr>
-              <a:spcAft>
-                <a:spcPts val="0"/>
-              </a:spcAft>
-            </a:pPr>
-            <a:r>
-              <a:rPr sz="2500" b="1">
-                <a:solidFill>
-                  <a:srgbClr val="1A1F27"/>
-                </a:solidFill>
-                <a:latin typeface="Segoe UI"/>
-              </a:rPr>
-              <a:t>How we prove the scores are right</a:t>
-            </a:r>
-          </a:p>
-        </p:txBody>
-      </p:sp>
-      <p:sp>
-        <p:nvSpPr>
-          <p:cNvPr id="4" name="TextBox 3"/>
-          <p:cNvSpPr txBox="1"/>
-          <p:nvPr/>
-        </p:nvSpPr>
-        <p:spPr>
-          <a:xfrm>
-            <a:off x="685800" y="1828800"/>
-            <a:ext cx="5577840" cy="4023360"/>
-          </a:xfrm>
-          <a:prstGeom prst="rect">
-            <a:avLst/>
-          </a:prstGeom>
-          <a:noFill/>
-        </p:spPr>
-        <p:txBody>
-          <a:bodyPr wrap="square">
-            <a:spAutoFit/>
-          </a:bodyPr>
-          <a:lstStyle/>
-          <a:p>
-            <a:pPr>
-              <a:spcAft>
-                <a:spcPts val="800"/>
-              </a:spcAft>
-            </a:pPr>
-            <a:r>
-              <a:rPr sz="1400" b="0">
-                <a:solidFill>
-                  <a:srgbClr val="1A1F27"/>
-                </a:solidFill>
-                <a:latin typeface="Segoe UI"/>
-              </a:rPr>
-              <a:t>“Golden data” = real calls with business-certified correct answers.</a:t>
-            </a:r>
-          </a:p>
-          <a:p>
-            <a:pPr>
-              <a:spcAft>
-                <a:spcPts val="800"/>
-              </a:spcAft>
-            </a:pPr>
-            <a:r>
-              <a:rPr sz="1400" b="0">
-                <a:solidFill>
-                  <a:srgbClr val="1A1F27"/>
-                </a:solidFill>
-                <a:latin typeface="Segoe UI"/>
-              </a:rPr>
-              <a:t/>
-            </a:r>
-          </a:p>
-          <a:p>
-            <a:pPr>
-              <a:spcAft>
-                <a:spcPts val="800"/>
-              </a:spcAft>
-            </a:pPr>
-            <a:r>
-              <a:rPr sz="1400" b="0">
-                <a:solidFill>
-                  <a:srgbClr val="A96E12"/>
-                </a:solidFill>
-                <a:latin typeface="Segoe UI"/>
-              </a:rPr>
-              <a:t>✗  Wrong way: one call → one KPI value.</a:t>
-            </a:r>
-          </a:p>
-          <a:p>
-            <a:pPr>
-              <a:spcAft>
-                <a:spcPts val="800"/>
-              </a:spcAft>
-            </a:pPr>
-            <a:r>
-              <a:rPr sz="1400" b="0">
-                <a:solidFill>
-                  <a:srgbClr val="535C6A"/>
-                </a:solidFill>
-                <a:latin typeface="Segoe UI"/>
-              </a:rPr>
-              <a:t>     Can't validate a KPI averaged over many calls.</a:t>
-            </a:r>
-          </a:p>
-          <a:p>
-            <a:pPr>
-              <a:spcAft>
-                <a:spcPts val="800"/>
-              </a:spcAft>
-            </a:pPr>
-            <a:r>
-              <a:rPr sz="1400" b="0">
-                <a:solidFill>
-                  <a:srgbClr val="2E8B5E"/>
-                </a:solidFill>
-                <a:latin typeface="Segoe UI"/>
-              </a:rPr>
-              <a:t>✓  Right way: coaches certify the AI's per-call</a:t>
-            </a:r>
-          </a:p>
-          <a:p>
-            <a:pPr>
-              <a:spcAft>
-                <a:spcPts val="800"/>
-              </a:spcAft>
-            </a:pPr>
-            <a:r>
-              <a:rPr sz="1400" b="0">
-                <a:solidFill>
-                  <a:srgbClr val="535C6A"/>
-                </a:solidFill>
-                <a:latin typeface="Segoe UI"/>
-              </a:rPr>
-              <a:t>     judgments; the KPIs then follow by counting.</a:t>
-            </a:r>
-          </a:p>
-        </p:txBody>
-      </p:sp>
-      <p:sp>
-        <p:nvSpPr>
-          <p:cNvPr id="5" name="Rounded Rectangle 4"/>
-          <p:cNvSpPr/>
-          <p:nvPr/>
-        </p:nvSpPr>
-        <p:spPr>
-          <a:xfrm>
-            <a:off x="6400800" y="1828800"/>
-            <a:ext cx="5212080" cy="2834640"/>
-          </a:xfrm>
-          <a:prstGeom prst="roundRect">
-            <a:avLst/>
-          </a:prstGeom>
-          <a:solidFill>
-            <a:srgbClr val="E1F0EE"/>
-          </a:solidFill>
-          <a:ln w="9525">
-            <a:solidFill>
-              <a:srgbClr val="D9DFE5"/>
-            </a:solidFill>
-          </a:ln>
-          <a:effectLst/>
-        </p:spPr>
-        <p:style>
-          <a:lnRef idx="1">
-            <a:schemeClr val="accent1"/>
-          </a:lnRef>
-          <a:fillRef idx="3">
-            <a:schemeClr val="accent1"/>
-          </a:fillRef>
-          <a:effectRef idx="2">
-            <a:schemeClr val="accent1"/>
-          </a:effectRef>
-          <a:fontRef idx="minor">
-            <a:schemeClr val="lt1"/>
-          </a:fontRef>
-        </p:style>
-        <p:txBody>
-          <a:bodyPr rtlCol="0" anchor="ctr" wrap="square" lIns="146304" rIns="128016" tIns="118872" bIns="91440"/>
-          <a:lstStyle/>
-          <a:p>
-            <a:pPr algn="ctr">
-              <a:spcAft>
-                <a:spcPts val="700"/>
-              </a:spcAft>
-            </a:pPr>
-            <a:r>
-              <a:rPr sz="1250" b="1">
-                <a:solidFill>
-                  <a:srgbClr val="0E7C74"/>
-                </a:solidFill>
-                <a:latin typeface="Segoe UI"/>
-              </a:rPr>
-              <a:t>EXAMPLE · one golden record</a:t>
-            </a:r>
-          </a:p>
-          <a:p>
-            <a:pPr>
-              <a:spcAft>
-                <a:spcPts val="300"/>
-              </a:spcAft>
-            </a:pPr>
-            <a:r>
-              <a:rPr sz="1150" b="0">
-                <a:solidFill>
-                  <a:srgbClr val="535C6A"/>
-                </a:solidFill>
-                <a:latin typeface="Segoe UI"/>
-              </a:rPr>
-              <a:t>Transcript #4471 (Telesales)</a:t>
-            </a:r>
-          </a:p>
-          <a:p>
-            <a:pPr>
-              <a:spcAft>
-                <a:spcPts val="300"/>
-              </a:spcAft>
-            </a:pPr>
-            <a:r>
-              <a:rPr sz="1150" b="0">
-                <a:solidFill>
-                  <a:srgbClr val="0A5B55"/>
-                </a:solidFill>
-                <a:latin typeface="Consolas"/>
-              </a:rPr>
-              <a:t>new_line_opportunity_exists = true</a:t>
-            </a:r>
-          </a:p>
-          <a:p>
-            <a:pPr>
-              <a:spcAft>
-                <a:spcPts val="300"/>
-              </a:spcAft>
-            </a:pPr>
-            <a:r>
-              <a:rPr sz="1150" b="0">
-                <a:solidFill>
-                  <a:srgbClr val="0A5B55"/>
-                </a:solidFill>
-                <a:latin typeface="Consolas"/>
-              </a:rPr>
-              <a:t>pitched_new_line            = false</a:t>
-            </a:r>
-          </a:p>
-          <a:p>
-            <a:pPr>
-              <a:spcAft>
-                <a:spcPts val="300"/>
-              </a:spcAft>
-            </a:pPr>
-            <a:r>
-              <a:rPr sz="1150" b="0">
-                <a:solidFill>
-                  <a:srgbClr val="0A5B55"/>
-                </a:solidFill>
-                <a:latin typeface="Consolas"/>
-              </a:rPr>
-              <a:t>customer_experience         = Medium</a:t>
-            </a:r>
-          </a:p>
-          <a:p>
-            <a:pPr>
-              <a:spcAft>
-                <a:spcPts val="300"/>
-              </a:spcAft>
-            </a:pPr>
-            <a:r>
-              <a:rPr sz="1150" b="0">
-                <a:solidFill>
-                  <a:srgbClr val="535C6A"/>
-                </a:solidFill>
-                <a:latin typeface="Segoe UI"/>
-              </a:rPr>
-              <a:t>Evidence: lines 12–14</a:t>
-            </a:r>
-          </a:p>
-          <a:p>
-            <a:pPr>
-              <a:spcAft>
-                <a:spcPts val="300"/>
-              </a:spcAft>
-            </a:pPr>
-            <a:r>
-              <a:rPr sz="1150" b="0">
-                <a:solidFill>
-                  <a:srgbClr val="535C6A"/>
-                </a:solidFill>
-                <a:latin typeface="Segoe UI"/>
-              </a:rPr>
-              <a:t>Certified by: 2 coaches · 8 Sep</a:t>
-            </a:r>
-          </a:p>
-        </p:txBody>
-      </p:sp>
-      <p:graphicFrame>
-        <p:nvGraphicFramePr>
-          <p:cNvPr id="6" name="Table 5"/>
-          <p:cNvGraphicFramePr>
-            <a:graphicFrameLocks noGrp="1"/>
-          </p:cNvGraphicFramePr>
-          <p:nvPr/>
-        </p:nvGraphicFramePr>
-        <p:xfrm>
-          <a:off x="6400800" y="4800600"/>
-          <a:ext cx="10927080" cy="914400"/>
-        </p:xfrm>
-        <a:graphic>
-          <a:graphicData uri="http://schemas.openxmlformats.org/drawingml/2006/table">
-            <a:tbl>
-              <a:tblPr firstRow="1">
-                <a:tableStyleId>{5C22544A-7EE6-4342-B048-85BDC9FD1C3A}</a:tableStyleId>
-              </a:tblPr>
-              <a:tblGrid>
-                <a:gridCol w="2194560"/>
-                <a:gridCol w="2194560"/>
-                <a:gridCol w="2148840"/>
-                <a:gridCol w="2194560"/>
-                <a:gridCol w="2194560"/>
-              </a:tblGrid>
-              <a:tr h="457200">
-                <a:tc>
-                  <a:txBody>
-                    <a:bodyPr wrap="square"/>
-                    <a:lstStyle/>
-                    <a:p>
-                      <a:r>
-                        <a:rPr sz="1100" b="1">
-                          <a:solidFill>
-                            <a:srgbClr val="FFFFFF"/>
-                          </a:solidFill>
-                          <a:latin typeface="Segoe UI"/>
-                        </a:rPr>
-                        <a:t>Program</a:t>
-                      </a:r>
-                    </a:p>
-                  </a:txBody>
-                  <a:tcPr anchor="ctr" marL="91440" marR="54864" marT="18288" marB="18288">
-                    <a:solidFill>
-                      <a:srgbClr val="0E7C74"/>
-                    </a:solidFill>
-                  </a:tcPr>
-                </a:tc>
-                <a:tc>
-                  <a:txBody>
-                    <a:bodyPr wrap="square"/>
-                    <a:lstStyle/>
-                    <a:p>
-                      <a:r>
-                        <a:rPr sz="1100" b="1">
-                          <a:solidFill>
-                            <a:srgbClr val="FFFFFF"/>
-                          </a:solidFill>
-                          <a:latin typeface="Segoe UI"/>
-                        </a:rPr>
-                        <a:t>Telesales</a:t>
-                      </a:r>
-                    </a:p>
-                  </a:txBody>
-                  <a:tcPr anchor="ctr" marL="91440" marR="54864" marT="18288" marB="18288">
-                    <a:solidFill>
-                      <a:srgbClr val="0E7C74"/>
-                    </a:solidFill>
-                  </a:tcPr>
-                </a:tc>
-                <a:tc>
-                  <a:txBody>
-                    <a:bodyPr wrap="square"/>
-                    <a:lstStyle/>
-                    <a:p>
-                      <a:r>
-                        <a:rPr sz="1100" b="1">
-                          <a:solidFill>
-                            <a:srgbClr val="FFFFFF"/>
-                          </a:solidFill>
-                          <a:latin typeface="Segoe UI"/>
-                        </a:rPr>
-                        <a:t>WCC</a:t>
-                      </a:r>
-                    </a:p>
-                  </a:txBody>
-                  <a:tcPr anchor="ctr" marL="91440" marR="54864" marT="18288" marB="18288">
-                    <a:solidFill>
-                      <a:srgbClr val="0E7C74"/>
-                    </a:solidFill>
-                  </a:tcPr>
-                </a:tc>
-                <a:tc>
-                  <a:txBody>
-                    <a:bodyPr wrap="square"/>
-                    <a:lstStyle/>
-                    <a:p>
-                      <a:r>
-                        <a:rPr sz="1100" b="1">
-                          <a:solidFill>
-                            <a:srgbClr val="FFFFFF"/>
-                          </a:solidFill>
-                          <a:latin typeface="Segoe UI"/>
-                        </a:rPr>
-                        <a:t>PSO</a:t>
-                      </a:r>
-                    </a:p>
-                  </a:txBody>
-                  <a:tcPr anchor="ctr" marL="91440" marR="54864" marT="18288" marB="18288">
-                    <a:solidFill>
-                      <a:srgbClr val="0E7C74"/>
-                    </a:solidFill>
-                  </a:tcPr>
-                </a:tc>
-                <a:tc>
-                  <a:txBody>
-                    <a:bodyPr wrap="square"/>
-                    <a:lstStyle/>
-                    <a:p>
-                      <a:r>
-                        <a:rPr sz="1100" b="1">
-                          <a:solidFill>
-                            <a:srgbClr val="FFFFFF"/>
-                          </a:solidFill>
-                          <a:latin typeface="Segoe UI"/>
-                        </a:rPr>
-                        <a:t>Total</a:t>
-                      </a:r>
-                    </a:p>
-                  </a:txBody>
-                  <a:tcPr anchor="ctr" marL="91440" marR="54864" marT="18288" marB="18288">
-                    <a:solidFill>
-                      <a:srgbClr val="0E7C74"/>
-                    </a:solidFill>
-                  </a:tcPr>
-                </a:tc>
-              </a:tr>
-              <a:tr h="457200">
-                <a:tc>
-                  <a:txBody>
-                    <a:bodyPr wrap="square"/>
-                    <a:lstStyle/>
-                    <a:p>
-                      <a:r>
-                        <a:rPr sz="1200" b="1">
-                          <a:solidFill>
-                            <a:srgbClr val="1A1F27"/>
-                          </a:solidFill>
-                          <a:latin typeface="Segoe UI"/>
-                        </a:rPr>
-                        <a:t>Golden calls</a:t>
-                      </a:r>
-                    </a:p>
-                  </a:txBody>
-                  <a:tcPr anchor="ctr" marL="91440" marR="54864" marT="18288" marB="18288">
-                    <a:solidFill>
-                      <a:srgbClr val="FFFFFF"/>
-                    </a:solidFill>
-                  </a:tcPr>
-                </a:tc>
-                <a:tc>
-                  <a:txBody>
-                    <a:bodyPr wrap="square"/>
-                    <a:lstStyle/>
-                    <a:p>
-                      <a:r>
-                        <a:rPr sz="1200" b="0">
-                          <a:solidFill>
-                            <a:srgbClr val="535C6A"/>
-                          </a:solidFill>
-                          <a:latin typeface="Segoe UI"/>
-                        </a:rPr>
-                        <a:t>150</a:t>
-                      </a:r>
-                    </a:p>
-                  </a:txBody>
-                  <a:tcPr anchor="ctr" marL="91440" marR="54864" marT="18288" marB="18288">
-                    <a:solidFill>
-                      <a:srgbClr val="FFFFFF"/>
-                    </a:solidFill>
-                  </a:tcPr>
-                </a:tc>
-                <a:tc>
-                  <a:txBody>
-                    <a:bodyPr wrap="square"/>
-                    <a:lstStyle/>
-                    <a:p>
-                      <a:r>
-                        <a:rPr sz="1200" b="0">
-                          <a:solidFill>
-                            <a:srgbClr val="535C6A"/>
-                          </a:solidFill>
-                          <a:latin typeface="Segoe UI"/>
-                        </a:rPr>
-                        <a:t>150</a:t>
-                      </a:r>
-                    </a:p>
-                  </a:txBody>
-                  <a:tcPr anchor="ctr" marL="91440" marR="54864" marT="18288" marB="18288">
-                    <a:solidFill>
-                      <a:srgbClr val="FFFFFF"/>
-                    </a:solidFill>
-                  </a:tcPr>
-                </a:tc>
-                <a:tc>
-                  <a:txBody>
-                    <a:bodyPr wrap="square"/>
-                    <a:lstStyle/>
-                    <a:p>
-                      <a:r>
-                        <a:rPr sz="1200" b="0">
-                          <a:solidFill>
-                            <a:srgbClr val="535C6A"/>
-                          </a:solidFill>
-                          <a:latin typeface="Segoe UI"/>
-                        </a:rPr>
-                        <a:t>200</a:t>
-                      </a:r>
-                    </a:p>
-                  </a:txBody>
-                  <a:tcPr anchor="ctr" marL="91440" marR="54864" marT="18288" marB="18288">
-                    <a:solidFill>
-                      <a:srgbClr val="FFFFFF"/>
-                    </a:solidFill>
-                  </a:tcPr>
-                </a:tc>
-                <a:tc>
-                  <a:txBody>
-                    <a:bodyPr wrap="square"/>
-                    <a:lstStyle/>
-                    <a:p>
-                      <a:r>
-                        <a:rPr sz="1200" b="0">
-                          <a:solidFill>
-                            <a:srgbClr val="535C6A"/>
-                          </a:solidFill>
-                          <a:latin typeface="Segoe UI"/>
-                        </a:rPr>
-                        <a:t>500</a:t>
-                      </a:r>
-                    </a:p>
-                  </a:txBody>
-                  <a:tcPr anchor="ctr" marL="91440" marR="54864" marT="18288" marB="18288">
-                    <a:solidFill>
-                      <a:srgbClr val="FFFFFF"/>
-                    </a:solidFill>
-                  </a:tcPr>
-                </a:tc>
-              </a:tr>
-            </a:tbl>
-          </a:graphicData>
-        </a:graphic>
-      </p:graphicFrame>
-      <p:sp>
-        <p:nvSpPr>
-          <p:cNvPr id="7" name="Rounded Rectangle 6"/>
-          <p:cNvSpPr/>
-          <p:nvPr/>
-        </p:nvSpPr>
-        <p:spPr>
-          <a:xfrm>
-            <a:off x="640080" y="5852160"/>
-            <a:ext cx="10927080" cy="749808"/>
-          </a:xfrm>
-          <a:prstGeom prst="roundRect">
-            <a:avLst/>
-          </a:prstGeom>
-          <a:solidFill>
-            <a:srgbClr val="E1F0EE"/>
-          </a:solidFill>
-          <a:ln>
-            <a:noFill/>
-          </a:ln>
-          <a:effectLst/>
-        </p:spPr>
-        <p:style>
-          <a:lnRef idx="1">
-            <a:schemeClr val="accent1"/>
-          </a:lnRef>
-          <a:fillRef idx="3">
-            <a:schemeClr val="accent1"/>
-          </a:fillRef>
-          <a:effectRef idx="2">
-            <a:schemeClr val="accent1"/>
-          </a:effectRef>
-          <a:fontRef idx="minor">
-            <a:schemeClr val="lt1"/>
-          </a:fontRef>
-        </p:style>
-        <p:txBody>
-          <a:bodyPr rtlCol="0" anchor="ctr" wrap="square" lIns="201168" rIns="201168"/>
-          <a:lstStyle/>
-          <a:p>
-            <a:pPr algn="ctr">
-              <a:spcAft>
-                <a:spcPts val="0"/>
-              </a:spcAft>
-            </a:pPr>
-            <a:r>
-              <a:rPr sz="1400" b="1">
-                <a:solidFill>
-                  <a:srgbClr val="0A5B55"/>
-                </a:solidFill>
-                <a:latin typeface="Segoe UI"/>
-              </a:rPr>
-              <a:t>A transcript is “golden” only when 2+ coaches agree on its answers. Disagreement means the definition needs fixing first.</a:t>
-            </a:r>
-          </a:p>
-        </p:txBody>
-      </p:sp>
-    </p:spTree>
-  </p:cSld>
-  <p:clrMapOvr>
-    <a:masterClrMapping/>
-  </p:clrMapOvr>
-</p:sld>
-</file>
-
-<file path=ppt/slides/slide7.xml><?xml version="1.0" encoding="utf-8"?>
-<p:sld xmlns:a="http://schemas.openxmlformats.org/drawingml/2006/main" xmlns:p="http://schemas.openxmlformats.org/presentationml/2006/main" xmlns:r="http://schemas.openxmlformats.org/officeDocument/2006/relationships">
-  <p:cSld>
-    <p:bg>
-      <p:bgPr>
-        <a:solidFill>
-          <a:srgbClr val="FFFFFF"/>
-        </a:solidFill>
-        <a:effectLst/>
-      </p:bgPr>
-    </p:bg>
-    <p:spTree>
-      <p:nvGrpSpPr>
-        <p:cNvPr id="1" name=""/>
-        <p:cNvGrpSpPr/>
-        <p:nvPr/>
-      </p:nvGrpSpPr>
-      <p:grpSpPr/>
-      <p:sp>
-        <p:nvSpPr>
-          <p:cNvPr id="2" name="Rectangle 1"/>
-          <p:cNvSpPr/>
-          <p:nvPr/>
-        </p:nvSpPr>
-        <p:spPr>
-          <a:xfrm>
-            <a:off x="0" y="0"/>
-            <a:ext cx="12191695" cy="128016"/>
-          </a:xfrm>
-          <a:prstGeom prst="rect">
-            <a:avLst/>
-          </a:prstGeom>
-          <a:solidFill>
-            <a:srgbClr val="0E7C74"/>
-          </a:solidFill>
-          <a:ln>
-            <a:noFill/>
-          </a:ln>
-          <a:effectLst/>
-        </p:spPr>
-        <p:style>
-          <a:lnRef idx="1">
-            <a:schemeClr val="accent1"/>
-          </a:lnRef>
-          <a:fillRef idx="3">
-            <a:schemeClr val="accent1"/>
-          </a:fillRef>
-          <a:effectRef idx="2">
-            <a:schemeClr val="accent1"/>
-          </a:effectRef>
-          <a:fontRef idx="minor">
-            <a:schemeClr val="lt1"/>
-          </a:fontRef>
-        </p:style>
-        <p:txBody>
-          <a:bodyPr rtlCol="0" anchor="ctr"/>
-          <a:lstStyle/>
-          <a:p>
-            <a:pPr algn="ctr"/>
-          </a:p>
-        </p:txBody>
-      </p:sp>
-      <p:sp>
-        <p:nvSpPr>
-          <p:cNvPr id="3" name="TextBox 2"/>
-          <p:cNvSpPr txBox="1"/>
-          <p:nvPr/>
-        </p:nvSpPr>
-        <p:spPr>
-          <a:xfrm>
-            <a:off x="640080" y="365760"/>
-            <a:ext cx="11247120" cy="1234440"/>
-          </a:xfrm>
-          <a:prstGeom prst="rect">
-            <a:avLst/>
-          </a:prstGeom>
-          <a:noFill/>
-        </p:spPr>
-        <p:txBody>
-          <a:bodyPr wrap="square">
-            <a:spAutoFit/>
-          </a:bodyPr>
-          <a:lstStyle/>
-          <a:p>
-            <a:pPr>
-              <a:spcAft>
-                <a:spcPts val="400"/>
-              </a:spcAft>
-            </a:pPr>
-            <a:r>
-              <a:rPr sz="1200" b="1">
-                <a:solidFill>
-                  <a:srgbClr val="0E7C74"/>
-                </a:solidFill>
-                <a:latin typeface="Segoe UI"/>
-              </a:rPr>
-              <a:t>STATUS</a:t>
-            </a:r>
-          </a:p>
-          <a:p>
-            <a:pPr>
-              <a:spcAft>
-                <a:spcPts val="0"/>
-              </a:spcAft>
-            </a:pPr>
-            <a:r>
-              <a:rPr sz="2500" b="1">
-                <a:solidFill>
-                  <a:srgbClr val="1A1F27"/>
-                </a:solidFill>
-                <a:latin typeface="Segoe UI"/>
-              </a:rPr>
-              <a:t>What's there  vs.  what we need</a:t>
-            </a:r>
-          </a:p>
-        </p:txBody>
-      </p:sp>
-      <p:sp>
-        <p:nvSpPr>
-          <p:cNvPr id="4" name="Rounded Rectangle 3"/>
-          <p:cNvSpPr/>
-          <p:nvPr/>
-        </p:nvSpPr>
-        <p:spPr>
-          <a:xfrm>
-            <a:off x="640080" y="1874519"/>
-            <a:ext cx="5486400" cy="3794760"/>
-          </a:xfrm>
-          <a:prstGeom prst="roundRect">
-            <a:avLst/>
-          </a:prstGeom>
-          <a:solidFill>
-            <a:srgbClr val="E4F3EB"/>
-          </a:solidFill>
-          <a:ln w="9525">
-            <a:solidFill>
-              <a:srgbClr val="D9DFE5"/>
-            </a:solidFill>
-          </a:ln>
-          <a:effectLst/>
-        </p:spPr>
-        <p:style>
-          <a:lnRef idx="1">
-            <a:schemeClr val="accent1"/>
-          </a:lnRef>
-          <a:fillRef idx="3">
-            <a:schemeClr val="accent1"/>
-          </a:fillRef>
-          <a:effectRef idx="2">
-            <a:schemeClr val="accent1"/>
-          </a:effectRef>
-          <a:fontRef idx="minor">
-            <a:schemeClr val="lt1"/>
-          </a:fontRef>
-        </p:style>
-        <p:txBody>
-          <a:bodyPr rtlCol="0" anchor="ctr" wrap="square" lIns="146304" rIns="128016" tIns="118872" bIns="91440"/>
-          <a:lstStyle/>
-          <a:p>
-            <a:pPr algn="ctr">
-              <a:spcAft>
-                <a:spcPts val="700"/>
-              </a:spcAft>
-            </a:pPr>
-            <a:r>
-              <a:rPr sz="1250" b="1">
-                <a:solidFill>
-                  <a:srgbClr val="2E8B5E"/>
-                </a:solidFill>
-                <a:latin typeface="Segoe UI"/>
-              </a:rPr>
-              <a:t>WHAT'S THERE</a:t>
-            </a:r>
-          </a:p>
-          <a:p>
-            <a:pPr>
-              <a:spcAft>
-                <a:spcPts val="300"/>
-              </a:spcAft>
-            </a:pPr>
-            <a:r>
-              <a:rPr sz="1150" b="0">
-                <a:solidFill>
-                  <a:srgbClr val="1A1F27"/>
-                </a:solidFill>
-                <a:latin typeface="Segoe UI"/>
-              </a:rPr>
-              <a:t>All 47 KPIs mapped: field → calc → unit</a:t>
-            </a:r>
-          </a:p>
-          <a:p>
-            <a:pPr>
-              <a:spcAft>
-                <a:spcPts val="300"/>
-              </a:spcAft>
-            </a:pPr>
-            <a:r>
-              <a:rPr sz="1150" b="0">
-                <a:solidFill>
-                  <a:srgbClr val="1A1F27"/>
-                </a:solidFill>
-                <a:latin typeface="Segoe UI"/>
-              </a:rPr>
-              <a:t>3 programs documented end to end</a:t>
-            </a:r>
-          </a:p>
-          <a:p>
-            <a:pPr>
-              <a:spcAft>
-                <a:spcPts val="300"/>
-              </a:spcAft>
-            </a:pPr>
-            <a:r>
-              <a:rPr sz="1150" b="0">
-                <a:solidFill>
-                  <a:srgbClr val="1A1F27"/>
-                </a:solidFill>
-                <a:latin typeface="Segoe UI"/>
-              </a:rPr>
-              <a:t>Evidence trail behind every score</a:t>
-            </a:r>
-          </a:p>
-          <a:p>
-            <a:pPr>
-              <a:spcAft>
-                <a:spcPts val="300"/>
-              </a:spcAft>
-            </a:pPr>
-            <a:r>
-              <a:rPr sz="1150" b="0">
-                <a:solidFill>
-                  <a:srgbClr val="1A1F27"/>
-                </a:solidFill>
-                <a:latin typeface="Segoe UI"/>
-              </a:rPr>
-              <a:t>Count-vs-rate labelling fixed</a:t>
-            </a:r>
-          </a:p>
-          <a:p>
-            <a:pPr>
-              <a:spcAft>
-                <a:spcPts val="300"/>
-              </a:spcAft>
-            </a:pPr>
-            <a:r>
-              <a:rPr sz="1150" b="0">
-                <a:solidFill>
-                  <a:srgbClr val="1A1F27"/>
-                </a:solidFill>
-                <a:latin typeface="Segoe UI"/>
-              </a:rPr>
-              <a:t>Evaluation platform integrated</a:t>
-            </a:r>
-          </a:p>
-          <a:p>
-            <a:pPr>
-              <a:spcAft>
-                <a:spcPts val="300"/>
-              </a:spcAft>
-            </a:pPr>
-            <a:r>
-              <a:rPr sz="1150" b="0">
-                <a:solidFill>
-                  <a:srgbClr val="1A1F27"/>
-                </a:solidFill>
-                <a:latin typeface="Segoe UI"/>
-              </a:rPr>
-              <a:t/>
-            </a:r>
-          </a:p>
-          <a:p>
-            <a:pPr>
-              <a:spcAft>
-                <a:spcPts val="300"/>
-              </a:spcAft>
-            </a:pPr>
-            <a:r>
-              <a:rPr sz="1150" b="0">
-                <a:solidFill>
-                  <a:srgbClr val="2E8B5E"/>
-                </a:solidFill>
-                <a:latin typeface="Segoe UI"/>
-              </a:rPr>
-              <a:t>A solid, documented foundation.</a:t>
-            </a:r>
-          </a:p>
-        </p:txBody>
-      </p:sp>
-      <p:sp>
-        <p:nvSpPr>
-          <p:cNvPr id="5" name="Rounded Rectangle 4"/>
-          <p:cNvSpPr/>
-          <p:nvPr/>
-        </p:nvSpPr>
-        <p:spPr>
-          <a:xfrm>
-            <a:off x="6355080" y="1874519"/>
-            <a:ext cx="5212080" cy="3794760"/>
-          </a:xfrm>
-          <a:prstGeom prst="roundRect">
-            <a:avLst/>
-          </a:prstGeom>
-          <a:solidFill>
-            <a:srgbClr val="F6ECD6"/>
-          </a:solidFill>
-          <a:ln w="9525">
-            <a:solidFill>
-              <a:srgbClr val="D9DFE5"/>
-            </a:solidFill>
-          </a:ln>
-          <a:effectLst/>
-        </p:spPr>
-        <p:style>
-          <a:lnRef idx="1">
-            <a:schemeClr val="accent1"/>
-          </a:lnRef>
-          <a:fillRef idx="3">
-            <a:schemeClr val="accent1"/>
-          </a:fillRef>
-          <a:effectRef idx="2">
-            <a:schemeClr val="accent1"/>
-          </a:effectRef>
-          <a:fontRef idx="minor">
-            <a:schemeClr val="lt1"/>
-          </a:fontRef>
-        </p:style>
-        <p:txBody>
-          <a:bodyPr rtlCol="0" anchor="ctr" wrap="square" lIns="146304" rIns="128016" tIns="118872" bIns="91440"/>
-          <a:lstStyle/>
-          <a:p>
-            <a:pPr algn="ctr">
-              <a:spcAft>
-                <a:spcPts val="700"/>
-              </a:spcAft>
-            </a:pPr>
-            <a:r>
-              <a:rPr sz="1250" b="1">
-                <a:solidFill>
-                  <a:srgbClr val="A96E12"/>
-                </a:solidFill>
-                <a:latin typeface="Segoe UI"/>
-              </a:rPr>
-              <a:t>WHAT WE NEED</a:t>
-            </a:r>
-          </a:p>
-          <a:p>
-            <a:pPr>
-              <a:spcAft>
-                <a:spcPts val="300"/>
-              </a:spcAft>
-            </a:pPr>
-            <a:r>
-              <a:rPr sz="1150" b="0">
-                <a:solidFill>
-                  <a:srgbClr val="1A1F27"/>
-                </a:solidFill>
-                <a:latin typeface="Segoe UI"/>
-              </a:rPr>
-              <a:t>Golden data (certified calls) — with coaches</a:t>
-            </a:r>
-          </a:p>
-          <a:p>
-            <a:pPr>
-              <a:spcAft>
-                <a:spcPts val="300"/>
-              </a:spcAft>
-            </a:pPr>
-            <a:r>
-              <a:rPr sz="1150" b="0">
-                <a:solidFill>
-                  <a:srgbClr val="1A1F27"/>
-                </a:solidFill>
-                <a:latin typeface="Segoe UI"/>
-              </a:rPr>
-              <a:t>Roll-up score re-specified per program</a:t>
-            </a:r>
-          </a:p>
-          <a:p>
-            <a:pPr>
-              <a:spcAft>
-                <a:spcPts val="300"/>
-              </a:spcAft>
-            </a:pPr>
-            <a:r>
-              <a:rPr sz="1150" b="0">
-                <a:solidFill>
-                  <a:srgbClr val="1A1F27"/>
-                </a:solidFill>
-                <a:latin typeface="Segoe UI"/>
-              </a:rPr>
-              <a:t>WCC prompt aligned to its scorecard</a:t>
-            </a:r>
-          </a:p>
-          <a:p>
-            <a:pPr>
-              <a:spcAft>
-                <a:spcPts val="300"/>
-              </a:spcAft>
-            </a:pPr>
-            <a:r>
-              <a:rPr sz="1150" b="0">
-                <a:solidFill>
-                  <a:srgbClr val="1A1F27"/>
-                </a:solidFill>
-                <a:latin typeface="Segoe UI"/>
-              </a:rPr>
-              <a:t>Acceptance threshold per KPI</a:t>
-            </a:r>
-          </a:p>
-          <a:p>
-            <a:pPr>
-              <a:spcAft>
-                <a:spcPts val="300"/>
-              </a:spcAft>
-            </a:pPr>
-            <a:r>
-              <a:rPr sz="1150" b="0">
-                <a:solidFill>
-                  <a:srgbClr val="1A1F27"/>
-                </a:solidFill>
-                <a:latin typeface="Segoe UI"/>
-              </a:rPr>
-              <a:t>A few definitions confirmed by SMEs</a:t>
-            </a:r>
-          </a:p>
-          <a:p>
-            <a:pPr>
-              <a:spcAft>
-                <a:spcPts val="300"/>
-              </a:spcAft>
-            </a:pPr>
-            <a:r>
-              <a:rPr sz="1150" b="0">
-                <a:solidFill>
-                  <a:srgbClr val="1A1F27"/>
-                </a:solidFill>
-                <a:latin typeface="Segoe UI"/>
-              </a:rPr>
-              <a:t/>
-            </a:r>
-          </a:p>
-          <a:p>
-            <a:pPr>
-              <a:spcAft>
-                <a:spcPts val="300"/>
-              </a:spcAft>
-            </a:pPr>
-            <a:r>
-              <a:rPr sz="1150" b="0">
-                <a:solidFill>
-                  <a:srgbClr val="A96E12"/>
-                </a:solidFill>
-                <a:latin typeface="Segoe UI"/>
-              </a:rPr>
-              <a:t>Mostly business input, not code.</a:t>
-            </a:r>
-          </a:p>
-        </p:txBody>
-      </p:sp>
-    </p:spTree>
-  </p:cSld>
-  <p:clrMapOvr>
-    <a:masterClrMapping/>
-  </p:clrMapOvr>
-</p:sld>
-</file>
-
-<file path=ppt/slides/slide8.xml><?xml version="1.0" encoding="utf-8"?>
-<p:sld xmlns:a="http://schemas.openxmlformats.org/drawingml/2006/main" xmlns:p="http://schemas.openxmlformats.org/presentationml/2006/main" xmlns:r="http://schemas.openxmlformats.org/officeDocument/2006/relationships">
-  <p:cSld>
-    <p:bg>
-      <p:bgPr>
-        <a:solidFill>
-          <a:srgbClr val="FFFFFF"/>
-        </a:solidFill>
-        <a:effectLst/>
-      </p:bgPr>
-    </p:bg>
-    <p:spTree>
-      <p:nvGrpSpPr>
-        <p:cNvPr id="1" name=""/>
-        <p:cNvGrpSpPr/>
-        <p:nvPr/>
-      </p:nvGrpSpPr>
-      <p:grpSpPr/>
-      <p:sp>
-        <p:nvSpPr>
-          <p:cNvPr id="2" name="Rectangle 1"/>
-          <p:cNvSpPr/>
-          <p:nvPr/>
-        </p:nvSpPr>
-        <p:spPr>
-          <a:xfrm>
-            <a:off x="0" y="0"/>
-            <a:ext cx="12191695" cy="128016"/>
-          </a:xfrm>
-          <a:prstGeom prst="rect">
-            <a:avLst/>
-          </a:prstGeom>
-          <a:solidFill>
-            <a:srgbClr val="0E7C74"/>
-          </a:solidFill>
-          <a:ln>
-            <a:noFill/>
-          </a:ln>
-          <a:effectLst/>
-        </p:spPr>
-        <p:style>
-          <a:lnRef idx="1">
-            <a:schemeClr val="accent1"/>
-          </a:lnRef>
-          <a:fillRef idx="3">
-            <a:schemeClr val="accent1"/>
-          </a:fillRef>
-          <a:effectRef idx="2">
-            <a:schemeClr val="accent1"/>
-          </a:effectRef>
-          <a:fontRef idx="minor">
-            <a:schemeClr val="lt1"/>
-          </a:fontRef>
-        </p:style>
-        <p:txBody>
-          <a:bodyPr rtlCol="0" anchor="ctr"/>
-          <a:lstStyle/>
-          <a:p>
-            <a:pPr algn="ctr"/>
-          </a:p>
-        </p:txBody>
-      </p:sp>
-      <p:sp>
-        <p:nvSpPr>
-          <p:cNvPr id="3" name="TextBox 2"/>
-          <p:cNvSpPr txBox="1"/>
-          <p:nvPr/>
-        </p:nvSpPr>
-        <p:spPr>
-          <a:xfrm>
-            <a:off x="640080" y="365760"/>
-            <a:ext cx="11247120" cy="1234440"/>
-          </a:xfrm>
-          <a:prstGeom prst="rect">
-            <a:avLst/>
-          </a:prstGeom>
-          <a:noFill/>
-        </p:spPr>
-        <p:txBody>
-          <a:bodyPr wrap="square">
-            <a:spAutoFit/>
-          </a:bodyPr>
-          <a:lstStyle/>
-          <a:p>
-            <a:pPr>
-              <a:spcAft>
-                <a:spcPts val="400"/>
-              </a:spcAft>
-            </a:pPr>
-            <a:r>
-              <a:rPr sz="1200" b="1">
-                <a:solidFill>
-                  <a:srgbClr val="0E7C74"/>
-                </a:solidFill>
-                <a:latin typeface="Segoe UI"/>
-              </a:rPr>
-              <a:t>WHAT WE NEED FROM YOU, AND WHAT'S NEXT</a:t>
-            </a:r>
-          </a:p>
-          <a:p>
-            <a:pPr>
-              <a:spcAft>
-                <a:spcPts val="0"/>
-              </a:spcAft>
-            </a:pPr>
-            <a:r>
-              <a:rPr sz="2500" b="1">
-                <a:solidFill>
-                  <a:srgbClr val="1A1F27"/>
-                </a:solidFill>
-                <a:latin typeface="Segoe UI"/>
-              </a:rPr>
-              <a:t>Five focused asks</a:t>
-            </a:r>
-          </a:p>
-        </p:txBody>
-      </p:sp>
-      <p:graphicFrame>
-        <p:nvGraphicFramePr>
-          <p:cNvPr id="4" name="Table 3"/>
-          <p:cNvGraphicFramePr>
-            <a:graphicFrameLocks noGrp="1"/>
-          </p:cNvGraphicFramePr>
-          <p:nvPr/>
-        </p:nvGraphicFramePr>
-        <p:xfrm>
-          <a:off x="640080" y="1874519"/>
-          <a:ext cx="10927079" cy="3291840"/>
-        </p:xfrm>
-        <a:graphic>
-          <a:graphicData uri="http://schemas.openxmlformats.org/drawingml/2006/table">
-            <a:tbl>
-              <a:tblPr firstRow="1">
-                <a:tableStyleId>{5C22544A-7EE6-4342-B048-85BDC9FD1C3A}</a:tableStyleId>
-              </a:tblPr>
-              <a:tblGrid>
-                <a:gridCol w="640080"/>
-                <a:gridCol w="6309360"/>
-                <a:gridCol w="3977639"/>
-              </a:tblGrid>
-              <a:tr h="548640">
-                <a:tc>
-                  <a:txBody>
-                    <a:bodyPr wrap="square"/>
-                    <a:lstStyle/>
-                    <a:p>
-                      <a:r>
-                        <a:rPr sz="1100" b="1">
-                          <a:solidFill>
-                            <a:srgbClr val="FFFFFF"/>
-                          </a:solidFill>
-                          <a:latin typeface="Segoe UI"/>
-                        </a:rPr>
-                        <a:t>#</a:t>
-                      </a:r>
-                    </a:p>
-                  </a:txBody>
-                  <a:tcPr anchor="ctr" marL="91440" marR="54864" marT="18288" marB="18288">
-                    <a:solidFill>
-                      <a:srgbClr val="0E7C74"/>
-                    </a:solidFill>
-                  </a:tcPr>
-                </a:tc>
-                <a:tc>
-                  <a:txBody>
-                    <a:bodyPr wrap="square"/>
-                    <a:lstStyle/>
-                    <a:p>
-                      <a:r>
-                        <a:rPr sz="1100" b="1">
-                          <a:solidFill>
-                            <a:srgbClr val="FFFFFF"/>
-                          </a:solidFill>
-                          <a:latin typeface="Segoe UI"/>
-                        </a:rPr>
-                        <a:t>Ask</a:t>
-                      </a:r>
-                    </a:p>
-                  </a:txBody>
-                  <a:tcPr anchor="ctr" marL="91440" marR="54864" marT="18288" marB="18288">
-                    <a:solidFill>
-                      <a:srgbClr val="0E7C74"/>
-                    </a:solidFill>
-                  </a:tcPr>
-                </a:tc>
-                <a:tc>
-                  <a:txBody>
-                    <a:bodyPr wrap="square"/>
-                    <a:lstStyle/>
-                    <a:p>
-                      <a:r>
-                        <a:rPr sz="1100" b="1">
-                          <a:solidFill>
-                            <a:srgbClr val="FFFFFF"/>
-                          </a:solidFill>
-                          <a:latin typeface="Segoe UI"/>
-                        </a:rPr>
-                        <a:t>What it gives us</a:t>
-                      </a:r>
-                    </a:p>
-                  </a:txBody>
-                  <a:tcPr anchor="ctr" marL="91440" marR="54864" marT="18288" marB="18288">
-                    <a:solidFill>
-                      <a:srgbClr val="0E7C74"/>
-                    </a:solidFill>
-                  </a:tcPr>
-                </a:tc>
-              </a:tr>
-              <a:tr h="548640">
-                <a:tc>
-                  <a:txBody>
-                    <a:bodyPr wrap="square"/>
-                    <a:lstStyle/>
-                    <a:p>
-                      <a:r>
-                        <a:rPr sz="1300" b="1">
-                          <a:solidFill>
-                            <a:srgbClr val="1A1F27"/>
-                          </a:solidFill>
-                          <a:latin typeface="Segoe UI"/>
-                        </a:rPr>
-                        <a:t>1</a:t>
-                      </a:r>
-                    </a:p>
-                  </a:txBody>
-                  <a:tcPr anchor="ctr" marL="91440" marR="54864" marT="18288" marB="18288">
-                    <a:solidFill>
-                      <a:srgbClr val="FFFFFF"/>
-                    </a:solidFill>
-                  </a:tcPr>
-                </a:tc>
-                <a:tc>
-                  <a:txBody>
-                    <a:bodyPr wrap="square"/>
-                    <a:lstStyle/>
-                    <a:p>
-                      <a:r>
-                        <a:rPr sz="1300" b="0">
-                          <a:solidFill>
-                            <a:srgbClr val="535C6A"/>
-                          </a:solidFill>
-                          <a:latin typeface="Segoe UI"/>
-                        </a:rPr>
-                        <a:t>Certify labels on a sample of calls</a:t>
-                      </a:r>
-                    </a:p>
-                  </a:txBody>
-                  <a:tcPr anchor="ctr" marL="91440" marR="54864" marT="18288" marB="18288">
-                    <a:solidFill>
-                      <a:srgbClr val="FFFFFF"/>
-                    </a:solidFill>
-                  </a:tcPr>
-                </a:tc>
-                <a:tc>
-                  <a:txBody>
-                    <a:bodyPr wrap="square"/>
-                    <a:lstStyle/>
-                    <a:p>
-                      <a:r>
-                        <a:rPr sz="1300" b="0">
-                          <a:solidFill>
-                            <a:srgbClr val="535C6A"/>
-                          </a:solidFill>
-                          <a:latin typeface="Segoe UI"/>
-                        </a:rPr>
-                        <a:t>The golden dataset</a:t>
-                      </a:r>
-                    </a:p>
-                  </a:txBody>
-                  <a:tcPr anchor="ctr" marL="91440" marR="54864" marT="18288" marB="18288">
-                    <a:solidFill>
-                      <a:srgbClr val="FFFFFF"/>
-                    </a:solidFill>
-                  </a:tcPr>
-                </a:tc>
-              </a:tr>
-              <a:tr h="548640">
-                <a:tc>
-                  <a:txBody>
-                    <a:bodyPr wrap="square"/>
-                    <a:lstStyle/>
-                    <a:p>
-                      <a:r>
-                        <a:rPr sz="1300" b="1">
-                          <a:solidFill>
-                            <a:srgbClr val="1A1F27"/>
-                          </a:solidFill>
-                          <a:latin typeface="Segoe UI"/>
-                        </a:rPr>
-                        <a:t>2</a:t>
-                      </a:r>
-                    </a:p>
-                  </a:txBody>
-                  <a:tcPr anchor="ctr" marL="91440" marR="54864" marT="18288" marB="18288">
-                    <a:solidFill>
-                      <a:srgbClr val="F7F9F8"/>
-                    </a:solidFill>
-                  </a:tcPr>
-                </a:tc>
-                <a:tc>
-                  <a:txBody>
-                    <a:bodyPr wrap="square"/>
-                    <a:lstStyle/>
-                    <a:p>
-                      <a:r>
-                        <a:rPr sz="1300" b="0">
-                          <a:solidFill>
-                            <a:srgbClr val="535C6A"/>
-                          </a:solidFill>
-                          <a:latin typeface="Segoe UI"/>
-                        </a:rPr>
-                        <a:t>Confirm the flagged KPI definitions</a:t>
-                      </a:r>
-                    </a:p>
-                  </a:txBody>
-                  <a:tcPr anchor="ctr" marL="91440" marR="54864" marT="18288" marB="18288">
-                    <a:solidFill>
-                      <a:srgbClr val="F7F9F8"/>
-                    </a:solidFill>
-                  </a:tcPr>
-                </a:tc>
-                <a:tc>
-                  <a:txBody>
-                    <a:bodyPr wrap="square"/>
-                    <a:lstStyle/>
-                    <a:p>
-                      <a:r>
-                        <a:rPr sz="1300" b="0">
-                          <a:solidFill>
-                            <a:srgbClr val="535C6A"/>
-                          </a:solidFill>
-                          <a:latin typeface="Segoe UI"/>
-                        </a:rPr>
-                        <a:t>Correct metrics</a:t>
-                      </a:r>
-                    </a:p>
-                  </a:txBody>
-                  <a:tcPr anchor="ctr" marL="91440" marR="54864" marT="18288" marB="18288">
-                    <a:solidFill>
-                      <a:srgbClr val="F7F9F8"/>
-                    </a:solidFill>
-                  </a:tcPr>
-                </a:tc>
-              </a:tr>
-              <a:tr h="548640">
-                <a:tc>
-                  <a:txBody>
-                    <a:bodyPr wrap="square"/>
-                    <a:lstStyle/>
-                    <a:p>
-                      <a:r>
-                        <a:rPr sz="1300" b="1">
-                          <a:solidFill>
-                            <a:srgbClr val="1A1F27"/>
-                          </a:solidFill>
-                          <a:latin typeface="Segoe UI"/>
-                        </a:rPr>
-                        <a:t>3</a:t>
-                      </a:r>
-                    </a:p>
-                  </a:txBody>
-                  <a:tcPr anchor="ctr" marL="91440" marR="54864" marT="18288" marB="18288">
-                    <a:solidFill>
-                      <a:srgbClr val="FFFFFF"/>
-                    </a:solidFill>
-                  </a:tcPr>
-                </a:tc>
-                <a:tc>
-                  <a:txBody>
-                    <a:bodyPr wrap="square"/>
-                    <a:lstStyle/>
-                    <a:p>
-                      <a:r>
-                        <a:rPr sz="1300" b="0">
-                          <a:solidFill>
-                            <a:srgbClr val="535C6A"/>
-                          </a:solidFill>
-                          <a:latin typeface="Segoe UI"/>
-                        </a:rPr>
-                        <a:t>Define what a “good” coaching tip is</a:t>
-                      </a:r>
-                    </a:p>
-                  </a:txBody>
-                  <a:tcPr anchor="ctr" marL="91440" marR="54864" marT="18288" marB="18288">
-                    <a:solidFill>
-                      <a:srgbClr val="FFFFFF"/>
-                    </a:solidFill>
-                  </a:tcPr>
-                </a:tc>
-                <a:tc>
-                  <a:txBody>
-                    <a:bodyPr wrap="square"/>
-                    <a:lstStyle/>
-                    <a:p>
-                      <a:r>
-                        <a:rPr sz="1300" b="0">
-                          <a:solidFill>
-                            <a:srgbClr val="535C6A"/>
-                          </a:solidFill>
-                          <a:latin typeface="Segoe UI"/>
-                        </a:rPr>
-                        <a:t>The scoring rubric</a:t>
-                      </a:r>
-                    </a:p>
-                  </a:txBody>
-                  <a:tcPr anchor="ctr" marL="91440" marR="54864" marT="18288" marB="18288">
-                    <a:solidFill>
-                      <a:srgbClr val="FFFFFF"/>
-                    </a:solidFill>
-                  </a:tcPr>
-                </a:tc>
-              </a:tr>
-              <a:tr h="548640">
-                <a:tc>
-                  <a:txBody>
-                    <a:bodyPr wrap="square"/>
-                    <a:lstStyle/>
-                    <a:p>
-                      <a:r>
-                        <a:rPr sz="1300" b="1">
-                          <a:solidFill>
-                            <a:srgbClr val="1A1F27"/>
-                          </a:solidFill>
-                          <a:latin typeface="Segoe UI"/>
-                        </a:rPr>
-                        <a:t>4</a:t>
-                      </a:r>
-                    </a:p>
-                  </a:txBody>
-                  <a:tcPr anchor="ctr" marL="91440" marR="54864" marT="18288" marB="18288">
-                    <a:solidFill>
-                      <a:srgbClr val="F7F9F8"/>
-                    </a:solidFill>
-                  </a:tcPr>
-                </a:tc>
-                <a:tc>
-                  <a:txBody>
-                    <a:bodyPr wrap="square"/>
-                    <a:lstStyle/>
-                    <a:p>
-                      <a:r>
-                        <a:rPr sz="1300" b="0">
-                          <a:solidFill>
-                            <a:srgbClr val="535C6A"/>
-                          </a:solidFill>
-                          <a:latin typeface="Segoe UI"/>
-                        </a:rPr>
-                        <a:t>Set the acceptable range per KPI</a:t>
-                      </a:r>
-                    </a:p>
-                  </a:txBody>
-                  <a:tcPr anchor="ctr" marL="91440" marR="54864" marT="18288" marB="18288">
-                    <a:solidFill>
-                      <a:srgbClr val="F7F9F8"/>
-                    </a:solidFill>
-                  </a:tcPr>
-                </a:tc>
-                <a:tc>
-                  <a:txBody>
-                    <a:bodyPr wrap="square"/>
-                    <a:lstStyle/>
-                    <a:p>
-                      <a:r>
-                        <a:rPr sz="1300" b="0">
-                          <a:solidFill>
-                            <a:srgbClr val="535C6A"/>
-                          </a:solidFill>
-                          <a:latin typeface="Segoe UI"/>
-                        </a:rPr>
-                        <a:t>The evaluation threshold</a:t>
-                      </a:r>
-                    </a:p>
-                  </a:txBody>
-                  <a:tcPr anchor="ctr" marL="91440" marR="54864" marT="18288" marB="18288">
-                    <a:solidFill>
-                      <a:srgbClr val="F7F9F8"/>
-                    </a:solidFill>
-                  </a:tcPr>
-                </a:tc>
-              </a:tr>
-              <a:tr h="548640">
-                <a:tc>
-                  <a:txBody>
-                    <a:bodyPr wrap="square"/>
-                    <a:lstStyle/>
-                    <a:p>
-                      <a:r>
-                        <a:rPr sz="1300" b="1">
-                          <a:solidFill>
-                            <a:srgbClr val="1A1F27"/>
-                          </a:solidFill>
-                          <a:latin typeface="Segoe UI"/>
-                        </a:rPr>
-                        <a:t>5</a:t>
-                      </a:r>
-                    </a:p>
-                  </a:txBody>
-                  <a:tcPr anchor="ctr" marL="91440" marR="54864" marT="18288" marB="18288">
-                    <a:solidFill>
-                      <a:srgbClr val="FFFFFF"/>
-                    </a:solidFill>
-                  </a:tcPr>
-                </a:tc>
-                <a:tc>
-                  <a:txBody>
-                    <a:bodyPr wrap="square"/>
-                    <a:lstStyle/>
-                    <a:p>
-                      <a:r>
-                        <a:rPr sz="1300" b="0">
-                          <a:solidFill>
-                            <a:srgbClr val="535C6A"/>
-                          </a:solidFill>
-                          <a:latin typeface="Segoe UI"/>
-                        </a:rPr>
-                        <a:t>Confirm operational metrics exist for WCC &amp; PSO</a:t>
-                      </a:r>
-                    </a:p>
-                  </a:txBody>
-                  <a:tcPr anchor="ctr" marL="91440" marR="54864" marT="18288" marB="18288">
-                    <a:solidFill>
-                      <a:srgbClr val="FFFFFF"/>
-                    </a:solidFill>
-                  </a:tcPr>
-                </a:tc>
-                <a:tc>
-                  <a:txBody>
-                    <a:bodyPr wrap="square"/>
-                    <a:lstStyle/>
-                    <a:p>
-                      <a:r>
-                        <a:rPr sz="1300" b="0">
-                          <a:solidFill>
-                            <a:srgbClr val="535C6A"/>
-                          </a:solidFill>
-                          <a:latin typeface="Segoe UI"/>
-                        </a:rPr>
-                        <a:t>Coaching-data coverage</a:t>
-                      </a:r>
-                    </a:p>
-                  </a:txBody>
-                  <a:tcPr anchor="ctr" marL="91440" marR="54864" marT="18288" marB="18288">
-                    <a:solidFill>
-                      <a:srgbClr val="FFFFFF"/>
-                    </a:solidFill>
-                  </a:tcPr>
-                </a:tc>
-              </a:tr>
-            </a:tbl>
-          </a:graphicData>
-        </a:graphic>
-      </p:graphicFrame>
-      <p:sp>
-        <p:nvSpPr>
-          <p:cNvPr id="5" name="Rounded Rectangle 4"/>
-          <p:cNvSpPr/>
-          <p:nvPr/>
-        </p:nvSpPr>
-        <p:spPr>
-          <a:xfrm>
-            <a:off x="640080" y="5806440"/>
-            <a:ext cx="10927080" cy="749808"/>
-          </a:xfrm>
-          <a:prstGeom prst="roundRect">
-            <a:avLst/>
-          </a:prstGeom>
-          <a:solidFill>
-            <a:srgbClr val="E1F0EE"/>
-          </a:solidFill>
-          <a:ln>
-            <a:noFill/>
-          </a:ln>
-          <a:effectLst/>
-        </p:spPr>
-        <p:style>
-          <a:lnRef idx="1">
-            <a:schemeClr val="accent1"/>
-          </a:lnRef>
-          <a:fillRef idx="3">
-            <a:schemeClr val="accent1"/>
-          </a:fillRef>
-          <a:effectRef idx="2">
-            <a:schemeClr val="accent1"/>
-          </a:effectRef>
-          <a:fontRef idx="minor">
-            <a:schemeClr val="lt1"/>
-          </a:fontRef>
-        </p:style>
-        <p:txBody>
-          <a:bodyPr rtlCol="0" anchor="ctr" wrap="square" lIns="201168" rIns="201168"/>
-          <a:lstStyle/>
-          <a:p>
-            <a:pPr algn="ctr">
-              <a:spcAft>
-                <a:spcPts val="0"/>
-              </a:spcAft>
-            </a:pPr>
-            <a:r>
-              <a:rPr sz="1300" b="1">
-                <a:solidFill>
-                  <a:srgbClr val="0A5B55"/>
-                </a:solidFill>
-                <a:latin typeface="Segoe UI"/>
-              </a:rPr>
-              <a:t>Next:  1) agree the golden-call sample with coaches   2) confirm definitions &amp; thresholds   3) we re-spec the roll-up score &amp; align WCC in parallel.</a:t>
+              <a:t>The homework is done — the remaining asks are focused decisions, not basic definitions.</a:t>
             </a:r>
           </a:p>
         </p:txBody>

--- a/usecases/ai_pipeline 2/docs/APIX_Metrics_Discussion.pptx
+++ b/usecases/ai_pipeline 2/docs/APIX_Metrics_Discussion.pptx
@@ -3987,7 +3987,7 @@
                 </a:solidFill>
                 <a:latin typeface="Segoe UI"/>
               </a:rPr>
-              <a:t>TRANSCRIPT (excerpt)</a:t>
+              <a:t>MOCK CALL TRANSCRIPT — APIX example (illustrative)</a:t>
             </a:r>
           </a:p>
           <a:p>
@@ -4575,7 +4575,7 @@
                 </a:solidFill>
                 <a:latin typeface="Segoe UI"/>
               </a:rPr>
-              <a:t>TRANSCRIPT (excerpt)</a:t>
+              <a:t>MOCK CALL TRANSCRIPT — APIX example (illustrative)</a:t>
             </a:r>
           </a:p>
           <a:p>

--- a/usecases/ai_pipeline 2/docs/APIX_Metrics_Discussion.pptx
+++ b/usecases/ai_pipeline 2/docs/APIX_Metrics_Discussion.pptx
@@ -3118,7 +3118,7 @@
             <a:avLst/>
           </a:prstGeom>
           <a:solidFill>
-            <a:srgbClr val="0E7C74"/>
+            <a:srgbClr val="16324F"/>
           </a:solidFill>
           <a:ln>
             <a:noFill/>
@@ -3177,7 +3177,7 @@
             <a:r>
               <a:rPr sz="1350" b="1">
                 <a:solidFill>
-                  <a:srgbClr val="0E7C74"/>
+                  <a:srgbClr val="16324F"/>
                 </a:solidFill>
                 <a:latin typeface="Segoe UI"/>
               </a:rPr>
@@ -3193,7 +3193,7 @@
             <a:r>
               <a:rPr sz="3400" b="1">
                 <a:solidFill>
-                  <a:srgbClr val="1A1F27"/>
+                  <a:srgbClr val="1C2733"/>
                 </a:solidFill>
                 <a:latin typeface="Segoe UI"/>
               </a:rPr>
@@ -3209,7 +3209,7 @@
             <a:r>
               <a:rPr sz="3400" b="1">
                 <a:solidFill>
-                  <a:srgbClr val="1A1F27"/>
+                  <a:srgbClr val="1C2733"/>
                 </a:solidFill>
                 <a:latin typeface="Segoe UI"/>
               </a:rPr>
@@ -3225,7 +3225,7 @@
             <a:r>
               <a:rPr sz="1650" b="0">
                 <a:solidFill>
-                  <a:srgbClr val="535C6A"/>
+                  <a:srgbClr val="566573"/>
                 </a:solidFill>
                 <a:latin typeface="Segoe UI"/>
               </a:rPr>
@@ -3264,7 +3264,7 @@
             <a:r>
               <a:rPr sz="1250" b="0">
                 <a:solidFill>
-                  <a:srgbClr val="8A93A1"/>
+                  <a:srgbClr val="93A0AD"/>
                 </a:solidFill>
                 <a:latin typeface="Segoe UI"/>
               </a:rPr>
@@ -3314,7 +3314,7 @@
             <a:avLst/>
           </a:prstGeom>
           <a:solidFill>
-            <a:srgbClr val="0E7C74"/>
+            <a:srgbClr val="16324F"/>
           </a:solidFill>
           <a:ln>
             <a:noFill/>
@@ -3373,7 +3373,7 @@
             <a:r>
               <a:rPr sz="1200" b="1">
                 <a:solidFill>
-                  <a:srgbClr val="0E7C74"/>
+                  <a:srgbClr val="16324F"/>
                 </a:solidFill>
                 <a:latin typeface="Segoe UI"/>
               </a:rPr>
@@ -3389,7 +3389,7 @@
             <a:r>
               <a:rPr sz="2400" b="1">
                 <a:solidFill>
-                  <a:srgbClr val="1A1F27"/>
+                  <a:srgbClr val="1C2733"/>
                 </a:solidFill>
                 <a:latin typeface="Segoe UI"/>
               </a:rPr>
@@ -3400,7 +3400,7 @@
       </p:sp>
       <p:sp>
         <p:nvSpPr>
-          <p:cNvPr id="4" name="Rounded Rectangle 3"/>
+          <p:cNvPr id="4" name="Rectangle 3"/>
           <p:cNvSpPr/>
           <p:nvPr/>
         </p:nvSpPr>
@@ -3409,15 +3409,15 @@
             <a:off x="640080" y="1691640"/>
             <a:ext cx="5486400" cy="1828800"/>
           </a:xfrm>
-          <a:prstGeom prst="roundRect">
+          <a:prstGeom prst="rect">
             <a:avLst/>
           </a:prstGeom>
           <a:solidFill>
-            <a:srgbClr val="E1F0EE"/>
+            <a:srgbClr val="EAEEF2"/>
           </a:solidFill>
           <a:ln w="9525">
             <a:solidFill>
-              <a:srgbClr val="D9DFE5"/>
+              <a:srgbClr val="D5DBE1"/>
             </a:solidFill>
           </a:ln>
           <a:effectLst/>
@@ -3448,7 +3448,7 @@
             <a:r>
               <a:rPr sz="1250" b="1">
                 <a:solidFill>
-                  <a:srgbClr val="0E7C74"/>
+                  <a:srgbClr val="16324F"/>
                 </a:solidFill>
                 <a:latin typeface="Segoe UI"/>
               </a:rPr>
@@ -3464,7 +3464,7 @@
             <a:r>
               <a:rPr sz="1150" b="0">
                 <a:solidFill>
-                  <a:srgbClr val="535C6A"/>
+                  <a:srgbClr val="566573"/>
                 </a:solidFill>
                 <a:latin typeface="Segoe UI"/>
               </a:rPr>
@@ -3480,7 +3480,7 @@
             <a:r>
               <a:rPr sz="1150" b="0">
                 <a:solidFill>
-                  <a:srgbClr val="535C6A"/>
+                  <a:srgbClr val="566573"/>
                 </a:solidFill>
                 <a:latin typeface="Segoe UI"/>
               </a:rPr>
@@ -3496,7 +3496,7 @@
             <a:r>
               <a:rPr sz="1150" b="0">
                 <a:solidFill>
-                  <a:srgbClr val="535C6A"/>
+                  <a:srgbClr val="566573"/>
                 </a:solidFill>
                 <a:latin typeface="Segoe UI"/>
               </a:rPr>
@@ -3512,7 +3512,7 @@
             <a:r>
               <a:rPr sz="1150" b="0">
                 <a:solidFill>
-                  <a:srgbClr val="535C6A"/>
+                  <a:srgbClr val="566573"/>
                 </a:solidFill>
                 <a:latin typeface="Segoe UI"/>
               </a:rPr>
@@ -3528,7 +3528,7 @@
             <a:r>
               <a:rPr sz="1150" b="0">
                 <a:solidFill>
-                  <a:srgbClr val="535C6A"/>
+                  <a:srgbClr val="566573"/>
                 </a:solidFill>
                 <a:latin typeface="Segoe UI"/>
               </a:rPr>
@@ -3539,7 +3539,7 @@
       </p:sp>
       <p:sp>
         <p:nvSpPr>
-          <p:cNvPr id="5" name="Rounded Rectangle 4"/>
+          <p:cNvPr id="5" name="Rectangle 4"/>
           <p:cNvSpPr/>
           <p:nvPr/>
         </p:nvSpPr>
@@ -3548,15 +3548,15 @@
             <a:off x="6355080" y="1691640"/>
             <a:ext cx="5212080" cy="1828800"/>
           </a:xfrm>
-          <a:prstGeom prst="roundRect">
+          <a:prstGeom prst="rect">
             <a:avLst/>
           </a:prstGeom>
           <a:solidFill>
-            <a:srgbClr val="E1F0EE"/>
+            <a:srgbClr val="EAEEF2"/>
           </a:solidFill>
           <a:ln w="9525">
             <a:solidFill>
-              <a:srgbClr val="D9DFE5"/>
+              <a:srgbClr val="D5DBE1"/>
             </a:solidFill>
           </a:ln>
           <a:effectLst/>
@@ -3587,7 +3587,7 @@
             <a:r>
               <a:rPr sz="1250" b="1">
                 <a:solidFill>
-                  <a:srgbClr val="0E7C74"/>
+                  <a:srgbClr val="16324F"/>
                 </a:solidFill>
                 <a:latin typeface="Segoe UI"/>
               </a:rPr>
@@ -3603,7 +3603,7 @@
             <a:r>
               <a:rPr sz="1150" b="0">
                 <a:solidFill>
-                  <a:srgbClr val="535C6A"/>
+                  <a:srgbClr val="566573"/>
                 </a:solidFill>
                 <a:latin typeface="Segoe UI"/>
               </a:rPr>
@@ -3619,7 +3619,7 @@
             <a:r>
               <a:rPr sz="1150" b="0">
                 <a:solidFill>
-                  <a:srgbClr val="535C6A"/>
+                  <a:srgbClr val="566573"/>
                 </a:solidFill>
                 <a:latin typeface="Segoe UI"/>
               </a:rPr>
@@ -3635,7 +3635,7 @@
             <a:r>
               <a:rPr sz="1150" b="0">
                 <a:solidFill>
-                  <a:srgbClr val="535C6A"/>
+                  <a:srgbClr val="566573"/>
                 </a:solidFill>
                 <a:latin typeface="Segoe UI"/>
               </a:rPr>
@@ -3651,7 +3651,7 @@
             <a:r>
               <a:rPr sz="1150" b="0">
                 <a:solidFill>
-                  <a:srgbClr val="535C6A"/>
+                  <a:srgbClr val="566573"/>
                 </a:solidFill>
                 <a:latin typeface="Segoe UI"/>
               </a:rPr>
@@ -3662,7 +3662,7 @@
       </p:sp>
       <p:sp>
         <p:nvSpPr>
-          <p:cNvPr id="6" name="Rounded Rectangle 5"/>
+          <p:cNvPr id="6" name="Rectangle 5"/>
           <p:cNvSpPr/>
           <p:nvPr/>
         </p:nvSpPr>
@@ -3671,11 +3671,11 @@
             <a:off x="640080" y="3794760"/>
             <a:ext cx="10927080" cy="868680"/>
           </a:xfrm>
-          <a:prstGeom prst="roundRect">
+          <a:prstGeom prst="rect">
             <a:avLst/>
           </a:prstGeom>
           <a:solidFill>
-            <a:srgbClr val="E1F0EE"/>
+            <a:srgbClr val="EAEEF2"/>
           </a:solidFill>
           <a:ln>
             <a:noFill/>
@@ -3708,7 +3708,7 @@
             <a:r>
               <a:rPr sz="1400" b="1">
                 <a:solidFill>
-                  <a:srgbClr val="0A5B55"/>
+                  <a:srgbClr val="122A42"/>
                 </a:solidFill>
                 <a:latin typeface="Segoe UI"/>
               </a:rPr>
@@ -3719,7 +3719,7 @@
       </p:sp>
       <p:sp>
         <p:nvSpPr>
-          <p:cNvPr id="7" name="Rounded Rectangle 6"/>
+          <p:cNvPr id="7" name="Rectangle 6"/>
           <p:cNvSpPr/>
           <p:nvPr/>
         </p:nvSpPr>
@@ -3728,15 +3728,15 @@
             <a:off x="640080" y="4892040"/>
             <a:ext cx="10927080" cy="1234440"/>
           </a:xfrm>
-          <a:prstGeom prst="roundRect">
+          <a:prstGeom prst="rect">
             <a:avLst/>
           </a:prstGeom>
           <a:solidFill>
-            <a:srgbClr val="E1F0EE"/>
+            <a:srgbClr val="EAEEF2"/>
           </a:solidFill>
           <a:ln w="9525">
             <a:solidFill>
-              <a:srgbClr val="D9DFE5"/>
+              <a:srgbClr val="D5DBE1"/>
             </a:solidFill>
           </a:ln>
           <a:effectLst/>
@@ -3767,7 +3767,7 @@
             <a:r>
               <a:rPr sz="1250" b="1">
                 <a:solidFill>
-                  <a:srgbClr val="0E7C74"/>
+                  <a:srgbClr val="16324F"/>
                 </a:solidFill>
                 <a:latin typeface="Segoe UI"/>
               </a:rPr>
@@ -3783,7 +3783,7 @@
             <a:r>
               <a:rPr sz="1100" b="0">
                 <a:solidFill>
-                  <a:srgbClr val="0A5B55"/>
+                  <a:srgbClr val="122A42"/>
                 </a:solidFill>
                 <a:latin typeface="Segoe UI"/>
               </a:rPr>
@@ -3799,7 +3799,7 @@
             <a:r>
               <a:rPr sz="1100" b="0">
                 <a:solidFill>
-                  <a:srgbClr val="535C6A"/>
+                  <a:srgbClr val="566573"/>
                 </a:solidFill>
                 <a:latin typeface="Segoe UI"/>
               </a:rPr>
@@ -3849,7 +3849,7 @@
             <a:avLst/>
           </a:prstGeom>
           <a:solidFill>
-            <a:srgbClr val="0E7C74"/>
+            <a:srgbClr val="16324F"/>
           </a:solidFill>
           <a:ln>
             <a:noFill/>
@@ -3908,7 +3908,7 @@
             <a:r>
               <a:rPr sz="1200" b="1">
                 <a:solidFill>
-                  <a:srgbClr val="0E7C74"/>
+                  <a:srgbClr val="16324F"/>
                 </a:solidFill>
                 <a:latin typeface="Segoe UI"/>
               </a:rPr>
@@ -3924,7 +3924,7 @@
             <a:r>
               <a:rPr sz="2400" b="1">
                 <a:solidFill>
-                  <a:srgbClr val="1A1F27"/>
+                  <a:srgbClr val="1C2733"/>
                 </a:solidFill>
                 <a:latin typeface="Segoe UI"/>
               </a:rPr>
@@ -3935,7 +3935,7 @@
       </p:sp>
       <p:sp>
         <p:nvSpPr>
-          <p:cNvPr id="4" name="Rounded Rectangle 3"/>
+          <p:cNvPr id="4" name="Rectangle 3"/>
           <p:cNvSpPr/>
           <p:nvPr/>
         </p:nvSpPr>
@@ -3944,15 +3944,15 @@
             <a:off x="640080" y="1691640"/>
             <a:ext cx="6035040" cy="3977639"/>
           </a:xfrm>
-          <a:prstGeom prst="roundRect">
+          <a:prstGeom prst="rect">
             <a:avLst/>
           </a:prstGeom>
           <a:solidFill>
-            <a:srgbClr val="F3F1EA"/>
+            <a:srgbClr val="F3F1EC"/>
           </a:solidFill>
           <a:ln w="9525">
             <a:solidFill>
-              <a:srgbClr val="D9DFE5"/>
+              <a:srgbClr val="D5DBE1"/>
             </a:solidFill>
           </a:ln>
           <a:effectLst/>
@@ -3983,7 +3983,7 @@
             <a:r>
               <a:rPr sz="1250" b="1">
                 <a:solidFill>
-                  <a:srgbClr val="0A5B55"/>
+                  <a:srgbClr val="122A42"/>
                 </a:solidFill>
                 <a:latin typeface="Segoe UI"/>
               </a:rPr>
@@ -3999,7 +3999,7 @@
             <a:r>
               <a:rPr sz="1050" b="0">
                 <a:solidFill>
-                  <a:srgbClr val="1A1F27"/>
+                  <a:srgbClr val="1C2733"/>
                 </a:solidFill>
                 <a:latin typeface="Consolas"/>
               </a:rPr>
@@ -4015,7 +4015,7 @@
             <a:r>
               <a:rPr sz="1050" b="0">
                 <a:solidFill>
-                  <a:srgbClr val="1A1F27"/>
+                  <a:srgbClr val="1C2733"/>
                 </a:solidFill>
                 <a:latin typeface="Consolas"/>
               </a:rPr>
@@ -4031,7 +4031,7 @@
             <a:r>
               <a:rPr sz="1050" b="0">
                 <a:solidFill>
-                  <a:srgbClr val="1A1F27"/>
+                  <a:srgbClr val="1C2733"/>
                 </a:solidFill>
                 <a:latin typeface="Consolas"/>
               </a:rPr>
@@ -4047,7 +4047,7 @@
             <a:r>
               <a:rPr sz="1050" b="0">
                 <a:solidFill>
-                  <a:srgbClr val="1A1F27"/>
+                  <a:srgbClr val="1C2733"/>
                 </a:solidFill>
                 <a:latin typeface="Consolas"/>
               </a:rPr>
@@ -4063,7 +4063,7 @@
             <a:r>
               <a:rPr sz="1050" b="0">
                 <a:solidFill>
-                  <a:srgbClr val="1A1F27"/>
+                  <a:srgbClr val="1C2733"/>
                 </a:solidFill>
                 <a:latin typeface="Consolas"/>
               </a:rPr>
@@ -4079,7 +4079,7 @@
             <a:r>
               <a:rPr sz="1050" b="0">
                 <a:solidFill>
-                  <a:srgbClr val="1A1F27"/>
+                  <a:srgbClr val="1C2733"/>
                 </a:solidFill>
                 <a:latin typeface="Consolas"/>
               </a:rPr>
@@ -4095,7 +4095,7 @@
             <a:r>
               <a:rPr sz="1050" b="0">
                 <a:solidFill>
-                  <a:srgbClr val="1A1F27"/>
+                  <a:srgbClr val="1C2733"/>
                 </a:solidFill>
                 <a:latin typeface="Consolas"/>
               </a:rPr>
@@ -4111,7 +4111,7 @@
             <a:r>
               <a:rPr sz="1050" b="0">
                 <a:solidFill>
-                  <a:srgbClr val="1A1F27"/>
+                  <a:srgbClr val="1C2733"/>
                 </a:solidFill>
                 <a:latin typeface="Consolas"/>
               </a:rPr>
@@ -4122,7 +4122,7 @@
       </p:sp>
       <p:sp>
         <p:nvSpPr>
-          <p:cNvPr id="5" name="Rounded Rectangle 4"/>
+          <p:cNvPr id="5" name="Rectangle 4"/>
           <p:cNvSpPr/>
           <p:nvPr/>
         </p:nvSpPr>
@@ -4131,15 +4131,15 @@
             <a:off x="6903720" y="1691640"/>
             <a:ext cx="4663440" cy="3977639"/>
           </a:xfrm>
-          <a:prstGeom prst="roundRect">
+          <a:prstGeom prst="rect">
             <a:avLst/>
           </a:prstGeom>
           <a:solidFill>
-            <a:srgbClr val="E4F3EB"/>
+            <a:srgbClr val="E8F0EA"/>
           </a:solidFill>
           <a:ln w="9525">
             <a:solidFill>
-              <a:srgbClr val="D9DFE5"/>
+              <a:srgbClr val="D5DBE1"/>
             </a:solidFill>
           </a:ln>
           <a:effectLst/>
@@ -4170,7 +4170,7 @@
             <a:r>
               <a:rPr sz="1250" b="1">
                 <a:solidFill>
-                  <a:srgbClr val="2E8B5E"/>
+                  <a:srgbClr val="2F6E4E"/>
                 </a:solidFill>
                 <a:latin typeface="Segoe UI"/>
               </a:rPr>
@@ -4186,7 +4186,7 @@
             <a:r>
               <a:rPr sz="1050" b="0">
                 <a:solidFill>
-                  <a:srgbClr val="0A5B55"/>
+                  <a:srgbClr val="122A42"/>
                 </a:solidFill>
                 <a:latin typeface="Consolas"/>
               </a:rPr>
@@ -4202,7 +4202,7 @@
             <a:r>
               <a:rPr sz="1050" b="0">
                 <a:solidFill>
-                  <a:srgbClr val="0A5B55"/>
+                  <a:srgbClr val="122A42"/>
                 </a:solidFill>
                 <a:latin typeface="Consolas"/>
               </a:rPr>
@@ -4218,7 +4218,7 @@
             <a:r>
               <a:rPr sz="1050" b="0">
                 <a:solidFill>
-                  <a:srgbClr val="0A5B55"/>
+                  <a:srgbClr val="122A42"/>
                 </a:solidFill>
                 <a:latin typeface="Consolas"/>
               </a:rPr>
@@ -4234,7 +4234,7 @@
             <a:r>
               <a:rPr sz="1050" b="0">
                 <a:solidFill>
-                  <a:srgbClr val="0A5B55"/>
+                  <a:srgbClr val="122A42"/>
                 </a:solidFill>
                 <a:latin typeface="Consolas"/>
               </a:rPr>
@@ -4250,7 +4250,7 @@
             <a:r>
               <a:rPr sz="1050" b="0">
                 <a:solidFill>
-                  <a:srgbClr val="0A5B55"/>
+                  <a:srgbClr val="122A42"/>
                 </a:solidFill>
                 <a:latin typeface="Consolas"/>
               </a:rPr>
@@ -4266,7 +4266,7 @@
             <a:r>
               <a:rPr sz="1050" b="0">
                 <a:solidFill>
-                  <a:srgbClr val="0A5B55"/>
+                  <a:srgbClr val="122A42"/>
                 </a:solidFill>
                 <a:latin typeface="Consolas"/>
               </a:rPr>
@@ -4282,7 +4282,7 @@
             <a:r>
               <a:rPr sz="1050" b="0">
                 <a:solidFill>
-                  <a:srgbClr val="0A5B55"/>
+                  <a:srgbClr val="122A42"/>
                 </a:solidFill>
                 <a:latin typeface="Consolas"/>
               </a:rPr>
@@ -4298,7 +4298,7 @@
             <a:r>
               <a:rPr sz="1050" b="0">
                 <a:solidFill>
-                  <a:srgbClr val="0A5B55"/>
+                  <a:srgbClr val="122A42"/>
                 </a:solidFill>
                 <a:latin typeface="Consolas"/>
               </a:rPr>
@@ -4314,7 +4314,7 @@
             <a:r>
               <a:rPr sz="1050" b="0">
                 <a:solidFill>
-                  <a:srgbClr val="1A1F27"/>
+                  <a:srgbClr val="1C2733"/>
                 </a:solidFill>
                 <a:latin typeface="Segoe UI"/>
               </a:rPr>
@@ -4330,7 +4330,7 @@
             <a:r>
               <a:rPr sz="1050" b="0">
                 <a:solidFill>
-                  <a:srgbClr val="2E8B5E"/>
+                  <a:srgbClr val="2F6E4E"/>
                 </a:solidFill>
                 <a:latin typeface="Segoe UI"/>
               </a:rPr>
@@ -4341,7 +4341,7 @@
       </p:sp>
       <p:sp>
         <p:nvSpPr>
-          <p:cNvPr id="6" name="Rounded Rectangle 5"/>
+          <p:cNvPr id="6" name="Rectangle 5"/>
           <p:cNvSpPr/>
           <p:nvPr/>
         </p:nvSpPr>
@@ -4350,11 +4350,11 @@
             <a:off x="640080" y="5806440"/>
             <a:ext cx="10927080" cy="731520"/>
           </a:xfrm>
-          <a:prstGeom prst="roundRect">
+          <a:prstGeom prst="rect">
             <a:avLst/>
           </a:prstGeom>
           <a:solidFill>
-            <a:srgbClr val="E1F0EE"/>
+            <a:srgbClr val="EAEEF2"/>
           </a:solidFill>
           <a:ln>
             <a:noFill/>
@@ -4387,7 +4387,7 @@
             <a:r>
               <a:rPr sz="1350" b="1">
                 <a:solidFill>
-                  <a:srgbClr val="0A5B55"/>
+                  <a:srgbClr val="122A42"/>
                 </a:solidFill>
                 <a:latin typeface="Segoe UI"/>
               </a:rPr>
@@ -4437,7 +4437,7 @@
             <a:avLst/>
           </a:prstGeom>
           <a:solidFill>
-            <a:srgbClr val="0E7C74"/>
+            <a:srgbClr val="16324F"/>
           </a:solidFill>
           <a:ln>
             <a:noFill/>
@@ -4496,7 +4496,7 @@
             <a:r>
               <a:rPr sz="1200" b="1">
                 <a:solidFill>
-                  <a:srgbClr val="0E7C74"/>
+                  <a:srgbClr val="16324F"/>
                 </a:solidFill>
                 <a:latin typeface="Segoe UI"/>
               </a:rPr>
@@ -4512,7 +4512,7 @@
             <a:r>
               <a:rPr sz="2400" b="1">
                 <a:solidFill>
-                  <a:srgbClr val="1A1F27"/>
+                  <a:srgbClr val="1C2733"/>
                 </a:solidFill>
                 <a:latin typeface="Segoe UI"/>
               </a:rPr>
@@ -4523,7 +4523,7 @@
       </p:sp>
       <p:sp>
         <p:nvSpPr>
-          <p:cNvPr id="4" name="Rounded Rectangle 3"/>
+          <p:cNvPr id="4" name="Rectangle 3"/>
           <p:cNvSpPr/>
           <p:nvPr/>
         </p:nvSpPr>
@@ -4532,15 +4532,15 @@
             <a:off x="640080" y="1691640"/>
             <a:ext cx="6035040" cy="3977639"/>
           </a:xfrm>
-          <a:prstGeom prst="roundRect">
+          <a:prstGeom prst="rect">
             <a:avLst/>
           </a:prstGeom>
           <a:solidFill>
-            <a:srgbClr val="F3F1EA"/>
+            <a:srgbClr val="F3F1EC"/>
           </a:solidFill>
           <a:ln w="9525">
             <a:solidFill>
-              <a:srgbClr val="D9DFE5"/>
+              <a:srgbClr val="D5DBE1"/>
             </a:solidFill>
           </a:ln>
           <a:effectLst/>
@@ -4571,7 +4571,7 @@
             <a:r>
               <a:rPr sz="1250" b="1">
                 <a:solidFill>
-                  <a:srgbClr val="0A5B55"/>
+                  <a:srgbClr val="122A42"/>
                 </a:solidFill>
                 <a:latin typeface="Segoe UI"/>
               </a:rPr>
@@ -4587,7 +4587,7 @@
             <a:r>
               <a:rPr sz="1050" b="0">
                 <a:solidFill>
-                  <a:srgbClr val="1A1F27"/>
+                  <a:srgbClr val="1C2733"/>
                 </a:solidFill>
                 <a:latin typeface="Consolas"/>
               </a:rPr>
@@ -4603,7 +4603,7 @@
             <a:r>
               <a:rPr sz="1050" b="0">
                 <a:solidFill>
-                  <a:srgbClr val="1A1F27"/>
+                  <a:srgbClr val="1C2733"/>
                 </a:solidFill>
                 <a:latin typeface="Consolas"/>
               </a:rPr>
@@ -4619,7 +4619,7 @@
             <a:r>
               <a:rPr sz="1050" b="0">
                 <a:solidFill>
-                  <a:srgbClr val="1A1F27"/>
+                  <a:srgbClr val="1C2733"/>
                 </a:solidFill>
                 <a:latin typeface="Consolas"/>
               </a:rPr>
@@ -4635,7 +4635,7 @@
             <a:r>
               <a:rPr sz="1050" b="0">
                 <a:solidFill>
-                  <a:srgbClr val="1A1F27"/>
+                  <a:srgbClr val="1C2733"/>
                 </a:solidFill>
                 <a:latin typeface="Consolas"/>
               </a:rPr>
@@ -4651,7 +4651,7 @@
             <a:r>
               <a:rPr sz="1050" b="0">
                 <a:solidFill>
-                  <a:srgbClr val="1A1F27"/>
+                  <a:srgbClr val="1C2733"/>
                 </a:solidFill>
                 <a:latin typeface="Consolas"/>
               </a:rPr>
@@ -4667,7 +4667,7 @@
             <a:r>
               <a:rPr sz="1050" b="0">
                 <a:solidFill>
-                  <a:srgbClr val="1A1F27"/>
+                  <a:srgbClr val="1C2733"/>
                 </a:solidFill>
                 <a:latin typeface="Consolas"/>
               </a:rPr>
@@ -4678,7 +4678,7 @@
       </p:sp>
       <p:sp>
         <p:nvSpPr>
-          <p:cNvPr id="5" name="Rounded Rectangle 4"/>
+          <p:cNvPr id="5" name="Rectangle 4"/>
           <p:cNvSpPr/>
           <p:nvPr/>
         </p:nvSpPr>
@@ -4687,15 +4687,15 @@
             <a:off x="6903720" y="1691640"/>
             <a:ext cx="4663440" cy="3977639"/>
           </a:xfrm>
-          <a:prstGeom prst="roundRect">
+          <a:prstGeom prst="rect">
             <a:avLst/>
           </a:prstGeom>
           <a:solidFill>
-            <a:srgbClr val="F6ECD6"/>
+            <a:srgbClr val="F2EBDE"/>
           </a:solidFill>
           <a:ln w="9525">
             <a:solidFill>
-              <a:srgbClr val="D9DFE5"/>
+              <a:srgbClr val="D5DBE1"/>
             </a:solidFill>
           </a:ln>
           <a:effectLst/>
@@ -4726,7 +4726,7 @@
             <a:r>
               <a:rPr sz="1250" b="1">
                 <a:solidFill>
-                  <a:srgbClr val="A96E12"/>
+                  <a:srgbClr val="8A5A1B"/>
                 </a:solidFill>
                 <a:latin typeface="Segoe UI"/>
               </a:rPr>
@@ -4742,7 +4742,7 @@
             <a:r>
               <a:rPr sz="1050" b="0">
                 <a:solidFill>
-                  <a:srgbClr val="0A5B55"/>
+                  <a:srgbClr val="122A42"/>
                 </a:solidFill>
                 <a:latin typeface="Consolas"/>
               </a:rPr>
@@ -4758,7 +4758,7 @@
             <a:r>
               <a:rPr sz="1050" b="0">
                 <a:solidFill>
-                  <a:srgbClr val="A96E12"/>
+                  <a:srgbClr val="8A5A1B"/>
                 </a:solidFill>
                 <a:latin typeface="Consolas"/>
               </a:rPr>
@@ -4774,7 +4774,7 @@
             <a:r>
               <a:rPr sz="1050" b="0">
                 <a:solidFill>
-                  <a:srgbClr val="A96E12"/>
+                  <a:srgbClr val="8A5A1B"/>
                 </a:solidFill>
                 <a:latin typeface="Consolas"/>
               </a:rPr>
@@ -4790,7 +4790,7 @@
             <a:r>
               <a:rPr sz="1050" b="0">
                 <a:solidFill>
-                  <a:srgbClr val="0A5B55"/>
+                  <a:srgbClr val="122A42"/>
                 </a:solidFill>
                 <a:latin typeface="Consolas"/>
               </a:rPr>
@@ -4806,7 +4806,7 @@
             <a:r>
               <a:rPr sz="1050" b="0">
                 <a:solidFill>
-                  <a:srgbClr val="A96E12"/>
+                  <a:srgbClr val="8A5A1B"/>
                 </a:solidFill>
                 <a:latin typeface="Consolas"/>
               </a:rPr>
@@ -4822,7 +4822,7 @@
             <a:r>
               <a:rPr sz="1050" b="0">
                 <a:solidFill>
-                  <a:srgbClr val="A96E12"/>
+                  <a:srgbClr val="8A5A1B"/>
                 </a:solidFill>
                 <a:latin typeface="Consolas"/>
               </a:rPr>
@@ -4838,7 +4838,7 @@
             <a:r>
               <a:rPr sz="1050" b="0">
                 <a:solidFill>
-                  <a:srgbClr val="A96E12"/>
+                  <a:srgbClr val="8A5A1B"/>
                 </a:solidFill>
                 <a:latin typeface="Consolas"/>
               </a:rPr>
@@ -4854,7 +4854,7 @@
             <a:r>
               <a:rPr sz="1050" b="0">
                 <a:solidFill>
-                  <a:srgbClr val="A96E12"/>
+                  <a:srgbClr val="8A5A1B"/>
                 </a:solidFill>
                 <a:latin typeface="Consolas"/>
               </a:rPr>
@@ -4870,7 +4870,7 @@
             <a:r>
               <a:rPr sz="1050" b="0">
                 <a:solidFill>
-                  <a:srgbClr val="1A1F27"/>
+                  <a:srgbClr val="1C2733"/>
                 </a:solidFill>
                 <a:latin typeface="Segoe UI"/>
               </a:rPr>
@@ -4886,7 +4886,7 @@
             <a:r>
               <a:rPr sz="1050" b="0">
                 <a:solidFill>
-                  <a:srgbClr val="2E8B5E"/>
+                  <a:srgbClr val="2F6E4E"/>
                 </a:solidFill>
                 <a:latin typeface="Segoe UI"/>
               </a:rPr>
@@ -4902,7 +4902,7 @@
             <a:r>
               <a:rPr sz="1050" b="0">
                 <a:solidFill>
-                  <a:srgbClr val="2E8B5E"/>
+                  <a:srgbClr val="2F6E4E"/>
                 </a:solidFill>
                 <a:latin typeface="Segoe UI"/>
               </a:rPr>
@@ -4913,7 +4913,7 @@
       </p:sp>
       <p:sp>
         <p:nvSpPr>
-          <p:cNvPr id="6" name="Rounded Rectangle 5"/>
+          <p:cNvPr id="6" name="Rectangle 5"/>
           <p:cNvSpPr/>
           <p:nvPr/>
         </p:nvSpPr>
@@ -4922,11 +4922,11 @@
             <a:off x="640080" y="5806440"/>
             <a:ext cx="10927080" cy="731520"/>
           </a:xfrm>
-          <a:prstGeom prst="roundRect">
+          <a:prstGeom prst="rect">
             <a:avLst/>
           </a:prstGeom>
           <a:solidFill>
-            <a:srgbClr val="E1F0EE"/>
+            <a:srgbClr val="EAEEF2"/>
           </a:solidFill>
           <a:ln>
             <a:noFill/>
@@ -4959,7 +4959,7 @@
             <a:r>
               <a:rPr sz="1350" b="1">
                 <a:solidFill>
-                  <a:srgbClr val="0A5B55"/>
+                  <a:srgbClr val="122A42"/>
                 </a:solidFill>
                 <a:latin typeface="Segoe UI"/>
               </a:rPr>
@@ -5009,7 +5009,7 @@
             <a:avLst/>
           </a:prstGeom>
           <a:solidFill>
-            <a:srgbClr val="0E7C74"/>
+            <a:srgbClr val="16324F"/>
           </a:solidFill>
           <a:ln>
             <a:noFill/>
@@ -5068,7 +5068,7 @@
             <a:r>
               <a:rPr sz="1200" b="1">
                 <a:solidFill>
-                  <a:srgbClr val="0E7C74"/>
+                  <a:srgbClr val="16324F"/>
                 </a:solidFill>
                 <a:latin typeface="Segoe UI"/>
               </a:rPr>
@@ -5084,7 +5084,7 @@
             <a:r>
               <a:rPr sz="2400" b="1">
                 <a:solidFill>
-                  <a:srgbClr val="1A1F27"/>
+                  <a:srgbClr val="1C2733"/>
                 </a:solidFill>
                 <a:latin typeface="Segoe UI"/>
               </a:rPr>
@@ -5136,7 +5136,7 @@
                   </a:txBody>
                   <a:tcPr anchor="ctr" marL="82296" marR="45720" marT="18288" marB="18288">
                     <a:solidFill>
-                      <a:srgbClr val="0E7C74"/>
+                      <a:srgbClr val="16324F"/>
                     </a:solidFill>
                   </a:tcPr>
                 </a:tc>
@@ -5158,7 +5158,7 @@
                   </a:txBody>
                   <a:tcPr anchor="ctr" marL="82296" marR="45720" marT="18288" marB="18288">
                     <a:solidFill>
-                      <a:srgbClr val="0E7C74"/>
+                      <a:srgbClr val="16324F"/>
                     </a:solidFill>
                   </a:tcPr>
                 </a:tc>
@@ -5180,7 +5180,7 @@
                   </a:txBody>
                   <a:tcPr anchor="ctr" marL="82296" marR="45720" marT="18288" marB="18288">
                     <a:solidFill>
-                      <a:srgbClr val="0E7C74"/>
+                      <a:srgbClr val="16324F"/>
                     </a:solidFill>
                   </a:tcPr>
                 </a:tc>
@@ -5202,7 +5202,7 @@
                   </a:txBody>
                   <a:tcPr anchor="ctr" marL="82296" marR="45720" marT="18288" marB="18288">
                     <a:solidFill>
-                      <a:srgbClr val="0E7C74"/>
+                      <a:srgbClr val="16324F"/>
                     </a:solidFill>
                   </a:tcPr>
                 </a:tc>
@@ -5216,7 +5216,7 @@
                       <a:r>
                         <a:rPr sz="1250" b="1">
                           <a:solidFill>
-                            <a:srgbClr val="1A1F27"/>
+                            <a:srgbClr val="1C2733"/>
                           </a:solidFill>
                           <a:latin typeface="Segoe UI"/>
                         </a:rPr>
@@ -5238,7 +5238,7 @@
                       <a:r>
                         <a:rPr sz="1250" b="0">
                           <a:solidFill>
-                            <a:srgbClr val="535C6A"/>
+                            <a:srgbClr val="566573"/>
                           </a:solidFill>
                           <a:latin typeface="Consolas"/>
                         </a:rPr>
@@ -5260,7 +5260,7 @@
                       <a:r>
                         <a:rPr sz="1250" b="0">
                           <a:solidFill>
-                            <a:srgbClr val="535C6A"/>
+                            <a:srgbClr val="566573"/>
                           </a:solidFill>
                           <a:latin typeface="Consolas"/>
                         </a:rPr>
@@ -5282,7 +5282,7 @@
                       <a:r>
                         <a:rPr sz="1250" b="0">
                           <a:solidFill>
-                            <a:srgbClr val="535C6A"/>
+                            <a:srgbClr val="566573"/>
                           </a:solidFill>
                           <a:latin typeface="Consolas"/>
                         </a:rPr>
@@ -5306,7 +5306,7 @@
                       <a:r>
                         <a:rPr sz="1250" b="1">
                           <a:solidFill>
-                            <a:srgbClr val="1A1F27"/>
+                            <a:srgbClr val="1C2733"/>
                           </a:solidFill>
                           <a:latin typeface="Segoe UI"/>
                         </a:rPr>
@@ -5316,7 +5316,7 @@
                   </a:txBody>
                   <a:tcPr anchor="ctr" marL="82296" marR="45720" marT="18288" marB="18288">
                     <a:solidFill>
-                      <a:srgbClr val="F7F9F8"/>
+                      <a:srgbClr val="F6F8FA"/>
                     </a:solidFill>
                   </a:tcPr>
                 </a:tc>
@@ -5328,7 +5328,7 @@
                       <a:r>
                         <a:rPr sz="1250" b="0">
                           <a:solidFill>
-                            <a:srgbClr val="535C6A"/>
+                            <a:srgbClr val="566573"/>
                           </a:solidFill>
                           <a:latin typeface="Consolas"/>
                         </a:rPr>
@@ -5338,7 +5338,7 @@
                   </a:txBody>
                   <a:tcPr anchor="ctr" marL="82296" marR="45720" marT="18288" marB="18288">
                     <a:solidFill>
-                      <a:srgbClr val="F7F9F8"/>
+                      <a:srgbClr val="F6F8FA"/>
                     </a:solidFill>
                   </a:tcPr>
                 </a:tc>
@@ -5350,7 +5350,7 @@
                       <a:r>
                         <a:rPr sz="1250" b="0">
                           <a:solidFill>
-                            <a:srgbClr val="535C6A"/>
+                            <a:srgbClr val="566573"/>
                           </a:solidFill>
                           <a:latin typeface="Consolas"/>
                         </a:rPr>
@@ -5360,7 +5360,7 @@
                   </a:txBody>
                   <a:tcPr anchor="ctr" marL="82296" marR="45720" marT="18288" marB="18288">
                     <a:solidFill>
-                      <a:srgbClr val="F7F9F8"/>
+                      <a:srgbClr val="F6F8FA"/>
                     </a:solidFill>
                   </a:tcPr>
                 </a:tc>
@@ -5372,7 +5372,7 @@
                       <a:r>
                         <a:rPr sz="1250" b="0">
                           <a:solidFill>
-                            <a:srgbClr val="535C6A"/>
+                            <a:srgbClr val="566573"/>
                           </a:solidFill>
                           <a:latin typeface="Consolas"/>
                         </a:rPr>
@@ -5382,7 +5382,7 @@
                   </a:txBody>
                   <a:tcPr anchor="ctr" marL="82296" marR="45720" marT="18288" marB="18288">
                     <a:solidFill>
-                      <a:srgbClr val="F7F9F8"/>
+                      <a:srgbClr val="F6F8FA"/>
                     </a:solidFill>
                   </a:tcPr>
                 </a:tc>
@@ -5396,7 +5396,7 @@
                       <a:r>
                         <a:rPr sz="1250" b="1">
                           <a:solidFill>
-                            <a:srgbClr val="1A1F27"/>
+                            <a:srgbClr val="1C2733"/>
                           </a:solidFill>
                           <a:latin typeface="Segoe UI"/>
                         </a:rPr>
@@ -5418,7 +5418,7 @@
                       <a:r>
                         <a:rPr sz="1250" b="0">
                           <a:solidFill>
-                            <a:srgbClr val="535C6A"/>
+                            <a:srgbClr val="566573"/>
                           </a:solidFill>
                           <a:latin typeface="Consolas"/>
                         </a:rPr>
@@ -5440,7 +5440,7 @@
                       <a:r>
                         <a:rPr sz="1250" b="0">
                           <a:solidFill>
-                            <a:srgbClr val="535C6A"/>
+                            <a:srgbClr val="566573"/>
                           </a:solidFill>
                           <a:latin typeface="Consolas"/>
                         </a:rPr>
@@ -5462,7 +5462,7 @@
                       <a:r>
                         <a:rPr sz="1250" b="0">
                           <a:solidFill>
-                            <a:srgbClr val="535C6A"/>
+                            <a:srgbClr val="566573"/>
                           </a:solidFill>
                           <a:latin typeface="Consolas"/>
                         </a:rPr>
@@ -5486,7 +5486,7 @@
                       <a:r>
                         <a:rPr sz="1250" b="1">
                           <a:solidFill>
-                            <a:srgbClr val="1A1F27"/>
+                            <a:srgbClr val="1C2733"/>
                           </a:solidFill>
                           <a:latin typeface="Segoe UI"/>
                         </a:rPr>
@@ -5496,7 +5496,7 @@
                   </a:txBody>
                   <a:tcPr anchor="ctr" marL="82296" marR="45720" marT="18288" marB="18288">
                     <a:solidFill>
-                      <a:srgbClr val="F7F9F8"/>
+                      <a:srgbClr val="F6F8FA"/>
                     </a:solidFill>
                   </a:tcPr>
                 </a:tc>
@@ -5508,7 +5508,7 @@
                       <a:r>
                         <a:rPr sz="1250" b="0">
                           <a:solidFill>
-                            <a:srgbClr val="535C6A"/>
+                            <a:srgbClr val="566573"/>
                           </a:solidFill>
                           <a:latin typeface="Consolas"/>
                         </a:rPr>
@@ -5518,7 +5518,7 @@
                   </a:txBody>
                   <a:tcPr anchor="ctr" marL="82296" marR="45720" marT="18288" marB="18288">
                     <a:solidFill>
-                      <a:srgbClr val="F7F9F8"/>
+                      <a:srgbClr val="F6F8FA"/>
                     </a:solidFill>
                   </a:tcPr>
                 </a:tc>
@@ -5530,7 +5530,7 @@
                       <a:r>
                         <a:rPr sz="1250" b="0">
                           <a:solidFill>
-                            <a:srgbClr val="535C6A"/>
+                            <a:srgbClr val="566573"/>
                           </a:solidFill>
                           <a:latin typeface="Consolas"/>
                         </a:rPr>
@@ -5540,7 +5540,7 @@
                   </a:txBody>
                   <a:tcPr anchor="ctr" marL="82296" marR="45720" marT="18288" marB="18288">
                     <a:solidFill>
-                      <a:srgbClr val="F7F9F8"/>
+                      <a:srgbClr val="F6F8FA"/>
                     </a:solidFill>
                   </a:tcPr>
                 </a:tc>
@@ -5552,7 +5552,7 @@
                       <a:r>
                         <a:rPr sz="1250" b="0">
                           <a:solidFill>
-                            <a:srgbClr val="535C6A"/>
+                            <a:srgbClr val="566573"/>
                           </a:solidFill>
                           <a:latin typeface="Consolas"/>
                         </a:rPr>
@@ -5562,7 +5562,7 @@
                   </a:txBody>
                   <a:tcPr anchor="ctr" marL="82296" marR="45720" marT="18288" marB="18288">
                     <a:solidFill>
-                      <a:srgbClr val="F7F9F8"/>
+                      <a:srgbClr val="F6F8FA"/>
                     </a:solidFill>
                   </a:tcPr>
                 </a:tc>
@@ -5576,7 +5576,7 @@
                       <a:r>
                         <a:rPr sz="1250" b="1">
                           <a:solidFill>
-                            <a:srgbClr val="1A1F27"/>
+                            <a:srgbClr val="1C2733"/>
                           </a:solidFill>
                           <a:latin typeface="Segoe UI"/>
                         </a:rPr>
@@ -5598,7 +5598,7 @@
                       <a:r>
                         <a:rPr sz="1250" b="0">
                           <a:solidFill>
-                            <a:srgbClr val="535C6A"/>
+                            <a:srgbClr val="566573"/>
                           </a:solidFill>
                           <a:latin typeface="Consolas"/>
                         </a:rPr>
@@ -5620,7 +5620,7 @@
                       <a:r>
                         <a:rPr sz="1250" b="0">
                           <a:solidFill>
-                            <a:srgbClr val="535C6A"/>
+                            <a:srgbClr val="566573"/>
                           </a:solidFill>
                           <a:latin typeface="Consolas"/>
                         </a:rPr>
@@ -5642,7 +5642,7 @@
                       <a:r>
                         <a:rPr sz="1250" b="0">
                           <a:solidFill>
-                            <a:srgbClr val="535C6A"/>
+                            <a:srgbClr val="566573"/>
                           </a:solidFill>
                           <a:latin typeface="Consolas"/>
                         </a:rPr>
@@ -5666,7 +5666,7 @@
                       <a:r>
                         <a:rPr sz="1250" b="1">
                           <a:solidFill>
-                            <a:srgbClr val="1A1F27"/>
+                            <a:srgbClr val="1C2733"/>
                           </a:solidFill>
                           <a:latin typeface="Segoe UI"/>
                         </a:rPr>
@@ -5676,7 +5676,7 @@
                   </a:txBody>
                   <a:tcPr anchor="ctr" marL="82296" marR="45720" marT="18288" marB="18288">
                     <a:solidFill>
-                      <a:srgbClr val="F7F9F8"/>
+                      <a:srgbClr val="F6F8FA"/>
                     </a:solidFill>
                   </a:tcPr>
                 </a:tc>
@@ -5688,7 +5688,7 @@
                       <a:r>
                         <a:rPr sz="1250" b="0">
                           <a:solidFill>
-                            <a:srgbClr val="535C6A"/>
+                            <a:srgbClr val="566573"/>
                           </a:solidFill>
                           <a:latin typeface="Consolas"/>
                         </a:rPr>
@@ -5698,7 +5698,7 @@
                   </a:txBody>
                   <a:tcPr anchor="ctr" marL="82296" marR="45720" marT="18288" marB="18288">
                     <a:solidFill>
-                      <a:srgbClr val="F7F9F8"/>
+                      <a:srgbClr val="F6F8FA"/>
                     </a:solidFill>
                   </a:tcPr>
                 </a:tc>
@@ -5710,7 +5710,7 @@
                       <a:r>
                         <a:rPr sz="1250" b="0">
                           <a:solidFill>
-                            <a:srgbClr val="535C6A"/>
+                            <a:srgbClr val="566573"/>
                           </a:solidFill>
                           <a:latin typeface="Consolas"/>
                         </a:rPr>
@@ -5720,7 +5720,7 @@
                   </a:txBody>
                   <a:tcPr anchor="ctr" marL="82296" marR="45720" marT="18288" marB="18288">
                     <a:solidFill>
-                      <a:srgbClr val="F7F9F8"/>
+                      <a:srgbClr val="F6F8FA"/>
                     </a:solidFill>
                   </a:tcPr>
                 </a:tc>
@@ -5732,7 +5732,7 @@
                       <a:r>
                         <a:rPr sz="1250" b="0">
                           <a:solidFill>
-                            <a:srgbClr val="535C6A"/>
+                            <a:srgbClr val="566573"/>
                           </a:solidFill>
                           <a:latin typeface="Consolas"/>
                         </a:rPr>
@@ -5742,7 +5742,7 @@
                   </a:txBody>
                   <a:tcPr anchor="ctr" marL="82296" marR="45720" marT="18288" marB="18288">
                     <a:solidFill>
-                      <a:srgbClr val="F7F9F8"/>
+                      <a:srgbClr val="F6F8FA"/>
                     </a:solidFill>
                   </a:tcPr>
                 </a:tc>
@@ -5756,7 +5756,7 @@
                       <a:r>
                         <a:rPr sz="1250" b="1">
                           <a:solidFill>
-                            <a:srgbClr val="1A1F27"/>
+                            <a:srgbClr val="1C2733"/>
                           </a:solidFill>
                           <a:latin typeface="Segoe UI"/>
                         </a:rPr>
@@ -5778,7 +5778,7 @@
                       <a:r>
                         <a:rPr sz="1250" b="0">
                           <a:solidFill>
-                            <a:srgbClr val="535C6A"/>
+                            <a:srgbClr val="566573"/>
                           </a:solidFill>
                           <a:latin typeface="Consolas"/>
                         </a:rPr>
@@ -5800,7 +5800,7 @@
                       <a:r>
                         <a:rPr sz="1250" b="0">
                           <a:solidFill>
-                            <a:srgbClr val="535C6A"/>
+                            <a:srgbClr val="566573"/>
                           </a:solidFill>
                           <a:latin typeface="Consolas"/>
                         </a:rPr>
@@ -5822,7 +5822,7 @@
                       <a:r>
                         <a:rPr sz="1250" b="0">
                           <a:solidFill>
-                            <a:srgbClr val="535C6A"/>
+                            <a:srgbClr val="566573"/>
                           </a:solidFill>
                           <a:latin typeface="Consolas"/>
                         </a:rPr>
@@ -5843,7 +5843,7 @@
       </p:graphicFrame>
       <p:sp>
         <p:nvSpPr>
-          <p:cNvPr id="5" name="Rounded Rectangle 4"/>
+          <p:cNvPr id="5" name="Rectangle 4"/>
           <p:cNvSpPr/>
           <p:nvPr/>
         </p:nvSpPr>
@@ -5852,11 +5852,11 @@
             <a:off x="640080" y="5806440"/>
             <a:ext cx="10927080" cy="777240"/>
           </a:xfrm>
-          <a:prstGeom prst="roundRect">
+          <a:prstGeom prst="rect">
             <a:avLst/>
           </a:prstGeom>
           <a:solidFill>
-            <a:srgbClr val="E1F0EE"/>
+            <a:srgbClr val="EAEEF2"/>
           </a:solidFill>
           <a:ln>
             <a:noFill/>
@@ -5889,7 +5889,7 @@
             <a:r>
               <a:rPr sz="1400" b="1">
                 <a:solidFill>
-                  <a:srgbClr val="0A5B55"/>
+                  <a:srgbClr val="122A42"/>
                 </a:solidFill>
                 <a:latin typeface="Segoe UI"/>
               </a:rPr>
@@ -5939,7 +5939,7 @@
             <a:avLst/>
           </a:prstGeom>
           <a:solidFill>
-            <a:srgbClr val="0E7C74"/>
+            <a:srgbClr val="16324F"/>
           </a:solidFill>
           <a:ln>
             <a:noFill/>
@@ -5998,7 +5998,7 @@
             <a:r>
               <a:rPr sz="1200" b="1">
                 <a:solidFill>
-                  <a:srgbClr val="0E7C74"/>
+                  <a:srgbClr val="16324F"/>
                 </a:solidFill>
                 <a:latin typeface="Segoe UI"/>
               </a:rPr>
@@ -6014,7 +6014,7 @@
             <a:r>
               <a:rPr sz="2400" b="1">
                 <a:solidFill>
-                  <a:srgbClr val="1A1F27"/>
+                  <a:srgbClr val="1C2733"/>
                 </a:solidFill>
                 <a:latin typeface="Segoe UI"/>
               </a:rPr>
@@ -6067,7 +6067,7 @@
                   </a:txBody>
                   <a:tcPr anchor="ctr" marL="82296" marR="45720" marT="18288" marB="18288">
                     <a:solidFill>
-                      <a:srgbClr val="0E7C74"/>
+                      <a:srgbClr val="16324F"/>
                     </a:solidFill>
                   </a:tcPr>
                 </a:tc>
@@ -6089,7 +6089,7 @@
                   </a:txBody>
                   <a:tcPr anchor="ctr" marL="82296" marR="45720" marT="18288" marB="18288">
                     <a:solidFill>
-                      <a:srgbClr val="0E7C74"/>
+                      <a:srgbClr val="16324F"/>
                     </a:solidFill>
                   </a:tcPr>
                 </a:tc>
@@ -6111,7 +6111,7 @@
                   </a:txBody>
                   <a:tcPr anchor="ctr" marL="82296" marR="45720" marT="18288" marB="18288">
                     <a:solidFill>
-                      <a:srgbClr val="0E7C74"/>
+                      <a:srgbClr val="16324F"/>
                     </a:solidFill>
                   </a:tcPr>
                 </a:tc>
@@ -6133,7 +6133,7 @@
                   </a:txBody>
                   <a:tcPr anchor="ctr" marL="82296" marR="45720" marT="18288" marB="18288">
                     <a:solidFill>
-                      <a:srgbClr val="0E7C74"/>
+                      <a:srgbClr val="16324F"/>
                     </a:solidFill>
                   </a:tcPr>
                 </a:tc>
@@ -6155,7 +6155,7 @@
                   </a:txBody>
                   <a:tcPr anchor="ctr" marL="82296" marR="45720" marT="18288" marB="18288">
                     <a:solidFill>
-                      <a:srgbClr val="0E7C74"/>
+                      <a:srgbClr val="16324F"/>
                     </a:solidFill>
                   </a:tcPr>
                 </a:tc>
@@ -6169,7 +6169,7 @@
                       <a:r>
                         <a:rPr sz="1250" b="1">
                           <a:solidFill>
-                            <a:srgbClr val="1A1F27"/>
+                            <a:srgbClr val="1C2733"/>
                           </a:solidFill>
                           <a:latin typeface="Segoe UI"/>
                         </a:rPr>
@@ -6191,7 +6191,7 @@
                       <a:r>
                         <a:rPr sz="1250" b="0">
                           <a:solidFill>
-                            <a:srgbClr val="535C6A"/>
+                            <a:srgbClr val="566573"/>
                           </a:solidFill>
                           <a:latin typeface="Consolas"/>
                         </a:rPr>
@@ -6213,7 +6213,7 @@
                       <a:r>
                         <a:rPr sz="1250" b="0">
                           <a:solidFill>
-                            <a:srgbClr val="535C6A"/>
+                            <a:srgbClr val="566573"/>
                           </a:solidFill>
                           <a:latin typeface="Consolas"/>
                         </a:rPr>
@@ -6235,7 +6235,7 @@
                       <a:r>
                         <a:rPr sz="1250" b="0">
                           <a:solidFill>
-                            <a:srgbClr val="535C6A"/>
+                            <a:srgbClr val="566573"/>
                           </a:solidFill>
                           <a:latin typeface="Consolas"/>
                         </a:rPr>
@@ -6257,7 +6257,7 @@
                       <a:r>
                         <a:rPr sz="1250" b="0">
                           <a:solidFill>
-                            <a:srgbClr val="535C6A"/>
+                            <a:srgbClr val="566573"/>
                           </a:solidFill>
                           <a:latin typeface="Consolas"/>
                         </a:rPr>
@@ -6281,7 +6281,7 @@
                       <a:r>
                         <a:rPr sz="1250" b="1">
                           <a:solidFill>
-                            <a:srgbClr val="1A1F27"/>
+                            <a:srgbClr val="1C2733"/>
                           </a:solidFill>
                           <a:latin typeface="Segoe UI"/>
                         </a:rPr>
@@ -6291,7 +6291,7 @@
                   </a:txBody>
                   <a:tcPr anchor="ctr" marL="82296" marR="45720" marT="18288" marB="18288">
                     <a:solidFill>
-                      <a:srgbClr val="F7F9F8"/>
+                      <a:srgbClr val="F6F8FA"/>
                     </a:solidFill>
                   </a:tcPr>
                 </a:tc>
@@ -6303,7 +6303,7 @@
                       <a:r>
                         <a:rPr sz="1250" b="0">
                           <a:solidFill>
-                            <a:srgbClr val="535C6A"/>
+                            <a:srgbClr val="566573"/>
                           </a:solidFill>
                           <a:latin typeface="Consolas"/>
                         </a:rPr>
@@ -6313,7 +6313,7 @@
                   </a:txBody>
                   <a:tcPr anchor="ctr" marL="82296" marR="45720" marT="18288" marB="18288">
                     <a:solidFill>
-                      <a:srgbClr val="F7F9F8"/>
+                      <a:srgbClr val="F6F8FA"/>
                     </a:solidFill>
                   </a:tcPr>
                 </a:tc>
@@ -6325,7 +6325,7 @@
                       <a:r>
                         <a:rPr sz="1250" b="0">
                           <a:solidFill>
-                            <a:srgbClr val="535C6A"/>
+                            <a:srgbClr val="566573"/>
                           </a:solidFill>
                           <a:latin typeface="Consolas"/>
                         </a:rPr>
@@ -6335,7 +6335,7 @@
                   </a:txBody>
                   <a:tcPr anchor="ctr" marL="82296" marR="45720" marT="18288" marB="18288">
                     <a:solidFill>
-                      <a:srgbClr val="F7F9F8"/>
+                      <a:srgbClr val="F6F8FA"/>
                     </a:solidFill>
                   </a:tcPr>
                 </a:tc>
@@ -6347,7 +6347,7 @@
                       <a:r>
                         <a:rPr sz="1250" b="0">
                           <a:solidFill>
-                            <a:srgbClr val="535C6A"/>
+                            <a:srgbClr val="566573"/>
                           </a:solidFill>
                           <a:latin typeface="Consolas"/>
                         </a:rPr>
@@ -6357,7 +6357,7 @@
                   </a:txBody>
                   <a:tcPr anchor="ctr" marL="82296" marR="45720" marT="18288" marB="18288">
                     <a:solidFill>
-                      <a:srgbClr val="F7F9F8"/>
+                      <a:srgbClr val="F6F8FA"/>
                     </a:solidFill>
                   </a:tcPr>
                 </a:tc>
@@ -6369,7 +6369,7 @@
                       <a:r>
                         <a:rPr sz="1250" b="0">
                           <a:solidFill>
-                            <a:srgbClr val="535C6A"/>
+                            <a:srgbClr val="566573"/>
                           </a:solidFill>
                           <a:latin typeface="Consolas"/>
                         </a:rPr>
@@ -6379,7 +6379,7 @@
                   </a:txBody>
                   <a:tcPr anchor="ctr" marL="82296" marR="45720" marT="18288" marB="18288">
                     <a:solidFill>
-                      <a:srgbClr val="F7F9F8"/>
+                      <a:srgbClr val="F6F8FA"/>
                     </a:solidFill>
                   </a:tcPr>
                 </a:tc>
@@ -6393,7 +6393,7 @@
                       <a:r>
                         <a:rPr sz="1250" b="1">
                           <a:solidFill>
-                            <a:srgbClr val="1A1F27"/>
+                            <a:srgbClr val="1C2733"/>
                           </a:solidFill>
                           <a:latin typeface="Segoe UI"/>
                         </a:rPr>
@@ -6415,7 +6415,7 @@
                       <a:r>
                         <a:rPr sz="1250" b="0">
                           <a:solidFill>
-                            <a:srgbClr val="535C6A"/>
+                            <a:srgbClr val="566573"/>
                           </a:solidFill>
                           <a:latin typeface="Consolas"/>
                         </a:rPr>
@@ -6437,7 +6437,7 @@
                       <a:r>
                         <a:rPr sz="1250" b="0">
                           <a:solidFill>
-                            <a:srgbClr val="535C6A"/>
+                            <a:srgbClr val="566573"/>
                           </a:solidFill>
                           <a:latin typeface="Consolas"/>
                         </a:rPr>
@@ -6459,7 +6459,7 @@
                       <a:r>
                         <a:rPr sz="1250" b="0">
                           <a:solidFill>
-                            <a:srgbClr val="535C6A"/>
+                            <a:srgbClr val="566573"/>
                           </a:solidFill>
                           <a:latin typeface="Consolas"/>
                         </a:rPr>
@@ -6481,7 +6481,7 @@
                       <a:r>
                         <a:rPr sz="1250" b="0">
                           <a:solidFill>
-                            <a:srgbClr val="535C6A"/>
+                            <a:srgbClr val="566573"/>
                           </a:solidFill>
                           <a:latin typeface="Consolas"/>
                         </a:rPr>
@@ -6502,7 +6502,7 @@
       </p:graphicFrame>
       <p:sp>
         <p:nvSpPr>
-          <p:cNvPr id="5" name="Rounded Rectangle 4"/>
+          <p:cNvPr id="5" name="Rectangle 4"/>
           <p:cNvSpPr/>
           <p:nvPr/>
         </p:nvSpPr>
@@ -6511,11 +6511,11 @@
             <a:off x="640080" y="5852160"/>
             <a:ext cx="10927080" cy="749808"/>
           </a:xfrm>
-          <a:prstGeom prst="roundRect">
+          <a:prstGeom prst="rect">
             <a:avLst/>
           </a:prstGeom>
           <a:solidFill>
-            <a:srgbClr val="E1F0EE"/>
+            <a:srgbClr val="EAEEF2"/>
           </a:solidFill>
           <a:ln>
             <a:noFill/>
@@ -6548,7 +6548,7 @@
             <a:r>
               <a:rPr sz="1350" b="1">
                 <a:solidFill>
-                  <a:srgbClr val="0A5B55"/>
+                  <a:srgbClr val="122A42"/>
                 </a:solidFill>
                 <a:latin typeface="Segoe UI"/>
               </a:rPr>
@@ -6598,7 +6598,7 @@
             <a:avLst/>
           </a:prstGeom>
           <a:solidFill>
-            <a:srgbClr val="0E7C74"/>
+            <a:srgbClr val="16324F"/>
           </a:solidFill>
           <a:ln>
             <a:noFill/>
@@ -6657,7 +6657,7 @@
             <a:r>
               <a:rPr sz="1200" b="1">
                 <a:solidFill>
-                  <a:srgbClr val="0E7C74"/>
+                  <a:srgbClr val="16324F"/>
                 </a:solidFill>
                 <a:latin typeface="Segoe UI"/>
               </a:rPr>
@@ -6673,7 +6673,7 @@
             <a:r>
               <a:rPr sz="2400" b="1">
                 <a:solidFill>
-                  <a:srgbClr val="1A1F27"/>
+                  <a:srgbClr val="1C2733"/>
                 </a:solidFill>
                 <a:latin typeface="Segoe UI"/>
               </a:rPr>
@@ -6712,7 +6712,7 @@
             <a:r>
               <a:rPr sz="1350" b="0">
                 <a:solidFill>
-                  <a:srgbClr val="1A1F27"/>
+                  <a:srgbClr val="1C2733"/>
                 </a:solidFill>
                 <a:latin typeface="Segoe UI"/>
               </a:rPr>
@@ -6728,7 +6728,7 @@
             <a:r>
               <a:rPr sz="1350" b="0">
                 <a:solidFill>
-                  <a:srgbClr val="1A1F27"/>
+                  <a:srgbClr val="1C2733"/>
                 </a:solidFill>
                 <a:latin typeface="Segoe UI"/>
               </a:rPr>
@@ -6744,7 +6744,7 @@
             <a:r>
               <a:rPr sz="1350" b="0">
                 <a:solidFill>
-                  <a:srgbClr val="1A1F27"/>
+                  <a:srgbClr val="1C2733"/>
                 </a:solidFill>
                 <a:latin typeface="Segoe UI"/>
               </a:rPr>
@@ -6760,7 +6760,7 @@
             <a:r>
               <a:rPr sz="1350" b="0">
                 <a:solidFill>
-                  <a:srgbClr val="A96E12"/>
+                  <a:srgbClr val="8A5A1B"/>
                 </a:solidFill>
                 <a:latin typeface="Segoe UI"/>
               </a:rPr>
@@ -6776,7 +6776,7 @@
             <a:r>
               <a:rPr sz="1350" b="0">
                 <a:solidFill>
-                  <a:srgbClr val="535C6A"/>
+                  <a:srgbClr val="566573"/>
                 </a:solidFill>
                 <a:latin typeface="Segoe UI"/>
               </a:rPr>
@@ -6792,7 +6792,7 @@
             <a:r>
               <a:rPr sz="1350" b="0">
                 <a:solidFill>
-                  <a:srgbClr val="2E8B5E"/>
+                  <a:srgbClr val="2F6E4E"/>
                 </a:solidFill>
                 <a:latin typeface="Segoe UI"/>
               </a:rPr>
@@ -6808,7 +6808,7 @@
             <a:r>
               <a:rPr sz="1350" b="0">
                 <a:solidFill>
-                  <a:srgbClr val="535C6A"/>
+                  <a:srgbClr val="566573"/>
                 </a:solidFill>
                 <a:latin typeface="Segoe UI"/>
               </a:rPr>
@@ -6819,7 +6819,7 @@
       </p:sp>
       <p:sp>
         <p:nvSpPr>
-          <p:cNvPr id="5" name="Rounded Rectangle 4"/>
+          <p:cNvPr id="5" name="Rectangle 4"/>
           <p:cNvSpPr/>
           <p:nvPr/>
         </p:nvSpPr>
@@ -6828,15 +6828,15 @@
             <a:off x="6400800" y="1737360"/>
             <a:ext cx="5166360" cy="2651760"/>
           </a:xfrm>
-          <a:prstGeom prst="roundRect">
+          <a:prstGeom prst="rect">
             <a:avLst/>
           </a:prstGeom>
           <a:solidFill>
-            <a:srgbClr val="F3F1EA"/>
+            <a:srgbClr val="F3F1EC"/>
           </a:solidFill>
           <a:ln w="9525">
             <a:solidFill>
-              <a:srgbClr val="D9DFE5"/>
+              <a:srgbClr val="D5DBE1"/>
             </a:solidFill>
           </a:ln>
           <a:effectLst/>
@@ -6867,7 +6867,7 @@
             <a:r>
               <a:rPr sz="1250" b="1">
                 <a:solidFill>
-                  <a:srgbClr val="0A5B55"/>
+                  <a:srgbClr val="122A42"/>
                 </a:solidFill>
                 <a:latin typeface="Segoe UI"/>
               </a:rPr>
@@ -6883,7 +6883,7 @@
             <a:r>
               <a:rPr sz="1050" b="0">
                 <a:solidFill>
-                  <a:srgbClr val="0A5B55"/>
+                  <a:srgbClr val="122A42"/>
                 </a:solidFill>
                 <a:latin typeface="Consolas"/>
               </a:rPr>
@@ -6899,7 +6899,7 @@
             <a:r>
               <a:rPr sz="1050" b="0">
                 <a:solidFill>
-                  <a:srgbClr val="0A5B55"/>
+                  <a:srgbClr val="122A42"/>
                 </a:solidFill>
                 <a:latin typeface="Consolas"/>
               </a:rPr>
@@ -6915,7 +6915,7 @@
             <a:r>
               <a:rPr sz="1050" b="0">
                 <a:solidFill>
-                  <a:srgbClr val="0A5B55"/>
+                  <a:srgbClr val="122A42"/>
                 </a:solidFill>
                 <a:latin typeface="Consolas"/>
               </a:rPr>
@@ -6931,7 +6931,7 @@
             <a:r>
               <a:rPr sz="1050" b="0">
                 <a:solidFill>
-                  <a:srgbClr val="0A5B55"/>
+                  <a:srgbClr val="122A42"/>
                 </a:solidFill>
                 <a:latin typeface="Consolas"/>
               </a:rPr>
@@ -6947,7 +6947,7 @@
             <a:r>
               <a:rPr sz="1050" b="0">
                 <a:solidFill>
-                  <a:srgbClr val="535C6A"/>
+                  <a:srgbClr val="566573"/>
                 </a:solidFill>
                 <a:latin typeface="Segoe UI"/>
               </a:rPr>
@@ -7000,7 +7000,7 @@
                   </a:txBody>
                   <a:tcPr anchor="ctr" marL="82296" marR="45720" marT="18288" marB="18288">
                     <a:solidFill>
-                      <a:srgbClr val="0E7C74"/>
+                      <a:srgbClr val="16324F"/>
                     </a:solidFill>
                   </a:tcPr>
                 </a:tc>
@@ -7022,7 +7022,7 @@
                   </a:txBody>
                   <a:tcPr anchor="ctr" marL="82296" marR="45720" marT="18288" marB="18288">
                     <a:solidFill>
-                      <a:srgbClr val="0E7C74"/>
+                      <a:srgbClr val="16324F"/>
                     </a:solidFill>
                   </a:tcPr>
                 </a:tc>
@@ -7044,7 +7044,7 @@
                   </a:txBody>
                   <a:tcPr anchor="ctr" marL="82296" marR="45720" marT="18288" marB="18288">
                     <a:solidFill>
-                      <a:srgbClr val="0E7C74"/>
+                      <a:srgbClr val="16324F"/>
                     </a:solidFill>
                   </a:tcPr>
                 </a:tc>
@@ -7066,7 +7066,7 @@
                   </a:txBody>
                   <a:tcPr anchor="ctr" marL="82296" marR="45720" marT="18288" marB="18288">
                     <a:solidFill>
-                      <a:srgbClr val="0E7C74"/>
+                      <a:srgbClr val="16324F"/>
                     </a:solidFill>
                   </a:tcPr>
                 </a:tc>
@@ -7088,7 +7088,7 @@
                   </a:txBody>
                   <a:tcPr anchor="ctr" marL="82296" marR="45720" marT="18288" marB="18288">
                     <a:solidFill>
-                      <a:srgbClr val="0E7C74"/>
+                      <a:srgbClr val="16324F"/>
                     </a:solidFill>
                   </a:tcPr>
                 </a:tc>
@@ -7102,7 +7102,7 @@
                       <a:r>
                         <a:rPr sz="1200" b="1">
                           <a:solidFill>
-                            <a:srgbClr val="1A1F27"/>
+                            <a:srgbClr val="1C2733"/>
                           </a:solidFill>
                           <a:latin typeface="Segoe UI"/>
                         </a:rPr>
@@ -7124,7 +7124,7 @@
                       <a:r>
                         <a:rPr sz="1200" b="0">
                           <a:solidFill>
-                            <a:srgbClr val="535C6A"/>
+                            <a:srgbClr val="566573"/>
                           </a:solidFill>
                           <a:latin typeface="Consolas"/>
                         </a:rPr>
@@ -7146,7 +7146,7 @@
                       <a:r>
                         <a:rPr sz="1200" b="0">
                           <a:solidFill>
-                            <a:srgbClr val="535C6A"/>
+                            <a:srgbClr val="566573"/>
                           </a:solidFill>
                           <a:latin typeface="Consolas"/>
                         </a:rPr>
@@ -7168,7 +7168,7 @@
                       <a:r>
                         <a:rPr sz="1200" b="0">
                           <a:solidFill>
-                            <a:srgbClr val="535C6A"/>
+                            <a:srgbClr val="566573"/>
                           </a:solidFill>
                           <a:latin typeface="Consolas"/>
                         </a:rPr>
@@ -7190,7 +7190,7 @@
                       <a:r>
                         <a:rPr sz="1200" b="0">
                           <a:solidFill>
-                            <a:srgbClr val="535C6A"/>
+                            <a:srgbClr val="566573"/>
                           </a:solidFill>
                           <a:latin typeface="Consolas"/>
                         </a:rPr>
@@ -7211,7 +7211,7 @@
       </p:graphicFrame>
       <p:sp>
         <p:nvSpPr>
-          <p:cNvPr id="7" name="Rounded Rectangle 6"/>
+          <p:cNvPr id="7" name="Rectangle 6"/>
           <p:cNvSpPr/>
           <p:nvPr/>
         </p:nvSpPr>
@@ -7220,11 +7220,11 @@
             <a:off x="640080" y="5806440"/>
             <a:ext cx="10927080" cy="749808"/>
           </a:xfrm>
-          <a:prstGeom prst="roundRect">
+          <a:prstGeom prst="rect">
             <a:avLst/>
           </a:prstGeom>
           <a:solidFill>
-            <a:srgbClr val="E1F0EE"/>
+            <a:srgbClr val="EAEEF2"/>
           </a:solidFill>
           <a:ln>
             <a:noFill/>
@@ -7257,7 +7257,7 @@
             <a:r>
               <a:rPr sz="1350" b="1">
                 <a:solidFill>
-                  <a:srgbClr val="0A5B55"/>
+                  <a:srgbClr val="122A42"/>
                 </a:solidFill>
                 <a:latin typeface="Segoe UI"/>
               </a:rPr>
@@ -7307,7 +7307,7 @@
             <a:avLst/>
           </a:prstGeom>
           <a:solidFill>
-            <a:srgbClr val="0E7C74"/>
+            <a:srgbClr val="16324F"/>
           </a:solidFill>
           <a:ln>
             <a:noFill/>
@@ -7366,7 +7366,7 @@
             <a:r>
               <a:rPr sz="1200" b="1">
                 <a:solidFill>
-                  <a:srgbClr val="0E7C74"/>
+                  <a:srgbClr val="16324F"/>
                 </a:solidFill>
                 <a:latin typeface="Segoe UI"/>
               </a:rPr>
@@ -7382,7 +7382,7 @@
             <a:r>
               <a:rPr sz="2400" b="1">
                 <a:solidFill>
-                  <a:srgbClr val="1A1F27"/>
+                  <a:srgbClr val="1C2733"/>
                 </a:solidFill>
                 <a:latin typeface="Segoe UI"/>
               </a:rPr>
@@ -7393,7 +7393,7 @@
       </p:sp>
       <p:sp>
         <p:nvSpPr>
-          <p:cNvPr id="4" name="Rounded Rectangle 3"/>
+          <p:cNvPr id="4" name="Rectangle 3"/>
           <p:cNvSpPr/>
           <p:nvPr/>
         </p:nvSpPr>
@@ -7402,15 +7402,15 @@
             <a:off x="640080" y="1737360"/>
             <a:ext cx="5486400" cy="2286000"/>
           </a:xfrm>
-          <a:prstGeom prst="roundRect">
+          <a:prstGeom prst="rect">
             <a:avLst/>
           </a:prstGeom>
           <a:solidFill>
-            <a:srgbClr val="E4F3EB"/>
+            <a:srgbClr val="E8F0EA"/>
           </a:solidFill>
           <a:ln w="9525">
             <a:solidFill>
-              <a:srgbClr val="D9DFE5"/>
+              <a:srgbClr val="D5DBE1"/>
             </a:solidFill>
           </a:ln>
           <a:effectLst/>
@@ -7441,7 +7441,7 @@
             <a:r>
               <a:rPr sz="1250" b="1">
                 <a:solidFill>
-                  <a:srgbClr val="2E8B5E"/>
+                  <a:srgbClr val="2F6E4E"/>
                 </a:solidFill>
                 <a:latin typeface="Segoe UI"/>
               </a:rPr>
@@ -7457,7 +7457,7 @@
             <a:r>
               <a:rPr sz="1150" b="0">
                 <a:solidFill>
-                  <a:srgbClr val="1A1F27"/>
+                  <a:srgbClr val="1C2733"/>
                 </a:solidFill>
                 <a:latin typeface="Segoe UI"/>
               </a:rPr>
@@ -7473,7 +7473,7 @@
             <a:r>
               <a:rPr sz="1150" b="0">
                 <a:solidFill>
-                  <a:srgbClr val="1A1F27"/>
+                  <a:srgbClr val="1C2733"/>
                 </a:solidFill>
                 <a:latin typeface="Segoe UI"/>
               </a:rPr>
@@ -7489,7 +7489,7 @@
             <a:r>
               <a:rPr sz="1150" b="0">
                 <a:solidFill>
-                  <a:srgbClr val="1A1F27"/>
+                  <a:srgbClr val="1C2733"/>
                 </a:solidFill>
                 <a:latin typeface="Segoe UI"/>
               </a:rPr>
@@ -7505,7 +7505,7 @@
             <a:r>
               <a:rPr sz="1150" b="0">
                 <a:solidFill>
-                  <a:srgbClr val="1A1F27"/>
+                  <a:srgbClr val="1C2733"/>
                 </a:solidFill>
                 <a:latin typeface="Segoe UI"/>
               </a:rPr>
@@ -7516,7 +7516,7 @@
       </p:sp>
       <p:sp>
         <p:nvSpPr>
-          <p:cNvPr id="5" name="Rounded Rectangle 4"/>
+          <p:cNvPr id="5" name="Rectangle 4"/>
           <p:cNvSpPr/>
           <p:nvPr/>
         </p:nvSpPr>
@@ -7525,15 +7525,15 @@
             <a:off x="6355080" y="1737360"/>
             <a:ext cx="5212080" cy="2286000"/>
           </a:xfrm>
-          <a:prstGeom prst="roundRect">
+          <a:prstGeom prst="rect">
             <a:avLst/>
           </a:prstGeom>
           <a:solidFill>
-            <a:srgbClr val="F6ECD6"/>
+            <a:srgbClr val="F2EBDE"/>
           </a:solidFill>
           <a:ln w="9525">
             <a:solidFill>
-              <a:srgbClr val="D9DFE5"/>
+              <a:srgbClr val="D5DBE1"/>
             </a:solidFill>
           </a:ln>
           <a:effectLst/>
@@ -7564,7 +7564,7 @@
             <a:r>
               <a:rPr sz="1250" b="1">
                 <a:solidFill>
-                  <a:srgbClr val="A96E12"/>
+                  <a:srgbClr val="8A5A1B"/>
                 </a:solidFill>
                 <a:latin typeface="Segoe UI"/>
               </a:rPr>
@@ -7580,7 +7580,7 @@
             <a:r>
               <a:rPr sz="1150" b="0">
                 <a:solidFill>
-                  <a:srgbClr val="1A1F27"/>
+                  <a:srgbClr val="1C2733"/>
                 </a:solidFill>
                 <a:latin typeface="Segoe UI"/>
               </a:rPr>
@@ -7596,7 +7596,7 @@
             <a:r>
               <a:rPr sz="1150" b="0">
                 <a:solidFill>
-                  <a:srgbClr val="1A1F27"/>
+                  <a:srgbClr val="1C2733"/>
                 </a:solidFill>
                 <a:latin typeface="Segoe UI"/>
               </a:rPr>
@@ -7612,7 +7612,7 @@
             <a:r>
               <a:rPr sz="1150" b="0">
                 <a:solidFill>
-                  <a:srgbClr val="1A1F27"/>
+                  <a:srgbClr val="1C2733"/>
                 </a:solidFill>
                 <a:latin typeface="Segoe UI"/>
               </a:rPr>
@@ -7628,7 +7628,7 @@
             <a:r>
               <a:rPr sz="1150" b="0">
                 <a:solidFill>
-                  <a:srgbClr val="1A1F27"/>
+                  <a:srgbClr val="1C2733"/>
                 </a:solidFill>
                 <a:latin typeface="Segoe UI"/>
               </a:rPr>
@@ -7678,7 +7678,7 @@
                   </a:txBody>
                   <a:tcPr anchor="ctr" marL="82296" marR="45720" marT="18288" marB="18288">
                     <a:solidFill>
-                      <a:srgbClr val="0E7C74"/>
+                      <a:srgbClr val="16324F"/>
                     </a:solidFill>
                   </a:tcPr>
                 </a:tc>
@@ -7700,7 +7700,7 @@
                   </a:txBody>
                   <a:tcPr anchor="ctr" marL="82296" marR="45720" marT="18288" marB="18288">
                     <a:solidFill>
-                      <a:srgbClr val="0E7C74"/>
+                      <a:srgbClr val="16324F"/>
                     </a:solidFill>
                   </a:tcPr>
                 </a:tc>
@@ -7714,7 +7714,7 @@
                       <a:r>
                         <a:rPr sz="1300" b="1">
                           <a:solidFill>
-                            <a:srgbClr val="1A1F27"/>
+                            <a:srgbClr val="1C2733"/>
                           </a:solidFill>
                           <a:latin typeface="Segoe UI"/>
                         </a:rPr>
@@ -7736,7 +7736,7 @@
                       <a:r>
                         <a:rPr sz="1300" b="0">
                           <a:solidFill>
-                            <a:srgbClr val="535C6A"/>
+                            <a:srgbClr val="566573"/>
                           </a:solidFill>
                           <a:latin typeface="Consolas"/>
                         </a:rPr>
@@ -7760,7 +7760,7 @@
                       <a:r>
                         <a:rPr sz="1300" b="1">
                           <a:solidFill>
-                            <a:srgbClr val="1A1F27"/>
+                            <a:srgbClr val="1C2733"/>
                           </a:solidFill>
                           <a:latin typeface="Segoe UI"/>
                         </a:rPr>
@@ -7770,7 +7770,7 @@
                   </a:txBody>
                   <a:tcPr anchor="ctr" marL="82296" marR="45720" marT="18288" marB="18288">
                     <a:solidFill>
-                      <a:srgbClr val="F7F9F8"/>
+                      <a:srgbClr val="F6F8FA"/>
                     </a:solidFill>
                   </a:tcPr>
                 </a:tc>
@@ -7782,7 +7782,7 @@
                       <a:r>
                         <a:rPr sz="1300" b="0">
                           <a:solidFill>
-                            <a:srgbClr val="535C6A"/>
+                            <a:srgbClr val="566573"/>
                           </a:solidFill>
                           <a:latin typeface="Consolas"/>
                         </a:rPr>
@@ -7792,7 +7792,7 @@
                   </a:txBody>
                   <a:tcPr anchor="ctr" marL="82296" marR="45720" marT="18288" marB="18288">
                     <a:solidFill>
-                      <a:srgbClr val="F7F9F8"/>
+                      <a:srgbClr val="F6F8FA"/>
                     </a:solidFill>
                   </a:tcPr>
                 </a:tc>
@@ -7806,7 +7806,7 @@
                       <a:r>
                         <a:rPr sz="1300" b="1">
                           <a:solidFill>
-                            <a:srgbClr val="1A1F27"/>
+                            <a:srgbClr val="1C2733"/>
                           </a:solidFill>
                           <a:latin typeface="Segoe UI"/>
                         </a:rPr>
@@ -7828,7 +7828,7 @@
                       <a:r>
                         <a:rPr sz="1300" b="0">
                           <a:solidFill>
-                            <a:srgbClr val="535C6A"/>
+                            <a:srgbClr val="566573"/>
                           </a:solidFill>
                           <a:latin typeface="Consolas"/>
                         </a:rPr>
@@ -7849,7 +7849,7 @@
       </p:graphicFrame>
       <p:sp>
         <p:nvSpPr>
-          <p:cNvPr id="7" name="Rounded Rectangle 6"/>
+          <p:cNvPr id="7" name="Rectangle 6"/>
           <p:cNvSpPr/>
           <p:nvPr/>
         </p:nvSpPr>
@@ -7858,11 +7858,11 @@
             <a:off x="640080" y="5943600"/>
             <a:ext cx="10927080" cy="658368"/>
           </a:xfrm>
-          <a:prstGeom prst="roundRect">
+          <a:prstGeom prst="rect">
             <a:avLst/>
           </a:prstGeom>
           <a:solidFill>
-            <a:srgbClr val="E1F0EE"/>
+            <a:srgbClr val="EAEEF2"/>
           </a:solidFill>
           <a:ln>
             <a:noFill/>
@@ -7895,7 +7895,7 @@
             <a:r>
               <a:rPr sz="1300" b="1">
                 <a:solidFill>
-                  <a:srgbClr val="0A5B55"/>
+                  <a:srgbClr val="122A42"/>
                 </a:solidFill>
                 <a:latin typeface="Segoe UI"/>
               </a:rPr>
